--- a/Docs/PRESENTATION/2. 최종/09285_백준현_AI_Master_최종발표자료_v8.pptx
+++ b/Docs/PRESENTATION/2. 최종/09285_백준현_AI_Master_최종발표자료_v8.pptx
@@ -2,16 +2,16 @@
 <file path=ppt/presentation.xml><?xml version="1.0" encoding="utf-8"?>
 <p:presentation xmlns:p="http://schemas.openxmlformats.org/presentationml/2006/main">
   <p:sldMasterIdLst>
-    <p:sldMasterId xmlns:r="http://schemas.openxmlformats.org/officeDocument/2006/relationships" id="2147483648" r:id="Rfcf27fd5c8d54038"/>
+    <p:sldMasterId xmlns:r="http://schemas.openxmlformats.org/officeDocument/2006/relationships" id="2147483648" r:id="R2a71922ec204473a"/>
   </p:sldMasterIdLst>
   <p:notesMasterIdLst>
-    <p:notesMasterId xmlns:r="http://schemas.openxmlformats.org/officeDocument/2006/relationships" r:id="R0a8184bb296747da"/>
+    <p:notesMasterId xmlns:r="http://schemas.openxmlformats.org/officeDocument/2006/relationships" r:id="Rea0e1c29e7584e4e"/>
   </p:notesMasterIdLst>
   <p:sldIdLst>
-    <p:sldId xmlns:r="http://schemas.openxmlformats.org/officeDocument/2006/relationships" id="256" r:id="Rd92f558f5b0e4caf"/>
-    <p:sldId xmlns:r="http://schemas.openxmlformats.org/officeDocument/2006/relationships" id="257" r:id="Rc956308a99d24fb3"/>
-    <p:sldId xmlns:r="http://schemas.openxmlformats.org/officeDocument/2006/relationships" id="258" r:id="Rf3ba52f8f75248c3"/>
-    <p:sldId xmlns:r="http://schemas.openxmlformats.org/officeDocument/2006/relationships" id="259" r:id="Rfb7794da1f4f4200"/>
+    <p:sldId xmlns:r="http://schemas.openxmlformats.org/officeDocument/2006/relationships" id="256" r:id="R3f7c8f7213f04f7b"/>
+    <p:sldId xmlns:r="http://schemas.openxmlformats.org/officeDocument/2006/relationships" id="257" r:id="R3417ac2bdc71405d"/>
+    <p:sldId xmlns:r="http://schemas.openxmlformats.org/officeDocument/2006/relationships" id="258" r:id="R1de59b96e48c435b"/>
+    <p:sldId xmlns:r="http://schemas.openxmlformats.org/officeDocument/2006/relationships" id="259" r:id="R8ace2014f4ab45bd"/>
   </p:sldIdLst>
   <p:sldSz cx="12192000" cy="6858000"/>
   <p:notesSz cx="6858000" cy="9144000"/>
@@ -933,7 +933,7 @@
   </p:cSld>
   <p:clrMap bg1="lt1" tx1="dk1" bg2="lt2" tx2="dk2" accent1="accent1" accent2="accent2" accent3="accent3" accent4="accent4" accent5="accent5" accent6="accent6" hlink="hlink" folHlink="folHlink"/>
   <p:sldLayoutIdLst>
-    <p:sldLayoutId xmlns:r="http://schemas.openxmlformats.org/officeDocument/2006/relationships" id="2147483649" r:id="Re46a3b60ec2e4889"/>
+    <p:sldLayoutId xmlns:r="http://schemas.openxmlformats.org/officeDocument/2006/relationships" id="2147483649" r:id="R720b743c4d314160"/>
   </p:sldLayoutIdLst>
   <p:txStyles>
     <p:titleStyle>
@@ -1484,7 +1484,7 @@
           <p:cNvPr id="9" name="">
             <a:extLst xmlns:a="http://schemas.openxmlformats.org/drawingml/2006/main">
               <a:ext uri="{FF2B5EF4-FFF2-40B4-BE49-F238E27FC236}">
-                <a16:creationId xmlns:a16="http://schemas.microsoft.com/office/drawing/2014/main" id="{90FEFBF4-C522-4E35-A2FE-2A8C91DA4D50}"/>
+                <a16:creationId xmlns:a16="http://schemas.microsoft.com/office/drawing/2014/main" id="{EFC8F352-DBAB-44DC-9EC4-47963E076916}"/>
               </a:ext>
             </a:extLst>
           </p:cNvPr>
@@ -1514,7 +1514,7 @@
           <p:cNvPr id="2" name="">
             <a:extLst xmlns:a="http://schemas.openxmlformats.org/drawingml/2006/main">
               <a:ext uri="{FF2B5EF4-FFF2-40B4-BE49-F238E27FC236}">
-                <a16:creationId xmlns:a16="http://schemas.microsoft.com/office/drawing/2014/main" id="{9EEADA74-C853-4C0F-9190-B28B8E2F6273}"/>
+                <a16:creationId xmlns:a16="http://schemas.microsoft.com/office/drawing/2014/main" id="{0B806969-6FC1-4728-8125-C21B58D3DF8F}"/>
               </a:ext>
             </a:extLst>
           </p:cNvPr>
@@ -1571,7 +1571,7 @@
           <p:cNvPr id="3" name="">
             <a:extLst xmlns:a="http://schemas.openxmlformats.org/drawingml/2006/main">
               <a:ext uri="{FF2B5EF4-FFF2-40B4-BE49-F238E27FC236}">
-                <a16:creationId xmlns:a16="http://schemas.microsoft.com/office/drawing/2014/main" id="{B30BCFC0-1A72-4DC6-A27D-792F184C53B8}"/>
+                <a16:creationId xmlns:a16="http://schemas.microsoft.com/office/drawing/2014/main" id="{773E8115-BE31-4970-8A56-CCFC4765A8F6}"/>
               </a:ext>
             </a:extLst>
           </p:cNvPr>
@@ -1628,7 +1628,7 @@
           <p:cNvPr id="4" name="">
             <a:extLst xmlns:a="http://schemas.openxmlformats.org/drawingml/2006/main">
               <a:ext uri="{FF2B5EF4-FFF2-40B4-BE49-F238E27FC236}">
-                <a16:creationId xmlns:a16="http://schemas.microsoft.com/office/drawing/2014/main" id="{55D62BA0-ADA9-4568-8C40-43743C1AE6D3}"/>
+                <a16:creationId xmlns:a16="http://schemas.microsoft.com/office/drawing/2014/main" id="{F449C9C5-14E9-4A9F-9C68-C7944A4B4326}"/>
               </a:ext>
             </a:extLst>
           </p:cNvPr>
@@ -1685,7 +1685,7 @@
           <p:cNvPr id="5" name="">
             <a:extLst xmlns:a="http://schemas.openxmlformats.org/drawingml/2006/main">
               <a:ext uri="{FF2B5EF4-FFF2-40B4-BE49-F238E27FC236}">
-                <a16:creationId xmlns:a16="http://schemas.microsoft.com/office/drawing/2014/main" id="{7BF29381-0FAF-4258-B081-638B2CAEBB18}"/>
+                <a16:creationId xmlns:a16="http://schemas.microsoft.com/office/drawing/2014/main" id="{DADE25B2-9712-42CB-A79C-D5144FEB603B}"/>
               </a:ext>
             </a:extLst>
           </p:cNvPr>
@@ -1715,7 +1715,7 @@
           <p:cNvPr id="6" name="">
             <a:extLst xmlns:a="http://schemas.openxmlformats.org/drawingml/2006/main">
               <a:ext uri="{FF2B5EF4-FFF2-40B4-BE49-F238E27FC236}">
-                <a16:creationId xmlns:a16="http://schemas.microsoft.com/office/drawing/2014/main" id="{FDAF7A5D-C140-4A03-B095-04D48640C65C}"/>
+                <a16:creationId xmlns:a16="http://schemas.microsoft.com/office/drawing/2014/main" id="{418CEB92-AD68-4269-81D1-BC2884F700A2}"/>
               </a:ext>
             </a:extLst>
           </p:cNvPr>
@@ -1772,7 +1772,7 @@
           <p:cNvPr id="7" name="">
             <a:extLst xmlns:a="http://schemas.openxmlformats.org/drawingml/2006/main">
               <a:ext uri="{FF2B5EF4-FFF2-40B4-BE49-F238E27FC236}">
-                <a16:creationId xmlns:a16="http://schemas.microsoft.com/office/drawing/2014/main" id="{87EA95CA-D328-4410-817F-D8E83C02C13A}"/>
+                <a16:creationId xmlns:a16="http://schemas.microsoft.com/office/drawing/2014/main" id="{2078F427-6E5D-4E83-8ACA-75E3C9564848}"/>
               </a:ext>
             </a:extLst>
           </p:cNvPr>
@@ -1829,7 +1829,7 @@
           <p:cNvPr id="8" name="">
             <a:extLst xmlns:a="http://schemas.openxmlformats.org/drawingml/2006/main">
               <a:ext uri="{FF2B5EF4-FFF2-40B4-BE49-F238E27FC236}">
-                <a16:creationId xmlns:a16="http://schemas.microsoft.com/office/drawing/2014/main" id="{A71FC11B-8331-49EE-A160-E08A6260D51D}"/>
+                <a16:creationId xmlns:a16="http://schemas.microsoft.com/office/drawing/2014/main" id="{AA795D95-0B37-479F-8777-1D9FC446B8EA}"/>
               </a:ext>
             </a:extLst>
           </p:cNvPr>
@@ -1884,7 +1884,7 @@
     </p:spTree>
     <p:extLst>
       <p:ext uri="{BB962C8B-B14F-4D97-AF65-F5344CB8AC3E}">
-        <p14:creationId xmlns:p14="http://schemas.microsoft.com/office/powerpoint/2010/main" val="1201496953"/>
+        <p14:creationId xmlns:p14="http://schemas.microsoft.com/office/powerpoint/2010/main" val="550010036"/>
       </p:ext>
     </p:extLst>
   </p:cSld>
@@ -1915,7 +1915,7 @@
           <p:cNvPr id="45" name="">
             <a:extLst xmlns:a="http://schemas.openxmlformats.org/drawingml/2006/main">
               <a:ext uri="{FF2B5EF4-FFF2-40B4-BE49-F238E27FC236}">
-                <a16:creationId xmlns:a16="http://schemas.microsoft.com/office/drawing/2014/main" id="{3D9DFC07-2B0C-46AE-8F33-B5DE06E3DF03}"/>
+                <a16:creationId xmlns:a16="http://schemas.microsoft.com/office/drawing/2014/main" id="{466B8E65-DF6A-43D7-BE0A-3777B2F90C12}"/>
               </a:ext>
             </a:extLst>
           </p:cNvPr>
@@ -1945,7 +1945,7 @@
           <p:cNvPr id="2" name="">
             <a:extLst xmlns:a="http://schemas.openxmlformats.org/drawingml/2006/main">
               <a:ext uri="{FF2B5EF4-FFF2-40B4-BE49-F238E27FC236}">
-                <a16:creationId xmlns:a16="http://schemas.microsoft.com/office/drawing/2014/main" id="{19D2931A-A20B-4EAD-97AF-8782727B198C}"/>
+                <a16:creationId xmlns:a16="http://schemas.microsoft.com/office/drawing/2014/main" id="{2C5247B1-1B82-42B7-B914-29021BB094F9}"/>
               </a:ext>
             </a:extLst>
           </p:cNvPr>
@@ -2002,7 +2002,7 @@
           <p:cNvPr id="3" name="">
             <a:extLst xmlns:a="http://schemas.openxmlformats.org/drawingml/2006/main">
               <a:ext uri="{FF2B5EF4-FFF2-40B4-BE49-F238E27FC236}">
-                <a16:creationId xmlns:a16="http://schemas.microsoft.com/office/drawing/2014/main" id="{0FE89F47-4A2D-4C1E-8F98-1DDA4A513738}"/>
+                <a16:creationId xmlns:a16="http://schemas.microsoft.com/office/drawing/2014/main" id="{AC9F1720-5BB6-4666-8F42-E182F2A2E2F9}"/>
               </a:ext>
             </a:extLst>
           </p:cNvPr>
@@ -2032,7 +2032,7 @@
           <p:cNvPr id="4" name="">
             <a:extLst xmlns:a="http://schemas.openxmlformats.org/drawingml/2006/main">
               <a:ext uri="{FF2B5EF4-FFF2-40B4-BE49-F238E27FC236}">
-                <a16:creationId xmlns:a16="http://schemas.microsoft.com/office/drawing/2014/main" id="{8B3FE3F9-1284-4B0B-BE3C-3346E413923E}"/>
+                <a16:creationId xmlns:a16="http://schemas.microsoft.com/office/drawing/2014/main" id="{C1F7EE13-3267-4BE1-A7FA-5BD32EB09895}"/>
               </a:ext>
             </a:extLst>
           </p:cNvPr>
@@ -2089,7 +2089,7 @@
           <p:cNvPr id="5" name="">
             <a:extLst xmlns:a="http://schemas.openxmlformats.org/drawingml/2006/main">
               <a:ext uri="{FF2B5EF4-FFF2-40B4-BE49-F238E27FC236}">
-                <a16:creationId xmlns:a16="http://schemas.microsoft.com/office/drawing/2014/main" id="{455FEE0A-5D2A-4C93-A39D-E50DEA31CA51}"/>
+                <a16:creationId xmlns:a16="http://schemas.microsoft.com/office/drawing/2014/main" id="{4F35DD48-53BA-4CEA-BFAC-B194F102F955}"/>
               </a:ext>
             </a:extLst>
           </p:cNvPr>
@@ -2146,7 +2146,7 @@
           <p:cNvPr id="6" name="">
             <a:extLst xmlns:a="http://schemas.openxmlformats.org/drawingml/2006/main">
               <a:ext uri="{FF2B5EF4-FFF2-40B4-BE49-F238E27FC236}">
-                <a16:creationId xmlns:a16="http://schemas.microsoft.com/office/drawing/2014/main" id="{79FB2027-8F12-4585-90D2-799B2730D509}"/>
+                <a16:creationId xmlns:a16="http://schemas.microsoft.com/office/drawing/2014/main" id="{E6C914CA-F164-4F01-B09F-90C931055BDD}"/>
               </a:ext>
             </a:extLst>
           </p:cNvPr>
@@ -2203,7 +2203,7 @@
           <p:cNvPr id="7" name="">
             <a:extLst xmlns:a="http://schemas.openxmlformats.org/drawingml/2006/main">
               <a:ext uri="{FF2B5EF4-FFF2-40B4-BE49-F238E27FC236}">
-                <a16:creationId xmlns:a16="http://schemas.microsoft.com/office/drawing/2014/main" id="{70959FAC-E80F-446A-8CBA-8EA5F7876D5A}"/>
+                <a16:creationId xmlns:a16="http://schemas.microsoft.com/office/drawing/2014/main" id="{E590AAE8-469E-4A79-B970-E0D2849BF8D2}"/>
               </a:ext>
             </a:extLst>
           </p:cNvPr>
@@ -2237,7 +2237,7 @@
           <p:cNvPr id="8" name="">
             <a:extLst xmlns:a="http://schemas.openxmlformats.org/drawingml/2006/main">
               <a:ext uri="{FF2B5EF4-FFF2-40B4-BE49-F238E27FC236}">
-                <a16:creationId xmlns:a16="http://schemas.microsoft.com/office/drawing/2014/main" id="{EC3DA6EE-BA4D-49FA-84BF-E1AAB818E376}"/>
+                <a16:creationId xmlns:a16="http://schemas.microsoft.com/office/drawing/2014/main" id="{29AECD61-0241-47E0-8AFF-F4BBF435DEE9}"/>
               </a:ext>
             </a:extLst>
           </p:cNvPr>
@@ -2269,7 +2269,7 @@
           <p:cNvPr id="9" name="">
             <a:extLst xmlns:a="http://schemas.openxmlformats.org/drawingml/2006/main">
               <a:ext uri="{FF2B5EF4-FFF2-40B4-BE49-F238E27FC236}">
-                <a16:creationId xmlns:a16="http://schemas.microsoft.com/office/drawing/2014/main" id="{6277F404-733F-4E89-B1D1-3515852D902C}"/>
+                <a16:creationId xmlns:a16="http://schemas.microsoft.com/office/drawing/2014/main" id="{2D2132D6-1FA8-44E8-8B53-DADBE395A9EB}"/>
               </a:ext>
             </a:extLst>
           </p:cNvPr>
@@ -2326,7 +2326,7 @@
           <p:cNvPr id="10" name="">
             <a:extLst xmlns:a="http://schemas.openxmlformats.org/drawingml/2006/main">
               <a:ext uri="{FF2B5EF4-FFF2-40B4-BE49-F238E27FC236}">
-                <a16:creationId xmlns:a16="http://schemas.microsoft.com/office/drawing/2014/main" id="{3115DB86-F1EC-4B0E-B1E5-A5ABD7AB3AC9}"/>
+                <a16:creationId xmlns:a16="http://schemas.microsoft.com/office/drawing/2014/main" id="{398A6958-290F-4345-92FF-E9553747B667}"/>
               </a:ext>
             </a:extLst>
           </p:cNvPr>
@@ -2406,7 +2406,7 @@
           <p:cNvPr id="11" name="">
             <a:extLst xmlns:a="http://schemas.openxmlformats.org/drawingml/2006/main">
               <a:ext uri="{FF2B5EF4-FFF2-40B4-BE49-F238E27FC236}">
-                <a16:creationId xmlns:a16="http://schemas.microsoft.com/office/drawing/2014/main" id="{85D9F9FC-0A6E-43A6-B3D4-D2F685C2D316}"/>
+                <a16:creationId xmlns:a16="http://schemas.microsoft.com/office/drawing/2014/main" id="{8CA9391B-D674-44DD-9A17-7E9B37B14FCB}"/>
               </a:ext>
             </a:extLst>
           </p:cNvPr>
@@ -2436,7 +2436,7 @@
           <p:cNvPr id="12" name="">
             <a:extLst xmlns:a="http://schemas.openxmlformats.org/drawingml/2006/main">
               <a:ext uri="{FF2B5EF4-FFF2-40B4-BE49-F238E27FC236}">
-                <a16:creationId xmlns:a16="http://schemas.microsoft.com/office/drawing/2014/main" id="{BB56FB75-4DCF-4F16-A8A6-94FDF70503F9}"/>
+                <a16:creationId xmlns:a16="http://schemas.microsoft.com/office/drawing/2014/main" id="{E6500ABA-06CE-4D39-9B5C-593A99E85793}"/>
               </a:ext>
             </a:extLst>
           </p:cNvPr>
@@ -2470,7 +2470,7 @@
           <p:cNvPr id="13" name="">
             <a:extLst xmlns:a="http://schemas.openxmlformats.org/drawingml/2006/main">
               <a:ext uri="{FF2B5EF4-FFF2-40B4-BE49-F238E27FC236}">
-                <a16:creationId xmlns:a16="http://schemas.microsoft.com/office/drawing/2014/main" id="{58BDF5D2-ACB8-44DC-A080-D090AF9A4084}"/>
+                <a16:creationId xmlns:a16="http://schemas.microsoft.com/office/drawing/2014/main" id="{EC823ED8-C977-4E26-9122-38FBD29B2A69}"/>
               </a:ext>
             </a:extLst>
           </p:cNvPr>
@@ -2502,7 +2502,7 @@
           <p:cNvPr id="14" name="">
             <a:extLst xmlns:a="http://schemas.openxmlformats.org/drawingml/2006/main">
               <a:ext uri="{FF2B5EF4-FFF2-40B4-BE49-F238E27FC236}">
-                <a16:creationId xmlns:a16="http://schemas.microsoft.com/office/drawing/2014/main" id="{6034939E-2665-41C3-9330-8E4F560AF908}"/>
+                <a16:creationId xmlns:a16="http://schemas.microsoft.com/office/drawing/2014/main" id="{CFEAAFF7-0552-4F47-9C8F-49EB83507EB7}"/>
               </a:ext>
             </a:extLst>
           </p:cNvPr>
@@ -2559,7 +2559,7 @@
           <p:cNvPr id="15" name="">
             <a:extLst xmlns:a="http://schemas.openxmlformats.org/drawingml/2006/main">
               <a:ext uri="{FF2B5EF4-FFF2-40B4-BE49-F238E27FC236}">
-                <a16:creationId xmlns:a16="http://schemas.microsoft.com/office/drawing/2014/main" id="{DE7B30FF-0BEB-487E-A963-A8C46B0AE132}"/>
+                <a16:creationId xmlns:a16="http://schemas.microsoft.com/office/drawing/2014/main" id="{1FC3D539-3CD3-4810-987A-AC9352AA83D5}"/>
               </a:ext>
             </a:extLst>
           </p:cNvPr>
@@ -2639,7 +2639,7 @@
           <p:cNvPr id="16" name="">
             <a:extLst xmlns:a="http://schemas.openxmlformats.org/drawingml/2006/main">
               <a:ext uri="{FF2B5EF4-FFF2-40B4-BE49-F238E27FC236}">
-                <a16:creationId xmlns:a16="http://schemas.microsoft.com/office/drawing/2014/main" id="{3D9BA0D2-2B4E-449C-92BC-F65CDF8412B9}"/>
+                <a16:creationId xmlns:a16="http://schemas.microsoft.com/office/drawing/2014/main" id="{CA6ED2A8-5C02-4728-8C19-ADD6111E12D4}"/>
               </a:ext>
             </a:extLst>
           </p:cNvPr>
@@ -2669,7 +2669,7 @@
           <p:cNvPr id="17" name="">
             <a:extLst xmlns:a="http://schemas.openxmlformats.org/drawingml/2006/main">
               <a:ext uri="{FF2B5EF4-FFF2-40B4-BE49-F238E27FC236}">
-                <a16:creationId xmlns:a16="http://schemas.microsoft.com/office/drawing/2014/main" id="{0A85CCF3-32FB-4FF3-99C8-5BCF8AB57471}"/>
+                <a16:creationId xmlns:a16="http://schemas.microsoft.com/office/drawing/2014/main" id="{EFB55766-D657-45AD-904E-0248102A1089}"/>
               </a:ext>
             </a:extLst>
           </p:cNvPr>
@@ -2703,7 +2703,7 @@
           <p:cNvPr id="18" name="">
             <a:extLst xmlns:a="http://schemas.openxmlformats.org/drawingml/2006/main">
               <a:ext uri="{FF2B5EF4-FFF2-40B4-BE49-F238E27FC236}">
-                <a16:creationId xmlns:a16="http://schemas.microsoft.com/office/drawing/2014/main" id="{86A2A5EE-E030-4DB3-975D-0C0949061BF7}"/>
+                <a16:creationId xmlns:a16="http://schemas.microsoft.com/office/drawing/2014/main" id="{6EF46A4F-9BE3-49D8-80CC-1680FA161E19}"/>
               </a:ext>
             </a:extLst>
           </p:cNvPr>
@@ -2735,7 +2735,7 @@
           <p:cNvPr id="19" name="">
             <a:extLst xmlns:a="http://schemas.openxmlformats.org/drawingml/2006/main">
               <a:ext uri="{FF2B5EF4-FFF2-40B4-BE49-F238E27FC236}">
-                <a16:creationId xmlns:a16="http://schemas.microsoft.com/office/drawing/2014/main" id="{1A75E61A-EA54-4ADE-B944-1966CB25F13F}"/>
+                <a16:creationId xmlns:a16="http://schemas.microsoft.com/office/drawing/2014/main" id="{B55C37B9-6A7B-4CC0-9FB2-D4AF60AA942A}"/>
               </a:ext>
             </a:extLst>
           </p:cNvPr>
@@ -2792,7 +2792,7 @@
           <p:cNvPr id="20" name="">
             <a:extLst xmlns:a="http://schemas.openxmlformats.org/drawingml/2006/main">
               <a:ext uri="{FF2B5EF4-FFF2-40B4-BE49-F238E27FC236}">
-                <a16:creationId xmlns:a16="http://schemas.microsoft.com/office/drawing/2014/main" id="{38DD47E5-C400-4C3B-93D7-AB138512E83E}"/>
+                <a16:creationId xmlns:a16="http://schemas.microsoft.com/office/drawing/2014/main" id="{78DD94B6-3A12-480F-B00C-D6A412A30EF0}"/>
               </a:ext>
             </a:extLst>
           </p:cNvPr>
@@ -2872,7 +2872,7 @@
           <p:cNvPr id="21" name="">
             <a:extLst xmlns:a="http://schemas.openxmlformats.org/drawingml/2006/main">
               <a:ext uri="{FF2B5EF4-FFF2-40B4-BE49-F238E27FC236}">
-                <a16:creationId xmlns:a16="http://schemas.microsoft.com/office/drawing/2014/main" id="{265E6D86-85F9-4D72-953A-33FAA9959267}"/>
+                <a16:creationId xmlns:a16="http://schemas.microsoft.com/office/drawing/2014/main" id="{772C9AE0-8737-4306-8B52-F266712A3D28}"/>
               </a:ext>
             </a:extLst>
           </p:cNvPr>
@@ -2902,7 +2902,7 @@
           <p:cNvPr id="22" name="">
             <a:extLst xmlns:a="http://schemas.openxmlformats.org/drawingml/2006/main">
               <a:ext uri="{FF2B5EF4-FFF2-40B4-BE49-F238E27FC236}">
-                <a16:creationId xmlns:a16="http://schemas.microsoft.com/office/drawing/2014/main" id="{61D82F41-7741-44FC-B303-337B6F92F7F3}"/>
+                <a16:creationId xmlns:a16="http://schemas.microsoft.com/office/drawing/2014/main" id="{BD17DF5D-73F2-40F4-876C-5636D841C951}"/>
               </a:ext>
             </a:extLst>
           </p:cNvPr>
@@ -2936,7 +2936,7 @@
           <p:cNvPr id="23" name="">
             <a:extLst xmlns:a="http://schemas.openxmlformats.org/drawingml/2006/main">
               <a:ext uri="{FF2B5EF4-FFF2-40B4-BE49-F238E27FC236}">
-                <a16:creationId xmlns:a16="http://schemas.microsoft.com/office/drawing/2014/main" id="{E5CCBAF8-572D-464D-B559-2D0D644DB15B}"/>
+                <a16:creationId xmlns:a16="http://schemas.microsoft.com/office/drawing/2014/main" id="{074AF708-C5F8-47DC-A736-2A7E0B6E7B89}"/>
               </a:ext>
             </a:extLst>
           </p:cNvPr>
@@ -2968,7 +2968,7 @@
           <p:cNvPr id="24" name="">
             <a:extLst xmlns:a="http://schemas.openxmlformats.org/drawingml/2006/main">
               <a:ext uri="{FF2B5EF4-FFF2-40B4-BE49-F238E27FC236}">
-                <a16:creationId xmlns:a16="http://schemas.microsoft.com/office/drawing/2014/main" id="{682488D9-2D26-4634-B513-89FA91B3FAB5}"/>
+                <a16:creationId xmlns:a16="http://schemas.microsoft.com/office/drawing/2014/main" id="{B19703B4-A079-45DF-A3E2-08571E321A4D}"/>
               </a:ext>
             </a:extLst>
           </p:cNvPr>
@@ -3025,7 +3025,7 @@
           <p:cNvPr id="25" name="">
             <a:extLst xmlns:a="http://schemas.openxmlformats.org/drawingml/2006/main">
               <a:ext uri="{FF2B5EF4-FFF2-40B4-BE49-F238E27FC236}">
-                <a16:creationId xmlns:a16="http://schemas.microsoft.com/office/drawing/2014/main" id="{417F4FF7-D710-49C6-92DB-739870C523BA}"/>
+                <a16:creationId xmlns:a16="http://schemas.microsoft.com/office/drawing/2014/main" id="{FEF881FF-D07E-4672-95D4-83D329931EB7}"/>
               </a:ext>
             </a:extLst>
           </p:cNvPr>
@@ -3105,7 +3105,7 @@
           <p:cNvPr id="26" name="">
             <a:extLst xmlns:a="http://schemas.openxmlformats.org/drawingml/2006/main">
               <a:ext uri="{FF2B5EF4-FFF2-40B4-BE49-F238E27FC236}">
-                <a16:creationId xmlns:a16="http://schemas.microsoft.com/office/drawing/2014/main" id="{B7E5F08B-FCE4-4D0E-BB08-664F399F6A4D}"/>
+                <a16:creationId xmlns:a16="http://schemas.microsoft.com/office/drawing/2014/main" id="{28154C7E-63F5-4F3D-BCCF-C10E9D190F87}"/>
               </a:ext>
             </a:extLst>
           </p:cNvPr>
@@ -3135,7 +3135,7 @@
           <p:cNvPr id="27" name="">
             <a:extLst xmlns:a="http://schemas.openxmlformats.org/drawingml/2006/main">
               <a:ext uri="{FF2B5EF4-FFF2-40B4-BE49-F238E27FC236}">
-                <a16:creationId xmlns:a16="http://schemas.microsoft.com/office/drawing/2014/main" id="{830C8417-98F9-4BCA-BC76-D3C96126E4D3}"/>
+                <a16:creationId xmlns:a16="http://schemas.microsoft.com/office/drawing/2014/main" id="{4E413B4A-8D0F-44E5-BCC6-E48E66689A1B}"/>
               </a:ext>
             </a:extLst>
           </p:cNvPr>
@@ -3169,7 +3169,7 @@
           <p:cNvPr id="28" name="">
             <a:extLst xmlns:a="http://schemas.openxmlformats.org/drawingml/2006/main">
               <a:ext uri="{FF2B5EF4-FFF2-40B4-BE49-F238E27FC236}">
-                <a16:creationId xmlns:a16="http://schemas.microsoft.com/office/drawing/2014/main" id="{A41B2833-003B-45B1-B1B1-545BC7A60887}"/>
+                <a16:creationId xmlns:a16="http://schemas.microsoft.com/office/drawing/2014/main" id="{25A49EE0-378B-4A3E-B5F5-2F56FFA90D2B}"/>
               </a:ext>
             </a:extLst>
           </p:cNvPr>
@@ -3201,7 +3201,7 @@
           <p:cNvPr id="29" name="">
             <a:extLst xmlns:a="http://schemas.openxmlformats.org/drawingml/2006/main">
               <a:ext uri="{FF2B5EF4-FFF2-40B4-BE49-F238E27FC236}">
-                <a16:creationId xmlns:a16="http://schemas.microsoft.com/office/drawing/2014/main" id="{0DAEF5DC-3857-43FC-80AF-CB9A634E8C0B}"/>
+                <a16:creationId xmlns:a16="http://schemas.microsoft.com/office/drawing/2014/main" id="{53FC9CD2-1450-42BE-880A-8B206EA31249}"/>
               </a:ext>
             </a:extLst>
           </p:cNvPr>
@@ -3258,7 +3258,7 @@
           <p:cNvPr id="30" name="">
             <a:extLst xmlns:a="http://schemas.openxmlformats.org/drawingml/2006/main">
               <a:ext uri="{FF2B5EF4-FFF2-40B4-BE49-F238E27FC236}">
-                <a16:creationId xmlns:a16="http://schemas.microsoft.com/office/drawing/2014/main" id="{3A527159-EAF2-4DBC-A6E8-9BC33819F10E}"/>
+                <a16:creationId xmlns:a16="http://schemas.microsoft.com/office/drawing/2014/main" id="{467678EE-A701-4624-894C-E77EA4466143}"/>
               </a:ext>
             </a:extLst>
           </p:cNvPr>
@@ -3338,7 +3338,7 @@
           <p:cNvPr id="31" name="">
             <a:extLst xmlns:a="http://schemas.openxmlformats.org/drawingml/2006/main">
               <a:ext uri="{FF2B5EF4-FFF2-40B4-BE49-F238E27FC236}">
-                <a16:creationId xmlns:a16="http://schemas.microsoft.com/office/drawing/2014/main" id="{3797B6C4-17D2-48E7-97F2-584DD0621808}"/>
+                <a16:creationId xmlns:a16="http://schemas.microsoft.com/office/drawing/2014/main" id="{0A935648-678D-4B14-A1E4-FAC8F7DB8834}"/>
               </a:ext>
             </a:extLst>
           </p:cNvPr>
@@ -3395,7 +3395,7 @@
           <p:cNvPr id="32" name="">
             <a:extLst xmlns:a="http://schemas.openxmlformats.org/drawingml/2006/main">
               <a:ext uri="{FF2B5EF4-FFF2-40B4-BE49-F238E27FC236}">
-                <a16:creationId xmlns:a16="http://schemas.microsoft.com/office/drawing/2014/main" id="{CC7B37C7-BFEA-4084-B289-B0488F873BCD}"/>
+                <a16:creationId xmlns:a16="http://schemas.microsoft.com/office/drawing/2014/main" id="{13E31A25-71B4-4207-B7DA-3B114B403808}"/>
               </a:ext>
             </a:extLst>
           </p:cNvPr>
@@ -3452,7 +3452,7 @@
           <p:cNvPr id="33" name="">
             <a:extLst xmlns:a="http://schemas.openxmlformats.org/drawingml/2006/main">
               <a:ext uri="{FF2B5EF4-FFF2-40B4-BE49-F238E27FC236}">
-                <a16:creationId xmlns:a16="http://schemas.microsoft.com/office/drawing/2014/main" id="{0ADD6516-84F6-46D4-92EB-FF4EB4698BD3}"/>
+                <a16:creationId xmlns:a16="http://schemas.microsoft.com/office/drawing/2014/main" id="{55377C47-7D72-4F60-ADAA-94A813450FC1}"/>
               </a:ext>
             </a:extLst>
           </p:cNvPr>
@@ -3509,7 +3509,7 @@
           <p:cNvPr id="34" name="">
             <a:extLst xmlns:a="http://schemas.openxmlformats.org/drawingml/2006/main">
               <a:ext uri="{FF2B5EF4-FFF2-40B4-BE49-F238E27FC236}">
-                <a16:creationId xmlns:a16="http://schemas.microsoft.com/office/drawing/2014/main" id="{8D2E41B3-789B-4BCF-9804-1D3F43D845EE}"/>
+                <a16:creationId xmlns:a16="http://schemas.microsoft.com/office/drawing/2014/main" id="{35588D4E-F31C-409A-943E-50E39AFF418D}"/>
               </a:ext>
             </a:extLst>
           </p:cNvPr>
@@ -3566,7 +3566,7 @@
           <p:cNvPr id="35" name="">
             <a:extLst xmlns:a="http://schemas.openxmlformats.org/drawingml/2006/main">
               <a:ext uri="{FF2B5EF4-FFF2-40B4-BE49-F238E27FC236}">
-                <a16:creationId xmlns:a16="http://schemas.microsoft.com/office/drawing/2014/main" id="{94A49C27-B905-41A1-AAA9-64010C344BCF}"/>
+                <a16:creationId xmlns:a16="http://schemas.microsoft.com/office/drawing/2014/main" id="{E735B1DA-B9D0-476C-8897-7AE93C9A341B}"/>
               </a:ext>
             </a:extLst>
           </p:cNvPr>
@@ -3623,7 +3623,7 @@
           <p:cNvPr id="36" name="">
             <a:extLst xmlns:a="http://schemas.openxmlformats.org/drawingml/2006/main">
               <a:ext uri="{FF2B5EF4-FFF2-40B4-BE49-F238E27FC236}">
-                <a16:creationId xmlns:a16="http://schemas.microsoft.com/office/drawing/2014/main" id="{5918798C-16E9-4F68-AB98-0ABB5F684ED2}"/>
+                <a16:creationId xmlns:a16="http://schemas.microsoft.com/office/drawing/2014/main" id="{68E6D471-387A-41AB-B1F7-30317DF61479}"/>
               </a:ext>
             </a:extLst>
           </p:cNvPr>
@@ -3680,7 +3680,7 @@
           <p:cNvPr id="37" name="">
             <a:extLst xmlns:a="http://schemas.openxmlformats.org/drawingml/2006/main">
               <a:ext uri="{FF2B5EF4-FFF2-40B4-BE49-F238E27FC236}">
-                <a16:creationId xmlns:a16="http://schemas.microsoft.com/office/drawing/2014/main" id="{52EDD4F6-37BC-465C-B269-C540B48660D2}"/>
+                <a16:creationId xmlns:a16="http://schemas.microsoft.com/office/drawing/2014/main" id="{77C5B1A6-3AE3-40FD-9C27-C1DBE39AFF14}"/>
               </a:ext>
             </a:extLst>
           </p:cNvPr>
@@ -3737,7 +3737,7 @@
           <p:cNvPr id="38" name="">
             <a:extLst xmlns:a="http://schemas.openxmlformats.org/drawingml/2006/main">
               <a:ext uri="{FF2B5EF4-FFF2-40B4-BE49-F238E27FC236}">
-                <a16:creationId xmlns:a16="http://schemas.microsoft.com/office/drawing/2014/main" id="{21575A69-7F03-4AC9-BF2D-377728F7F2A4}"/>
+                <a16:creationId xmlns:a16="http://schemas.microsoft.com/office/drawing/2014/main" id="{4D596F42-3158-4804-BA9B-A2D84D5E747D}"/>
               </a:ext>
             </a:extLst>
           </p:cNvPr>
@@ -3794,7 +3794,7 @@
           <p:cNvPr id="39" name="">
             <a:extLst xmlns:a="http://schemas.openxmlformats.org/drawingml/2006/main">
               <a:ext uri="{FF2B5EF4-FFF2-40B4-BE49-F238E27FC236}">
-                <a16:creationId xmlns:a16="http://schemas.microsoft.com/office/drawing/2014/main" id="{73FFBDDB-EFC1-4C22-B4A6-EA85AD2CA9E7}"/>
+                <a16:creationId xmlns:a16="http://schemas.microsoft.com/office/drawing/2014/main" id="{EF9BC48C-101F-4FE7-AD64-ED4122F2564E}"/>
               </a:ext>
             </a:extLst>
           </p:cNvPr>
@@ -3851,7 +3851,7 @@
           <p:cNvPr id="40" name="">
             <a:extLst xmlns:a="http://schemas.openxmlformats.org/drawingml/2006/main">
               <a:ext uri="{FF2B5EF4-FFF2-40B4-BE49-F238E27FC236}">
-                <a16:creationId xmlns:a16="http://schemas.microsoft.com/office/drawing/2014/main" id="{27CCAF9A-5B6E-4400-94B8-979D90CF51E1}"/>
+                <a16:creationId xmlns:a16="http://schemas.microsoft.com/office/drawing/2014/main" id="{86B06C3E-025E-4E69-941C-9EC570A5AE92}"/>
               </a:ext>
             </a:extLst>
           </p:cNvPr>
@@ -3898,7 +3898,7 @@
                 <a:ea typeface="Malgun Gothic"/>
                 <a:cs typeface="Malgun Gothic"/>
               </a:rPr>
-              <a:t>보조 검증  |  pytest 179 passed  ·  중복 재조회 35/35</a:t>
+              <a:t>보조 검증  |  pytest 214 passed  ·  중복 재조회 35/35</a:t>
             </a:r>
           </a:p>
         </p:txBody>
@@ -3908,7 +3908,7 @@
           <p:cNvPr id="41" name="">
             <a:extLst xmlns:a="http://schemas.openxmlformats.org/drawingml/2006/main">
               <a:ext uri="{FF2B5EF4-FFF2-40B4-BE49-F238E27FC236}">
-                <a16:creationId xmlns:a16="http://schemas.microsoft.com/office/drawing/2014/main" id="{3BF94959-6C0C-427D-9573-58471F19B4F6}"/>
+                <a16:creationId xmlns:a16="http://schemas.microsoft.com/office/drawing/2014/main" id="{4B88229A-ACDA-40ED-BB93-A442F4606C46}"/>
               </a:ext>
             </a:extLst>
           </p:cNvPr>
@@ -3988,7 +3988,7 @@
           <p:cNvPr id="42" name="">
             <a:extLst xmlns:a="http://schemas.openxmlformats.org/drawingml/2006/main">
               <a:ext uri="{FF2B5EF4-FFF2-40B4-BE49-F238E27FC236}">
-                <a16:creationId xmlns:a16="http://schemas.microsoft.com/office/drawing/2014/main" id="{C199B579-025E-48A8-A581-FDF4F3B2E788}"/>
+                <a16:creationId xmlns:a16="http://schemas.microsoft.com/office/drawing/2014/main" id="{7D4E69B3-50BA-482C-9FB6-FD3F041E9963}"/>
               </a:ext>
             </a:extLst>
           </p:cNvPr>
@@ -4045,7 +4045,7 @@
           <p:cNvPr id="43" name="">
             <a:extLst xmlns:a="http://schemas.openxmlformats.org/drawingml/2006/main">
               <a:ext uri="{FF2B5EF4-FFF2-40B4-BE49-F238E27FC236}">
-                <a16:creationId xmlns:a16="http://schemas.microsoft.com/office/drawing/2014/main" id="{B556CB86-7EE0-4DC0-B78E-3710E8D94593}"/>
+                <a16:creationId xmlns:a16="http://schemas.microsoft.com/office/drawing/2014/main" id="{45277F2E-EFD0-43E7-852C-4F0E54869209}"/>
               </a:ext>
             </a:extLst>
           </p:cNvPr>
@@ -4077,7 +4077,7 @@
           <p:cNvPr id="44" name="">
             <a:extLst xmlns:a="http://schemas.openxmlformats.org/drawingml/2006/main">
               <a:ext uri="{FF2B5EF4-FFF2-40B4-BE49-F238E27FC236}">
-                <a16:creationId xmlns:a16="http://schemas.microsoft.com/office/drawing/2014/main" id="{917C1BD2-20D5-4145-AE3E-A2FB5216AC42}"/>
+                <a16:creationId xmlns:a16="http://schemas.microsoft.com/office/drawing/2014/main" id="{0DC63E33-E59A-411B-997B-F34F7F82CCB4}"/>
               </a:ext>
             </a:extLst>
           </p:cNvPr>
@@ -4132,7 +4132,7 @@
     </p:spTree>
     <p:extLst>
       <p:ext uri="{BB962C8B-B14F-4D97-AF65-F5344CB8AC3E}">
-        <p14:creationId xmlns:p14="http://schemas.microsoft.com/office/powerpoint/2010/main" val="302738593"/>
+        <p14:creationId xmlns:p14="http://schemas.microsoft.com/office/powerpoint/2010/main" val="352965319"/>
       </p:ext>
     </p:extLst>
   </p:cSld>
@@ -4163,7 +4163,7 @@
           <p:cNvPr id="56" name="">
             <a:extLst xmlns:a="http://schemas.openxmlformats.org/drawingml/2006/main">
               <a:ext uri="{FF2B5EF4-FFF2-40B4-BE49-F238E27FC236}">
-                <a16:creationId xmlns:a16="http://schemas.microsoft.com/office/drawing/2014/main" id="{318E0669-D38A-402E-B4C2-86D54FD051D1}"/>
+                <a16:creationId xmlns:a16="http://schemas.microsoft.com/office/drawing/2014/main" id="{C54BCE00-1C0F-46BA-B566-66D92F471129}"/>
               </a:ext>
             </a:extLst>
           </p:cNvPr>
@@ -4193,7 +4193,7 @@
           <p:cNvPr id="2" name="">
             <a:extLst xmlns:a="http://schemas.openxmlformats.org/drawingml/2006/main">
               <a:ext uri="{FF2B5EF4-FFF2-40B4-BE49-F238E27FC236}">
-                <a16:creationId xmlns:a16="http://schemas.microsoft.com/office/drawing/2014/main" id="{4BA2FBA5-3E51-4FE9-955A-D11235FDA992}"/>
+                <a16:creationId xmlns:a16="http://schemas.microsoft.com/office/drawing/2014/main" id="{1FB26A3D-8033-46A5-86AD-AE6C24771A11}"/>
               </a:ext>
             </a:extLst>
           </p:cNvPr>
@@ -4250,7 +4250,7 @@
           <p:cNvPr id="3" name="">
             <a:extLst xmlns:a="http://schemas.openxmlformats.org/drawingml/2006/main">
               <a:ext uri="{FF2B5EF4-FFF2-40B4-BE49-F238E27FC236}">
-                <a16:creationId xmlns:a16="http://schemas.microsoft.com/office/drawing/2014/main" id="{90AB2FA8-55E4-494F-B629-AA3E7232839F}"/>
+                <a16:creationId xmlns:a16="http://schemas.microsoft.com/office/drawing/2014/main" id="{D856C706-6BC1-4139-9A8A-01DA94C28182}"/>
               </a:ext>
             </a:extLst>
           </p:cNvPr>
@@ -4280,7 +4280,7 @@
           <p:cNvPr id="4" name="">
             <a:extLst xmlns:a="http://schemas.openxmlformats.org/drawingml/2006/main">
               <a:ext uri="{FF2B5EF4-FFF2-40B4-BE49-F238E27FC236}">
-                <a16:creationId xmlns:a16="http://schemas.microsoft.com/office/drawing/2014/main" id="{39CCF4ED-539F-4B72-8A48-30BD2CBC7576}"/>
+                <a16:creationId xmlns:a16="http://schemas.microsoft.com/office/drawing/2014/main" id="{3262191A-2759-4E8F-B570-F8A17281BB16}"/>
               </a:ext>
             </a:extLst>
           </p:cNvPr>
@@ -4337,7 +4337,7 @@
           <p:cNvPr id="5" name="">
             <a:extLst xmlns:a="http://schemas.openxmlformats.org/drawingml/2006/main">
               <a:ext uri="{FF2B5EF4-FFF2-40B4-BE49-F238E27FC236}">
-                <a16:creationId xmlns:a16="http://schemas.microsoft.com/office/drawing/2014/main" id="{743AFC7B-15FC-47CF-9AE4-5FF684FDA01C}"/>
+                <a16:creationId xmlns:a16="http://schemas.microsoft.com/office/drawing/2014/main" id="{D8BBD1E5-A40F-476A-87F7-16C67C99633E}"/>
               </a:ext>
             </a:extLst>
           </p:cNvPr>
@@ -4394,7 +4394,7 @@
           <p:cNvPr id="6" name="">
             <a:extLst xmlns:a="http://schemas.openxmlformats.org/drawingml/2006/main">
               <a:ext uri="{FF2B5EF4-FFF2-40B4-BE49-F238E27FC236}">
-                <a16:creationId xmlns:a16="http://schemas.microsoft.com/office/drawing/2014/main" id="{81F5BE21-20F8-48F5-BB12-313168B20BF5}"/>
+                <a16:creationId xmlns:a16="http://schemas.microsoft.com/office/drawing/2014/main" id="{AF5DADFA-346E-4394-8C5F-D64A6C02AE12}"/>
               </a:ext>
             </a:extLst>
           </p:cNvPr>
@@ -4428,7 +4428,7 @@
           <p:cNvPr id="7" name="">
             <a:extLst xmlns:a="http://schemas.openxmlformats.org/drawingml/2006/main">
               <a:ext uri="{FF2B5EF4-FFF2-40B4-BE49-F238E27FC236}">
-                <a16:creationId xmlns:a16="http://schemas.microsoft.com/office/drawing/2014/main" id="{07211CED-AD92-4C74-830B-01181ECD419F}"/>
+                <a16:creationId xmlns:a16="http://schemas.microsoft.com/office/drawing/2014/main" id="{9AEB5FB6-C8AB-48D7-844F-AAF33DAA385A}"/>
               </a:ext>
             </a:extLst>
           </p:cNvPr>
@@ -4460,7 +4460,7 @@
           <p:cNvPr id="8" name="">
             <a:extLst xmlns:a="http://schemas.openxmlformats.org/drawingml/2006/main">
               <a:ext uri="{FF2B5EF4-FFF2-40B4-BE49-F238E27FC236}">
-                <a16:creationId xmlns:a16="http://schemas.microsoft.com/office/drawing/2014/main" id="{6F702748-B69F-46F8-920A-CE39A8EBE107}"/>
+                <a16:creationId xmlns:a16="http://schemas.microsoft.com/office/drawing/2014/main" id="{01270EC1-0490-4DE6-9831-B88C6BAC97C1}"/>
               </a:ext>
             </a:extLst>
           </p:cNvPr>
@@ -4517,7 +4517,7 @@
           <p:cNvPr id="9" name="">
             <a:extLst xmlns:a="http://schemas.openxmlformats.org/drawingml/2006/main">
               <a:ext uri="{FF2B5EF4-FFF2-40B4-BE49-F238E27FC236}">
-                <a16:creationId xmlns:a16="http://schemas.microsoft.com/office/drawing/2014/main" id="{D8DC00B0-57F9-4DCE-B009-5EFBBB21911D}"/>
+                <a16:creationId xmlns:a16="http://schemas.microsoft.com/office/drawing/2014/main" id="{CA0F10BA-180B-4E08-A6B0-D214DC0B2891}"/>
               </a:ext>
             </a:extLst>
           </p:cNvPr>
@@ -4574,7 +4574,7 @@
           <p:cNvPr id="10" name="">
             <a:extLst xmlns:a="http://schemas.openxmlformats.org/drawingml/2006/main">
               <a:ext uri="{FF2B5EF4-FFF2-40B4-BE49-F238E27FC236}">
-                <a16:creationId xmlns:a16="http://schemas.microsoft.com/office/drawing/2014/main" id="{68C51C1F-5B42-4120-80BD-5CBCC6E0089A}"/>
+                <a16:creationId xmlns:a16="http://schemas.microsoft.com/office/drawing/2014/main" id="{AA084EEB-CAA3-4B42-A15F-F6E231B1F9BA}"/>
               </a:ext>
             </a:extLst>
           </p:cNvPr>
@@ -4631,7 +4631,7 @@
           <p:cNvPr id="11" name="">
             <a:extLst xmlns:a="http://schemas.openxmlformats.org/drawingml/2006/main">
               <a:ext uri="{FF2B5EF4-FFF2-40B4-BE49-F238E27FC236}">
-                <a16:creationId xmlns:a16="http://schemas.microsoft.com/office/drawing/2014/main" id="{44F1BDE0-A7A4-4BC3-BCC1-2553358F84F7}"/>
+                <a16:creationId xmlns:a16="http://schemas.microsoft.com/office/drawing/2014/main" id="{5D55987B-39B6-4029-A831-28BFFAFF0EAA}"/>
               </a:ext>
             </a:extLst>
           </p:cNvPr>
@@ -4661,7 +4661,7 @@
           <p:cNvPr id="12" name="">
             <a:extLst xmlns:a="http://schemas.openxmlformats.org/drawingml/2006/main">
               <a:ext uri="{FF2B5EF4-FFF2-40B4-BE49-F238E27FC236}">
-                <a16:creationId xmlns:a16="http://schemas.microsoft.com/office/drawing/2014/main" id="{4CFA9F30-C351-4468-8969-7B18DC1CEE88}"/>
+                <a16:creationId xmlns:a16="http://schemas.microsoft.com/office/drawing/2014/main" id="{B55B9E1A-5476-4639-9DE7-96C35576A2F9}"/>
               </a:ext>
             </a:extLst>
           </p:cNvPr>
@@ -4695,7 +4695,7 @@
           <p:cNvPr id="13" name="">
             <a:extLst xmlns:a="http://schemas.openxmlformats.org/drawingml/2006/main">
               <a:ext uri="{FF2B5EF4-FFF2-40B4-BE49-F238E27FC236}">
-                <a16:creationId xmlns:a16="http://schemas.microsoft.com/office/drawing/2014/main" id="{ECAE0F05-2DA2-452D-8756-0D2092233D7B}"/>
+                <a16:creationId xmlns:a16="http://schemas.microsoft.com/office/drawing/2014/main" id="{45834AB0-D07B-41CD-B9F2-D56C7F5037A3}"/>
               </a:ext>
             </a:extLst>
           </p:cNvPr>
@@ -4727,7 +4727,7 @@
           <p:cNvPr id="14" name="">
             <a:extLst xmlns:a="http://schemas.openxmlformats.org/drawingml/2006/main">
               <a:ext uri="{FF2B5EF4-FFF2-40B4-BE49-F238E27FC236}">
-                <a16:creationId xmlns:a16="http://schemas.microsoft.com/office/drawing/2014/main" id="{4C103511-C667-4C0B-A5BC-08F5450B0FAC}"/>
+                <a16:creationId xmlns:a16="http://schemas.microsoft.com/office/drawing/2014/main" id="{D67DB4CC-7208-40E8-AB9D-CA85A8084CAA}"/>
               </a:ext>
             </a:extLst>
           </p:cNvPr>
@@ -4784,7 +4784,7 @@
           <p:cNvPr id="15" name="">
             <a:extLst xmlns:a="http://schemas.openxmlformats.org/drawingml/2006/main">
               <a:ext uri="{FF2B5EF4-FFF2-40B4-BE49-F238E27FC236}">
-                <a16:creationId xmlns:a16="http://schemas.microsoft.com/office/drawing/2014/main" id="{964C3ED9-B129-4064-849F-9DC4533188EB}"/>
+                <a16:creationId xmlns:a16="http://schemas.microsoft.com/office/drawing/2014/main" id="{136FAE2F-C537-4FBF-86BB-B7B43AC84E05}"/>
               </a:ext>
             </a:extLst>
           </p:cNvPr>
@@ -4841,7 +4841,7 @@
           <p:cNvPr id="16" name="">
             <a:extLst xmlns:a="http://schemas.openxmlformats.org/drawingml/2006/main">
               <a:ext uri="{FF2B5EF4-FFF2-40B4-BE49-F238E27FC236}">
-                <a16:creationId xmlns:a16="http://schemas.microsoft.com/office/drawing/2014/main" id="{AE944B74-A9EB-42C5-9EFD-AB58CE9D1985}"/>
+                <a16:creationId xmlns:a16="http://schemas.microsoft.com/office/drawing/2014/main" id="{A6AB38D7-0863-4AFD-A4C8-6723DF064448}"/>
               </a:ext>
             </a:extLst>
           </p:cNvPr>
@@ -4898,7 +4898,7 @@
           <p:cNvPr id="17" name="">
             <a:extLst xmlns:a="http://schemas.openxmlformats.org/drawingml/2006/main">
               <a:ext uri="{FF2B5EF4-FFF2-40B4-BE49-F238E27FC236}">
-                <a16:creationId xmlns:a16="http://schemas.microsoft.com/office/drawing/2014/main" id="{EF8B65FB-06A3-4F8B-A4E5-A1593E6B11CB}"/>
+                <a16:creationId xmlns:a16="http://schemas.microsoft.com/office/drawing/2014/main" id="{385A7F39-20D8-4958-A91C-69CED28828D8}"/>
               </a:ext>
             </a:extLst>
           </p:cNvPr>
@@ -4928,7 +4928,7 @@
           <p:cNvPr id="18" name="">
             <a:extLst xmlns:a="http://schemas.openxmlformats.org/drawingml/2006/main">
               <a:ext uri="{FF2B5EF4-FFF2-40B4-BE49-F238E27FC236}">
-                <a16:creationId xmlns:a16="http://schemas.microsoft.com/office/drawing/2014/main" id="{067E09DA-AF87-43CD-B129-C1CB5D4368CD}"/>
+                <a16:creationId xmlns:a16="http://schemas.microsoft.com/office/drawing/2014/main" id="{896FE9AC-3450-46E7-8AFC-9FEC5FAB8397}"/>
               </a:ext>
             </a:extLst>
           </p:cNvPr>
@@ -4962,7 +4962,7 @@
           <p:cNvPr id="19" name="">
             <a:extLst xmlns:a="http://schemas.openxmlformats.org/drawingml/2006/main">
               <a:ext uri="{FF2B5EF4-FFF2-40B4-BE49-F238E27FC236}">
-                <a16:creationId xmlns:a16="http://schemas.microsoft.com/office/drawing/2014/main" id="{14E04519-2865-455D-B102-61F370D2D2C8}"/>
+                <a16:creationId xmlns:a16="http://schemas.microsoft.com/office/drawing/2014/main" id="{8FA33EEA-9390-4BA7-8B05-2BD0ABFC07A7}"/>
               </a:ext>
             </a:extLst>
           </p:cNvPr>
@@ -4994,7 +4994,7 @@
           <p:cNvPr id="20" name="">
             <a:extLst xmlns:a="http://schemas.openxmlformats.org/drawingml/2006/main">
               <a:ext uri="{FF2B5EF4-FFF2-40B4-BE49-F238E27FC236}">
-                <a16:creationId xmlns:a16="http://schemas.microsoft.com/office/drawing/2014/main" id="{F50E2F10-2E95-4695-8A20-C10287167865}"/>
+                <a16:creationId xmlns:a16="http://schemas.microsoft.com/office/drawing/2014/main" id="{A4350722-AC0C-4121-9FA8-FAE0ACAF3CF7}"/>
               </a:ext>
             </a:extLst>
           </p:cNvPr>
@@ -5051,7 +5051,7 @@
           <p:cNvPr id="21" name="">
             <a:extLst xmlns:a="http://schemas.openxmlformats.org/drawingml/2006/main">
               <a:ext uri="{FF2B5EF4-FFF2-40B4-BE49-F238E27FC236}">
-                <a16:creationId xmlns:a16="http://schemas.microsoft.com/office/drawing/2014/main" id="{05B09DA5-730F-44F1-9F33-59B6990A89FF}"/>
+                <a16:creationId xmlns:a16="http://schemas.microsoft.com/office/drawing/2014/main" id="{721526A4-9002-492B-97FB-65B6D03D4603}"/>
               </a:ext>
             </a:extLst>
           </p:cNvPr>
@@ -5108,7 +5108,7 @@
           <p:cNvPr id="22" name="">
             <a:extLst xmlns:a="http://schemas.openxmlformats.org/drawingml/2006/main">
               <a:ext uri="{FF2B5EF4-FFF2-40B4-BE49-F238E27FC236}">
-                <a16:creationId xmlns:a16="http://schemas.microsoft.com/office/drawing/2014/main" id="{8F9D6037-146F-4AD9-A78F-BAFE46DF0EDB}"/>
+                <a16:creationId xmlns:a16="http://schemas.microsoft.com/office/drawing/2014/main" id="{50090DEB-BFEC-43A6-9D41-E084BE42F853}"/>
               </a:ext>
             </a:extLst>
           </p:cNvPr>
@@ -5165,7 +5165,7 @@
           <p:cNvPr id="23" name="">
             <a:extLst xmlns:a="http://schemas.openxmlformats.org/drawingml/2006/main">
               <a:ext uri="{FF2B5EF4-FFF2-40B4-BE49-F238E27FC236}">
-                <a16:creationId xmlns:a16="http://schemas.microsoft.com/office/drawing/2014/main" id="{0ADA2A04-4A29-4814-9F1C-E4ADC4D2D7BD}"/>
+                <a16:creationId xmlns:a16="http://schemas.microsoft.com/office/drawing/2014/main" id="{E0629DE7-F42E-458B-8EA9-156882BADF3F}"/>
               </a:ext>
             </a:extLst>
           </p:cNvPr>
@@ -5195,7 +5195,7 @@
           <p:cNvPr id="24" name="">
             <a:extLst xmlns:a="http://schemas.openxmlformats.org/drawingml/2006/main">
               <a:ext uri="{FF2B5EF4-FFF2-40B4-BE49-F238E27FC236}">
-                <a16:creationId xmlns:a16="http://schemas.microsoft.com/office/drawing/2014/main" id="{2CD456EF-33AB-423E-A3F8-6072B182DAE5}"/>
+                <a16:creationId xmlns:a16="http://schemas.microsoft.com/office/drawing/2014/main" id="{09915B2A-E60C-4D21-AF70-A78A4E8D7B60}"/>
               </a:ext>
             </a:extLst>
           </p:cNvPr>
@@ -5229,7 +5229,7 @@
           <p:cNvPr id="25" name="">
             <a:extLst xmlns:a="http://schemas.openxmlformats.org/drawingml/2006/main">
               <a:ext uri="{FF2B5EF4-FFF2-40B4-BE49-F238E27FC236}">
-                <a16:creationId xmlns:a16="http://schemas.microsoft.com/office/drawing/2014/main" id="{5AD05741-1E70-4783-BB0D-772406FD5502}"/>
+                <a16:creationId xmlns:a16="http://schemas.microsoft.com/office/drawing/2014/main" id="{1A8ACAC1-8ADC-447E-8524-61E9611BD1AB}"/>
               </a:ext>
             </a:extLst>
           </p:cNvPr>
@@ -5261,7 +5261,7 @@
           <p:cNvPr id="26" name="">
             <a:extLst xmlns:a="http://schemas.openxmlformats.org/drawingml/2006/main">
               <a:ext uri="{FF2B5EF4-FFF2-40B4-BE49-F238E27FC236}">
-                <a16:creationId xmlns:a16="http://schemas.microsoft.com/office/drawing/2014/main" id="{56D857B6-F301-468F-AC69-0D9D209BF260}"/>
+                <a16:creationId xmlns:a16="http://schemas.microsoft.com/office/drawing/2014/main" id="{6C817142-B504-4613-9874-BAE617563FFF}"/>
               </a:ext>
             </a:extLst>
           </p:cNvPr>
@@ -5318,7 +5318,7 @@
           <p:cNvPr id="27" name="">
             <a:extLst xmlns:a="http://schemas.openxmlformats.org/drawingml/2006/main">
               <a:ext uri="{FF2B5EF4-FFF2-40B4-BE49-F238E27FC236}">
-                <a16:creationId xmlns:a16="http://schemas.microsoft.com/office/drawing/2014/main" id="{548A680E-7381-4D8E-87EC-2B4DFEDFFFE4}"/>
+                <a16:creationId xmlns:a16="http://schemas.microsoft.com/office/drawing/2014/main" id="{A30CE130-77F5-4912-9C9E-8AAE171C2188}"/>
               </a:ext>
             </a:extLst>
           </p:cNvPr>
@@ -5375,7 +5375,7 @@
           <p:cNvPr id="28" name="">
             <a:extLst xmlns:a="http://schemas.openxmlformats.org/drawingml/2006/main">
               <a:ext uri="{FF2B5EF4-FFF2-40B4-BE49-F238E27FC236}">
-                <a16:creationId xmlns:a16="http://schemas.microsoft.com/office/drawing/2014/main" id="{8E70BD24-7A95-40EA-B7B5-0E52167B2C7D}"/>
+                <a16:creationId xmlns:a16="http://schemas.microsoft.com/office/drawing/2014/main" id="{DB3634BF-F12C-47BB-94BD-969F3E5C8B8C}"/>
               </a:ext>
             </a:extLst>
           </p:cNvPr>
@@ -5432,7 +5432,7 @@
           <p:cNvPr id="29" name="">
             <a:extLst xmlns:a="http://schemas.openxmlformats.org/drawingml/2006/main">
               <a:ext uri="{FF2B5EF4-FFF2-40B4-BE49-F238E27FC236}">
-                <a16:creationId xmlns:a16="http://schemas.microsoft.com/office/drawing/2014/main" id="{E3C9C6C5-ABB1-40F1-B91F-75A12A6BD3DC}"/>
+                <a16:creationId xmlns:a16="http://schemas.microsoft.com/office/drawing/2014/main" id="{EE491FEC-78CE-486A-AF22-0F6670D0A70C}"/>
               </a:ext>
             </a:extLst>
           </p:cNvPr>
@@ -5462,7 +5462,7 @@
           <p:cNvPr id="30" name="">
             <a:extLst xmlns:a="http://schemas.openxmlformats.org/drawingml/2006/main">
               <a:ext uri="{FF2B5EF4-FFF2-40B4-BE49-F238E27FC236}">
-                <a16:creationId xmlns:a16="http://schemas.microsoft.com/office/drawing/2014/main" id="{8E2267C5-C956-411F-814B-8053B03115D9}"/>
+                <a16:creationId xmlns:a16="http://schemas.microsoft.com/office/drawing/2014/main" id="{557AA3BD-2DEF-4C4A-A862-3BBB54C9D229}"/>
               </a:ext>
             </a:extLst>
           </p:cNvPr>
@@ -5496,7 +5496,7 @@
           <p:cNvPr id="31" name="">
             <a:extLst xmlns:a="http://schemas.openxmlformats.org/drawingml/2006/main">
               <a:ext uri="{FF2B5EF4-FFF2-40B4-BE49-F238E27FC236}">
-                <a16:creationId xmlns:a16="http://schemas.microsoft.com/office/drawing/2014/main" id="{D0265A7F-D491-4327-BF7B-6C2709FB1F4A}"/>
+                <a16:creationId xmlns:a16="http://schemas.microsoft.com/office/drawing/2014/main" id="{42F1C0C9-28C4-419F-B640-0E60DB2C7F1C}"/>
               </a:ext>
             </a:extLst>
           </p:cNvPr>
@@ -5528,7 +5528,7 @@
           <p:cNvPr id="32" name="">
             <a:extLst xmlns:a="http://schemas.openxmlformats.org/drawingml/2006/main">
               <a:ext uri="{FF2B5EF4-FFF2-40B4-BE49-F238E27FC236}">
-                <a16:creationId xmlns:a16="http://schemas.microsoft.com/office/drawing/2014/main" id="{E8832A62-56B3-493A-8AD4-19EEE137F45C}"/>
+                <a16:creationId xmlns:a16="http://schemas.microsoft.com/office/drawing/2014/main" id="{505C77D9-6EA8-4DD6-B951-DB41C5149BB0}"/>
               </a:ext>
             </a:extLst>
           </p:cNvPr>
@@ -5585,7 +5585,7 @@
           <p:cNvPr id="33" name="">
             <a:extLst xmlns:a="http://schemas.openxmlformats.org/drawingml/2006/main">
               <a:ext uri="{FF2B5EF4-FFF2-40B4-BE49-F238E27FC236}">
-                <a16:creationId xmlns:a16="http://schemas.microsoft.com/office/drawing/2014/main" id="{B4F8EF55-9B76-481F-8B66-D9D45122CA76}"/>
+                <a16:creationId xmlns:a16="http://schemas.microsoft.com/office/drawing/2014/main" id="{5590A043-6375-4EBF-A3F3-E3D3D9E1FA49}"/>
               </a:ext>
             </a:extLst>
           </p:cNvPr>
@@ -5642,7 +5642,7 @@
           <p:cNvPr id="34" name="">
             <a:extLst xmlns:a="http://schemas.openxmlformats.org/drawingml/2006/main">
               <a:ext uri="{FF2B5EF4-FFF2-40B4-BE49-F238E27FC236}">
-                <a16:creationId xmlns:a16="http://schemas.microsoft.com/office/drawing/2014/main" id="{6CCD6E2E-87D3-4825-97F4-A12853FA54D6}"/>
+                <a16:creationId xmlns:a16="http://schemas.microsoft.com/office/drawing/2014/main" id="{53CE8DA6-6638-4B94-B1FD-079ED4AD0D52}"/>
               </a:ext>
             </a:extLst>
           </p:cNvPr>
@@ -5699,7 +5699,7 @@
           <p:cNvPr id="35" name="">
             <a:extLst xmlns:a="http://schemas.openxmlformats.org/drawingml/2006/main">
               <a:ext uri="{FF2B5EF4-FFF2-40B4-BE49-F238E27FC236}">
-                <a16:creationId xmlns:a16="http://schemas.microsoft.com/office/drawing/2014/main" id="{3AD379A4-002F-4AD1-88BA-DED370AAB623}"/>
+                <a16:creationId xmlns:a16="http://schemas.microsoft.com/office/drawing/2014/main" id="{F6064164-23C9-44C7-B640-1C6D2B1157BE}"/>
               </a:ext>
             </a:extLst>
           </p:cNvPr>
@@ -5729,7 +5729,7 @@
           <p:cNvPr id="36" name="">
             <a:extLst xmlns:a="http://schemas.openxmlformats.org/drawingml/2006/main">
               <a:ext uri="{FF2B5EF4-FFF2-40B4-BE49-F238E27FC236}">
-                <a16:creationId xmlns:a16="http://schemas.microsoft.com/office/drawing/2014/main" id="{3A43C2AE-B467-4E4B-B7B8-4975B18F810C}"/>
+                <a16:creationId xmlns:a16="http://schemas.microsoft.com/office/drawing/2014/main" id="{6EAFC55A-5071-453A-B400-7261430D1EED}"/>
               </a:ext>
             </a:extLst>
           </p:cNvPr>
@@ -5763,7 +5763,7 @@
           <p:cNvPr id="37" name="">
             <a:extLst xmlns:a="http://schemas.openxmlformats.org/drawingml/2006/main">
               <a:ext uri="{FF2B5EF4-FFF2-40B4-BE49-F238E27FC236}">
-                <a16:creationId xmlns:a16="http://schemas.microsoft.com/office/drawing/2014/main" id="{2E002304-1EDC-40C5-A0DE-703873E6256C}"/>
+                <a16:creationId xmlns:a16="http://schemas.microsoft.com/office/drawing/2014/main" id="{F40D1F67-7448-48F1-BFD6-06570E300B89}"/>
               </a:ext>
             </a:extLst>
           </p:cNvPr>
@@ -5795,7 +5795,7 @@
           <p:cNvPr id="38" name="">
             <a:extLst xmlns:a="http://schemas.openxmlformats.org/drawingml/2006/main">
               <a:ext uri="{FF2B5EF4-FFF2-40B4-BE49-F238E27FC236}">
-                <a16:creationId xmlns:a16="http://schemas.microsoft.com/office/drawing/2014/main" id="{4CA30F29-26B9-4908-91C5-F5E1AA6EBA53}"/>
+                <a16:creationId xmlns:a16="http://schemas.microsoft.com/office/drawing/2014/main" id="{FB712458-A63B-437D-AE49-D245D8C64F97}"/>
               </a:ext>
             </a:extLst>
           </p:cNvPr>
@@ -5852,7 +5852,7 @@
           <p:cNvPr id="39" name="">
             <a:extLst xmlns:a="http://schemas.openxmlformats.org/drawingml/2006/main">
               <a:ext uri="{FF2B5EF4-FFF2-40B4-BE49-F238E27FC236}">
-                <a16:creationId xmlns:a16="http://schemas.microsoft.com/office/drawing/2014/main" id="{E1B43935-9D44-4ACE-976C-391E5B09C221}"/>
+                <a16:creationId xmlns:a16="http://schemas.microsoft.com/office/drawing/2014/main" id="{EDA0F901-0AB3-4214-ABE9-0457C137BDBF}"/>
               </a:ext>
             </a:extLst>
           </p:cNvPr>
@@ -5909,7 +5909,7 @@
           <p:cNvPr id="40" name="">
             <a:extLst xmlns:a="http://schemas.openxmlformats.org/drawingml/2006/main">
               <a:ext uri="{FF2B5EF4-FFF2-40B4-BE49-F238E27FC236}">
-                <a16:creationId xmlns:a16="http://schemas.microsoft.com/office/drawing/2014/main" id="{0BAF0A6E-8C64-4EC3-B7C2-417374E2646D}"/>
+                <a16:creationId xmlns:a16="http://schemas.microsoft.com/office/drawing/2014/main" id="{FA517CE7-EB64-44BE-9ACD-2CB535E0C80E}"/>
               </a:ext>
             </a:extLst>
           </p:cNvPr>
@@ -5966,7 +5966,7 @@
           <p:cNvPr id="41" name="">
             <a:extLst xmlns:a="http://schemas.openxmlformats.org/drawingml/2006/main">
               <a:ext uri="{FF2B5EF4-FFF2-40B4-BE49-F238E27FC236}">
-                <a16:creationId xmlns:a16="http://schemas.microsoft.com/office/drawing/2014/main" id="{D8AC0ABA-3777-4639-A155-A0EBAED7AE62}"/>
+                <a16:creationId xmlns:a16="http://schemas.microsoft.com/office/drawing/2014/main" id="{7E6B29F5-4399-4058-BAC8-72B37F3DFD24}"/>
               </a:ext>
             </a:extLst>
           </p:cNvPr>
@@ -5998,7 +5998,7 @@
           <p:cNvPr id="42" name="">
             <a:extLst xmlns:a="http://schemas.openxmlformats.org/drawingml/2006/main">
               <a:ext uri="{FF2B5EF4-FFF2-40B4-BE49-F238E27FC236}">
-                <a16:creationId xmlns:a16="http://schemas.microsoft.com/office/drawing/2014/main" id="{B4936082-1A4A-4680-9FC9-8BCEA87143EE}"/>
+                <a16:creationId xmlns:a16="http://schemas.microsoft.com/office/drawing/2014/main" id="{46CD561A-87E7-4881-BC98-B398F457AD8D}"/>
               </a:ext>
             </a:extLst>
           </p:cNvPr>
@@ -6055,7 +6055,7 @@
           <p:cNvPr id="43" name="">
             <a:extLst xmlns:a="http://schemas.openxmlformats.org/drawingml/2006/main">
               <a:ext uri="{FF2B5EF4-FFF2-40B4-BE49-F238E27FC236}">
-                <a16:creationId xmlns:a16="http://schemas.microsoft.com/office/drawing/2014/main" id="{7FBAA86D-AEC0-484B-8543-3CDA8FC02BF1}"/>
+                <a16:creationId xmlns:a16="http://schemas.microsoft.com/office/drawing/2014/main" id="{D604298F-DF6F-4C53-BE37-32BF937EA788}"/>
               </a:ext>
             </a:extLst>
           </p:cNvPr>
@@ -6112,7 +6112,7 @@
           <p:cNvPr id="44" name="">
             <a:extLst xmlns:a="http://schemas.openxmlformats.org/drawingml/2006/main">
               <a:ext uri="{FF2B5EF4-FFF2-40B4-BE49-F238E27FC236}">
-                <a16:creationId xmlns:a16="http://schemas.microsoft.com/office/drawing/2014/main" id="{F41ECABA-0AD8-41D0-BB7F-31FD642F7B92}"/>
+                <a16:creationId xmlns:a16="http://schemas.microsoft.com/office/drawing/2014/main" id="{2BF517D5-D9DE-42B4-AD4A-3D3D311B48EF}"/>
               </a:ext>
             </a:extLst>
           </p:cNvPr>
@@ -6169,7 +6169,7 @@
           <p:cNvPr id="45" name="">
             <a:extLst xmlns:a="http://schemas.openxmlformats.org/drawingml/2006/main">
               <a:ext uri="{FF2B5EF4-FFF2-40B4-BE49-F238E27FC236}">
-                <a16:creationId xmlns:a16="http://schemas.microsoft.com/office/drawing/2014/main" id="{B2FF0ADC-B841-41BF-8967-F6A97A42C29B}"/>
+                <a16:creationId xmlns:a16="http://schemas.microsoft.com/office/drawing/2014/main" id="{839FB54A-A2E8-40A1-B5D0-4BCC3BB078C4}"/>
               </a:ext>
             </a:extLst>
           </p:cNvPr>
@@ -6226,7 +6226,7 @@
           <p:cNvPr id="46" name="">
             <a:extLst xmlns:a="http://schemas.openxmlformats.org/drawingml/2006/main">
               <a:ext uri="{FF2B5EF4-FFF2-40B4-BE49-F238E27FC236}">
-                <a16:creationId xmlns:a16="http://schemas.microsoft.com/office/drawing/2014/main" id="{DFA25735-3B43-485A-BBE3-D957AC54086C}"/>
+                <a16:creationId xmlns:a16="http://schemas.microsoft.com/office/drawing/2014/main" id="{DDD383B0-0982-4147-9B77-1D5BF2B70CDE}"/>
               </a:ext>
             </a:extLst>
           </p:cNvPr>
@@ -6283,7 +6283,7 @@
           <p:cNvPr id="47" name="">
             <a:extLst xmlns:a="http://schemas.openxmlformats.org/drawingml/2006/main">
               <a:ext uri="{FF2B5EF4-FFF2-40B4-BE49-F238E27FC236}">
-                <a16:creationId xmlns:a16="http://schemas.microsoft.com/office/drawing/2014/main" id="{D1970E87-0ABB-4BAB-A795-1D27F2773E42}"/>
+                <a16:creationId xmlns:a16="http://schemas.microsoft.com/office/drawing/2014/main" id="{A22D6975-F122-4418-8F1B-68CB500DF560}"/>
               </a:ext>
             </a:extLst>
           </p:cNvPr>
@@ -6340,7 +6340,7 @@
           <p:cNvPr id="48" name="">
             <a:extLst xmlns:a="http://schemas.openxmlformats.org/drawingml/2006/main">
               <a:ext uri="{FF2B5EF4-FFF2-40B4-BE49-F238E27FC236}">
-                <a16:creationId xmlns:a16="http://schemas.microsoft.com/office/drawing/2014/main" id="{272799D7-C7FE-43C1-AEE3-1B72A61E7CBF}"/>
+                <a16:creationId xmlns:a16="http://schemas.microsoft.com/office/drawing/2014/main" id="{26BED696-33D1-47B3-89DF-50431B560A0A}"/>
               </a:ext>
             </a:extLst>
           </p:cNvPr>
@@ -6397,7 +6397,7 @@
           <p:cNvPr id="49" name="">
             <a:extLst xmlns:a="http://schemas.openxmlformats.org/drawingml/2006/main">
               <a:ext uri="{FF2B5EF4-FFF2-40B4-BE49-F238E27FC236}">
-                <a16:creationId xmlns:a16="http://schemas.microsoft.com/office/drawing/2014/main" id="{908AC0DC-9240-44B5-81F4-F9771E978699}"/>
+                <a16:creationId xmlns:a16="http://schemas.microsoft.com/office/drawing/2014/main" id="{D7C03A36-5119-455C-8DE1-412F4497C9E7}"/>
               </a:ext>
             </a:extLst>
           </p:cNvPr>
@@ -6477,7 +6477,7 @@
           <p:cNvPr id="50" name="">
             <a:extLst xmlns:a="http://schemas.openxmlformats.org/drawingml/2006/main">
               <a:ext uri="{FF2B5EF4-FFF2-40B4-BE49-F238E27FC236}">
-                <a16:creationId xmlns:a16="http://schemas.microsoft.com/office/drawing/2014/main" id="{AD870773-FCCD-4626-BF7B-C621BC4BA533}"/>
+                <a16:creationId xmlns:a16="http://schemas.microsoft.com/office/drawing/2014/main" id="{4C730EFB-3D10-4865-82BE-23861229B3E7}"/>
               </a:ext>
             </a:extLst>
           </p:cNvPr>
@@ -6534,7 +6534,7 @@
           <p:cNvPr id="51" name="">
             <a:extLst xmlns:a="http://schemas.openxmlformats.org/drawingml/2006/main">
               <a:ext uri="{FF2B5EF4-FFF2-40B4-BE49-F238E27FC236}">
-                <a16:creationId xmlns:a16="http://schemas.microsoft.com/office/drawing/2014/main" id="{08DD966C-B091-472F-8AFA-34F2013A6C59}"/>
+                <a16:creationId xmlns:a16="http://schemas.microsoft.com/office/drawing/2014/main" id="{4B0293DD-0E49-4D19-A29A-694BCD519734}"/>
               </a:ext>
             </a:extLst>
           </p:cNvPr>
@@ -6614,7 +6614,7 @@
           <p:cNvPr id="52" name="">
             <a:extLst xmlns:a="http://schemas.openxmlformats.org/drawingml/2006/main">
               <a:ext uri="{FF2B5EF4-FFF2-40B4-BE49-F238E27FC236}">
-                <a16:creationId xmlns:a16="http://schemas.microsoft.com/office/drawing/2014/main" id="{74EB2997-03D6-4CB6-B6C0-9DDB3093AFBE}"/>
+                <a16:creationId xmlns:a16="http://schemas.microsoft.com/office/drawing/2014/main" id="{0E1904B7-6066-4EFA-BACC-F2FF26849AAB}"/>
               </a:ext>
             </a:extLst>
           </p:cNvPr>
@@ -6671,7 +6671,7 @@
           <p:cNvPr id="53" name="">
             <a:extLst xmlns:a="http://schemas.openxmlformats.org/drawingml/2006/main">
               <a:ext uri="{FF2B5EF4-FFF2-40B4-BE49-F238E27FC236}">
-                <a16:creationId xmlns:a16="http://schemas.microsoft.com/office/drawing/2014/main" id="{C7050CD6-D094-4BB9-84C0-F7AAE6ECDF83}"/>
+                <a16:creationId xmlns:a16="http://schemas.microsoft.com/office/drawing/2014/main" id="{6B7ACDC1-9A43-4DB6-9FE0-46826333945E}"/>
               </a:ext>
             </a:extLst>
           </p:cNvPr>
@@ -6751,7 +6751,7 @@
           <p:cNvPr id="54" name="">
             <a:extLst xmlns:a="http://schemas.openxmlformats.org/drawingml/2006/main">
               <a:ext uri="{FF2B5EF4-FFF2-40B4-BE49-F238E27FC236}">
-                <a16:creationId xmlns:a16="http://schemas.microsoft.com/office/drawing/2014/main" id="{A5A80BFC-0CD4-4FC2-B273-7B42FAFEFC80}"/>
+                <a16:creationId xmlns:a16="http://schemas.microsoft.com/office/drawing/2014/main" id="{48CB09C1-E5C1-4F4F-BF27-95743F9CCE8C}"/>
               </a:ext>
             </a:extLst>
           </p:cNvPr>
@@ -6783,7 +6783,7 @@
           <p:cNvPr id="55" name="">
             <a:extLst xmlns:a="http://schemas.openxmlformats.org/drawingml/2006/main">
               <a:ext uri="{FF2B5EF4-FFF2-40B4-BE49-F238E27FC236}">
-                <a16:creationId xmlns:a16="http://schemas.microsoft.com/office/drawing/2014/main" id="{905DE995-D2BE-45E1-B5E3-FE29D309B5AC}"/>
+                <a16:creationId xmlns:a16="http://schemas.microsoft.com/office/drawing/2014/main" id="{EB306481-6171-4FB0-A7C3-4AE05C7DA477}"/>
               </a:ext>
             </a:extLst>
           </p:cNvPr>
@@ -6838,7 +6838,7 @@
     </p:spTree>
     <p:extLst>
       <p:ext uri="{BB962C8B-B14F-4D97-AF65-F5344CB8AC3E}">
-        <p14:creationId xmlns:p14="http://schemas.microsoft.com/office/powerpoint/2010/main" val="504423062"/>
+        <p14:creationId xmlns:p14="http://schemas.microsoft.com/office/powerpoint/2010/main" val="288603465"/>
       </p:ext>
     </p:extLst>
   </p:cSld>
@@ -6869,7 +6869,7 @@
           <p:cNvPr id="41" name="">
             <a:extLst xmlns:a="http://schemas.openxmlformats.org/drawingml/2006/main">
               <a:ext uri="{FF2B5EF4-FFF2-40B4-BE49-F238E27FC236}">
-                <a16:creationId xmlns:a16="http://schemas.microsoft.com/office/drawing/2014/main" id="{3815459B-CF57-4251-A826-8CAEEEF15819}"/>
+                <a16:creationId xmlns:a16="http://schemas.microsoft.com/office/drawing/2014/main" id="{91FF1F08-F008-4785-9B55-6FAD6AC6D840}"/>
               </a:ext>
             </a:extLst>
           </p:cNvPr>
@@ -6899,7 +6899,7 @@
           <p:cNvPr id="2" name="">
             <a:extLst xmlns:a="http://schemas.openxmlformats.org/drawingml/2006/main">
               <a:ext uri="{FF2B5EF4-FFF2-40B4-BE49-F238E27FC236}">
-                <a16:creationId xmlns:a16="http://schemas.microsoft.com/office/drawing/2014/main" id="{7E5E45AB-98C8-496D-AC92-4F0C172816E1}"/>
+                <a16:creationId xmlns:a16="http://schemas.microsoft.com/office/drawing/2014/main" id="{606FA963-A8D8-4F71-8B2E-F55DB82437A1}"/>
               </a:ext>
             </a:extLst>
           </p:cNvPr>
@@ -6956,7 +6956,7 @@
           <p:cNvPr id="3" name="">
             <a:extLst xmlns:a="http://schemas.openxmlformats.org/drawingml/2006/main">
               <a:ext uri="{FF2B5EF4-FFF2-40B4-BE49-F238E27FC236}">
-                <a16:creationId xmlns:a16="http://schemas.microsoft.com/office/drawing/2014/main" id="{E19DFBD1-E4D9-42E0-9857-CA0DE2473B29}"/>
+                <a16:creationId xmlns:a16="http://schemas.microsoft.com/office/drawing/2014/main" id="{19CCA6BF-76C6-4AE8-8F69-BCF50D948CEC}"/>
               </a:ext>
             </a:extLst>
           </p:cNvPr>
@@ -6986,7 +6986,7 @@
           <p:cNvPr id="4" name="">
             <a:extLst xmlns:a="http://schemas.openxmlformats.org/drawingml/2006/main">
               <a:ext uri="{FF2B5EF4-FFF2-40B4-BE49-F238E27FC236}">
-                <a16:creationId xmlns:a16="http://schemas.microsoft.com/office/drawing/2014/main" id="{6C211A11-1DAF-4D2F-B2CB-731F648D970D}"/>
+                <a16:creationId xmlns:a16="http://schemas.microsoft.com/office/drawing/2014/main" id="{C1671335-9E4B-4137-835C-163381B0BA5E}"/>
               </a:ext>
             </a:extLst>
           </p:cNvPr>
@@ -7043,7 +7043,7 @@
           <p:cNvPr id="5" name="">
             <a:extLst xmlns:a="http://schemas.openxmlformats.org/drawingml/2006/main">
               <a:ext uri="{FF2B5EF4-FFF2-40B4-BE49-F238E27FC236}">
-                <a16:creationId xmlns:a16="http://schemas.microsoft.com/office/drawing/2014/main" id="{EB04A272-E146-4221-B3EE-B3143B5EF6A6}"/>
+                <a16:creationId xmlns:a16="http://schemas.microsoft.com/office/drawing/2014/main" id="{2F69188F-1FD1-48DD-9944-FC3A70F6534B}"/>
               </a:ext>
             </a:extLst>
           </p:cNvPr>
@@ -7100,7 +7100,7 @@
           <p:cNvPr id="6" name="">
             <a:extLst xmlns:a="http://schemas.openxmlformats.org/drawingml/2006/main">
               <a:ext uri="{FF2B5EF4-FFF2-40B4-BE49-F238E27FC236}">
-                <a16:creationId xmlns:a16="http://schemas.microsoft.com/office/drawing/2014/main" id="{CB4FDFCC-5ED9-42F6-B255-0E61FFA6A8AC}"/>
+                <a16:creationId xmlns:a16="http://schemas.microsoft.com/office/drawing/2014/main" id="{C7D567CC-257A-4BDD-98AB-E01ABA3B4B01}"/>
               </a:ext>
             </a:extLst>
           </p:cNvPr>
@@ -7157,7 +7157,7 @@
           <p:cNvPr id="7" name="">
             <a:extLst xmlns:a="http://schemas.openxmlformats.org/drawingml/2006/main">
               <a:ext uri="{FF2B5EF4-FFF2-40B4-BE49-F238E27FC236}">
-                <a16:creationId xmlns:a16="http://schemas.microsoft.com/office/drawing/2014/main" id="{6563DA24-94FE-47BF-B4D6-94C7BA8E2D53}"/>
+                <a16:creationId xmlns:a16="http://schemas.microsoft.com/office/drawing/2014/main" id="{3B117E09-F23C-46E8-A705-7136AF37F2BD}"/>
               </a:ext>
             </a:extLst>
           </p:cNvPr>
@@ -7187,7 +7187,7 @@
           <p:cNvPr id="8" name="">
             <a:extLst xmlns:a="http://schemas.openxmlformats.org/drawingml/2006/main">
               <a:ext uri="{FF2B5EF4-FFF2-40B4-BE49-F238E27FC236}">
-                <a16:creationId xmlns:a16="http://schemas.microsoft.com/office/drawing/2014/main" id="{EEC3D371-22CA-463B-8072-E891EF6087F6}"/>
+                <a16:creationId xmlns:a16="http://schemas.microsoft.com/office/drawing/2014/main" id="{A1AAC4F0-ED51-4DD2-BC1F-C23E6C52CB51}"/>
               </a:ext>
             </a:extLst>
           </p:cNvPr>
@@ -7244,7 +7244,7 @@
           <p:cNvPr id="9" name="">
             <a:extLst xmlns:a="http://schemas.openxmlformats.org/drawingml/2006/main">
               <a:ext uri="{FF2B5EF4-FFF2-40B4-BE49-F238E27FC236}">
-                <a16:creationId xmlns:a16="http://schemas.microsoft.com/office/drawing/2014/main" id="{C242A742-5936-4794-AEEC-947BB3782114}"/>
+                <a16:creationId xmlns:a16="http://schemas.microsoft.com/office/drawing/2014/main" id="{F175105E-4B59-49DF-9023-9D6E6C552682}"/>
               </a:ext>
             </a:extLst>
           </p:cNvPr>
@@ -7276,7 +7276,7 @@
           <p:cNvPr id="10" name="">
             <a:extLst xmlns:a="http://schemas.openxmlformats.org/drawingml/2006/main">
               <a:ext uri="{FF2B5EF4-FFF2-40B4-BE49-F238E27FC236}">
-                <a16:creationId xmlns:a16="http://schemas.microsoft.com/office/drawing/2014/main" id="{3B91C987-03D1-4FD6-BFD9-CF8895CF4C64}"/>
+                <a16:creationId xmlns:a16="http://schemas.microsoft.com/office/drawing/2014/main" id="{6BDC9029-3799-4DF6-B88A-BAE0BB242FB3}"/>
               </a:ext>
             </a:extLst>
           </p:cNvPr>
@@ -7333,7 +7333,7 @@
           <p:cNvPr id="11" name="">
             <a:extLst xmlns:a="http://schemas.openxmlformats.org/drawingml/2006/main">
               <a:ext uri="{FF2B5EF4-FFF2-40B4-BE49-F238E27FC236}">
-                <a16:creationId xmlns:a16="http://schemas.microsoft.com/office/drawing/2014/main" id="{F4D1EE15-1593-473A-90B3-82D52BDA4C9B}"/>
+                <a16:creationId xmlns:a16="http://schemas.microsoft.com/office/drawing/2014/main" id="{FA0D3BDA-641E-43F4-9C80-B182D4999732}"/>
               </a:ext>
             </a:extLst>
           </p:cNvPr>
@@ -7390,7 +7390,7 @@
           <p:cNvPr id="12" name="">
             <a:extLst xmlns:a="http://schemas.openxmlformats.org/drawingml/2006/main">
               <a:ext uri="{FF2B5EF4-FFF2-40B4-BE49-F238E27FC236}">
-                <a16:creationId xmlns:a16="http://schemas.microsoft.com/office/drawing/2014/main" id="{4E469951-2307-4094-BEA3-C595CE6D31F7}"/>
+                <a16:creationId xmlns:a16="http://schemas.microsoft.com/office/drawing/2014/main" id="{E517D86C-B5F0-49D6-8EFA-D955781E7C0B}"/>
               </a:ext>
             </a:extLst>
           </p:cNvPr>
@@ -7447,7 +7447,7 @@
           <p:cNvPr id="13" name="">
             <a:extLst xmlns:a="http://schemas.openxmlformats.org/drawingml/2006/main">
               <a:ext uri="{FF2B5EF4-FFF2-40B4-BE49-F238E27FC236}">
-                <a16:creationId xmlns:a16="http://schemas.microsoft.com/office/drawing/2014/main" id="{DA45FEA8-DF9D-41D9-80DD-B81B7EFF57BF}"/>
+                <a16:creationId xmlns:a16="http://schemas.microsoft.com/office/drawing/2014/main" id="{5F46BEC4-8B57-498B-9284-5CA8F9D9B326}"/>
               </a:ext>
             </a:extLst>
           </p:cNvPr>
@@ -7479,7 +7479,7 @@
           <p:cNvPr id="14" name="">
             <a:extLst xmlns:a="http://schemas.openxmlformats.org/drawingml/2006/main">
               <a:ext uri="{FF2B5EF4-FFF2-40B4-BE49-F238E27FC236}">
-                <a16:creationId xmlns:a16="http://schemas.microsoft.com/office/drawing/2014/main" id="{F7DB1C6E-3144-4B38-A0A4-33264FF29A7A}"/>
+                <a16:creationId xmlns:a16="http://schemas.microsoft.com/office/drawing/2014/main" id="{720E859E-54D7-4672-B7BA-CB3803C2D1E2}"/>
               </a:ext>
             </a:extLst>
           </p:cNvPr>
@@ -7536,7 +7536,7 @@
           <p:cNvPr id="15" name="">
             <a:extLst xmlns:a="http://schemas.openxmlformats.org/drawingml/2006/main">
               <a:ext uri="{FF2B5EF4-FFF2-40B4-BE49-F238E27FC236}">
-                <a16:creationId xmlns:a16="http://schemas.microsoft.com/office/drawing/2014/main" id="{8932742E-491D-4482-B921-C17A74DB0866}"/>
+                <a16:creationId xmlns:a16="http://schemas.microsoft.com/office/drawing/2014/main" id="{8BE11C9A-1772-4E80-8CB0-767EFA342EC7}"/>
               </a:ext>
             </a:extLst>
           </p:cNvPr>
@@ -7593,7 +7593,7 @@
           <p:cNvPr id="16" name="">
             <a:extLst xmlns:a="http://schemas.openxmlformats.org/drawingml/2006/main">
               <a:ext uri="{FF2B5EF4-FFF2-40B4-BE49-F238E27FC236}">
-                <a16:creationId xmlns:a16="http://schemas.microsoft.com/office/drawing/2014/main" id="{09E65209-ABB2-4A20-9810-408949539F54}"/>
+                <a16:creationId xmlns:a16="http://schemas.microsoft.com/office/drawing/2014/main" id="{9CFC009E-47C6-40F5-80C7-584D1D137162}"/>
               </a:ext>
             </a:extLst>
           </p:cNvPr>
@@ -7650,7 +7650,7 @@
           <p:cNvPr id="17" name="">
             <a:extLst xmlns:a="http://schemas.openxmlformats.org/drawingml/2006/main">
               <a:ext uri="{FF2B5EF4-FFF2-40B4-BE49-F238E27FC236}">
-                <a16:creationId xmlns:a16="http://schemas.microsoft.com/office/drawing/2014/main" id="{2913204F-D0B5-44BC-8BED-D99F65680A18}"/>
+                <a16:creationId xmlns:a16="http://schemas.microsoft.com/office/drawing/2014/main" id="{89D8904B-A5EC-435E-BE38-ECA294CF0F40}"/>
               </a:ext>
             </a:extLst>
           </p:cNvPr>
@@ -7682,7 +7682,7 @@
           <p:cNvPr id="18" name="">
             <a:extLst xmlns:a="http://schemas.openxmlformats.org/drawingml/2006/main">
               <a:ext uri="{FF2B5EF4-FFF2-40B4-BE49-F238E27FC236}">
-                <a16:creationId xmlns:a16="http://schemas.microsoft.com/office/drawing/2014/main" id="{A7E69037-B54F-48E9-91B6-4DCFDE272938}"/>
+                <a16:creationId xmlns:a16="http://schemas.microsoft.com/office/drawing/2014/main" id="{8A5C992A-696E-4D57-8A13-CA04A35EBEB9}"/>
               </a:ext>
             </a:extLst>
           </p:cNvPr>
@@ -7739,7 +7739,7 @@
           <p:cNvPr id="19" name="">
             <a:extLst xmlns:a="http://schemas.openxmlformats.org/drawingml/2006/main">
               <a:ext uri="{FF2B5EF4-FFF2-40B4-BE49-F238E27FC236}">
-                <a16:creationId xmlns:a16="http://schemas.microsoft.com/office/drawing/2014/main" id="{3D04F266-764D-470F-BB4C-2276891EA03A}"/>
+                <a16:creationId xmlns:a16="http://schemas.microsoft.com/office/drawing/2014/main" id="{E857F763-1E66-4BB5-BAF6-37277BE8F0F6}"/>
               </a:ext>
             </a:extLst>
           </p:cNvPr>
@@ -7796,7 +7796,7 @@
           <p:cNvPr id="20" name="">
             <a:extLst xmlns:a="http://schemas.openxmlformats.org/drawingml/2006/main">
               <a:ext uri="{FF2B5EF4-FFF2-40B4-BE49-F238E27FC236}">
-                <a16:creationId xmlns:a16="http://schemas.microsoft.com/office/drawing/2014/main" id="{26B981ED-C597-4841-BDFD-ADAC23CF3CAA}"/>
+                <a16:creationId xmlns:a16="http://schemas.microsoft.com/office/drawing/2014/main" id="{B9897190-FC2D-45A9-B0CF-B9F3EDAE6A1F}"/>
               </a:ext>
             </a:extLst>
           </p:cNvPr>
@@ -7853,7 +7853,7 @@
           <p:cNvPr id="21" name="">
             <a:extLst xmlns:a="http://schemas.openxmlformats.org/drawingml/2006/main">
               <a:ext uri="{FF2B5EF4-FFF2-40B4-BE49-F238E27FC236}">
-                <a16:creationId xmlns:a16="http://schemas.microsoft.com/office/drawing/2014/main" id="{C0879241-C278-4831-8C0E-D1D1DB76830B}"/>
+                <a16:creationId xmlns:a16="http://schemas.microsoft.com/office/drawing/2014/main" id="{6E25ABDC-9769-41F5-83E9-95DFC7BAB01D}"/>
               </a:ext>
             </a:extLst>
           </p:cNvPr>
@@ -7885,7 +7885,7 @@
           <p:cNvPr id="22" name="">
             <a:extLst xmlns:a="http://schemas.openxmlformats.org/drawingml/2006/main">
               <a:ext uri="{FF2B5EF4-FFF2-40B4-BE49-F238E27FC236}">
-                <a16:creationId xmlns:a16="http://schemas.microsoft.com/office/drawing/2014/main" id="{5E26CB9D-D464-4CFD-BE02-5F98652C2067}"/>
+                <a16:creationId xmlns:a16="http://schemas.microsoft.com/office/drawing/2014/main" id="{BE540E16-7220-4A50-9E55-5A1BFF01FC02}"/>
               </a:ext>
             </a:extLst>
           </p:cNvPr>
@@ -7942,7 +7942,7 @@
           <p:cNvPr id="23" name="">
             <a:extLst xmlns:a="http://schemas.openxmlformats.org/drawingml/2006/main">
               <a:ext uri="{FF2B5EF4-FFF2-40B4-BE49-F238E27FC236}">
-                <a16:creationId xmlns:a16="http://schemas.microsoft.com/office/drawing/2014/main" id="{E3B1B416-5F06-4766-B162-FFC9FAA96581}"/>
+                <a16:creationId xmlns:a16="http://schemas.microsoft.com/office/drawing/2014/main" id="{7052203D-D54C-46DE-AB50-8D655AFEC589}"/>
               </a:ext>
             </a:extLst>
           </p:cNvPr>
@@ -7999,7 +7999,7 @@
           <p:cNvPr id="24" name="">
             <a:extLst xmlns:a="http://schemas.openxmlformats.org/drawingml/2006/main">
               <a:ext uri="{FF2B5EF4-FFF2-40B4-BE49-F238E27FC236}">
-                <a16:creationId xmlns:a16="http://schemas.microsoft.com/office/drawing/2014/main" id="{54AB7B83-5D85-418D-9B61-B8B672AB4D71}"/>
+                <a16:creationId xmlns:a16="http://schemas.microsoft.com/office/drawing/2014/main" id="{52000C6D-3881-420A-8E8E-435D53B18DD9}"/>
               </a:ext>
             </a:extLst>
           </p:cNvPr>
@@ -8056,7 +8056,7 @@
           <p:cNvPr id="25" name="">
             <a:extLst xmlns:a="http://schemas.openxmlformats.org/drawingml/2006/main">
               <a:ext uri="{FF2B5EF4-FFF2-40B4-BE49-F238E27FC236}">
-                <a16:creationId xmlns:a16="http://schemas.microsoft.com/office/drawing/2014/main" id="{3873D89A-91D8-42C0-81F5-9119CEAF9CE7}"/>
+                <a16:creationId xmlns:a16="http://schemas.microsoft.com/office/drawing/2014/main" id="{338A4892-644C-469E-A98C-6D5592CE37A3}"/>
               </a:ext>
             </a:extLst>
           </p:cNvPr>
@@ -8088,7 +8088,7 @@
           <p:cNvPr id="26" name="">
             <a:extLst xmlns:a="http://schemas.openxmlformats.org/drawingml/2006/main">
               <a:ext uri="{FF2B5EF4-FFF2-40B4-BE49-F238E27FC236}">
-                <a16:creationId xmlns:a16="http://schemas.microsoft.com/office/drawing/2014/main" id="{1A70DDB9-D5BC-4256-93BE-44F029BCD5C7}"/>
+                <a16:creationId xmlns:a16="http://schemas.microsoft.com/office/drawing/2014/main" id="{8731F650-4C87-4FEB-8A6B-040D798B42DE}"/>
               </a:ext>
             </a:extLst>
           </p:cNvPr>
@@ -8145,7 +8145,7 @@
           <p:cNvPr id="27" name="">
             <a:extLst xmlns:a="http://schemas.openxmlformats.org/drawingml/2006/main">
               <a:ext uri="{FF2B5EF4-FFF2-40B4-BE49-F238E27FC236}">
-                <a16:creationId xmlns:a16="http://schemas.microsoft.com/office/drawing/2014/main" id="{3D2E539C-4071-4924-9667-F2C65210C5A7}"/>
+                <a16:creationId xmlns:a16="http://schemas.microsoft.com/office/drawing/2014/main" id="{8ED966BF-A260-4CC0-8847-468796354179}"/>
               </a:ext>
             </a:extLst>
           </p:cNvPr>
@@ -8202,7 +8202,7 @@
           <p:cNvPr id="28" name="">
             <a:extLst xmlns:a="http://schemas.openxmlformats.org/drawingml/2006/main">
               <a:ext uri="{FF2B5EF4-FFF2-40B4-BE49-F238E27FC236}">
-                <a16:creationId xmlns:a16="http://schemas.microsoft.com/office/drawing/2014/main" id="{C69BEECF-A08C-4B73-A69C-9EB0D992B3E7}"/>
+                <a16:creationId xmlns:a16="http://schemas.microsoft.com/office/drawing/2014/main" id="{683F9B4B-C6ED-44D9-ACFA-E0E3A33C5FE9}"/>
               </a:ext>
             </a:extLst>
           </p:cNvPr>
@@ -8259,7 +8259,7 @@
           <p:cNvPr id="29" name="">
             <a:extLst xmlns:a="http://schemas.openxmlformats.org/drawingml/2006/main">
               <a:ext uri="{FF2B5EF4-FFF2-40B4-BE49-F238E27FC236}">
-                <a16:creationId xmlns:a16="http://schemas.microsoft.com/office/drawing/2014/main" id="{150CF921-9C7A-4EFE-904E-2D0B5533898A}"/>
+                <a16:creationId xmlns:a16="http://schemas.microsoft.com/office/drawing/2014/main" id="{8286CE71-9D51-4EC7-BE7A-3D505887CD29}"/>
               </a:ext>
             </a:extLst>
           </p:cNvPr>
@@ -8316,7 +8316,7 @@
           <p:cNvPr id="30" name="">
             <a:extLst xmlns:a="http://schemas.openxmlformats.org/drawingml/2006/main">
               <a:ext uri="{FF2B5EF4-FFF2-40B4-BE49-F238E27FC236}">
-                <a16:creationId xmlns:a16="http://schemas.microsoft.com/office/drawing/2014/main" id="{21C628B7-80B9-4881-8ED5-1C5811DA8323}"/>
+                <a16:creationId xmlns:a16="http://schemas.microsoft.com/office/drawing/2014/main" id="{442C8948-B011-444C-B456-1FEFE699EC28}"/>
               </a:ext>
             </a:extLst>
           </p:cNvPr>
@@ -8373,7 +8373,7 @@
           <p:cNvPr id="31" name="">
             <a:extLst xmlns:a="http://schemas.openxmlformats.org/drawingml/2006/main">
               <a:ext uri="{FF2B5EF4-FFF2-40B4-BE49-F238E27FC236}">
-                <a16:creationId xmlns:a16="http://schemas.microsoft.com/office/drawing/2014/main" id="{A20390C4-7041-4DAC-8F54-CC6097EB08F8}"/>
+                <a16:creationId xmlns:a16="http://schemas.microsoft.com/office/drawing/2014/main" id="{391C62A5-E354-44F1-84BC-8F1EF742A7FA}"/>
               </a:ext>
             </a:extLst>
           </p:cNvPr>
@@ -8430,7 +8430,7 @@
           <p:cNvPr id="32" name="">
             <a:extLst xmlns:a="http://schemas.openxmlformats.org/drawingml/2006/main">
               <a:ext uri="{FF2B5EF4-FFF2-40B4-BE49-F238E27FC236}">
-                <a16:creationId xmlns:a16="http://schemas.microsoft.com/office/drawing/2014/main" id="{758F6AFF-1DE0-4020-A25D-45731B4E005B}"/>
+                <a16:creationId xmlns:a16="http://schemas.microsoft.com/office/drawing/2014/main" id="{5314AD38-A63C-42AE-B8E0-563C1B378178}"/>
               </a:ext>
             </a:extLst>
           </p:cNvPr>
@@ -8487,7 +8487,7 @@
           <p:cNvPr id="33" name="">
             <a:extLst xmlns:a="http://schemas.openxmlformats.org/drawingml/2006/main">
               <a:ext uri="{FF2B5EF4-FFF2-40B4-BE49-F238E27FC236}">
-                <a16:creationId xmlns:a16="http://schemas.microsoft.com/office/drawing/2014/main" id="{34B7A09B-A697-415A-8EDA-DEAB8B108C77}"/>
+                <a16:creationId xmlns:a16="http://schemas.microsoft.com/office/drawing/2014/main" id="{E7337F21-BB32-41D1-9AE2-9A0B22611083}"/>
               </a:ext>
             </a:extLst>
           </p:cNvPr>
@@ -8544,7 +8544,7 @@
           <p:cNvPr id="34" name="">
             <a:extLst xmlns:a="http://schemas.openxmlformats.org/drawingml/2006/main">
               <a:ext uri="{FF2B5EF4-FFF2-40B4-BE49-F238E27FC236}">
-                <a16:creationId xmlns:a16="http://schemas.microsoft.com/office/drawing/2014/main" id="{27D945B6-91D0-4D6F-8DAF-33E05F52BF69}"/>
+                <a16:creationId xmlns:a16="http://schemas.microsoft.com/office/drawing/2014/main" id="{223D0D2D-A380-4E8B-A8C9-7A9E48599A6A}"/>
               </a:ext>
             </a:extLst>
           </p:cNvPr>
@@ -8601,7 +8601,7 @@
           <p:cNvPr id="35" name="">
             <a:extLst xmlns:a="http://schemas.openxmlformats.org/drawingml/2006/main">
               <a:ext uri="{FF2B5EF4-FFF2-40B4-BE49-F238E27FC236}">
-                <a16:creationId xmlns:a16="http://schemas.microsoft.com/office/drawing/2014/main" id="{56D2897B-6F21-4537-A4B5-F6B38D0CB8E2}"/>
+                <a16:creationId xmlns:a16="http://schemas.microsoft.com/office/drawing/2014/main" id="{77A3F1EA-135E-4D4B-A97A-36F76DFCB0A6}"/>
               </a:ext>
             </a:extLst>
           </p:cNvPr>
@@ -8658,7 +8658,7 @@
           <p:cNvPr id="36" name="">
             <a:extLst xmlns:a="http://schemas.openxmlformats.org/drawingml/2006/main">
               <a:ext uri="{FF2B5EF4-FFF2-40B4-BE49-F238E27FC236}">
-                <a16:creationId xmlns:a16="http://schemas.microsoft.com/office/drawing/2014/main" id="{3006ABBE-AD8F-494D-8B86-01D4BDEA2A75}"/>
+                <a16:creationId xmlns:a16="http://schemas.microsoft.com/office/drawing/2014/main" id="{6A3A51C0-934F-41F9-8AE9-2DD280C9EEAA}"/>
               </a:ext>
             </a:extLst>
           </p:cNvPr>
@@ -8705,7 +8705,7 @@
                 <a:ea typeface="Malgun Gothic"/>
                 <a:cs typeface="Malgun Gothic"/>
               </a:rPr>
-              <a:t>그 1건</a:t>
+              <a:t>실제 Gmail 재현</a:t>
             </a:r>
           </a:p>
         </p:txBody>
@@ -8715,7 +8715,7 @@
           <p:cNvPr id="37" name="">
             <a:extLst xmlns:a="http://schemas.openxmlformats.org/drawingml/2006/main">
               <a:ext uri="{FF2B5EF4-FFF2-40B4-BE49-F238E27FC236}">
-                <a16:creationId xmlns:a16="http://schemas.microsoft.com/office/drawing/2014/main" id="{7CDA2142-BA61-412C-BAFA-42F668878E24}"/>
+                <a16:creationId xmlns:a16="http://schemas.microsoft.com/office/drawing/2014/main" id="{554A3D6F-62DF-4209-89E0-910D018548CF}"/>
               </a:ext>
             </a:extLst>
           </p:cNvPr>
@@ -8762,7 +8762,7 @@
                 <a:ea typeface="Malgun Gothic"/>
                 <a:cs typeface="Malgun Gothic"/>
               </a:rPr>
-              <a:t>Off는 한쪽에 자동 연결</a:t>
+              <a:t>새 메일 3통 발송</a:t>
             </a:r>
           </a:p>
         </p:txBody>
@@ -8772,7 +8772,7 @@
           <p:cNvPr id="38" name="">
             <a:extLst xmlns:a="http://schemas.openxmlformats.org/drawingml/2006/main">
               <a:ext uri="{FF2B5EF4-FFF2-40B4-BE49-F238E27FC236}">
-                <a16:creationId xmlns:a16="http://schemas.microsoft.com/office/drawing/2014/main" id="{3F1A8D21-314C-49C2-AC43-5A14FB2E4356}"/>
+                <a16:creationId xmlns:a16="http://schemas.microsoft.com/office/drawing/2014/main" id="{171F130A-1057-42C8-B1B6-8882CFCC7D0A}"/>
               </a:ext>
             </a:extLst>
           </p:cNvPr>
@@ -8819,7 +8819,7 @@
                 <a:ea typeface="Malgun Gothic"/>
                 <a:cs typeface="Malgun Gothic"/>
               </a:rPr>
-              <a:t>On은 지지도 0.55 대 0.45로 사용자 확인</a:t>
+              <a:t>같은 경로로 ASK_USER 확인</a:t>
             </a:r>
           </a:p>
         </p:txBody>
@@ -8829,7 +8829,7 @@
           <p:cNvPr id="39" name="">
             <a:extLst xmlns:a="http://schemas.openxmlformats.org/drawingml/2006/main">
               <a:ext uri="{FF2B5EF4-FFF2-40B4-BE49-F238E27FC236}">
-                <a16:creationId xmlns:a16="http://schemas.microsoft.com/office/drawing/2014/main" id="{1374DD00-8278-4682-8CA2-9AF108C58CAA}"/>
+                <a16:creationId xmlns:a16="http://schemas.microsoft.com/office/drawing/2014/main" id="{E01A1273-AC1F-401A-9118-3C0F8A957B73}"/>
               </a:ext>
             </a:extLst>
           </p:cNvPr>
@@ -8886,7 +8886,7 @@
           <p:cNvPr id="40" name="">
             <a:extLst xmlns:a="http://schemas.openxmlformats.org/drawingml/2006/main">
               <a:ext uri="{FF2B5EF4-FFF2-40B4-BE49-F238E27FC236}">
-                <a16:creationId xmlns:a16="http://schemas.microsoft.com/office/drawing/2014/main" id="{D6491A56-D12B-4C06-A52A-57642505DF23}"/>
+                <a16:creationId xmlns:a16="http://schemas.microsoft.com/office/drawing/2014/main" id="{65F0A6AE-85D0-4CF8-BFFB-9A58B36214DC}"/>
               </a:ext>
             </a:extLst>
           </p:cNvPr>
@@ -8941,7 +8941,7 @@
     </p:spTree>
     <p:extLst>
       <p:ext uri="{BB962C8B-B14F-4D97-AF65-F5344CB8AC3E}">
-        <p14:creationId xmlns:p14="http://schemas.microsoft.com/office/powerpoint/2010/main" val="1254836365"/>
+        <p14:creationId xmlns:p14="http://schemas.microsoft.com/office/powerpoint/2010/main" val="272195111"/>
       </p:ext>
     </p:extLst>
   </p:cSld>

--- a/Docs/PRESENTATION/2. 최종/09285_백준현_AI_Master_최종발표자료_v8.pptx
+++ b/Docs/PRESENTATION/2. 최종/09285_백준현_AI_Master_최종발표자료_v8.pptx
@@ -2,16 +2,16 @@
 <file path=ppt/presentation.xml><?xml version="1.0" encoding="utf-8"?>
 <p:presentation xmlns:p="http://schemas.openxmlformats.org/presentationml/2006/main">
   <p:sldMasterIdLst>
-    <p:sldMasterId xmlns:r="http://schemas.openxmlformats.org/officeDocument/2006/relationships" id="2147483648" r:id="R2a71922ec204473a"/>
+    <p:sldMasterId xmlns:r="http://schemas.openxmlformats.org/officeDocument/2006/relationships" id="2147483648" r:id="R7453c52429e54dc4"/>
   </p:sldMasterIdLst>
   <p:notesMasterIdLst>
-    <p:notesMasterId xmlns:r="http://schemas.openxmlformats.org/officeDocument/2006/relationships" r:id="Rea0e1c29e7584e4e"/>
+    <p:notesMasterId xmlns:r="http://schemas.openxmlformats.org/officeDocument/2006/relationships" r:id="Rd40260ce55ed45a5"/>
   </p:notesMasterIdLst>
   <p:sldIdLst>
-    <p:sldId xmlns:r="http://schemas.openxmlformats.org/officeDocument/2006/relationships" id="256" r:id="R3f7c8f7213f04f7b"/>
-    <p:sldId xmlns:r="http://schemas.openxmlformats.org/officeDocument/2006/relationships" id="257" r:id="R3417ac2bdc71405d"/>
-    <p:sldId xmlns:r="http://schemas.openxmlformats.org/officeDocument/2006/relationships" id="258" r:id="R1de59b96e48c435b"/>
-    <p:sldId xmlns:r="http://schemas.openxmlformats.org/officeDocument/2006/relationships" id="259" r:id="R8ace2014f4ab45bd"/>
+    <p:sldId xmlns:r="http://schemas.openxmlformats.org/officeDocument/2006/relationships" id="256" r:id="R38fbd7bdb0c04fc0"/>
+    <p:sldId xmlns:r="http://schemas.openxmlformats.org/officeDocument/2006/relationships" id="257" r:id="R18f2afb0e63a4d58"/>
+    <p:sldId xmlns:r="http://schemas.openxmlformats.org/officeDocument/2006/relationships" id="258" r:id="Rd88722b38483464f"/>
+    <p:sldId xmlns:r="http://schemas.openxmlformats.org/officeDocument/2006/relationships" id="259" r:id="Re926dc090984455d"/>
   </p:sldIdLst>
   <p:sldSz cx="12192000" cy="6858000"/>
   <p:notesSz cx="6858000" cy="9144000"/>
@@ -800,7 +800,7 @@
           </a:p>
           <a:p xmlns:a="http://schemas.openxmlformats.org/drawingml/2006/main">
             <a:r>
-              <a:t>효과는 같은 코드에서 기능만 껐다 켜서 측정했습니다. 기존 열다섯 개 Case는 양쪽이 똑같이 15/15, Action 28/28이고 소요시간만 약 삼십 퍼센트 늘었습니다. 숙고가 실제 발동하는 전용 네 개 Case에서는 켠 쪽이 4/4, 끈 쪽이 3/4였습니다. 차이는 한 건입니다. 요청자가 같고 대상 시스템만 다른 유사 업무가 둘 있을 때, 단일 결론 경로는 둘 중 하나에 그대로 연결했고, 두 단계 경로는 지지도가 갈리지 않아 재검색 후 사용자 확인으로 닫았습니다. 성능이 올라갔다는 주장이 아니라 잘못된 업무에 조용히 붙던 경우가 사람에게 넘어갔다는 뜻입니다.</a:t>
+              <a:t>효과는 같은 코드에서 기능만 껐다 켜서 측정했습니다. 기존 열다섯 개 Case는 양쪽이 똑같이 15/15, Action 28/28이고 소요시간만 약 삼십 퍼센트 늘었습니다. 숙고가 실제 발동하는 전용 네 개 Case는 출력이 회차마다 달라져서 각 설정을 세 번씩 돌렸습니다. 통과 수는 켠 쪽이 삼, 사, 삼이고 끈 쪽이 삼, 이, 삼입니다. 그래서 한 회차 숫자를 결론으로 쓰지 않았습니다. 세 번 모두 재현되는 차이는 한 건입니다. 요청자가 같고 대상 시스템만 다른 유사 업무가 둘 있을 때, 단일 결론 경로는 세 번 모두 둘 중 하나에 그대로 연결했고, 두 단계 경로는 세 번 모두 사용자 확인으로 닫았습니다. 제가 개선했다고 말하는 범위는 이 한 건입니다.</a:t>
             </a:r>
           </a:p>
           <a:p xmlns:a="http://schemas.openxmlformats.org/drawingml/2006/main">
@@ -820,7 +820,7 @@
           </a:p>
           <a:p xmlns:a="http://schemas.openxmlformats.org/drawingml/2006/main">
             <a:r>
-              <a:t>수치를 읽을 때 주의할 점입니다. 화면의 신뢰도와 지지도는 모델의 자기보고 값이지 검증된 정답 확률이 아닙니다. 그래서 값이 높아도 중요 변경은 자동 확정하지 않습니다. 같은 실행에서 Intent 진단 정확도는 13/15, 86.7퍼센트로 100퍼센트가 아니었고 이 수치도 함께 공개합니다.</a:t>
+              <a:t>반대로 개선되지 않은 것도 말씀드리겠습니다. 검색 결과 안에 명령을 심어 둔 Case는 두 설정 모두에서 흔들렸습니다. 켠 쪽이 세 번 중 한 번, 끈 쪽이 세 번 중 두 번 통과했습니다. 실패한 회차는 모두 무시로 끝났는데, 심어진 명령을 실행하지 않는다는 점에서는 안전하지만 저희 기준은 사람에게 넘기는 것이라 실패로 셌습니다. 이 변동은 숙고의 효과로도 부작용으로도 말하지 않습니다. 화면의 신뢰도와 지지도 역시 모델의 자기보고 값이지 검증된 정답 확률이 아닙니다.</a:t>
             </a:r>
           </a:p>
           <a:p xmlns:a="http://schemas.openxmlformats.org/drawingml/2006/main">
@@ -933,7 +933,7 @@
   </p:cSld>
   <p:clrMap bg1="lt1" tx1="dk1" bg2="lt2" tx2="dk2" accent1="accent1" accent2="accent2" accent3="accent3" accent4="accent4" accent5="accent5" accent6="accent6" hlink="hlink" folHlink="folHlink"/>
   <p:sldLayoutIdLst>
-    <p:sldLayoutId xmlns:r="http://schemas.openxmlformats.org/officeDocument/2006/relationships" id="2147483649" r:id="R720b743c4d314160"/>
+    <p:sldLayoutId xmlns:r="http://schemas.openxmlformats.org/officeDocument/2006/relationships" id="2147483649" r:id="Re3415ed155eb4162"/>
   </p:sldLayoutIdLst>
   <p:txStyles>
     <p:titleStyle>
@@ -1484,7 +1484,7 @@
           <p:cNvPr id="9" name="">
             <a:extLst xmlns:a="http://schemas.openxmlformats.org/drawingml/2006/main">
               <a:ext uri="{FF2B5EF4-FFF2-40B4-BE49-F238E27FC236}">
-                <a16:creationId xmlns:a16="http://schemas.microsoft.com/office/drawing/2014/main" id="{EFC8F352-DBAB-44DC-9EC4-47963E076916}"/>
+                <a16:creationId xmlns:a16="http://schemas.microsoft.com/office/drawing/2014/main" id="{11EA757A-CDC1-494D-B4D1-AA18D6F5C488}"/>
               </a:ext>
             </a:extLst>
           </p:cNvPr>
@@ -1514,7 +1514,7 @@
           <p:cNvPr id="2" name="">
             <a:extLst xmlns:a="http://schemas.openxmlformats.org/drawingml/2006/main">
               <a:ext uri="{FF2B5EF4-FFF2-40B4-BE49-F238E27FC236}">
-                <a16:creationId xmlns:a16="http://schemas.microsoft.com/office/drawing/2014/main" id="{0B806969-6FC1-4728-8125-C21B58D3DF8F}"/>
+                <a16:creationId xmlns:a16="http://schemas.microsoft.com/office/drawing/2014/main" id="{4BB15AA1-AE7C-42F1-B4E9-A29C3C452659}"/>
               </a:ext>
             </a:extLst>
           </p:cNvPr>
@@ -1571,7 +1571,7 @@
           <p:cNvPr id="3" name="">
             <a:extLst xmlns:a="http://schemas.openxmlformats.org/drawingml/2006/main">
               <a:ext uri="{FF2B5EF4-FFF2-40B4-BE49-F238E27FC236}">
-                <a16:creationId xmlns:a16="http://schemas.microsoft.com/office/drawing/2014/main" id="{773E8115-BE31-4970-8A56-CCFC4765A8F6}"/>
+                <a16:creationId xmlns:a16="http://schemas.microsoft.com/office/drawing/2014/main" id="{6775212E-1F47-455E-B73C-7F2DBA7E9D33}"/>
               </a:ext>
             </a:extLst>
           </p:cNvPr>
@@ -1628,7 +1628,7 @@
           <p:cNvPr id="4" name="">
             <a:extLst xmlns:a="http://schemas.openxmlformats.org/drawingml/2006/main">
               <a:ext uri="{FF2B5EF4-FFF2-40B4-BE49-F238E27FC236}">
-                <a16:creationId xmlns:a16="http://schemas.microsoft.com/office/drawing/2014/main" id="{F449C9C5-14E9-4A9F-9C68-C7944A4B4326}"/>
+                <a16:creationId xmlns:a16="http://schemas.microsoft.com/office/drawing/2014/main" id="{9B933E85-09EF-4F4E-8D64-B37F61C935F5}"/>
               </a:ext>
             </a:extLst>
           </p:cNvPr>
@@ -1685,7 +1685,7 @@
           <p:cNvPr id="5" name="">
             <a:extLst xmlns:a="http://schemas.openxmlformats.org/drawingml/2006/main">
               <a:ext uri="{FF2B5EF4-FFF2-40B4-BE49-F238E27FC236}">
-                <a16:creationId xmlns:a16="http://schemas.microsoft.com/office/drawing/2014/main" id="{DADE25B2-9712-42CB-A79C-D5144FEB603B}"/>
+                <a16:creationId xmlns:a16="http://schemas.microsoft.com/office/drawing/2014/main" id="{BB35C80E-B5F5-4DC1-85A0-DA9098FE8EB5}"/>
               </a:ext>
             </a:extLst>
           </p:cNvPr>
@@ -1715,7 +1715,7 @@
           <p:cNvPr id="6" name="">
             <a:extLst xmlns:a="http://schemas.openxmlformats.org/drawingml/2006/main">
               <a:ext uri="{FF2B5EF4-FFF2-40B4-BE49-F238E27FC236}">
-                <a16:creationId xmlns:a16="http://schemas.microsoft.com/office/drawing/2014/main" id="{418CEB92-AD68-4269-81D1-BC2884F700A2}"/>
+                <a16:creationId xmlns:a16="http://schemas.microsoft.com/office/drawing/2014/main" id="{A2279CDB-C511-42B8-B863-D90B3A5B418E}"/>
               </a:ext>
             </a:extLst>
           </p:cNvPr>
@@ -1772,7 +1772,7 @@
           <p:cNvPr id="7" name="">
             <a:extLst xmlns:a="http://schemas.openxmlformats.org/drawingml/2006/main">
               <a:ext uri="{FF2B5EF4-FFF2-40B4-BE49-F238E27FC236}">
-                <a16:creationId xmlns:a16="http://schemas.microsoft.com/office/drawing/2014/main" id="{2078F427-6E5D-4E83-8ACA-75E3C9564848}"/>
+                <a16:creationId xmlns:a16="http://schemas.microsoft.com/office/drawing/2014/main" id="{F7392FF6-7F77-4683-9161-A8BE5B96257F}"/>
               </a:ext>
             </a:extLst>
           </p:cNvPr>
@@ -1829,7 +1829,7 @@
           <p:cNvPr id="8" name="">
             <a:extLst xmlns:a="http://schemas.openxmlformats.org/drawingml/2006/main">
               <a:ext uri="{FF2B5EF4-FFF2-40B4-BE49-F238E27FC236}">
-                <a16:creationId xmlns:a16="http://schemas.microsoft.com/office/drawing/2014/main" id="{AA795D95-0B37-479F-8777-1D9FC446B8EA}"/>
+                <a16:creationId xmlns:a16="http://schemas.microsoft.com/office/drawing/2014/main" id="{D3AC7868-6CC4-49C4-A6A5-F9CB0FB7EF34}"/>
               </a:ext>
             </a:extLst>
           </p:cNvPr>
@@ -1884,7 +1884,7 @@
     </p:spTree>
     <p:extLst>
       <p:ext uri="{BB962C8B-B14F-4D97-AF65-F5344CB8AC3E}">
-        <p14:creationId xmlns:p14="http://schemas.microsoft.com/office/powerpoint/2010/main" val="550010036"/>
+        <p14:creationId xmlns:p14="http://schemas.microsoft.com/office/powerpoint/2010/main" val="1467505580"/>
       </p:ext>
     </p:extLst>
   </p:cSld>
@@ -1915,7 +1915,7 @@
           <p:cNvPr id="45" name="">
             <a:extLst xmlns:a="http://schemas.openxmlformats.org/drawingml/2006/main">
               <a:ext uri="{FF2B5EF4-FFF2-40B4-BE49-F238E27FC236}">
-                <a16:creationId xmlns:a16="http://schemas.microsoft.com/office/drawing/2014/main" id="{466B8E65-DF6A-43D7-BE0A-3777B2F90C12}"/>
+                <a16:creationId xmlns:a16="http://schemas.microsoft.com/office/drawing/2014/main" id="{117E10D1-AF8C-40F5-9A51-AC6FF99273FD}"/>
               </a:ext>
             </a:extLst>
           </p:cNvPr>
@@ -1945,7 +1945,7 @@
           <p:cNvPr id="2" name="">
             <a:extLst xmlns:a="http://schemas.openxmlformats.org/drawingml/2006/main">
               <a:ext uri="{FF2B5EF4-FFF2-40B4-BE49-F238E27FC236}">
-                <a16:creationId xmlns:a16="http://schemas.microsoft.com/office/drawing/2014/main" id="{2C5247B1-1B82-42B7-B914-29021BB094F9}"/>
+                <a16:creationId xmlns:a16="http://schemas.microsoft.com/office/drawing/2014/main" id="{1A4B81EA-56D4-4A3A-94C1-772B372E9610}"/>
               </a:ext>
             </a:extLst>
           </p:cNvPr>
@@ -2002,7 +2002,7 @@
           <p:cNvPr id="3" name="">
             <a:extLst xmlns:a="http://schemas.openxmlformats.org/drawingml/2006/main">
               <a:ext uri="{FF2B5EF4-FFF2-40B4-BE49-F238E27FC236}">
-                <a16:creationId xmlns:a16="http://schemas.microsoft.com/office/drawing/2014/main" id="{AC9F1720-5BB6-4666-8F42-E182F2A2E2F9}"/>
+                <a16:creationId xmlns:a16="http://schemas.microsoft.com/office/drawing/2014/main" id="{B274C2E7-B8F2-49BC-A460-E1803EB1A3B8}"/>
               </a:ext>
             </a:extLst>
           </p:cNvPr>
@@ -2032,7 +2032,7 @@
           <p:cNvPr id="4" name="">
             <a:extLst xmlns:a="http://schemas.openxmlformats.org/drawingml/2006/main">
               <a:ext uri="{FF2B5EF4-FFF2-40B4-BE49-F238E27FC236}">
-                <a16:creationId xmlns:a16="http://schemas.microsoft.com/office/drawing/2014/main" id="{C1F7EE13-3267-4BE1-A7FA-5BD32EB09895}"/>
+                <a16:creationId xmlns:a16="http://schemas.microsoft.com/office/drawing/2014/main" id="{79D713CE-A7DA-4637-B4D3-B39535BD5EB3}"/>
               </a:ext>
             </a:extLst>
           </p:cNvPr>
@@ -2089,7 +2089,7 @@
           <p:cNvPr id="5" name="">
             <a:extLst xmlns:a="http://schemas.openxmlformats.org/drawingml/2006/main">
               <a:ext uri="{FF2B5EF4-FFF2-40B4-BE49-F238E27FC236}">
-                <a16:creationId xmlns:a16="http://schemas.microsoft.com/office/drawing/2014/main" id="{4F35DD48-53BA-4CEA-BFAC-B194F102F955}"/>
+                <a16:creationId xmlns:a16="http://schemas.microsoft.com/office/drawing/2014/main" id="{31BB9726-23B4-4F88-9325-457326FEF18E}"/>
               </a:ext>
             </a:extLst>
           </p:cNvPr>
@@ -2146,7 +2146,7 @@
           <p:cNvPr id="6" name="">
             <a:extLst xmlns:a="http://schemas.openxmlformats.org/drawingml/2006/main">
               <a:ext uri="{FF2B5EF4-FFF2-40B4-BE49-F238E27FC236}">
-                <a16:creationId xmlns:a16="http://schemas.microsoft.com/office/drawing/2014/main" id="{E6C914CA-F164-4F01-B09F-90C931055BDD}"/>
+                <a16:creationId xmlns:a16="http://schemas.microsoft.com/office/drawing/2014/main" id="{8AE2D544-9C30-4407-87D3-427E9ABC4911}"/>
               </a:ext>
             </a:extLst>
           </p:cNvPr>
@@ -2203,7 +2203,7 @@
           <p:cNvPr id="7" name="">
             <a:extLst xmlns:a="http://schemas.openxmlformats.org/drawingml/2006/main">
               <a:ext uri="{FF2B5EF4-FFF2-40B4-BE49-F238E27FC236}">
-                <a16:creationId xmlns:a16="http://schemas.microsoft.com/office/drawing/2014/main" id="{E590AAE8-469E-4A79-B970-E0D2849BF8D2}"/>
+                <a16:creationId xmlns:a16="http://schemas.microsoft.com/office/drawing/2014/main" id="{9F53F407-0872-434D-B40C-271CEA20DC9F}"/>
               </a:ext>
             </a:extLst>
           </p:cNvPr>
@@ -2237,7 +2237,7 @@
           <p:cNvPr id="8" name="">
             <a:extLst xmlns:a="http://schemas.openxmlformats.org/drawingml/2006/main">
               <a:ext uri="{FF2B5EF4-FFF2-40B4-BE49-F238E27FC236}">
-                <a16:creationId xmlns:a16="http://schemas.microsoft.com/office/drawing/2014/main" id="{29AECD61-0241-47E0-8AFF-F4BBF435DEE9}"/>
+                <a16:creationId xmlns:a16="http://schemas.microsoft.com/office/drawing/2014/main" id="{0B660285-C6BD-455C-9672-4F2284831144}"/>
               </a:ext>
             </a:extLst>
           </p:cNvPr>
@@ -2269,7 +2269,7 @@
           <p:cNvPr id="9" name="">
             <a:extLst xmlns:a="http://schemas.openxmlformats.org/drawingml/2006/main">
               <a:ext uri="{FF2B5EF4-FFF2-40B4-BE49-F238E27FC236}">
-                <a16:creationId xmlns:a16="http://schemas.microsoft.com/office/drawing/2014/main" id="{2D2132D6-1FA8-44E8-8B53-DADBE395A9EB}"/>
+                <a16:creationId xmlns:a16="http://schemas.microsoft.com/office/drawing/2014/main" id="{51C770F2-7A4D-4ED2-B9A5-879956B7F29A}"/>
               </a:ext>
             </a:extLst>
           </p:cNvPr>
@@ -2326,7 +2326,7 @@
           <p:cNvPr id="10" name="">
             <a:extLst xmlns:a="http://schemas.openxmlformats.org/drawingml/2006/main">
               <a:ext uri="{FF2B5EF4-FFF2-40B4-BE49-F238E27FC236}">
-                <a16:creationId xmlns:a16="http://schemas.microsoft.com/office/drawing/2014/main" id="{398A6958-290F-4345-92FF-E9553747B667}"/>
+                <a16:creationId xmlns:a16="http://schemas.microsoft.com/office/drawing/2014/main" id="{AB317620-ABCB-4FF4-97E0-69C7EB54B421}"/>
               </a:ext>
             </a:extLst>
           </p:cNvPr>
@@ -2406,7 +2406,7 @@
           <p:cNvPr id="11" name="">
             <a:extLst xmlns:a="http://schemas.openxmlformats.org/drawingml/2006/main">
               <a:ext uri="{FF2B5EF4-FFF2-40B4-BE49-F238E27FC236}">
-                <a16:creationId xmlns:a16="http://schemas.microsoft.com/office/drawing/2014/main" id="{8CA9391B-D674-44DD-9A17-7E9B37B14FCB}"/>
+                <a16:creationId xmlns:a16="http://schemas.microsoft.com/office/drawing/2014/main" id="{777F9C93-73B4-4012-BE7E-DEF1CDE3A498}"/>
               </a:ext>
             </a:extLst>
           </p:cNvPr>
@@ -2436,7 +2436,7 @@
           <p:cNvPr id="12" name="">
             <a:extLst xmlns:a="http://schemas.openxmlformats.org/drawingml/2006/main">
               <a:ext uri="{FF2B5EF4-FFF2-40B4-BE49-F238E27FC236}">
-                <a16:creationId xmlns:a16="http://schemas.microsoft.com/office/drawing/2014/main" id="{E6500ABA-06CE-4D39-9B5C-593A99E85793}"/>
+                <a16:creationId xmlns:a16="http://schemas.microsoft.com/office/drawing/2014/main" id="{8BF5C83D-5DA6-437A-A191-5CB04038FACB}"/>
               </a:ext>
             </a:extLst>
           </p:cNvPr>
@@ -2470,7 +2470,7 @@
           <p:cNvPr id="13" name="">
             <a:extLst xmlns:a="http://schemas.openxmlformats.org/drawingml/2006/main">
               <a:ext uri="{FF2B5EF4-FFF2-40B4-BE49-F238E27FC236}">
-                <a16:creationId xmlns:a16="http://schemas.microsoft.com/office/drawing/2014/main" id="{EC823ED8-C977-4E26-9122-38FBD29B2A69}"/>
+                <a16:creationId xmlns:a16="http://schemas.microsoft.com/office/drawing/2014/main" id="{99B1019A-4B60-4D0C-BA6C-25F566176F8D}"/>
               </a:ext>
             </a:extLst>
           </p:cNvPr>
@@ -2502,7 +2502,7 @@
           <p:cNvPr id="14" name="">
             <a:extLst xmlns:a="http://schemas.openxmlformats.org/drawingml/2006/main">
               <a:ext uri="{FF2B5EF4-FFF2-40B4-BE49-F238E27FC236}">
-                <a16:creationId xmlns:a16="http://schemas.microsoft.com/office/drawing/2014/main" id="{CFEAAFF7-0552-4F47-9C8F-49EB83507EB7}"/>
+                <a16:creationId xmlns:a16="http://schemas.microsoft.com/office/drawing/2014/main" id="{5B9F6CF6-7DA6-4036-9D65-1C811331F9EC}"/>
               </a:ext>
             </a:extLst>
           </p:cNvPr>
@@ -2559,7 +2559,7 @@
           <p:cNvPr id="15" name="">
             <a:extLst xmlns:a="http://schemas.openxmlformats.org/drawingml/2006/main">
               <a:ext uri="{FF2B5EF4-FFF2-40B4-BE49-F238E27FC236}">
-                <a16:creationId xmlns:a16="http://schemas.microsoft.com/office/drawing/2014/main" id="{1FC3D539-3CD3-4810-987A-AC9352AA83D5}"/>
+                <a16:creationId xmlns:a16="http://schemas.microsoft.com/office/drawing/2014/main" id="{44FFFB10-BEAF-4558-A3DC-7E136B819172}"/>
               </a:ext>
             </a:extLst>
           </p:cNvPr>
@@ -2639,7 +2639,7 @@
           <p:cNvPr id="16" name="">
             <a:extLst xmlns:a="http://schemas.openxmlformats.org/drawingml/2006/main">
               <a:ext uri="{FF2B5EF4-FFF2-40B4-BE49-F238E27FC236}">
-                <a16:creationId xmlns:a16="http://schemas.microsoft.com/office/drawing/2014/main" id="{CA6ED2A8-5C02-4728-8C19-ADD6111E12D4}"/>
+                <a16:creationId xmlns:a16="http://schemas.microsoft.com/office/drawing/2014/main" id="{18613988-FAE9-4785-A391-8A59CE564126}"/>
               </a:ext>
             </a:extLst>
           </p:cNvPr>
@@ -2669,7 +2669,7 @@
           <p:cNvPr id="17" name="">
             <a:extLst xmlns:a="http://schemas.openxmlformats.org/drawingml/2006/main">
               <a:ext uri="{FF2B5EF4-FFF2-40B4-BE49-F238E27FC236}">
-                <a16:creationId xmlns:a16="http://schemas.microsoft.com/office/drawing/2014/main" id="{EFB55766-D657-45AD-904E-0248102A1089}"/>
+                <a16:creationId xmlns:a16="http://schemas.microsoft.com/office/drawing/2014/main" id="{7C5A8CEE-FEA6-417F-8D42-4341D2AF3281}"/>
               </a:ext>
             </a:extLst>
           </p:cNvPr>
@@ -2703,7 +2703,7 @@
           <p:cNvPr id="18" name="">
             <a:extLst xmlns:a="http://schemas.openxmlformats.org/drawingml/2006/main">
               <a:ext uri="{FF2B5EF4-FFF2-40B4-BE49-F238E27FC236}">
-                <a16:creationId xmlns:a16="http://schemas.microsoft.com/office/drawing/2014/main" id="{6EF46A4F-9BE3-49D8-80CC-1680FA161E19}"/>
+                <a16:creationId xmlns:a16="http://schemas.microsoft.com/office/drawing/2014/main" id="{C670EE29-0089-47D8-B91E-C697578E960E}"/>
               </a:ext>
             </a:extLst>
           </p:cNvPr>
@@ -2735,7 +2735,7 @@
           <p:cNvPr id="19" name="">
             <a:extLst xmlns:a="http://schemas.openxmlformats.org/drawingml/2006/main">
               <a:ext uri="{FF2B5EF4-FFF2-40B4-BE49-F238E27FC236}">
-                <a16:creationId xmlns:a16="http://schemas.microsoft.com/office/drawing/2014/main" id="{B55C37B9-6A7B-4CC0-9FB2-D4AF60AA942A}"/>
+                <a16:creationId xmlns:a16="http://schemas.microsoft.com/office/drawing/2014/main" id="{40AAA02B-E7D9-45D4-8E9E-D178C06BC742}"/>
               </a:ext>
             </a:extLst>
           </p:cNvPr>
@@ -2792,7 +2792,7 @@
           <p:cNvPr id="20" name="">
             <a:extLst xmlns:a="http://schemas.openxmlformats.org/drawingml/2006/main">
               <a:ext uri="{FF2B5EF4-FFF2-40B4-BE49-F238E27FC236}">
-                <a16:creationId xmlns:a16="http://schemas.microsoft.com/office/drawing/2014/main" id="{78DD94B6-3A12-480F-B00C-D6A412A30EF0}"/>
+                <a16:creationId xmlns:a16="http://schemas.microsoft.com/office/drawing/2014/main" id="{EACE8C90-2C22-41C1-AF44-D5C8029A0132}"/>
               </a:ext>
             </a:extLst>
           </p:cNvPr>
@@ -2872,7 +2872,7 @@
           <p:cNvPr id="21" name="">
             <a:extLst xmlns:a="http://schemas.openxmlformats.org/drawingml/2006/main">
               <a:ext uri="{FF2B5EF4-FFF2-40B4-BE49-F238E27FC236}">
-                <a16:creationId xmlns:a16="http://schemas.microsoft.com/office/drawing/2014/main" id="{772C9AE0-8737-4306-8B52-F266712A3D28}"/>
+                <a16:creationId xmlns:a16="http://schemas.microsoft.com/office/drawing/2014/main" id="{F0A78457-CD3E-4CF8-BD6D-C3EDCC513A1C}"/>
               </a:ext>
             </a:extLst>
           </p:cNvPr>
@@ -2902,7 +2902,7 @@
           <p:cNvPr id="22" name="">
             <a:extLst xmlns:a="http://schemas.openxmlformats.org/drawingml/2006/main">
               <a:ext uri="{FF2B5EF4-FFF2-40B4-BE49-F238E27FC236}">
-                <a16:creationId xmlns:a16="http://schemas.microsoft.com/office/drawing/2014/main" id="{BD17DF5D-73F2-40F4-876C-5636D841C951}"/>
+                <a16:creationId xmlns:a16="http://schemas.microsoft.com/office/drawing/2014/main" id="{59439C8A-CED7-4515-86C1-6E80DFD2BDB0}"/>
               </a:ext>
             </a:extLst>
           </p:cNvPr>
@@ -2936,7 +2936,7 @@
           <p:cNvPr id="23" name="">
             <a:extLst xmlns:a="http://schemas.openxmlformats.org/drawingml/2006/main">
               <a:ext uri="{FF2B5EF4-FFF2-40B4-BE49-F238E27FC236}">
-                <a16:creationId xmlns:a16="http://schemas.microsoft.com/office/drawing/2014/main" id="{074AF708-C5F8-47DC-A736-2A7E0B6E7B89}"/>
+                <a16:creationId xmlns:a16="http://schemas.microsoft.com/office/drawing/2014/main" id="{90881BFA-B046-4B37-B420-105E7584752F}"/>
               </a:ext>
             </a:extLst>
           </p:cNvPr>
@@ -2968,7 +2968,7 @@
           <p:cNvPr id="24" name="">
             <a:extLst xmlns:a="http://schemas.openxmlformats.org/drawingml/2006/main">
               <a:ext uri="{FF2B5EF4-FFF2-40B4-BE49-F238E27FC236}">
-                <a16:creationId xmlns:a16="http://schemas.microsoft.com/office/drawing/2014/main" id="{B19703B4-A079-45DF-A3E2-08571E321A4D}"/>
+                <a16:creationId xmlns:a16="http://schemas.microsoft.com/office/drawing/2014/main" id="{8A38CF9D-49B1-4ECA-A288-67ABD2ABD2F0}"/>
               </a:ext>
             </a:extLst>
           </p:cNvPr>
@@ -3025,7 +3025,7 @@
           <p:cNvPr id="25" name="">
             <a:extLst xmlns:a="http://schemas.openxmlformats.org/drawingml/2006/main">
               <a:ext uri="{FF2B5EF4-FFF2-40B4-BE49-F238E27FC236}">
-                <a16:creationId xmlns:a16="http://schemas.microsoft.com/office/drawing/2014/main" id="{FEF881FF-D07E-4672-95D4-83D329931EB7}"/>
+                <a16:creationId xmlns:a16="http://schemas.microsoft.com/office/drawing/2014/main" id="{6FAEEF1A-2F81-4493-8CD1-FAF56367DD20}"/>
               </a:ext>
             </a:extLst>
           </p:cNvPr>
@@ -3105,7 +3105,7 @@
           <p:cNvPr id="26" name="">
             <a:extLst xmlns:a="http://schemas.openxmlformats.org/drawingml/2006/main">
               <a:ext uri="{FF2B5EF4-FFF2-40B4-BE49-F238E27FC236}">
-                <a16:creationId xmlns:a16="http://schemas.microsoft.com/office/drawing/2014/main" id="{28154C7E-63F5-4F3D-BCCF-C10E9D190F87}"/>
+                <a16:creationId xmlns:a16="http://schemas.microsoft.com/office/drawing/2014/main" id="{F4C56C02-0636-41FD-B9A0-13EDA4C103E0}"/>
               </a:ext>
             </a:extLst>
           </p:cNvPr>
@@ -3135,7 +3135,7 @@
           <p:cNvPr id="27" name="">
             <a:extLst xmlns:a="http://schemas.openxmlformats.org/drawingml/2006/main">
               <a:ext uri="{FF2B5EF4-FFF2-40B4-BE49-F238E27FC236}">
-                <a16:creationId xmlns:a16="http://schemas.microsoft.com/office/drawing/2014/main" id="{4E413B4A-8D0F-44E5-BCC6-E48E66689A1B}"/>
+                <a16:creationId xmlns:a16="http://schemas.microsoft.com/office/drawing/2014/main" id="{C5F0469A-8C71-42DA-8713-E7891DB45ECD}"/>
               </a:ext>
             </a:extLst>
           </p:cNvPr>
@@ -3169,7 +3169,7 @@
           <p:cNvPr id="28" name="">
             <a:extLst xmlns:a="http://schemas.openxmlformats.org/drawingml/2006/main">
               <a:ext uri="{FF2B5EF4-FFF2-40B4-BE49-F238E27FC236}">
-                <a16:creationId xmlns:a16="http://schemas.microsoft.com/office/drawing/2014/main" id="{25A49EE0-378B-4A3E-B5F5-2F56FFA90D2B}"/>
+                <a16:creationId xmlns:a16="http://schemas.microsoft.com/office/drawing/2014/main" id="{74549072-D117-4046-AC16-F0295D2547CF}"/>
               </a:ext>
             </a:extLst>
           </p:cNvPr>
@@ -3201,7 +3201,7 @@
           <p:cNvPr id="29" name="">
             <a:extLst xmlns:a="http://schemas.openxmlformats.org/drawingml/2006/main">
               <a:ext uri="{FF2B5EF4-FFF2-40B4-BE49-F238E27FC236}">
-                <a16:creationId xmlns:a16="http://schemas.microsoft.com/office/drawing/2014/main" id="{53FC9CD2-1450-42BE-880A-8B206EA31249}"/>
+                <a16:creationId xmlns:a16="http://schemas.microsoft.com/office/drawing/2014/main" id="{B5DE38AE-707B-415D-95D3-61E205311E45}"/>
               </a:ext>
             </a:extLst>
           </p:cNvPr>
@@ -3258,7 +3258,7 @@
           <p:cNvPr id="30" name="">
             <a:extLst xmlns:a="http://schemas.openxmlformats.org/drawingml/2006/main">
               <a:ext uri="{FF2B5EF4-FFF2-40B4-BE49-F238E27FC236}">
-                <a16:creationId xmlns:a16="http://schemas.microsoft.com/office/drawing/2014/main" id="{467678EE-A701-4624-894C-E77EA4466143}"/>
+                <a16:creationId xmlns:a16="http://schemas.microsoft.com/office/drawing/2014/main" id="{96ED35ED-2C7C-4B26-AEAD-276C34FEF6A8}"/>
               </a:ext>
             </a:extLst>
           </p:cNvPr>
@@ -3338,7 +3338,7 @@
           <p:cNvPr id="31" name="">
             <a:extLst xmlns:a="http://schemas.openxmlformats.org/drawingml/2006/main">
               <a:ext uri="{FF2B5EF4-FFF2-40B4-BE49-F238E27FC236}">
-                <a16:creationId xmlns:a16="http://schemas.microsoft.com/office/drawing/2014/main" id="{0A935648-678D-4B14-A1E4-FAC8F7DB8834}"/>
+                <a16:creationId xmlns:a16="http://schemas.microsoft.com/office/drawing/2014/main" id="{A9CD70F1-AF71-4CEB-BBF2-57B354D42347}"/>
               </a:ext>
             </a:extLst>
           </p:cNvPr>
@@ -3395,7 +3395,7 @@
           <p:cNvPr id="32" name="">
             <a:extLst xmlns:a="http://schemas.openxmlformats.org/drawingml/2006/main">
               <a:ext uri="{FF2B5EF4-FFF2-40B4-BE49-F238E27FC236}">
-                <a16:creationId xmlns:a16="http://schemas.microsoft.com/office/drawing/2014/main" id="{13E31A25-71B4-4207-B7DA-3B114B403808}"/>
+                <a16:creationId xmlns:a16="http://schemas.microsoft.com/office/drawing/2014/main" id="{78125356-45EA-4FBB-84DE-ECBD84DFB073}"/>
               </a:ext>
             </a:extLst>
           </p:cNvPr>
@@ -3452,7 +3452,7 @@
           <p:cNvPr id="33" name="">
             <a:extLst xmlns:a="http://schemas.openxmlformats.org/drawingml/2006/main">
               <a:ext uri="{FF2B5EF4-FFF2-40B4-BE49-F238E27FC236}">
-                <a16:creationId xmlns:a16="http://schemas.microsoft.com/office/drawing/2014/main" id="{55377C47-7D72-4F60-ADAA-94A813450FC1}"/>
+                <a16:creationId xmlns:a16="http://schemas.microsoft.com/office/drawing/2014/main" id="{EF98A646-17FD-4098-BC8D-1D7A39BEDFED}"/>
               </a:ext>
             </a:extLst>
           </p:cNvPr>
@@ -3509,7 +3509,7 @@
           <p:cNvPr id="34" name="">
             <a:extLst xmlns:a="http://schemas.openxmlformats.org/drawingml/2006/main">
               <a:ext uri="{FF2B5EF4-FFF2-40B4-BE49-F238E27FC236}">
-                <a16:creationId xmlns:a16="http://schemas.microsoft.com/office/drawing/2014/main" id="{35588D4E-F31C-409A-943E-50E39AFF418D}"/>
+                <a16:creationId xmlns:a16="http://schemas.microsoft.com/office/drawing/2014/main" id="{B6B523FB-0B81-4528-A38C-692B325CB3A8}"/>
               </a:ext>
             </a:extLst>
           </p:cNvPr>
@@ -3566,7 +3566,7 @@
           <p:cNvPr id="35" name="">
             <a:extLst xmlns:a="http://schemas.openxmlformats.org/drawingml/2006/main">
               <a:ext uri="{FF2B5EF4-FFF2-40B4-BE49-F238E27FC236}">
-                <a16:creationId xmlns:a16="http://schemas.microsoft.com/office/drawing/2014/main" id="{E735B1DA-B9D0-476C-8897-7AE93C9A341B}"/>
+                <a16:creationId xmlns:a16="http://schemas.microsoft.com/office/drawing/2014/main" id="{75F48F34-8A25-401A-B22B-14A7496F9720}"/>
               </a:ext>
             </a:extLst>
           </p:cNvPr>
@@ -3623,7 +3623,7 @@
           <p:cNvPr id="36" name="">
             <a:extLst xmlns:a="http://schemas.openxmlformats.org/drawingml/2006/main">
               <a:ext uri="{FF2B5EF4-FFF2-40B4-BE49-F238E27FC236}">
-                <a16:creationId xmlns:a16="http://schemas.microsoft.com/office/drawing/2014/main" id="{68E6D471-387A-41AB-B1F7-30317DF61479}"/>
+                <a16:creationId xmlns:a16="http://schemas.microsoft.com/office/drawing/2014/main" id="{B7C09CC2-3A85-4FF1-8C57-E65F7BDC120B}"/>
               </a:ext>
             </a:extLst>
           </p:cNvPr>
@@ -3680,7 +3680,7 @@
           <p:cNvPr id="37" name="">
             <a:extLst xmlns:a="http://schemas.openxmlformats.org/drawingml/2006/main">
               <a:ext uri="{FF2B5EF4-FFF2-40B4-BE49-F238E27FC236}">
-                <a16:creationId xmlns:a16="http://schemas.microsoft.com/office/drawing/2014/main" id="{77C5B1A6-3AE3-40FD-9C27-C1DBE39AFF14}"/>
+                <a16:creationId xmlns:a16="http://schemas.microsoft.com/office/drawing/2014/main" id="{41583FBD-2154-4639-AC52-378F5E646A48}"/>
               </a:ext>
             </a:extLst>
           </p:cNvPr>
@@ -3737,7 +3737,7 @@
           <p:cNvPr id="38" name="">
             <a:extLst xmlns:a="http://schemas.openxmlformats.org/drawingml/2006/main">
               <a:ext uri="{FF2B5EF4-FFF2-40B4-BE49-F238E27FC236}">
-                <a16:creationId xmlns:a16="http://schemas.microsoft.com/office/drawing/2014/main" id="{4D596F42-3158-4804-BA9B-A2D84D5E747D}"/>
+                <a16:creationId xmlns:a16="http://schemas.microsoft.com/office/drawing/2014/main" id="{76A0DEE8-ACFE-462E-A881-14278630F057}"/>
               </a:ext>
             </a:extLst>
           </p:cNvPr>
@@ -3794,7 +3794,7 @@
           <p:cNvPr id="39" name="">
             <a:extLst xmlns:a="http://schemas.openxmlformats.org/drawingml/2006/main">
               <a:ext uri="{FF2B5EF4-FFF2-40B4-BE49-F238E27FC236}">
-                <a16:creationId xmlns:a16="http://schemas.microsoft.com/office/drawing/2014/main" id="{EF9BC48C-101F-4FE7-AD64-ED4122F2564E}"/>
+                <a16:creationId xmlns:a16="http://schemas.microsoft.com/office/drawing/2014/main" id="{85E03942-7D96-49D1-9C55-8A30B65F6CE9}"/>
               </a:ext>
             </a:extLst>
           </p:cNvPr>
@@ -3851,7 +3851,7 @@
           <p:cNvPr id="40" name="">
             <a:extLst xmlns:a="http://schemas.openxmlformats.org/drawingml/2006/main">
               <a:ext uri="{FF2B5EF4-FFF2-40B4-BE49-F238E27FC236}">
-                <a16:creationId xmlns:a16="http://schemas.microsoft.com/office/drawing/2014/main" id="{86B06C3E-025E-4E69-941C-9EC570A5AE92}"/>
+                <a16:creationId xmlns:a16="http://schemas.microsoft.com/office/drawing/2014/main" id="{7F4F8D09-B71F-4F5B-B0E3-57FA3D81C7C7}"/>
               </a:ext>
             </a:extLst>
           </p:cNvPr>
@@ -3908,7 +3908,7 @@
           <p:cNvPr id="41" name="">
             <a:extLst xmlns:a="http://schemas.openxmlformats.org/drawingml/2006/main">
               <a:ext uri="{FF2B5EF4-FFF2-40B4-BE49-F238E27FC236}">
-                <a16:creationId xmlns:a16="http://schemas.microsoft.com/office/drawing/2014/main" id="{4B88229A-ACDA-40ED-BB93-A442F4606C46}"/>
+                <a16:creationId xmlns:a16="http://schemas.microsoft.com/office/drawing/2014/main" id="{13ADC870-A1E6-4082-97EE-E9D08D2136F9}"/>
               </a:ext>
             </a:extLst>
           </p:cNvPr>
@@ -3988,7 +3988,7 @@
           <p:cNvPr id="42" name="">
             <a:extLst xmlns:a="http://schemas.openxmlformats.org/drawingml/2006/main">
               <a:ext uri="{FF2B5EF4-FFF2-40B4-BE49-F238E27FC236}">
-                <a16:creationId xmlns:a16="http://schemas.microsoft.com/office/drawing/2014/main" id="{7D4E69B3-50BA-482C-9FB6-FD3F041E9963}"/>
+                <a16:creationId xmlns:a16="http://schemas.microsoft.com/office/drawing/2014/main" id="{27831340-0C22-4886-B68B-56ECC3C7CDBF}"/>
               </a:ext>
             </a:extLst>
           </p:cNvPr>
@@ -4045,7 +4045,7 @@
           <p:cNvPr id="43" name="">
             <a:extLst xmlns:a="http://schemas.openxmlformats.org/drawingml/2006/main">
               <a:ext uri="{FF2B5EF4-FFF2-40B4-BE49-F238E27FC236}">
-                <a16:creationId xmlns:a16="http://schemas.microsoft.com/office/drawing/2014/main" id="{45277F2E-EFD0-43E7-852C-4F0E54869209}"/>
+                <a16:creationId xmlns:a16="http://schemas.microsoft.com/office/drawing/2014/main" id="{1C8B260D-65FC-4930-88E8-E767781979B1}"/>
               </a:ext>
             </a:extLst>
           </p:cNvPr>
@@ -4077,7 +4077,7 @@
           <p:cNvPr id="44" name="">
             <a:extLst xmlns:a="http://schemas.openxmlformats.org/drawingml/2006/main">
               <a:ext uri="{FF2B5EF4-FFF2-40B4-BE49-F238E27FC236}">
-                <a16:creationId xmlns:a16="http://schemas.microsoft.com/office/drawing/2014/main" id="{0DC63E33-E59A-411B-997B-F34F7F82CCB4}"/>
+                <a16:creationId xmlns:a16="http://schemas.microsoft.com/office/drawing/2014/main" id="{A67722E8-9543-4BBA-B123-FC10E035C9C2}"/>
               </a:ext>
             </a:extLst>
           </p:cNvPr>
@@ -4132,7 +4132,7 @@
     </p:spTree>
     <p:extLst>
       <p:ext uri="{BB962C8B-B14F-4D97-AF65-F5344CB8AC3E}">
-        <p14:creationId xmlns:p14="http://schemas.microsoft.com/office/powerpoint/2010/main" val="352965319"/>
+        <p14:creationId xmlns:p14="http://schemas.microsoft.com/office/powerpoint/2010/main" val="678091102"/>
       </p:ext>
     </p:extLst>
   </p:cSld>
@@ -4163,7 +4163,7 @@
           <p:cNvPr id="56" name="">
             <a:extLst xmlns:a="http://schemas.openxmlformats.org/drawingml/2006/main">
               <a:ext uri="{FF2B5EF4-FFF2-40B4-BE49-F238E27FC236}">
-                <a16:creationId xmlns:a16="http://schemas.microsoft.com/office/drawing/2014/main" id="{C54BCE00-1C0F-46BA-B566-66D92F471129}"/>
+                <a16:creationId xmlns:a16="http://schemas.microsoft.com/office/drawing/2014/main" id="{E3D10723-A624-4903-8E65-840F65D5D688}"/>
               </a:ext>
             </a:extLst>
           </p:cNvPr>
@@ -4193,7 +4193,7 @@
           <p:cNvPr id="2" name="">
             <a:extLst xmlns:a="http://schemas.openxmlformats.org/drawingml/2006/main">
               <a:ext uri="{FF2B5EF4-FFF2-40B4-BE49-F238E27FC236}">
-                <a16:creationId xmlns:a16="http://schemas.microsoft.com/office/drawing/2014/main" id="{1FB26A3D-8033-46A5-86AD-AE6C24771A11}"/>
+                <a16:creationId xmlns:a16="http://schemas.microsoft.com/office/drawing/2014/main" id="{62DC4879-57BF-435B-9DE4-CBCF52CF4384}"/>
               </a:ext>
             </a:extLst>
           </p:cNvPr>
@@ -4250,7 +4250,7 @@
           <p:cNvPr id="3" name="">
             <a:extLst xmlns:a="http://schemas.openxmlformats.org/drawingml/2006/main">
               <a:ext uri="{FF2B5EF4-FFF2-40B4-BE49-F238E27FC236}">
-                <a16:creationId xmlns:a16="http://schemas.microsoft.com/office/drawing/2014/main" id="{D856C706-6BC1-4139-9A8A-01DA94C28182}"/>
+                <a16:creationId xmlns:a16="http://schemas.microsoft.com/office/drawing/2014/main" id="{31B26076-1C16-463D-87B9-A239207E8B52}"/>
               </a:ext>
             </a:extLst>
           </p:cNvPr>
@@ -4280,7 +4280,7 @@
           <p:cNvPr id="4" name="">
             <a:extLst xmlns:a="http://schemas.openxmlformats.org/drawingml/2006/main">
               <a:ext uri="{FF2B5EF4-FFF2-40B4-BE49-F238E27FC236}">
-                <a16:creationId xmlns:a16="http://schemas.microsoft.com/office/drawing/2014/main" id="{3262191A-2759-4E8F-B570-F8A17281BB16}"/>
+                <a16:creationId xmlns:a16="http://schemas.microsoft.com/office/drawing/2014/main" id="{598A0E73-BC1F-467F-B91B-CD2CCD4C122B}"/>
               </a:ext>
             </a:extLst>
           </p:cNvPr>
@@ -4337,7 +4337,7 @@
           <p:cNvPr id="5" name="">
             <a:extLst xmlns:a="http://schemas.openxmlformats.org/drawingml/2006/main">
               <a:ext uri="{FF2B5EF4-FFF2-40B4-BE49-F238E27FC236}">
-                <a16:creationId xmlns:a16="http://schemas.microsoft.com/office/drawing/2014/main" id="{D8BBD1E5-A40F-476A-87F7-16C67C99633E}"/>
+                <a16:creationId xmlns:a16="http://schemas.microsoft.com/office/drawing/2014/main" id="{226321E6-4768-4ED7-ABF0-5D76A1B287C6}"/>
               </a:ext>
             </a:extLst>
           </p:cNvPr>
@@ -4394,7 +4394,7 @@
           <p:cNvPr id="6" name="">
             <a:extLst xmlns:a="http://schemas.openxmlformats.org/drawingml/2006/main">
               <a:ext uri="{FF2B5EF4-FFF2-40B4-BE49-F238E27FC236}">
-                <a16:creationId xmlns:a16="http://schemas.microsoft.com/office/drawing/2014/main" id="{AF5DADFA-346E-4394-8C5F-D64A6C02AE12}"/>
+                <a16:creationId xmlns:a16="http://schemas.microsoft.com/office/drawing/2014/main" id="{8958EE09-E51A-48C0-BC7D-1814282435BE}"/>
               </a:ext>
             </a:extLst>
           </p:cNvPr>
@@ -4428,7 +4428,7 @@
           <p:cNvPr id="7" name="">
             <a:extLst xmlns:a="http://schemas.openxmlformats.org/drawingml/2006/main">
               <a:ext uri="{FF2B5EF4-FFF2-40B4-BE49-F238E27FC236}">
-                <a16:creationId xmlns:a16="http://schemas.microsoft.com/office/drawing/2014/main" id="{9AEB5FB6-C8AB-48D7-844F-AAF33DAA385A}"/>
+                <a16:creationId xmlns:a16="http://schemas.microsoft.com/office/drawing/2014/main" id="{58229896-5F06-4723-8A1A-7CF931A2531D}"/>
               </a:ext>
             </a:extLst>
           </p:cNvPr>
@@ -4460,7 +4460,7 @@
           <p:cNvPr id="8" name="">
             <a:extLst xmlns:a="http://schemas.openxmlformats.org/drawingml/2006/main">
               <a:ext uri="{FF2B5EF4-FFF2-40B4-BE49-F238E27FC236}">
-                <a16:creationId xmlns:a16="http://schemas.microsoft.com/office/drawing/2014/main" id="{01270EC1-0490-4DE6-9831-B88C6BAC97C1}"/>
+                <a16:creationId xmlns:a16="http://schemas.microsoft.com/office/drawing/2014/main" id="{D93BCC9E-D5FD-4369-8D77-3F8C6FC4E7A4}"/>
               </a:ext>
             </a:extLst>
           </p:cNvPr>
@@ -4517,7 +4517,7 @@
           <p:cNvPr id="9" name="">
             <a:extLst xmlns:a="http://schemas.openxmlformats.org/drawingml/2006/main">
               <a:ext uri="{FF2B5EF4-FFF2-40B4-BE49-F238E27FC236}">
-                <a16:creationId xmlns:a16="http://schemas.microsoft.com/office/drawing/2014/main" id="{CA0F10BA-180B-4E08-A6B0-D214DC0B2891}"/>
+                <a16:creationId xmlns:a16="http://schemas.microsoft.com/office/drawing/2014/main" id="{55B3486F-DDBD-4D0F-82A6-1A0ECF100617}"/>
               </a:ext>
             </a:extLst>
           </p:cNvPr>
@@ -4574,7 +4574,7 @@
           <p:cNvPr id="10" name="">
             <a:extLst xmlns:a="http://schemas.openxmlformats.org/drawingml/2006/main">
               <a:ext uri="{FF2B5EF4-FFF2-40B4-BE49-F238E27FC236}">
-                <a16:creationId xmlns:a16="http://schemas.microsoft.com/office/drawing/2014/main" id="{AA084EEB-CAA3-4B42-A15F-F6E231B1F9BA}"/>
+                <a16:creationId xmlns:a16="http://schemas.microsoft.com/office/drawing/2014/main" id="{3C466D01-ACDA-4C68-B430-AE5D22081F5F}"/>
               </a:ext>
             </a:extLst>
           </p:cNvPr>
@@ -4631,7 +4631,7 @@
           <p:cNvPr id="11" name="">
             <a:extLst xmlns:a="http://schemas.openxmlformats.org/drawingml/2006/main">
               <a:ext uri="{FF2B5EF4-FFF2-40B4-BE49-F238E27FC236}">
-                <a16:creationId xmlns:a16="http://schemas.microsoft.com/office/drawing/2014/main" id="{5D55987B-39B6-4029-A831-28BFFAFF0EAA}"/>
+                <a16:creationId xmlns:a16="http://schemas.microsoft.com/office/drawing/2014/main" id="{8ACE0320-D522-4D96-B337-F0EACE555068}"/>
               </a:ext>
             </a:extLst>
           </p:cNvPr>
@@ -4661,7 +4661,7 @@
           <p:cNvPr id="12" name="">
             <a:extLst xmlns:a="http://schemas.openxmlformats.org/drawingml/2006/main">
               <a:ext uri="{FF2B5EF4-FFF2-40B4-BE49-F238E27FC236}">
-                <a16:creationId xmlns:a16="http://schemas.microsoft.com/office/drawing/2014/main" id="{B55B9E1A-5476-4639-9DE7-96C35576A2F9}"/>
+                <a16:creationId xmlns:a16="http://schemas.microsoft.com/office/drawing/2014/main" id="{B09EA37C-2ACB-40F4-B012-06F39672B5F0}"/>
               </a:ext>
             </a:extLst>
           </p:cNvPr>
@@ -4695,7 +4695,7 @@
           <p:cNvPr id="13" name="">
             <a:extLst xmlns:a="http://schemas.openxmlformats.org/drawingml/2006/main">
               <a:ext uri="{FF2B5EF4-FFF2-40B4-BE49-F238E27FC236}">
-                <a16:creationId xmlns:a16="http://schemas.microsoft.com/office/drawing/2014/main" id="{45834AB0-D07B-41CD-B9F2-D56C7F5037A3}"/>
+                <a16:creationId xmlns:a16="http://schemas.microsoft.com/office/drawing/2014/main" id="{AF994664-FDF7-4C3A-A388-6F650B39DCFE}"/>
               </a:ext>
             </a:extLst>
           </p:cNvPr>
@@ -4727,7 +4727,7 @@
           <p:cNvPr id="14" name="">
             <a:extLst xmlns:a="http://schemas.openxmlformats.org/drawingml/2006/main">
               <a:ext uri="{FF2B5EF4-FFF2-40B4-BE49-F238E27FC236}">
-                <a16:creationId xmlns:a16="http://schemas.microsoft.com/office/drawing/2014/main" id="{D67DB4CC-7208-40E8-AB9D-CA85A8084CAA}"/>
+                <a16:creationId xmlns:a16="http://schemas.microsoft.com/office/drawing/2014/main" id="{35B8913D-6762-4B2F-917E-C92643CA9A52}"/>
               </a:ext>
             </a:extLst>
           </p:cNvPr>
@@ -4784,7 +4784,7 @@
           <p:cNvPr id="15" name="">
             <a:extLst xmlns:a="http://schemas.openxmlformats.org/drawingml/2006/main">
               <a:ext uri="{FF2B5EF4-FFF2-40B4-BE49-F238E27FC236}">
-                <a16:creationId xmlns:a16="http://schemas.microsoft.com/office/drawing/2014/main" id="{136FAE2F-C537-4FBF-86BB-B7B43AC84E05}"/>
+                <a16:creationId xmlns:a16="http://schemas.microsoft.com/office/drawing/2014/main" id="{6C639567-8A47-4DBD-9B6B-53CB30D285D2}"/>
               </a:ext>
             </a:extLst>
           </p:cNvPr>
@@ -4841,7 +4841,7 @@
           <p:cNvPr id="16" name="">
             <a:extLst xmlns:a="http://schemas.openxmlformats.org/drawingml/2006/main">
               <a:ext uri="{FF2B5EF4-FFF2-40B4-BE49-F238E27FC236}">
-                <a16:creationId xmlns:a16="http://schemas.microsoft.com/office/drawing/2014/main" id="{A6AB38D7-0863-4AFD-A4C8-6723DF064448}"/>
+                <a16:creationId xmlns:a16="http://schemas.microsoft.com/office/drawing/2014/main" id="{2BF4F288-7586-4FED-9608-D467D4EB9E66}"/>
               </a:ext>
             </a:extLst>
           </p:cNvPr>
@@ -4898,7 +4898,7 @@
           <p:cNvPr id="17" name="">
             <a:extLst xmlns:a="http://schemas.openxmlformats.org/drawingml/2006/main">
               <a:ext uri="{FF2B5EF4-FFF2-40B4-BE49-F238E27FC236}">
-                <a16:creationId xmlns:a16="http://schemas.microsoft.com/office/drawing/2014/main" id="{385A7F39-20D8-4958-A91C-69CED28828D8}"/>
+                <a16:creationId xmlns:a16="http://schemas.microsoft.com/office/drawing/2014/main" id="{C26C8E7E-5051-4FE0-A941-D39B59586C40}"/>
               </a:ext>
             </a:extLst>
           </p:cNvPr>
@@ -4928,7 +4928,7 @@
           <p:cNvPr id="18" name="">
             <a:extLst xmlns:a="http://schemas.openxmlformats.org/drawingml/2006/main">
               <a:ext uri="{FF2B5EF4-FFF2-40B4-BE49-F238E27FC236}">
-                <a16:creationId xmlns:a16="http://schemas.microsoft.com/office/drawing/2014/main" id="{896FE9AC-3450-46E7-8AFC-9FEC5FAB8397}"/>
+                <a16:creationId xmlns:a16="http://schemas.microsoft.com/office/drawing/2014/main" id="{E231873B-FADD-4CDD-9A48-384D8529340B}"/>
               </a:ext>
             </a:extLst>
           </p:cNvPr>
@@ -4962,7 +4962,7 @@
           <p:cNvPr id="19" name="">
             <a:extLst xmlns:a="http://schemas.openxmlformats.org/drawingml/2006/main">
               <a:ext uri="{FF2B5EF4-FFF2-40B4-BE49-F238E27FC236}">
-                <a16:creationId xmlns:a16="http://schemas.microsoft.com/office/drawing/2014/main" id="{8FA33EEA-9390-4BA7-8B05-2BD0ABFC07A7}"/>
+                <a16:creationId xmlns:a16="http://schemas.microsoft.com/office/drawing/2014/main" id="{526BE33E-A5A2-4F61-B1F5-AA321E23570E}"/>
               </a:ext>
             </a:extLst>
           </p:cNvPr>
@@ -4994,7 +4994,7 @@
           <p:cNvPr id="20" name="">
             <a:extLst xmlns:a="http://schemas.openxmlformats.org/drawingml/2006/main">
               <a:ext uri="{FF2B5EF4-FFF2-40B4-BE49-F238E27FC236}">
-                <a16:creationId xmlns:a16="http://schemas.microsoft.com/office/drawing/2014/main" id="{A4350722-AC0C-4121-9FA8-FAE0ACAF3CF7}"/>
+                <a16:creationId xmlns:a16="http://schemas.microsoft.com/office/drawing/2014/main" id="{D62B1BDC-ACE7-4B12-9968-AA39607C9B1E}"/>
               </a:ext>
             </a:extLst>
           </p:cNvPr>
@@ -5051,7 +5051,7 @@
           <p:cNvPr id="21" name="">
             <a:extLst xmlns:a="http://schemas.openxmlformats.org/drawingml/2006/main">
               <a:ext uri="{FF2B5EF4-FFF2-40B4-BE49-F238E27FC236}">
-                <a16:creationId xmlns:a16="http://schemas.microsoft.com/office/drawing/2014/main" id="{721526A4-9002-492B-97FB-65B6D03D4603}"/>
+                <a16:creationId xmlns:a16="http://schemas.microsoft.com/office/drawing/2014/main" id="{BAED3878-0B6F-492F-8597-221BC8B3F352}"/>
               </a:ext>
             </a:extLst>
           </p:cNvPr>
@@ -5108,7 +5108,7 @@
           <p:cNvPr id="22" name="">
             <a:extLst xmlns:a="http://schemas.openxmlformats.org/drawingml/2006/main">
               <a:ext uri="{FF2B5EF4-FFF2-40B4-BE49-F238E27FC236}">
-                <a16:creationId xmlns:a16="http://schemas.microsoft.com/office/drawing/2014/main" id="{50090DEB-BFEC-43A6-9D41-E084BE42F853}"/>
+                <a16:creationId xmlns:a16="http://schemas.microsoft.com/office/drawing/2014/main" id="{8D6C473C-6601-4C1F-9B56-D65F26B70E5C}"/>
               </a:ext>
             </a:extLst>
           </p:cNvPr>
@@ -5165,7 +5165,7 @@
           <p:cNvPr id="23" name="">
             <a:extLst xmlns:a="http://schemas.openxmlformats.org/drawingml/2006/main">
               <a:ext uri="{FF2B5EF4-FFF2-40B4-BE49-F238E27FC236}">
-                <a16:creationId xmlns:a16="http://schemas.microsoft.com/office/drawing/2014/main" id="{E0629DE7-F42E-458B-8EA9-156882BADF3F}"/>
+                <a16:creationId xmlns:a16="http://schemas.microsoft.com/office/drawing/2014/main" id="{612B226D-62B3-46A7-ADBE-31DCD13AE0EA}"/>
               </a:ext>
             </a:extLst>
           </p:cNvPr>
@@ -5195,7 +5195,7 @@
           <p:cNvPr id="24" name="">
             <a:extLst xmlns:a="http://schemas.openxmlformats.org/drawingml/2006/main">
               <a:ext uri="{FF2B5EF4-FFF2-40B4-BE49-F238E27FC236}">
-                <a16:creationId xmlns:a16="http://schemas.microsoft.com/office/drawing/2014/main" id="{09915B2A-E60C-4D21-AF70-A78A4E8D7B60}"/>
+                <a16:creationId xmlns:a16="http://schemas.microsoft.com/office/drawing/2014/main" id="{B4380685-92BB-4EA1-95E0-1DD5AC156BB3}"/>
               </a:ext>
             </a:extLst>
           </p:cNvPr>
@@ -5229,7 +5229,7 @@
           <p:cNvPr id="25" name="">
             <a:extLst xmlns:a="http://schemas.openxmlformats.org/drawingml/2006/main">
               <a:ext uri="{FF2B5EF4-FFF2-40B4-BE49-F238E27FC236}">
-                <a16:creationId xmlns:a16="http://schemas.microsoft.com/office/drawing/2014/main" id="{1A8ACAC1-8ADC-447E-8524-61E9611BD1AB}"/>
+                <a16:creationId xmlns:a16="http://schemas.microsoft.com/office/drawing/2014/main" id="{BC5C885F-72E7-44F3-A742-7FD5DB90391C}"/>
               </a:ext>
             </a:extLst>
           </p:cNvPr>
@@ -5261,7 +5261,7 @@
           <p:cNvPr id="26" name="">
             <a:extLst xmlns:a="http://schemas.openxmlformats.org/drawingml/2006/main">
               <a:ext uri="{FF2B5EF4-FFF2-40B4-BE49-F238E27FC236}">
-                <a16:creationId xmlns:a16="http://schemas.microsoft.com/office/drawing/2014/main" id="{6C817142-B504-4613-9874-BAE617563FFF}"/>
+                <a16:creationId xmlns:a16="http://schemas.microsoft.com/office/drawing/2014/main" id="{BC94BAB0-6010-4C2F-972C-95161498134C}"/>
               </a:ext>
             </a:extLst>
           </p:cNvPr>
@@ -5318,7 +5318,7 @@
           <p:cNvPr id="27" name="">
             <a:extLst xmlns:a="http://schemas.openxmlformats.org/drawingml/2006/main">
               <a:ext uri="{FF2B5EF4-FFF2-40B4-BE49-F238E27FC236}">
-                <a16:creationId xmlns:a16="http://schemas.microsoft.com/office/drawing/2014/main" id="{A30CE130-77F5-4912-9C9E-8AAE171C2188}"/>
+                <a16:creationId xmlns:a16="http://schemas.microsoft.com/office/drawing/2014/main" id="{50A3C85F-A793-481A-970C-5B9C07223501}"/>
               </a:ext>
             </a:extLst>
           </p:cNvPr>
@@ -5375,7 +5375,7 @@
           <p:cNvPr id="28" name="">
             <a:extLst xmlns:a="http://schemas.openxmlformats.org/drawingml/2006/main">
               <a:ext uri="{FF2B5EF4-FFF2-40B4-BE49-F238E27FC236}">
-                <a16:creationId xmlns:a16="http://schemas.microsoft.com/office/drawing/2014/main" id="{DB3634BF-F12C-47BB-94BD-969F3E5C8B8C}"/>
+                <a16:creationId xmlns:a16="http://schemas.microsoft.com/office/drawing/2014/main" id="{AAD68C50-F435-4252-BAC8-659B0223C17A}"/>
               </a:ext>
             </a:extLst>
           </p:cNvPr>
@@ -5432,7 +5432,7 @@
           <p:cNvPr id="29" name="">
             <a:extLst xmlns:a="http://schemas.openxmlformats.org/drawingml/2006/main">
               <a:ext uri="{FF2B5EF4-FFF2-40B4-BE49-F238E27FC236}">
-                <a16:creationId xmlns:a16="http://schemas.microsoft.com/office/drawing/2014/main" id="{EE491FEC-78CE-486A-AF22-0F6670D0A70C}"/>
+                <a16:creationId xmlns:a16="http://schemas.microsoft.com/office/drawing/2014/main" id="{4FEC1028-4F2A-4C1A-9CD7-3D6736455A3F}"/>
               </a:ext>
             </a:extLst>
           </p:cNvPr>
@@ -5462,7 +5462,7 @@
           <p:cNvPr id="30" name="">
             <a:extLst xmlns:a="http://schemas.openxmlformats.org/drawingml/2006/main">
               <a:ext uri="{FF2B5EF4-FFF2-40B4-BE49-F238E27FC236}">
-                <a16:creationId xmlns:a16="http://schemas.microsoft.com/office/drawing/2014/main" id="{557AA3BD-2DEF-4C4A-A862-3BBB54C9D229}"/>
+                <a16:creationId xmlns:a16="http://schemas.microsoft.com/office/drawing/2014/main" id="{6812D253-CA01-4C2A-842D-695EDA16FAA6}"/>
               </a:ext>
             </a:extLst>
           </p:cNvPr>
@@ -5496,7 +5496,7 @@
           <p:cNvPr id="31" name="">
             <a:extLst xmlns:a="http://schemas.openxmlformats.org/drawingml/2006/main">
               <a:ext uri="{FF2B5EF4-FFF2-40B4-BE49-F238E27FC236}">
-                <a16:creationId xmlns:a16="http://schemas.microsoft.com/office/drawing/2014/main" id="{42F1C0C9-28C4-419F-B640-0E60DB2C7F1C}"/>
+                <a16:creationId xmlns:a16="http://schemas.microsoft.com/office/drawing/2014/main" id="{D62D44F3-D60D-4ACA-82D3-E748E22F186F}"/>
               </a:ext>
             </a:extLst>
           </p:cNvPr>
@@ -5528,7 +5528,7 @@
           <p:cNvPr id="32" name="">
             <a:extLst xmlns:a="http://schemas.openxmlformats.org/drawingml/2006/main">
               <a:ext uri="{FF2B5EF4-FFF2-40B4-BE49-F238E27FC236}">
-                <a16:creationId xmlns:a16="http://schemas.microsoft.com/office/drawing/2014/main" id="{505C77D9-6EA8-4DD6-B951-DB41C5149BB0}"/>
+                <a16:creationId xmlns:a16="http://schemas.microsoft.com/office/drawing/2014/main" id="{DC58FA19-DC56-477A-8869-34651E80A20C}"/>
               </a:ext>
             </a:extLst>
           </p:cNvPr>
@@ -5585,7 +5585,7 @@
           <p:cNvPr id="33" name="">
             <a:extLst xmlns:a="http://schemas.openxmlformats.org/drawingml/2006/main">
               <a:ext uri="{FF2B5EF4-FFF2-40B4-BE49-F238E27FC236}">
-                <a16:creationId xmlns:a16="http://schemas.microsoft.com/office/drawing/2014/main" id="{5590A043-6375-4EBF-A3F3-E3D3D9E1FA49}"/>
+                <a16:creationId xmlns:a16="http://schemas.microsoft.com/office/drawing/2014/main" id="{6E5AF0CE-770B-4F9F-83D4-53751B840803}"/>
               </a:ext>
             </a:extLst>
           </p:cNvPr>
@@ -5642,7 +5642,7 @@
           <p:cNvPr id="34" name="">
             <a:extLst xmlns:a="http://schemas.openxmlformats.org/drawingml/2006/main">
               <a:ext uri="{FF2B5EF4-FFF2-40B4-BE49-F238E27FC236}">
-                <a16:creationId xmlns:a16="http://schemas.microsoft.com/office/drawing/2014/main" id="{53CE8DA6-6638-4B94-B1FD-079ED4AD0D52}"/>
+                <a16:creationId xmlns:a16="http://schemas.microsoft.com/office/drawing/2014/main" id="{F828A7A2-F8DF-46C0-AA1F-40BF172DA69C}"/>
               </a:ext>
             </a:extLst>
           </p:cNvPr>
@@ -5699,7 +5699,7 @@
           <p:cNvPr id="35" name="">
             <a:extLst xmlns:a="http://schemas.openxmlformats.org/drawingml/2006/main">
               <a:ext uri="{FF2B5EF4-FFF2-40B4-BE49-F238E27FC236}">
-                <a16:creationId xmlns:a16="http://schemas.microsoft.com/office/drawing/2014/main" id="{F6064164-23C9-44C7-B640-1C6D2B1157BE}"/>
+                <a16:creationId xmlns:a16="http://schemas.microsoft.com/office/drawing/2014/main" id="{9D03FF3B-30FA-45B3-8075-508D71BA030A}"/>
               </a:ext>
             </a:extLst>
           </p:cNvPr>
@@ -5729,7 +5729,7 @@
           <p:cNvPr id="36" name="">
             <a:extLst xmlns:a="http://schemas.openxmlformats.org/drawingml/2006/main">
               <a:ext uri="{FF2B5EF4-FFF2-40B4-BE49-F238E27FC236}">
-                <a16:creationId xmlns:a16="http://schemas.microsoft.com/office/drawing/2014/main" id="{6EAFC55A-5071-453A-B400-7261430D1EED}"/>
+                <a16:creationId xmlns:a16="http://schemas.microsoft.com/office/drawing/2014/main" id="{C25E4C7B-F1E2-4C80-8256-21BCD6F182E5}"/>
               </a:ext>
             </a:extLst>
           </p:cNvPr>
@@ -5763,7 +5763,7 @@
           <p:cNvPr id="37" name="">
             <a:extLst xmlns:a="http://schemas.openxmlformats.org/drawingml/2006/main">
               <a:ext uri="{FF2B5EF4-FFF2-40B4-BE49-F238E27FC236}">
-                <a16:creationId xmlns:a16="http://schemas.microsoft.com/office/drawing/2014/main" id="{F40D1F67-7448-48F1-BFD6-06570E300B89}"/>
+                <a16:creationId xmlns:a16="http://schemas.microsoft.com/office/drawing/2014/main" id="{935FEFBE-1DAA-4DF5-A0E2-9310DD9B9667}"/>
               </a:ext>
             </a:extLst>
           </p:cNvPr>
@@ -5795,7 +5795,7 @@
           <p:cNvPr id="38" name="">
             <a:extLst xmlns:a="http://schemas.openxmlformats.org/drawingml/2006/main">
               <a:ext uri="{FF2B5EF4-FFF2-40B4-BE49-F238E27FC236}">
-                <a16:creationId xmlns:a16="http://schemas.microsoft.com/office/drawing/2014/main" id="{FB712458-A63B-437D-AE49-D245D8C64F97}"/>
+                <a16:creationId xmlns:a16="http://schemas.microsoft.com/office/drawing/2014/main" id="{EA98122E-41DA-4921-9F43-FFA0263B5279}"/>
               </a:ext>
             </a:extLst>
           </p:cNvPr>
@@ -5852,7 +5852,7 @@
           <p:cNvPr id="39" name="">
             <a:extLst xmlns:a="http://schemas.openxmlformats.org/drawingml/2006/main">
               <a:ext uri="{FF2B5EF4-FFF2-40B4-BE49-F238E27FC236}">
-                <a16:creationId xmlns:a16="http://schemas.microsoft.com/office/drawing/2014/main" id="{EDA0F901-0AB3-4214-ABE9-0457C137BDBF}"/>
+                <a16:creationId xmlns:a16="http://schemas.microsoft.com/office/drawing/2014/main" id="{74750590-FAFC-45E8-8130-4BB3DE9A6CEB}"/>
               </a:ext>
             </a:extLst>
           </p:cNvPr>
@@ -5909,7 +5909,7 @@
           <p:cNvPr id="40" name="">
             <a:extLst xmlns:a="http://schemas.openxmlformats.org/drawingml/2006/main">
               <a:ext uri="{FF2B5EF4-FFF2-40B4-BE49-F238E27FC236}">
-                <a16:creationId xmlns:a16="http://schemas.microsoft.com/office/drawing/2014/main" id="{FA517CE7-EB64-44BE-9ACD-2CB535E0C80E}"/>
+                <a16:creationId xmlns:a16="http://schemas.microsoft.com/office/drawing/2014/main" id="{C8AA26CD-1561-4137-B2F8-96F52340C63C}"/>
               </a:ext>
             </a:extLst>
           </p:cNvPr>
@@ -5966,7 +5966,7 @@
           <p:cNvPr id="41" name="">
             <a:extLst xmlns:a="http://schemas.openxmlformats.org/drawingml/2006/main">
               <a:ext uri="{FF2B5EF4-FFF2-40B4-BE49-F238E27FC236}">
-                <a16:creationId xmlns:a16="http://schemas.microsoft.com/office/drawing/2014/main" id="{7E6B29F5-4399-4058-BAC8-72B37F3DFD24}"/>
+                <a16:creationId xmlns:a16="http://schemas.microsoft.com/office/drawing/2014/main" id="{10C88B33-8EAE-4229-ACD4-29A819EBA082}"/>
               </a:ext>
             </a:extLst>
           </p:cNvPr>
@@ -5998,7 +5998,7 @@
           <p:cNvPr id="42" name="">
             <a:extLst xmlns:a="http://schemas.openxmlformats.org/drawingml/2006/main">
               <a:ext uri="{FF2B5EF4-FFF2-40B4-BE49-F238E27FC236}">
-                <a16:creationId xmlns:a16="http://schemas.microsoft.com/office/drawing/2014/main" id="{46CD561A-87E7-4881-BC98-B398F457AD8D}"/>
+                <a16:creationId xmlns:a16="http://schemas.microsoft.com/office/drawing/2014/main" id="{E9A0A87D-5A32-4343-86FC-D468F0C6C21A}"/>
               </a:ext>
             </a:extLst>
           </p:cNvPr>
@@ -6055,7 +6055,7 @@
           <p:cNvPr id="43" name="">
             <a:extLst xmlns:a="http://schemas.openxmlformats.org/drawingml/2006/main">
               <a:ext uri="{FF2B5EF4-FFF2-40B4-BE49-F238E27FC236}">
-                <a16:creationId xmlns:a16="http://schemas.microsoft.com/office/drawing/2014/main" id="{D604298F-DF6F-4C53-BE37-32BF937EA788}"/>
+                <a16:creationId xmlns:a16="http://schemas.microsoft.com/office/drawing/2014/main" id="{075A0B91-BA13-44E0-9C59-879A4E8FF2CF}"/>
               </a:ext>
             </a:extLst>
           </p:cNvPr>
@@ -6112,7 +6112,7 @@
           <p:cNvPr id="44" name="">
             <a:extLst xmlns:a="http://schemas.openxmlformats.org/drawingml/2006/main">
               <a:ext uri="{FF2B5EF4-FFF2-40B4-BE49-F238E27FC236}">
-                <a16:creationId xmlns:a16="http://schemas.microsoft.com/office/drawing/2014/main" id="{2BF517D5-D9DE-42B4-AD4A-3D3D311B48EF}"/>
+                <a16:creationId xmlns:a16="http://schemas.microsoft.com/office/drawing/2014/main" id="{AE215257-E8C6-4828-8285-2F72323810C6}"/>
               </a:ext>
             </a:extLst>
           </p:cNvPr>
@@ -6169,7 +6169,7 @@
           <p:cNvPr id="45" name="">
             <a:extLst xmlns:a="http://schemas.openxmlformats.org/drawingml/2006/main">
               <a:ext uri="{FF2B5EF4-FFF2-40B4-BE49-F238E27FC236}">
-                <a16:creationId xmlns:a16="http://schemas.microsoft.com/office/drawing/2014/main" id="{839FB54A-A2E8-40A1-B5D0-4BCC3BB078C4}"/>
+                <a16:creationId xmlns:a16="http://schemas.microsoft.com/office/drawing/2014/main" id="{8C83AAA6-F7B4-4F72-B190-75801E628C87}"/>
               </a:ext>
             </a:extLst>
           </p:cNvPr>
@@ -6226,7 +6226,7 @@
           <p:cNvPr id="46" name="">
             <a:extLst xmlns:a="http://schemas.openxmlformats.org/drawingml/2006/main">
               <a:ext uri="{FF2B5EF4-FFF2-40B4-BE49-F238E27FC236}">
-                <a16:creationId xmlns:a16="http://schemas.microsoft.com/office/drawing/2014/main" id="{DDD383B0-0982-4147-9B77-1D5BF2B70CDE}"/>
+                <a16:creationId xmlns:a16="http://schemas.microsoft.com/office/drawing/2014/main" id="{F678E5CC-DDB2-4691-8167-51AE6C48F8E5}"/>
               </a:ext>
             </a:extLst>
           </p:cNvPr>
@@ -6283,7 +6283,7 @@
           <p:cNvPr id="47" name="">
             <a:extLst xmlns:a="http://schemas.openxmlformats.org/drawingml/2006/main">
               <a:ext uri="{FF2B5EF4-FFF2-40B4-BE49-F238E27FC236}">
-                <a16:creationId xmlns:a16="http://schemas.microsoft.com/office/drawing/2014/main" id="{A22D6975-F122-4418-8F1B-68CB500DF560}"/>
+                <a16:creationId xmlns:a16="http://schemas.microsoft.com/office/drawing/2014/main" id="{926FCD29-63CD-46C5-937D-4C892697FA27}"/>
               </a:ext>
             </a:extLst>
           </p:cNvPr>
@@ -6340,7 +6340,7 @@
           <p:cNvPr id="48" name="">
             <a:extLst xmlns:a="http://schemas.openxmlformats.org/drawingml/2006/main">
               <a:ext uri="{FF2B5EF4-FFF2-40B4-BE49-F238E27FC236}">
-                <a16:creationId xmlns:a16="http://schemas.microsoft.com/office/drawing/2014/main" id="{26BED696-33D1-47B3-89DF-50431B560A0A}"/>
+                <a16:creationId xmlns:a16="http://schemas.microsoft.com/office/drawing/2014/main" id="{8D48BCE8-3DEE-42DD-BF5C-6E48C61BF442}"/>
               </a:ext>
             </a:extLst>
           </p:cNvPr>
@@ -6397,7 +6397,7 @@
           <p:cNvPr id="49" name="">
             <a:extLst xmlns:a="http://schemas.openxmlformats.org/drawingml/2006/main">
               <a:ext uri="{FF2B5EF4-FFF2-40B4-BE49-F238E27FC236}">
-                <a16:creationId xmlns:a16="http://schemas.microsoft.com/office/drawing/2014/main" id="{D7C03A36-5119-455C-8DE1-412F4497C9E7}"/>
+                <a16:creationId xmlns:a16="http://schemas.microsoft.com/office/drawing/2014/main" id="{FF1E7BD1-99B3-4057-8313-3060B5963D05}"/>
               </a:ext>
             </a:extLst>
           </p:cNvPr>
@@ -6477,7 +6477,7 @@
           <p:cNvPr id="50" name="">
             <a:extLst xmlns:a="http://schemas.openxmlformats.org/drawingml/2006/main">
               <a:ext uri="{FF2B5EF4-FFF2-40B4-BE49-F238E27FC236}">
-                <a16:creationId xmlns:a16="http://schemas.microsoft.com/office/drawing/2014/main" id="{4C730EFB-3D10-4865-82BE-23861229B3E7}"/>
+                <a16:creationId xmlns:a16="http://schemas.microsoft.com/office/drawing/2014/main" id="{472D1117-0D17-4503-B852-BD6388BE1E76}"/>
               </a:ext>
             </a:extLst>
           </p:cNvPr>
@@ -6534,7 +6534,7 @@
           <p:cNvPr id="51" name="">
             <a:extLst xmlns:a="http://schemas.openxmlformats.org/drawingml/2006/main">
               <a:ext uri="{FF2B5EF4-FFF2-40B4-BE49-F238E27FC236}">
-                <a16:creationId xmlns:a16="http://schemas.microsoft.com/office/drawing/2014/main" id="{4B0293DD-0E49-4D19-A29A-694BCD519734}"/>
+                <a16:creationId xmlns:a16="http://schemas.microsoft.com/office/drawing/2014/main" id="{276721D9-5DC2-4C45-9FB9-33B17E473BBE}"/>
               </a:ext>
             </a:extLst>
           </p:cNvPr>
@@ -6614,7 +6614,7 @@
           <p:cNvPr id="52" name="">
             <a:extLst xmlns:a="http://schemas.openxmlformats.org/drawingml/2006/main">
               <a:ext uri="{FF2B5EF4-FFF2-40B4-BE49-F238E27FC236}">
-                <a16:creationId xmlns:a16="http://schemas.microsoft.com/office/drawing/2014/main" id="{0E1904B7-6066-4EFA-BACC-F2FF26849AAB}"/>
+                <a16:creationId xmlns:a16="http://schemas.microsoft.com/office/drawing/2014/main" id="{C265B8ED-8D31-47D4-B475-BF6C2D090A80}"/>
               </a:ext>
             </a:extLst>
           </p:cNvPr>
@@ -6671,7 +6671,7 @@
           <p:cNvPr id="53" name="">
             <a:extLst xmlns:a="http://schemas.openxmlformats.org/drawingml/2006/main">
               <a:ext uri="{FF2B5EF4-FFF2-40B4-BE49-F238E27FC236}">
-                <a16:creationId xmlns:a16="http://schemas.microsoft.com/office/drawing/2014/main" id="{6B7ACDC1-9A43-4DB6-9FE0-46826333945E}"/>
+                <a16:creationId xmlns:a16="http://schemas.microsoft.com/office/drawing/2014/main" id="{9816FBB1-CDAD-49C1-B875-980DCAA186AD}"/>
               </a:ext>
             </a:extLst>
           </p:cNvPr>
@@ -6751,7 +6751,7 @@
           <p:cNvPr id="54" name="">
             <a:extLst xmlns:a="http://schemas.openxmlformats.org/drawingml/2006/main">
               <a:ext uri="{FF2B5EF4-FFF2-40B4-BE49-F238E27FC236}">
-                <a16:creationId xmlns:a16="http://schemas.microsoft.com/office/drawing/2014/main" id="{48CB09C1-E5C1-4F4F-BF27-95743F9CCE8C}"/>
+                <a16:creationId xmlns:a16="http://schemas.microsoft.com/office/drawing/2014/main" id="{C0E0350A-C17C-4632-916F-4046490FBEF8}"/>
               </a:ext>
             </a:extLst>
           </p:cNvPr>
@@ -6783,7 +6783,7 @@
           <p:cNvPr id="55" name="">
             <a:extLst xmlns:a="http://schemas.openxmlformats.org/drawingml/2006/main">
               <a:ext uri="{FF2B5EF4-FFF2-40B4-BE49-F238E27FC236}">
-                <a16:creationId xmlns:a16="http://schemas.microsoft.com/office/drawing/2014/main" id="{EB306481-6171-4FB0-A7C3-4AE05C7DA477}"/>
+                <a16:creationId xmlns:a16="http://schemas.microsoft.com/office/drawing/2014/main" id="{75422F59-704F-4766-B111-9F6F4C0CA65B}"/>
               </a:ext>
             </a:extLst>
           </p:cNvPr>
@@ -6838,7 +6838,7 @@
     </p:spTree>
     <p:extLst>
       <p:ext uri="{BB962C8B-B14F-4D97-AF65-F5344CB8AC3E}">
-        <p14:creationId xmlns:p14="http://schemas.microsoft.com/office/powerpoint/2010/main" val="288603465"/>
+        <p14:creationId xmlns:p14="http://schemas.microsoft.com/office/powerpoint/2010/main" val="127154672"/>
       </p:ext>
     </p:extLst>
   </p:cSld>
@@ -6869,7 +6869,7 @@
           <p:cNvPr id="41" name="">
             <a:extLst xmlns:a="http://schemas.openxmlformats.org/drawingml/2006/main">
               <a:ext uri="{FF2B5EF4-FFF2-40B4-BE49-F238E27FC236}">
-                <a16:creationId xmlns:a16="http://schemas.microsoft.com/office/drawing/2014/main" id="{91FF1F08-F008-4785-9B55-6FAD6AC6D840}"/>
+                <a16:creationId xmlns:a16="http://schemas.microsoft.com/office/drawing/2014/main" id="{A301C061-E2C7-4E2F-91DF-7DE8B5B0F300}"/>
               </a:ext>
             </a:extLst>
           </p:cNvPr>
@@ -6899,7 +6899,7 @@
           <p:cNvPr id="2" name="">
             <a:extLst xmlns:a="http://schemas.openxmlformats.org/drawingml/2006/main">
               <a:ext uri="{FF2B5EF4-FFF2-40B4-BE49-F238E27FC236}">
-                <a16:creationId xmlns:a16="http://schemas.microsoft.com/office/drawing/2014/main" id="{606FA963-A8D8-4F71-8B2E-F55DB82437A1}"/>
+                <a16:creationId xmlns:a16="http://schemas.microsoft.com/office/drawing/2014/main" id="{CC719CD3-A7A4-475D-8AF9-DA1FB83BC1D1}"/>
               </a:ext>
             </a:extLst>
           </p:cNvPr>
@@ -6956,7 +6956,7 @@
           <p:cNvPr id="3" name="">
             <a:extLst xmlns:a="http://schemas.openxmlformats.org/drawingml/2006/main">
               <a:ext uri="{FF2B5EF4-FFF2-40B4-BE49-F238E27FC236}">
-                <a16:creationId xmlns:a16="http://schemas.microsoft.com/office/drawing/2014/main" id="{19CCA6BF-76C6-4AE8-8F69-BCF50D948CEC}"/>
+                <a16:creationId xmlns:a16="http://schemas.microsoft.com/office/drawing/2014/main" id="{AF93F2E7-5809-40D6-BB3F-9E209E40E3CD}"/>
               </a:ext>
             </a:extLst>
           </p:cNvPr>
@@ -6986,7 +6986,7 @@
           <p:cNvPr id="4" name="">
             <a:extLst xmlns:a="http://schemas.openxmlformats.org/drawingml/2006/main">
               <a:ext uri="{FF2B5EF4-FFF2-40B4-BE49-F238E27FC236}">
-                <a16:creationId xmlns:a16="http://schemas.microsoft.com/office/drawing/2014/main" id="{C1671335-9E4B-4137-835C-163381B0BA5E}"/>
+                <a16:creationId xmlns:a16="http://schemas.microsoft.com/office/drawing/2014/main" id="{788ED17C-4663-4667-BB9D-B36D42EAC077}"/>
               </a:ext>
             </a:extLst>
           </p:cNvPr>
@@ -7043,7 +7043,7 @@
           <p:cNvPr id="5" name="">
             <a:extLst xmlns:a="http://schemas.openxmlformats.org/drawingml/2006/main">
               <a:ext uri="{FF2B5EF4-FFF2-40B4-BE49-F238E27FC236}">
-                <a16:creationId xmlns:a16="http://schemas.microsoft.com/office/drawing/2014/main" id="{2F69188F-1FD1-48DD-9944-FC3A70F6534B}"/>
+                <a16:creationId xmlns:a16="http://schemas.microsoft.com/office/drawing/2014/main" id="{8802B30B-12E0-461A-BCE3-B9620C672F11}"/>
               </a:ext>
             </a:extLst>
           </p:cNvPr>
@@ -7100,7 +7100,7 @@
           <p:cNvPr id="6" name="">
             <a:extLst xmlns:a="http://schemas.openxmlformats.org/drawingml/2006/main">
               <a:ext uri="{FF2B5EF4-FFF2-40B4-BE49-F238E27FC236}">
-                <a16:creationId xmlns:a16="http://schemas.microsoft.com/office/drawing/2014/main" id="{C7D567CC-257A-4BDD-98AB-E01ABA3B4B01}"/>
+                <a16:creationId xmlns:a16="http://schemas.microsoft.com/office/drawing/2014/main" id="{F4C86D2C-BE11-47A6-B899-C5CC7D7E6843}"/>
               </a:ext>
             </a:extLst>
           </p:cNvPr>
@@ -7157,7 +7157,7 @@
           <p:cNvPr id="7" name="">
             <a:extLst xmlns:a="http://schemas.openxmlformats.org/drawingml/2006/main">
               <a:ext uri="{FF2B5EF4-FFF2-40B4-BE49-F238E27FC236}">
-                <a16:creationId xmlns:a16="http://schemas.microsoft.com/office/drawing/2014/main" id="{3B117E09-F23C-46E8-A705-7136AF37F2BD}"/>
+                <a16:creationId xmlns:a16="http://schemas.microsoft.com/office/drawing/2014/main" id="{16791E65-0057-486F-8D7C-69535072473F}"/>
               </a:ext>
             </a:extLst>
           </p:cNvPr>
@@ -7187,7 +7187,7 @@
           <p:cNvPr id="8" name="">
             <a:extLst xmlns:a="http://schemas.openxmlformats.org/drawingml/2006/main">
               <a:ext uri="{FF2B5EF4-FFF2-40B4-BE49-F238E27FC236}">
-                <a16:creationId xmlns:a16="http://schemas.microsoft.com/office/drawing/2014/main" id="{A1AAC4F0-ED51-4DD2-BC1F-C23E6C52CB51}"/>
+                <a16:creationId xmlns:a16="http://schemas.microsoft.com/office/drawing/2014/main" id="{677082B3-FCF0-4940-B461-AAA0E615996F}"/>
               </a:ext>
             </a:extLst>
           </p:cNvPr>
@@ -7244,7 +7244,7 @@
           <p:cNvPr id="9" name="">
             <a:extLst xmlns:a="http://schemas.openxmlformats.org/drawingml/2006/main">
               <a:ext uri="{FF2B5EF4-FFF2-40B4-BE49-F238E27FC236}">
-                <a16:creationId xmlns:a16="http://schemas.microsoft.com/office/drawing/2014/main" id="{F175105E-4B59-49DF-9023-9D6E6C552682}"/>
+                <a16:creationId xmlns:a16="http://schemas.microsoft.com/office/drawing/2014/main" id="{FE505008-2468-44D0-AAFF-5229649E1FEE}"/>
               </a:ext>
             </a:extLst>
           </p:cNvPr>
@@ -7276,7 +7276,7 @@
           <p:cNvPr id="10" name="">
             <a:extLst xmlns:a="http://schemas.openxmlformats.org/drawingml/2006/main">
               <a:ext uri="{FF2B5EF4-FFF2-40B4-BE49-F238E27FC236}">
-                <a16:creationId xmlns:a16="http://schemas.microsoft.com/office/drawing/2014/main" id="{6BDC9029-3799-4DF6-B88A-BAE0BB242FB3}"/>
+                <a16:creationId xmlns:a16="http://schemas.microsoft.com/office/drawing/2014/main" id="{848BC55C-796D-4115-A2EC-3270E237D7A3}"/>
               </a:ext>
             </a:extLst>
           </p:cNvPr>
@@ -7333,7 +7333,7 @@
           <p:cNvPr id="11" name="">
             <a:extLst xmlns:a="http://schemas.openxmlformats.org/drawingml/2006/main">
               <a:ext uri="{FF2B5EF4-FFF2-40B4-BE49-F238E27FC236}">
-                <a16:creationId xmlns:a16="http://schemas.microsoft.com/office/drawing/2014/main" id="{FA0D3BDA-641E-43F4-9C80-B182D4999732}"/>
+                <a16:creationId xmlns:a16="http://schemas.microsoft.com/office/drawing/2014/main" id="{592009E0-71CD-4CAA-9618-8CE24EBC3BFA}"/>
               </a:ext>
             </a:extLst>
           </p:cNvPr>
@@ -7390,7 +7390,7 @@
           <p:cNvPr id="12" name="">
             <a:extLst xmlns:a="http://schemas.openxmlformats.org/drawingml/2006/main">
               <a:ext uri="{FF2B5EF4-FFF2-40B4-BE49-F238E27FC236}">
-                <a16:creationId xmlns:a16="http://schemas.microsoft.com/office/drawing/2014/main" id="{E517D86C-B5F0-49D6-8EFA-D955781E7C0B}"/>
+                <a16:creationId xmlns:a16="http://schemas.microsoft.com/office/drawing/2014/main" id="{A8B80D8B-DDE7-4BE0-8B1C-634789B0F368}"/>
               </a:ext>
             </a:extLst>
           </p:cNvPr>
@@ -7447,7 +7447,7 @@
           <p:cNvPr id="13" name="">
             <a:extLst xmlns:a="http://schemas.openxmlformats.org/drawingml/2006/main">
               <a:ext uri="{FF2B5EF4-FFF2-40B4-BE49-F238E27FC236}">
-                <a16:creationId xmlns:a16="http://schemas.microsoft.com/office/drawing/2014/main" id="{5F46BEC4-8B57-498B-9284-5CA8F9D9B326}"/>
+                <a16:creationId xmlns:a16="http://schemas.microsoft.com/office/drawing/2014/main" id="{374B067E-0696-4AE6-A303-AC54133642CB}"/>
               </a:ext>
             </a:extLst>
           </p:cNvPr>
@@ -7479,7 +7479,7 @@
           <p:cNvPr id="14" name="">
             <a:extLst xmlns:a="http://schemas.openxmlformats.org/drawingml/2006/main">
               <a:ext uri="{FF2B5EF4-FFF2-40B4-BE49-F238E27FC236}">
-                <a16:creationId xmlns:a16="http://schemas.microsoft.com/office/drawing/2014/main" id="{720E859E-54D7-4672-B7BA-CB3803C2D1E2}"/>
+                <a16:creationId xmlns:a16="http://schemas.microsoft.com/office/drawing/2014/main" id="{58AEF8F1-43C1-44A4-BA32-3150C8B62F2A}"/>
               </a:ext>
             </a:extLst>
           </p:cNvPr>
@@ -7536,7 +7536,7 @@
           <p:cNvPr id="15" name="">
             <a:extLst xmlns:a="http://schemas.openxmlformats.org/drawingml/2006/main">
               <a:ext uri="{FF2B5EF4-FFF2-40B4-BE49-F238E27FC236}">
-                <a16:creationId xmlns:a16="http://schemas.microsoft.com/office/drawing/2014/main" id="{8BE11C9A-1772-4E80-8CB0-767EFA342EC7}"/>
+                <a16:creationId xmlns:a16="http://schemas.microsoft.com/office/drawing/2014/main" id="{9E3665AD-27A9-4867-86E7-784F9BCB6B3F}"/>
               </a:ext>
             </a:extLst>
           </p:cNvPr>
@@ -7593,7 +7593,7 @@
           <p:cNvPr id="16" name="">
             <a:extLst xmlns:a="http://schemas.openxmlformats.org/drawingml/2006/main">
               <a:ext uri="{FF2B5EF4-FFF2-40B4-BE49-F238E27FC236}">
-                <a16:creationId xmlns:a16="http://schemas.microsoft.com/office/drawing/2014/main" id="{9CFC009E-47C6-40F5-80C7-584D1D137162}"/>
+                <a16:creationId xmlns:a16="http://schemas.microsoft.com/office/drawing/2014/main" id="{FC3489C7-8409-4594-8BB0-2261D2E73CAA}"/>
               </a:ext>
             </a:extLst>
           </p:cNvPr>
@@ -7650,7 +7650,7 @@
           <p:cNvPr id="17" name="">
             <a:extLst xmlns:a="http://schemas.openxmlformats.org/drawingml/2006/main">
               <a:ext uri="{FF2B5EF4-FFF2-40B4-BE49-F238E27FC236}">
-                <a16:creationId xmlns:a16="http://schemas.microsoft.com/office/drawing/2014/main" id="{89D8904B-A5EC-435E-BE38-ECA294CF0F40}"/>
+                <a16:creationId xmlns:a16="http://schemas.microsoft.com/office/drawing/2014/main" id="{97E57877-BA7A-4BDC-85B5-0FAB0B31FC6A}"/>
               </a:ext>
             </a:extLst>
           </p:cNvPr>
@@ -7682,7 +7682,7 @@
           <p:cNvPr id="18" name="">
             <a:extLst xmlns:a="http://schemas.openxmlformats.org/drawingml/2006/main">
               <a:ext uri="{FF2B5EF4-FFF2-40B4-BE49-F238E27FC236}">
-                <a16:creationId xmlns:a16="http://schemas.microsoft.com/office/drawing/2014/main" id="{8A5C992A-696E-4D57-8A13-CA04A35EBEB9}"/>
+                <a16:creationId xmlns:a16="http://schemas.microsoft.com/office/drawing/2014/main" id="{A1A64E4D-14F5-4439-A060-FFFE11876E68}"/>
               </a:ext>
             </a:extLst>
           </p:cNvPr>
@@ -7739,7 +7739,7 @@
           <p:cNvPr id="19" name="">
             <a:extLst xmlns:a="http://schemas.openxmlformats.org/drawingml/2006/main">
               <a:ext uri="{FF2B5EF4-FFF2-40B4-BE49-F238E27FC236}">
-                <a16:creationId xmlns:a16="http://schemas.microsoft.com/office/drawing/2014/main" id="{E857F763-1E66-4BB5-BAF6-37277BE8F0F6}"/>
+                <a16:creationId xmlns:a16="http://schemas.microsoft.com/office/drawing/2014/main" id="{A86C5249-FF49-414E-AB88-A5089576F41C}"/>
               </a:ext>
             </a:extLst>
           </p:cNvPr>
@@ -7796,7 +7796,7 @@
           <p:cNvPr id="20" name="">
             <a:extLst xmlns:a="http://schemas.openxmlformats.org/drawingml/2006/main">
               <a:ext uri="{FF2B5EF4-FFF2-40B4-BE49-F238E27FC236}">
-                <a16:creationId xmlns:a16="http://schemas.microsoft.com/office/drawing/2014/main" id="{B9897190-FC2D-45A9-B0CF-B9F3EDAE6A1F}"/>
+                <a16:creationId xmlns:a16="http://schemas.microsoft.com/office/drawing/2014/main" id="{692C6ABC-3489-4A8A-9BD1-23A6A6BCC361}"/>
               </a:ext>
             </a:extLst>
           </p:cNvPr>
@@ -7853,7 +7853,7 @@
           <p:cNvPr id="21" name="">
             <a:extLst xmlns:a="http://schemas.openxmlformats.org/drawingml/2006/main">
               <a:ext uri="{FF2B5EF4-FFF2-40B4-BE49-F238E27FC236}">
-                <a16:creationId xmlns:a16="http://schemas.microsoft.com/office/drawing/2014/main" id="{6E25ABDC-9769-41F5-83E9-95DFC7BAB01D}"/>
+                <a16:creationId xmlns:a16="http://schemas.microsoft.com/office/drawing/2014/main" id="{F63F78F3-CA3F-4336-81D0-5313E6D21820}"/>
               </a:ext>
             </a:extLst>
           </p:cNvPr>
@@ -7885,7 +7885,7 @@
           <p:cNvPr id="22" name="">
             <a:extLst xmlns:a="http://schemas.openxmlformats.org/drawingml/2006/main">
               <a:ext uri="{FF2B5EF4-FFF2-40B4-BE49-F238E27FC236}">
-                <a16:creationId xmlns:a16="http://schemas.microsoft.com/office/drawing/2014/main" id="{BE540E16-7220-4A50-9E55-5A1BFF01FC02}"/>
+                <a16:creationId xmlns:a16="http://schemas.microsoft.com/office/drawing/2014/main" id="{B7D4DF2B-F6DC-4FEE-97E1-00F44F4B353A}"/>
               </a:ext>
             </a:extLst>
           </p:cNvPr>
@@ -7942,7 +7942,7 @@
           <p:cNvPr id="23" name="">
             <a:extLst xmlns:a="http://schemas.openxmlformats.org/drawingml/2006/main">
               <a:ext uri="{FF2B5EF4-FFF2-40B4-BE49-F238E27FC236}">
-                <a16:creationId xmlns:a16="http://schemas.microsoft.com/office/drawing/2014/main" id="{7052203D-D54C-46DE-AB50-8D655AFEC589}"/>
+                <a16:creationId xmlns:a16="http://schemas.microsoft.com/office/drawing/2014/main" id="{F2484456-6CBA-478B-8BDB-EB657FF62A6F}"/>
               </a:ext>
             </a:extLst>
           </p:cNvPr>
@@ -7999,7 +7999,7 @@
           <p:cNvPr id="24" name="">
             <a:extLst xmlns:a="http://schemas.openxmlformats.org/drawingml/2006/main">
               <a:ext uri="{FF2B5EF4-FFF2-40B4-BE49-F238E27FC236}">
-                <a16:creationId xmlns:a16="http://schemas.microsoft.com/office/drawing/2014/main" id="{52000C6D-3881-420A-8E8E-435D53B18DD9}"/>
+                <a16:creationId xmlns:a16="http://schemas.microsoft.com/office/drawing/2014/main" id="{883D878B-A455-46E8-8251-C3F79377C547}"/>
               </a:ext>
             </a:extLst>
           </p:cNvPr>
@@ -8056,7 +8056,7 @@
           <p:cNvPr id="25" name="">
             <a:extLst xmlns:a="http://schemas.openxmlformats.org/drawingml/2006/main">
               <a:ext uri="{FF2B5EF4-FFF2-40B4-BE49-F238E27FC236}">
-                <a16:creationId xmlns:a16="http://schemas.microsoft.com/office/drawing/2014/main" id="{338A4892-644C-469E-A98C-6D5592CE37A3}"/>
+                <a16:creationId xmlns:a16="http://schemas.microsoft.com/office/drawing/2014/main" id="{EAAD8A0C-9C6D-4F6F-A898-292FA541E1D6}"/>
               </a:ext>
             </a:extLst>
           </p:cNvPr>
@@ -8088,7 +8088,7 @@
           <p:cNvPr id="26" name="">
             <a:extLst xmlns:a="http://schemas.openxmlformats.org/drawingml/2006/main">
               <a:ext uri="{FF2B5EF4-FFF2-40B4-BE49-F238E27FC236}">
-                <a16:creationId xmlns:a16="http://schemas.microsoft.com/office/drawing/2014/main" id="{8731F650-4C87-4FEB-8A6B-040D798B42DE}"/>
+                <a16:creationId xmlns:a16="http://schemas.microsoft.com/office/drawing/2014/main" id="{D58C1E84-8531-4EF9-8E50-467391B6892B}"/>
               </a:ext>
             </a:extLst>
           </p:cNvPr>
@@ -8145,7 +8145,7 @@
           <p:cNvPr id="27" name="">
             <a:extLst xmlns:a="http://schemas.openxmlformats.org/drawingml/2006/main">
               <a:ext uri="{FF2B5EF4-FFF2-40B4-BE49-F238E27FC236}">
-                <a16:creationId xmlns:a16="http://schemas.microsoft.com/office/drawing/2014/main" id="{8ED966BF-A260-4CC0-8847-468796354179}"/>
+                <a16:creationId xmlns:a16="http://schemas.microsoft.com/office/drawing/2014/main" id="{042BECFC-CE50-4008-8A19-30F788604D84}"/>
               </a:ext>
             </a:extLst>
           </p:cNvPr>
@@ -8202,7 +8202,7 @@
           <p:cNvPr id="28" name="">
             <a:extLst xmlns:a="http://schemas.openxmlformats.org/drawingml/2006/main">
               <a:ext uri="{FF2B5EF4-FFF2-40B4-BE49-F238E27FC236}">
-                <a16:creationId xmlns:a16="http://schemas.microsoft.com/office/drawing/2014/main" id="{683F9B4B-C6ED-44D9-ACFA-E0E3A33C5FE9}"/>
+                <a16:creationId xmlns:a16="http://schemas.microsoft.com/office/drawing/2014/main" id="{22E14C8E-A2B0-406B-97D8-57B5B9CA400D}"/>
               </a:ext>
             </a:extLst>
           </p:cNvPr>
@@ -8259,7 +8259,7 @@
           <p:cNvPr id="29" name="">
             <a:extLst xmlns:a="http://schemas.openxmlformats.org/drawingml/2006/main">
               <a:ext uri="{FF2B5EF4-FFF2-40B4-BE49-F238E27FC236}">
-                <a16:creationId xmlns:a16="http://schemas.microsoft.com/office/drawing/2014/main" id="{8286CE71-9D51-4EC7-BE7A-3D505887CD29}"/>
+                <a16:creationId xmlns:a16="http://schemas.microsoft.com/office/drawing/2014/main" id="{1D462E9C-F996-4D1B-93A8-3DBBA961A4C5}"/>
               </a:ext>
             </a:extLst>
           </p:cNvPr>
@@ -8316,7 +8316,7 @@
           <p:cNvPr id="30" name="">
             <a:extLst xmlns:a="http://schemas.openxmlformats.org/drawingml/2006/main">
               <a:ext uri="{FF2B5EF4-FFF2-40B4-BE49-F238E27FC236}">
-                <a16:creationId xmlns:a16="http://schemas.microsoft.com/office/drawing/2014/main" id="{442C8948-B011-444C-B456-1FEFE699EC28}"/>
+                <a16:creationId xmlns:a16="http://schemas.microsoft.com/office/drawing/2014/main" id="{8B06ACE5-3101-4C08-98C2-CD110AC7AC96}"/>
               </a:ext>
             </a:extLst>
           </p:cNvPr>
@@ -8373,7 +8373,7 @@
           <p:cNvPr id="31" name="">
             <a:extLst xmlns:a="http://schemas.openxmlformats.org/drawingml/2006/main">
               <a:ext uri="{FF2B5EF4-FFF2-40B4-BE49-F238E27FC236}">
-                <a16:creationId xmlns:a16="http://schemas.microsoft.com/office/drawing/2014/main" id="{391C62A5-E354-44F1-84BC-8F1EF742A7FA}"/>
+                <a16:creationId xmlns:a16="http://schemas.microsoft.com/office/drawing/2014/main" id="{69DCCE3C-A506-4EB9-AA9C-EB2A088CB5E6}"/>
               </a:ext>
             </a:extLst>
           </p:cNvPr>
@@ -8430,7 +8430,7 @@
           <p:cNvPr id="32" name="">
             <a:extLst xmlns:a="http://schemas.openxmlformats.org/drawingml/2006/main">
               <a:ext uri="{FF2B5EF4-FFF2-40B4-BE49-F238E27FC236}">
-                <a16:creationId xmlns:a16="http://schemas.microsoft.com/office/drawing/2014/main" id="{5314AD38-A63C-42AE-B8E0-563C1B378178}"/>
+                <a16:creationId xmlns:a16="http://schemas.microsoft.com/office/drawing/2014/main" id="{30C24AE9-5881-4A63-8C8C-D1487E0945B9}"/>
               </a:ext>
             </a:extLst>
           </p:cNvPr>
@@ -8477,7 +8477,7 @@
                 <a:ea typeface="Malgun Gothic"/>
                 <a:cs typeface="Malgun Gothic"/>
               </a:rPr>
-              <a:t>숙고 On·Off 동일</a:t>
+              <a:t>숙고 On·Off 동일, 시간만 증가</a:t>
             </a:r>
           </a:p>
         </p:txBody>
@@ -8487,7 +8487,7 @@
           <p:cNvPr id="33" name="">
             <a:extLst xmlns:a="http://schemas.openxmlformats.org/drawingml/2006/main">
               <a:ext uri="{FF2B5EF4-FFF2-40B4-BE49-F238E27FC236}">
-                <a16:creationId xmlns:a16="http://schemas.microsoft.com/office/drawing/2014/main" id="{E7337F21-BB32-41D1-9AE2-9A0B22611083}"/>
+                <a16:creationId xmlns:a16="http://schemas.microsoft.com/office/drawing/2014/main" id="{C7F17F36-BC99-4F65-A8BA-DF7FEFE3AB1A}"/>
               </a:ext>
             </a:extLst>
           </p:cNvPr>
@@ -8534,7 +8534,7 @@
                 <a:ea typeface="Malgun Gothic"/>
                 <a:cs typeface="Malgun Gothic"/>
               </a:rPr>
-              <a:t>숙고 전용 4 Case</a:t>
+              <a:t>숙고 전용 4 Case · 3회</a:t>
             </a:r>
           </a:p>
         </p:txBody>
@@ -8544,7 +8544,7 @@
           <p:cNvPr id="34" name="">
             <a:extLst xmlns:a="http://schemas.openxmlformats.org/drawingml/2006/main">
               <a:ext uri="{FF2B5EF4-FFF2-40B4-BE49-F238E27FC236}">
-                <a16:creationId xmlns:a16="http://schemas.microsoft.com/office/drawing/2014/main" id="{223D0D2D-A380-4E8B-A8C9-7A9E48599A6A}"/>
+                <a16:creationId xmlns:a16="http://schemas.microsoft.com/office/drawing/2014/main" id="{043A31BA-79BA-4A20-B9AD-FBCF96731654}"/>
               </a:ext>
             </a:extLst>
           </p:cNvPr>
@@ -8591,7 +8591,7 @@
                 <a:ea typeface="Malgun Gothic"/>
                 <a:cs typeface="Malgun Gothic"/>
               </a:rPr>
-              <a:t>On 4/4  ·  Off 3/4</a:t>
+              <a:t>재현되는 차이 1건</a:t>
             </a:r>
           </a:p>
         </p:txBody>
@@ -8601,7 +8601,7 @@
           <p:cNvPr id="35" name="">
             <a:extLst xmlns:a="http://schemas.openxmlformats.org/drawingml/2006/main">
               <a:ext uri="{FF2B5EF4-FFF2-40B4-BE49-F238E27FC236}">
-                <a16:creationId xmlns:a16="http://schemas.microsoft.com/office/drawing/2014/main" id="{77A3F1EA-135E-4D4B-A97A-36F76DFCB0A6}"/>
+                <a16:creationId xmlns:a16="http://schemas.microsoft.com/office/drawing/2014/main" id="{0AD4AD10-A69E-4995-8346-6FE6C46D6F66}"/>
               </a:ext>
             </a:extLst>
           </p:cNvPr>
@@ -8648,7 +8648,7 @@
                 <a:ea typeface="Malgun Gothic"/>
                 <a:cs typeface="Malgun Gothic"/>
               </a:rPr>
-              <a:t>차이는 유사 업무 2건 상황 1건</a:t>
+              <a:t>DLB-02: On 3/3 통과, Off 3/3 실패</a:t>
             </a:r>
           </a:p>
         </p:txBody>
@@ -8658,7 +8658,7 @@
           <p:cNvPr id="36" name="">
             <a:extLst xmlns:a="http://schemas.openxmlformats.org/drawingml/2006/main">
               <a:ext uri="{FF2B5EF4-FFF2-40B4-BE49-F238E27FC236}">
-                <a16:creationId xmlns:a16="http://schemas.microsoft.com/office/drawing/2014/main" id="{6A3A51C0-934F-41F9-8AE9-2DD280C9EEAA}"/>
+                <a16:creationId xmlns:a16="http://schemas.microsoft.com/office/drawing/2014/main" id="{580CEF93-DD34-4B7A-8EF4-FF8992016866}"/>
               </a:ext>
             </a:extLst>
           </p:cNvPr>
@@ -8715,7 +8715,7 @@
           <p:cNvPr id="37" name="">
             <a:extLst xmlns:a="http://schemas.openxmlformats.org/drawingml/2006/main">
               <a:ext uri="{FF2B5EF4-FFF2-40B4-BE49-F238E27FC236}">
-                <a16:creationId xmlns:a16="http://schemas.microsoft.com/office/drawing/2014/main" id="{554A3D6F-62DF-4209-89E0-910D018548CF}"/>
+                <a16:creationId xmlns:a16="http://schemas.microsoft.com/office/drawing/2014/main" id="{64B50644-3C83-4A39-A74B-2F8B053F6666}"/>
               </a:ext>
             </a:extLst>
           </p:cNvPr>
@@ -8772,7 +8772,7 @@
           <p:cNvPr id="38" name="">
             <a:extLst xmlns:a="http://schemas.openxmlformats.org/drawingml/2006/main">
               <a:ext uri="{FF2B5EF4-FFF2-40B4-BE49-F238E27FC236}">
-                <a16:creationId xmlns:a16="http://schemas.microsoft.com/office/drawing/2014/main" id="{171F130A-1057-42C8-B1B6-8882CFCC7D0A}"/>
+                <a16:creationId xmlns:a16="http://schemas.microsoft.com/office/drawing/2014/main" id="{60D60258-420A-4ADD-BDC8-5ACA6A4EA1E5}"/>
               </a:ext>
             </a:extLst>
           </p:cNvPr>
@@ -8829,7 +8829,7 @@
           <p:cNvPr id="39" name="">
             <a:extLst xmlns:a="http://schemas.openxmlformats.org/drawingml/2006/main">
               <a:ext uri="{FF2B5EF4-FFF2-40B4-BE49-F238E27FC236}">
-                <a16:creationId xmlns:a16="http://schemas.microsoft.com/office/drawing/2014/main" id="{E01A1273-AC1F-401A-9118-3C0F8A957B73}"/>
+                <a16:creationId xmlns:a16="http://schemas.microsoft.com/office/drawing/2014/main" id="{DCC07A96-F902-4A4C-A7B8-B32A56E3A2DB}"/>
               </a:ext>
             </a:extLst>
           </p:cNvPr>
@@ -8886,7 +8886,7 @@
           <p:cNvPr id="40" name="">
             <a:extLst xmlns:a="http://schemas.openxmlformats.org/drawingml/2006/main">
               <a:ext uri="{FF2B5EF4-FFF2-40B4-BE49-F238E27FC236}">
-                <a16:creationId xmlns:a16="http://schemas.microsoft.com/office/drawing/2014/main" id="{65F0A6AE-85D0-4CF8-BFFB-9A58B36214DC}"/>
+                <a16:creationId xmlns:a16="http://schemas.microsoft.com/office/drawing/2014/main" id="{802DB9D0-DDA5-4372-960C-C1BE0407B585}"/>
               </a:ext>
             </a:extLst>
           </p:cNvPr>
@@ -8941,7 +8941,7 @@
     </p:spTree>
     <p:extLst>
       <p:ext uri="{BB962C8B-B14F-4D97-AF65-F5344CB8AC3E}">
-        <p14:creationId xmlns:p14="http://schemas.microsoft.com/office/powerpoint/2010/main" val="272195111"/>
+        <p14:creationId xmlns:p14="http://schemas.microsoft.com/office/powerpoint/2010/main" val="1029891108"/>
       </p:ext>
     </p:extLst>
   </p:cSld>

--- a/Docs/PRESENTATION/2. 최종/09285_백준현_AI_Master_최종발표자료_v8.pptx
+++ b/Docs/PRESENTATION/2. 최종/09285_백준현_AI_Master_최종발표자료_v8.pptx
@@ -2,16 +2,16 @@
 <file path=ppt/presentation.xml><?xml version="1.0" encoding="utf-8"?>
 <p:presentation xmlns:p="http://schemas.openxmlformats.org/presentationml/2006/main">
   <p:sldMasterIdLst>
-    <p:sldMasterId xmlns:r="http://schemas.openxmlformats.org/officeDocument/2006/relationships" id="2147483648" r:id="R7453c52429e54dc4"/>
+    <p:sldMasterId xmlns:r="http://schemas.openxmlformats.org/officeDocument/2006/relationships" id="2147483648" r:id="R1ece40f1d70b483a"/>
   </p:sldMasterIdLst>
   <p:notesMasterIdLst>
-    <p:notesMasterId xmlns:r="http://schemas.openxmlformats.org/officeDocument/2006/relationships" r:id="Rd40260ce55ed45a5"/>
+    <p:notesMasterId xmlns:r="http://schemas.openxmlformats.org/officeDocument/2006/relationships" r:id="Rb637b666397a4b4e"/>
   </p:notesMasterIdLst>
   <p:sldIdLst>
-    <p:sldId xmlns:r="http://schemas.openxmlformats.org/officeDocument/2006/relationships" id="256" r:id="R38fbd7bdb0c04fc0"/>
-    <p:sldId xmlns:r="http://schemas.openxmlformats.org/officeDocument/2006/relationships" id="257" r:id="R18f2afb0e63a4d58"/>
-    <p:sldId xmlns:r="http://schemas.openxmlformats.org/officeDocument/2006/relationships" id="258" r:id="Rd88722b38483464f"/>
-    <p:sldId xmlns:r="http://schemas.openxmlformats.org/officeDocument/2006/relationships" id="259" r:id="Re926dc090984455d"/>
+    <p:sldId xmlns:r="http://schemas.openxmlformats.org/officeDocument/2006/relationships" id="256" r:id="Radb904423e0e4fda"/>
+    <p:sldId xmlns:r="http://schemas.openxmlformats.org/officeDocument/2006/relationships" id="257" r:id="R539e3f979d3c4465"/>
+    <p:sldId xmlns:r="http://schemas.openxmlformats.org/officeDocument/2006/relationships" id="258" r:id="R71416bab2b55442f"/>
+    <p:sldId xmlns:r="http://schemas.openxmlformats.org/officeDocument/2006/relationships" id="259" r:id="Rd1193541fd2045ed"/>
   </p:sldIdLst>
   <p:sldSz cx="12192000" cy="6858000"/>
   <p:notesSz cx="6858000" cy="9144000"/>
@@ -800,7 +800,7 @@
           </a:p>
           <a:p xmlns:a="http://schemas.openxmlformats.org/drawingml/2006/main">
             <a:r>
-              <a:t>효과는 같은 코드에서 기능만 껐다 켜서 측정했습니다. 기존 열다섯 개 Case는 양쪽이 똑같이 15/15, Action 28/28이고 소요시간만 약 삼십 퍼센트 늘었습니다. 숙고가 실제 발동하는 전용 네 개 Case는 출력이 회차마다 달라져서 각 설정을 세 번씩 돌렸습니다. 통과 수는 켠 쪽이 삼, 사, 삼이고 끈 쪽이 삼, 이, 삼입니다. 그래서 한 회차 숫자를 결론으로 쓰지 않았습니다. 세 번 모두 재현되는 차이는 한 건입니다. 요청자가 같고 대상 시스템만 다른 유사 업무가 둘 있을 때, 단일 결론 경로는 세 번 모두 둘 중 하나에 그대로 연결했고, 두 단계 경로는 세 번 모두 사용자 확인으로 닫았습니다. 제가 개선했다고 말하는 범위는 이 한 건입니다.</a:t>
+              <a:t>효과는 같은 코드에서 기능만 껐다 켜서 측정했습니다. 기존 열다섯 개 Case는 양쪽이 똑같이 15/15, Action 28/28이고 소요시간만 약 삼십 퍼센트 늘었습니다. 숙고가 실제 발동하는 전용 네 개 Case는 엘엘엠 출력이 회차마다 달라져서 각 설정을 세 번씩 돌렸습니다. 통과 수는 켠 쪽이 삼, 사, 삼이고 끈 쪽이 삼, 이, 삼이라 한 회차 숫자를 결론으로 쓰지 않았습니다. 대신 엘엘엠을 호출하지 않는 결정론적 경로에서도 같은 비교를 했고, 거기서는 켠 쪽 사 대 사, 끈 쪽 삼 대 사로 갈립니다. 실패하는 케이스와 실패하는 방식까지 같습니다. 요청자가 같고 대상 시스템만 다른 유사 업무가 둘 있을 때, 단일 결론 경로는 둘 중 하나에 그대로 연결하고, 두 단계 경로는 사용자 확인으로 닫습니다. 회차 변동이 없는 경로에서 재현되니까, 이 차이는 모델 출력 운이 아니라 판단 구조의 차이라고 말할 수 있습니다. 제가 개선했다고 말하는 범위는 이 한 건입니다.</a:t>
             </a:r>
           </a:p>
           <a:p xmlns:a="http://schemas.openxmlformats.org/drawingml/2006/main">
@@ -933,7 +933,7 @@
   </p:cSld>
   <p:clrMap bg1="lt1" tx1="dk1" bg2="lt2" tx2="dk2" accent1="accent1" accent2="accent2" accent3="accent3" accent4="accent4" accent5="accent5" accent6="accent6" hlink="hlink" folHlink="folHlink"/>
   <p:sldLayoutIdLst>
-    <p:sldLayoutId xmlns:r="http://schemas.openxmlformats.org/officeDocument/2006/relationships" id="2147483649" r:id="Re3415ed155eb4162"/>
+    <p:sldLayoutId xmlns:r="http://schemas.openxmlformats.org/officeDocument/2006/relationships" id="2147483649" r:id="Rad53b6b2db6f42f4"/>
   </p:sldLayoutIdLst>
   <p:txStyles>
     <p:titleStyle>
@@ -1484,7 +1484,7 @@
           <p:cNvPr id="9" name="">
             <a:extLst xmlns:a="http://schemas.openxmlformats.org/drawingml/2006/main">
               <a:ext uri="{FF2B5EF4-FFF2-40B4-BE49-F238E27FC236}">
-                <a16:creationId xmlns:a16="http://schemas.microsoft.com/office/drawing/2014/main" id="{11EA757A-CDC1-494D-B4D1-AA18D6F5C488}"/>
+                <a16:creationId xmlns:a16="http://schemas.microsoft.com/office/drawing/2014/main" id="{E308FBDF-CB90-4C74-A050-65DFE4AA3341}"/>
               </a:ext>
             </a:extLst>
           </p:cNvPr>
@@ -1514,7 +1514,7 @@
           <p:cNvPr id="2" name="">
             <a:extLst xmlns:a="http://schemas.openxmlformats.org/drawingml/2006/main">
               <a:ext uri="{FF2B5EF4-FFF2-40B4-BE49-F238E27FC236}">
-                <a16:creationId xmlns:a16="http://schemas.microsoft.com/office/drawing/2014/main" id="{4BB15AA1-AE7C-42F1-B4E9-A29C3C452659}"/>
+                <a16:creationId xmlns:a16="http://schemas.microsoft.com/office/drawing/2014/main" id="{87081F9D-49E2-4F5C-93BC-674C95876C69}"/>
               </a:ext>
             </a:extLst>
           </p:cNvPr>
@@ -1571,7 +1571,7 @@
           <p:cNvPr id="3" name="">
             <a:extLst xmlns:a="http://schemas.openxmlformats.org/drawingml/2006/main">
               <a:ext uri="{FF2B5EF4-FFF2-40B4-BE49-F238E27FC236}">
-                <a16:creationId xmlns:a16="http://schemas.microsoft.com/office/drawing/2014/main" id="{6775212E-1F47-455E-B73C-7F2DBA7E9D33}"/>
+                <a16:creationId xmlns:a16="http://schemas.microsoft.com/office/drawing/2014/main" id="{D2249088-3FB9-453D-A96A-8B9FD1867BEE}"/>
               </a:ext>
             </a:extLst>
           </p:cNvPr>
@@ -1628,7 +1628,7 @@
           <p:cNvPr id="4" name="">
             <a:extLst xmlns:a="http://schemas.openxmlformats.org/drawingml/2006/main">
               <a:ext uri="{FF2B5EF4-FFF2-40B4-BE49-F238E27FC236}">
-                <a16:creationId xmlns:a16="http://schemas.microsoft.com/office/drawing/2014/main" id="{9B933E85-09EF-4F4E-8D64-B37F61C935F5}"/>
+                <a16:creationId xmlns:a16="http://schemas.microsoft.com/office/drawing/2014/main" id="{2579C8FA-C882-4FA7-8DA2-A75738F1EB42}"/>
               </a:ext>
             </a:extLst>
           </p:cNvPr>
@@ -1685,7 +1685,7 @@
           <p:cNvPr id="5" name="">
             <a:extLst xmlns:a="http://schemas.openxmlformats.org/drawingml/2006/main">
               <a:ext uri="{FF2B5EF4-FFF2-40B4-BE49-F238E27FC236}">
-                <a16:creationId xmlns:a16="http://schemas.microsoft.com/office/drawing/2014/main" id="{BB35C80E-B5F5-4DC1-85A0-DA9098FE8EB5}"/>
+                <a16:creationId xmlns:a16="http://schemas.microsoft.com/office/drawing/2014/main" id="{906B8096-0987-4489-8E8F-51DAE484DD12}"/>
               </a:ext>
             </a:extLst>
           </p:cNvPr>
@@ -1715,7 +1715,7 @@
           <p:cNvPr id="6" name="">
             <a:extLst xmlns:a="http://schemas.openxmlformats.org/drawingml/2006/main">
               <a:ext uri="{FF2B5EF4-FFF2-40B4-BE49-F238E27FC236}">
-                <a16:creationId xmlns:a16="http://schemas.microsoft.com/office/drawing/2014/main" id="{A2279CDB-C511-42B8-B863-D90B3A5B418E}"/>
+                <a16:creationId xmlns:a16="http://schemas.microsoft.com/office/drawing/2014/main" id="{190D4A90-DDD6-435D-9DC3-C5CCD2DE32AD}"/>
               </a:ext>
             </a:extLst>
           </p:cNvPr>
@@ -1772,7 +1772,7 @@
           <p:cNvPr id="7" name="">
             <a:extLst xmlns:a="http://schemas.openxmlformats.org/drawingml/2006/main">
               <a:ext uri="{FF2B5EF4-FFF2-40B4-BE49-F238E27FC236}">
-                <a16:creationId xmlns:a16="http://schemas.microsoft.com/office/drawing/2014/main" id="{F7392FF6-7F77-4683-9161-A8BE5B96257F}"/>
+                <a16:creationId xmlns:a16="http://schemas.microsoft.com/office/drawing/2014/main" id="{28DCA238-10DF-4B8C-87C8-83B298081805}"/>
               </a:ext>
             </a:extLst>
           </p:cNvPr>
@@ -1829,7 +1829,7 @@
           <p:cNvPr id="8" name="">
             <a:extLst xmlns:a="http://schemas.openxmlformats.org/drawingml/2006/main">
               <a:ext uri="{FF2B5EF4-FFF2-40B4-BE49-F238E27FC236}">
-                <a16:creationId xmlns:a16="http://schemas.microsoft.com/office/drawing/2014/main" id="{D3AC7868-6CC4-49C4-A6A5-F9CB0FB7EF34}"/>
+                <a16:creationId xmlns:a16="http://schemas.microsoft.com/office/drawing/2014/main" id="{9DA3E97B-1730-49D9-B798-C1B74A73C9FD}"/>
               </a:ext>
             </a:extLst>
           </p:cNvPr>
@@ -1884,7 +1884,7 @@
     </p:spTree>
     <p:extLst>
       <p:ext uri="{BB962C8B-B14F-4D97-AF65-F5344CB8AC3E}">
-        <p14:creationId xmlns:p14="http://schemas.microsoft.com/office/powerpoint/2010/main" val="1467505580"/>
+        <p14:creationId xmlns:p14="http://schemas.microsoft.com/office/powerpoint/2010/main" val="2013341118"/>
       </p:ext>
     </p:extLst>
   </p:cSld>
@@ -1915,7 +1915,7 @@
           <p:cNvPr id="45" name="">
             <a:extLst xmlns:a="http://schemas.openxmlformats.org/drawingml/2006/main">
               <a:ext uri="{FF2B5EF4-FFF2-40B4-BE49-F238E27FC236}">
-                <a16:creationId xmlns:a16="http://schemas.microsoft.com/office/drawing/2014/main" id="{117E10D1-AF8C-40F5-9A51-AC6FF99273FD}"/>
+                <a16:creationId xmlns:a16="http://schemas.microsoft.com/office/drawing/2014/main" id="{4665648A-0A3A-43CB-A6E6-A8C0B16EAE31}"/>
               </a:ext>
             </a:extLst>
           </p:cNvPr>
@@ -1945,7 +1945,7 @@
           <p:cNvPr id="2" name="">
             <a:extLst xmlns:a="http://schemas.openxmlformats.org/drawingml/2006/main">
               <a:ext uri="{FF2B5EF4-FFF2-40B4-BE49-F238E27FC236}">
-                <a16:creationId xmlns:a16="http://schemas.microsoft.com/office/drawing/2014/main" id="{1A4B81EA-56D4-4A3A-94C1-772B372E9610}"/>
+                <a16:creationId xmlns:a16="http://schemas.microsoft.com/office/drawing/2014/main" id="{8EE26F1D-D996-434F-9F61-9D40CD1AF171}"/>
               </a:ext>
             </a:extLst>
           </p:cNvPr>
@@ -2002,7 +2002,7 @@
           <p:cNvPr id="3" name="">
             <a:extLst xmlns:a="http://schemas.openxmlformats.org/drawingml/2006/main">
               <a:ext uri="{FF2B5EF4-FFF2-40B4-BE49-F238E27FC236}">
-                <a16:creationId xmlns:a16="http://schemas.microsoft.com/office/drawing/2014/main" id="{B274C2E7-B8F2-49BC-A460-E1803EB1A3B8}"/>
+                <a16:creationId xmlns:a16="http://schemas.microsoft.com/office/drawing/2014/main" id="{8D61DFF0-039F-4B07-8A9B-4631F38F5D9D}"/>
               </a:ext>
             </a:extLst>
           </p:cNvPr>
@@ -2032,7 +2032,7 @@
           <p:cNvPr id="4" name="">
             <a:extLst xmlns:a="http://schemas.openxmlformats.org/drawingml/2006/main">
               <a:ext uri="{FF2B5EF4-FFF2-40B4-BE49-F238E27FC236}">
-                <a16:creationId xmlns:a16="http://schemas.microsoft.com/office/drawing/2014/main" id="{79D713CE-A7DA-4637-B4D3-B39535BD5EB3}"/>
+                <a16:creationId xmlns:a16="http://schemas.microsoft.com/office/drawing/2014/main" id="{ADAFCC95-49B7-4884-9188-33DEC65BC4E3}"/>
               </a:ext>
             </a:extLst>
           </p:cNvPr>
@@ -2089,7 +2089,7 @@
           <p:cNvPr id="5" name="">
             <a:extLst xmlns:a="http://schemas.openxmlformats.org/drawingml/2006/main">
               <a:ext uri="{FF2B5EF4-FFF2-40B4-BE49-F238E27FC236}">
-                <a16:creationId xmlns:a16="http://schemas.microsoft.com/office/drawing/2014/main" id="{31BB9726-23B4-4F88-9325-457326FEF18E}"/>
+                <a16:creationId xmlns:a16="http://schemas.microsoft.com/office/drawing/2014/main" id="{B2376A46-4701-4DAF-9372-6C9303C8FC7F}"/>
               </a:ext>
             </a:extLst>
           </p:cNvPr>
@@ -2146,7 +2146,7 @@
           <p:cNvPr id="6" name="">
             <a:extLst xmlns:a="http://schemas.openxmlformats.org/drawingml/2006/main">
               <a:ext uri="{FF2B5EF4-FFF2-40B4-BE49-F238E27FC236}">
-                <a16:creationId xmlns:a16="http://schemas.microsoft.com/office/drawing/2014/main" id="{8AE2D544-9C30-4407-87D3-427E9ABC4911}"/>
+                <a16:creationId xmlns:a16="http://schemas.microsoft.com/office/drawing/2014/main" id="{F685CFB3-3673-4257-A896-98E6FE573CC6}"/>
               </a:ext>
             </a:extLst>
           </p:cNvPr>
@@ -2203,7 +2203,7 @@
           <p:cNvPr id="7" name="">
             <a:extLst xmlns:a="http://schemas.openxmlformats.org/drawingml/2006/main">
               <a:ext uri="{FF2B5EF4-FFF2-40B4-BE49-F238E27FC236}">
-                <a16:creationId xmlns:a16="http://schemas.microsoft.com/office/drawing/2014/main" id="{9F53F407-0872-434D-B40C-271CEA20DC9F}"/>
+                <a16:creationId xmlns:a16="http://schemas.microsoft.com/office/drawing/2014/main" id="{820718F0-206B-4B89-AFAB-4E8361EC7D82}"/>
               </a:ext>
             </a:extLst>
           </p:cNvPr>
@@ -2237,7 +2237,7 @@
           <p:cNvPr id="8" name="">
             <a:extLst xmlns:a="http://schemas.openxmlformats.org/drawingml/2006/main">
               <a:ext uri="{FF2B5EF4-FFF2-40B4-BE49-F238E27FC236}">
-                <a16:creationId xmlns:a16="http://schemas.microsoft.com/office/drawing/2014/main" id="{0B660285-C6BD-455C-9672-4F2284831144}"/>
+                <a16:creationId xmlns:a16="http://schemas.microsoft.com/office/drawing/2014/main" id="{EA8CEBC2-1097-40DF-9B22-2BD6908CFA43}"/>
               </a:ext>
             </a:extLst>
           </p:cNvPr>
@@ -2269,7 +2269,7 @@
           <p:cNvPr id="9" name="">
             <a:extLst xmlns:a="http://schemas.openxmlformats.org/drawingml/2006/main">
               <a:ext uri="{FF2B5EF4-FFF2-40B4-BE49-F238E27FC236}">
-                <a16:creationId xmlns:a16="http://schemas.microsoft.com/office/drawing/2014/main" id="{51C770F2-7A4D-4ED2-B9A5-879956B7F29A}"/>
+                <a16:creationId xmlns:a16="http://schemas.microsoft.com/office/drawing/2014/main" id="{FD41680D-2E22-4704-ADC3-85B61DC933DD}"/>
               </a:ext>
             </a:extLst>
           </p:cNvPr>
@@ -2326,7 +2326,7 @@
           <p:cNvPr id="10" name="">
             <a:extLst xmlns:a="http://schemas.openxmlformats.org/drawingml/2006/main">
               <a:ext uri="{FF2B5EF4-FFF2-40B4-BE49-F238E27FC236}">
-                <a16:creationId xmlns:a16="http://schemas.microsoft.com/office/drawing/2014/main" id="{AB317620-ABCB-4FF4-97E0-69C7EB54B421}"/>
+                <a16:creationId xmlns:a16="http://schemas.microsoft.com/office/drawing/2014/main" id="{71126D52-349A-4747-8E0E-52DD316D8179}"/>
               </a:ext>
             </a:extLst>
           </p:cNvPr>
@@ -2406,7 +2406,7 @@
           <p:cNvPr id="11" name="">
             <a:extLst xmlns:a="http://schemas.openxmlformats.org/drawingml/2006/main">
               <a:ext uri="{FF2B5EF4-FFF2-40B4-BE49-F238E27FC236}">
-                <a16:creationId xmlns:a16="http://schemas.microsoft.com/office/drawing/2014/main" id="{777F9C93-73B4-4012-BE7E-DEF1CDE3A498}"/>
+                <a16:creationId xmlns:a16="http://schemas.microsoft.com/office/drawing/2014/main" id="{C2BEDEDA-ABAF-40AC-A1D4-8BE36D3F604B}"/>
               </a:ext>
             </a:extLst>
           </p:cNvPr>
@@ -2436,7 +2436,7 @@
           <p:cNvPr id="12" name="">
             <a:extLst xmlns:a="http://schemas.openxmlformats.org/drawingml/2006/main">
               <a:ext uri="{FF2B5EF4-FFF2-40B4-BE49-F238E27FC236}">
-                <a16:creationId xmlns:a16="http://schemas.microsoft.com/office/drawing/2014/main" id="{8BF5C83D-5DA6-437A-A191-5CB04038FACB}"/>
+                <a16:creationId xmlns:a16="http://schemas.microsoft.com/office/drawing/2014/main" id="{409E19D9-BE16-49F6-AE44-8917E8ED8818}"/>
               </a:ext>
             </a:extLst>
           </p:cNvPr>
@@ -2470,7 +2470,7 @@
           <p:cNvPr id="13" name="">
             <a:extLst xmlns:a="http://schemas.openxmlformats.org/drawingml/2006/main">
               <a:ext uri="{FF2B5EF4-FFF2-40B4-BE49-F238E27FC236}">
-                <a16:creationId xmlns:a16="http://schemas.microsoft.com/office/drawing/2014/main" id="{99B1019A-4B60-4D0C-BA6C-25F566176F8D}"/>
+                <a16:creationId xmlns:a16="http://schemas.microsoft.com/office/drawing/2014/main" id="{26974091-ADEB-44C1-B0EA-332BB073142A}"/>
               </a:ext>
             </a:extLst>
           </p:cNvPr>
@@ -2502,7 +2502,7 @@
           <p:cNvPr id="14" name="">
             <a:extLst xmlns:a="http://schemas.openxmlformats.org/drawingml/2006/main">
               <a:ext uri="{FF2B5EF4-FFF2-40B4-BE49-F238E27FC236}">
-                <a16:creationId xmlns:a16="http://schemas.microsoft.com/office/drawing/2014/main" id="{5B9F6CF6-7DA6-4036-9D65-1C811331F9EC}"/>
+                <a16:creationId xmlns:a16="http://schemas.microsoft.com/office/drawing/2014/main" id="{E662049C-7208-4C2B-B0CC-ACE58F32B74A}"/>
               </a:ext>
             </a:extLst>
           </p:cNvPr>
@@ -2559,7 +2559,7 @@
           <p:cNvPr id="15" name="">
             <a:extLst xmlns:a="http://schemas.openxmlformats.org/drawingml/2006/main">
               <a:ext uri="{FF2B5EF4-FFF2-40B4-BE49-F238E27FC236}">
-                <a16:creationId xmlns:a16="http://schemas.microsoft.com/office/drawing/2014/main" id="{44FFFB10-BEAF-4558-A3DC-7E136B819172}"/>
+                <a16:creationId xmlns:a16="http://schemas.microsoft.com/office/drawing/2014/main" id="{2A12CC0C-86EA-4FF2-B50B-2841A38FB4ED}"/>
               </a:ext>
             </a:extLst>
           </p:cNvPr>
@@ -2639,7 +2639,7 @@
           <p:cNvPr id="16" name="">
             <a:extLst xmlns:a="http://schemas.openxmlformats.org/drawingml/2006/main">
               <a:ext uri="{FF2B5EF4-FFF2-40B4-BE49-F238E27FC236}">
-                <a16:creationId xmlns:a16="http://schemas.microsoft.com/office/drawing/2014/main" id="{18613988-FAE9-4785-A391-8A59CE564126}"/>
+                <a16:creationId xmlns:a16="http://schemas.microsoft.com/office/drawing/2014/main" id="{DEE09F92-1825-4A1F-936E-B4788F4E7D74}"/>
               </a:ext>
             </a:extLst>
           </p:cNvPr>
@@ -2669,7 +2669,7 @@
           <p:cNvPr id="17" name="">
             <a:extLst xmlns:a="http://schemas.openxmlformats.org/drawingml/2006/main">
               <a:ext uri="{FF2B5EF4-FFF2-40B4-BE49-F238E27FC236}">
-                <a16:creationId xmlns:a16="http://schemas.microsoft.com/office/drawing/2014/main" id="{7C5A8CEE-FEA6-417F-8D42-4341D2AF3281}"/>
+                <a16:creationId xmlns:a16="http://schemas.microsoft.com/office/drawing/2014/main" id="{AAD612AC-1547-4EA5-A167-2D93CCFCE3B9}"/>
               </a:ext>
             </a:extLst>
           </p:cNvPr>
@@ -2703,7 +2703,7 @@
           <p:cNvPr id="18" name="">
             <a:extLst xmlns:a="http://schemas.openxmlformats.org/drawingml/2006/main">
               <a:ext uri="{FF2B5EF4-FFF2-40B4-BE49-F238E27FC236}">
-                <a16:creationId xmlns:a16="http://schemas.microsoft.com/office/drawing/2014/main" id="{C670EE29-0089-47D8-B91E-C697578E960E}"/>
+                <a16:creationId xmlns:a16="http://schemas.microsoft.com/office/drawing/2014/main" id="{1E45ABEA-0E6B-4595-A768-88F00FE2EB75}"/>
               </a:ext>
             </a:extLst>
           </p:cNvPr>
@@ -2735,7 +2735,7 @@
           <p:cNvPr id="19" name="">
             <a:extLst xmlns:a="http://schemas.openxmlformats.org/drawingml/2006/main">
               <a:ext uri="{FF2B5EF4-FFF2-40B4-BE49-F238E27FC236}">
-                <a16:creationId xmlns:a16="http://schemas.microsoft.com/office/drawing/2014/main" id="{40AAA02B-E7D9-45D4-8E9E-D178C06BC742}"/>
+                <a16:creationId xmlns:a16="http://schemas.microsoft.com/office/drawing/2014/main" id="{F215C771-4185-4C84-B85F-D2A17669A13B}"/>
               </a:ext>
             </a:extLst>
           </p:cNvPr>
@@ -2792,7 +2792,7 @@
           <p:cNvPr id="20" name="">
             <a:extLst xmlns:a="http://schemas.openxmlformats.org/drawingml/2006/main">
               <a:ext uri="{FF2B5EF4-FFF2-40B4-BE49-F238E27FC236}">
-                <a16:creationId xmlns:a16="http://schemas.microsoft.com/office/drawing/2014/main" id="{EACE8C90-2C22-41C1-AF44-D5C8029A0132}"/>
+                <a16:creationId xmlns:a16="http://schemas.microsoft.com/office/drawing/2014/main" id="{F9F58620-8099-448D-B39C-124CCA6CF8A3}"/>
               </a:ext>
             </a:extLst>
           </p:cNvPr>
@@ -2872,7 +2872,7 @@
           <p:cNvPr id="21" name="">
             <a:extLst xmlns:a="http://schemas.openxmlformats.org/drawingml/2006/main">
               <a:ext uri="{FF2B5EF4-FFF2-40B4-BE49-F238E27FC236}">
-                <a16:creationId xmlns:a16="http://schemas.microsoft.com/office/drawing/2014/main" id="{F0A78457-CD3E-4CF8-BD6D-C3EDCC513A1C}"/>
+                <a16:creationId xmlns:a16="http://schemas.microsoft.com/office/drawing/2014/main" id="{B74180D5-9B56-4077-8BC5-17CF3F1033DC}"/>
               </a:ext>
             </a:extLst>
           </p:cNvPr>
@@ -2902,7 +2902,7 @@
           <p:cNvPr id="22" name="">
             <a:extLst xmlns:a="http://schemas.openxmlformats.org/drawingml/2006/main">
               <a:ext uri="{FF2B5EF4-FFF2-40B4-BE49-F238E27FC236}">
-                <a16:creationId xmlns:a16="http://schemas.microsoft.com/office/drawing/2014/main" id="{59439C8A-CED7-4515-86C1-6E80DFD2BDB0}"/>
+                <a16:creationId xmlns:a16="http://schemas.microsoft.com/office/drawing/2014/main" id="{83FEC0BF-7C1B-4230-BCFC-76D4183CCC53}"/>
               </a:ext>
             </a:extLst>
           </p:cNvPr>
@@ -2936,7 +2936,7 @@
           <p:cNvPr id="23" name="">
             <a:extLst xmlns:a="http://schemas.openxmlformats.org/drawingml/2006/main">
               <a:ext uri="{FF2B5EF4-FFF2-40B4-BE49-F238E27FC236}">
-                <a16:creationId xmlns:a16="http://schemas.microsoft.com/office/drawing/2014/main" id="{90881BFA-B046-4B37-B420-105E7584752F}"/>
+                <a16:creationId xmlns:a16="http://schemas.microsoft.com/office/drawing/2014/main" id="{392FD129-823A-4827-AA53-B9B3FBF80E40}"/>
               </a:ext>
             </a:extLst>
           </p:cNvPr>
@@ -2968,7 +2968,7 @@
           <p:cNvPr id="24" name="">
             <a:extLst xmlns:a="http://schemas.openxmlformats.org/drawingml/2006/main">
               <a:ext uri="{FF2B5EF4-FFF2-40B4-BE49-F238E27FC236}">
-                <a16:creationId xmlns:a16="http://schemas.microsoft.com/office/drawing/2014/main" id="{8A38CF9D-49B1-4ECA-A288-67ABD2ABD2F0}"/>
+                <a16:creationId xmlns:a16="http://schemas.microsoft.com/office/drawing/2014/main" id="{2A91466B-7244-4229-AAC6-B3A0C0DAEAFE}"/>
               </a:ext>
             </a:extLst>
           </p:cNvPr>
@@ -3025,7 +3025,7 @@
           <p:cNvPr id="25" name="">
             <a:extLst xmlns:a="http://schemas.openxmlformats.org/drawingml/2006/main">
               <a:ext uri="{FF2B5EF4-FFF2-40B4-BE49-F238E27FC236}">
-                <a16:creationId xmlns:a16="http://schemas.microsoft.com/office/drawing/2014/main" id="{6FAEEF1A-2F81-4493-8CD1-FAF56367DD20}"/>
+                <a16:creationId xmlns:a16="http://schemas.microsoft.com/office/drawing/2014/main" id="{8303B191-89CE-4F7B-9324-C372B77EF26B}"/>
               </a:ext>
             </a:extLst>
           </p:cNvPr>
@@ -3105,7 +3105,7 @@
           <p:cNvPr id="26" name="">
             <a:extLst xmlns:a="http://schemas.openxmlformats.org/drawingml/2006/main">
               <a:ext uri="{FF2B5EF4-FFF2-40B4-BE49-F238E27FC236}">
-                <a16:creationId xmlns:a16="http://schemas.microsoft.com/office/drawing/2014/main" id="{F4C56C02-0636-41FD-B9A0-13EDA4C103E0}"/>
+                <a16:creationId xmlns:a16="http://schemas.microsoft.com/office/drawing/2014/main" id="{8B199CC9-4449-4114-8B13-3DB2BEB47CD4}"/>
               </a:ext>
             </a:extLst>
           </p:cNvPr>
@@ -3135,7 +3135,7 @@
           <p:cNvPr id="27" name="">
             <a:extLst xmlns:a="http://schemas.openxmlformats.org/drawingml/2006/main">
               <a:ext uri="{FF2B5EF4-FFF2-40B4-BE49-F238E27FC236}">
-                <a16:creationId xmlns:a16="http://schemas.microsoft.com/office/drawing/2014/main" id="{C5F0469A-8C71-42DA-8713-E7891DB45ECD}"/>
+                <a16:creationId xmlns:a16="http://schemas.microsoft.com/office/drawing/2014/main" id="{11CC317B-73F2-426A-85D5-0191FB9678E0}"/>
               </a:ext>
             </a:extLst>
           </p:cNvPr>
@@ -3169,7 +3169,7 @@
           <p:cNvPr id="28" name="">
             <a:extLst xmlns:a="http://schemas.openxmlformats.org/drawingml/2006/main">
               <a:ext uri="{FF2B5EF4-FFF2-40B4-BE49-F238E27FC236}">
-                <a16:creationId xmlns:a16="http://schemas.microsoft.com/office/drawing/2014/main" id="{74549072-D117-4046-AC16-F0295D2547CF}"/>
+                <a16:creationId xmlns:a16="http://schemas.microsoft.com/office/drawing/2014/main" id="{3565D1EC-9B22-4C2D-BB98-B32B786096CD}"/>
               </a:ext>
             </a:extLst>
           </p:cNvPr>
@@ -3201,7 +3201,7 @@
           <p:cNvPr id="29" name="">
             <a:extLst xmlns:a="http://schemas.openxmlformats.org/drawingml/2006/main">
               <a:ext uri="{FF2B5EF4-FFF2-40B4-BE49-F238E27FC236}">
-                <a16:creationId xmlns:a16="http://schemas.microsoft.com/office/drawing/2014/main" id="{B5DE38AE-707B-415D-95D3-61E205311E45}"/>
+                <a16:creationId xmlns:a16="http://schemas.microsoft.com/office/drawing/2014/main" id="{7007FADF-52B6-42DC-8F52-C6D21A4428F5}"/>
               </a:ext>
             </a:extLst>
           </p:cNvPr>
@@ -3258,7 +3258,7 @@
           <p:cNvPr id="30" name="">
             <a:extLst xmlns:a="http://schemas.openxmlformats.org/drawingml/2006/main">
               <a:ext uri="{FF2B5EF4-FFF2-40B4-BE49-F238E27FC236}">
-                <a16:creationId xmlns:a16="http://schemas.microsoft.com/office/drawing/2014/main" id="{96ED35ED-2C7C-4B26-AEAD-276C34FEF6A8}"/>
+                <a16:creationId xmlns:a16="http://schemas.microsoft.com/office/drawing/2014/main" id="{2322E08A-0951-48B1-97E5-CF8D26AB7ECF}"/>
               </a:ext>
             </a:extLst>
           </p:cNvPr>
@@ -3338,7 +3338,7 @@
           <p:cNvPr id="31" name="">
             <a:extLst xmlns:a="http://schemas.openxmlformats.org/drawingml/2006/main">
               <a:ext uri="{FF2B5EF4-FFF2-40B4-BE49-F238E27FC236}">
-                <a16:creationId xmlns:a16="http://schemas.microsoft.com/office/drawing/2014/main" id="{A9CD70F1-AF71-4CEB-BBF2-57B354D42347}"/>
+                <a16:creationId xmlns:a16="http://schemas.microsoft.com/office/drawing/2014/main" id="{060B5122-F250-4ABA-9634-465488A80892}"/>
               </a:ext>
             </a:extLst>
           </p:cNvPr>
@@ -3395,7 +3395,7 @@
           <p:cNvPr id="32" name="">
             <a:extLst xmlns:a="http://schemas.openxmlformats.org/drawingml/2006/main">
               <a:ext uri="{FF2B5EF4-FFF2-40B4-BE49-F238E27FC236}">
-                <a16:creationId xmlns:a16="http://schemas.microsoft.com/office/drawing/2014/main" id="{78125356-45EA-4FBB-84DE-ECBD84DFB073}"/>
+                <a16:creationId xmlns:a16="http://schemas.microsoft.com/office/drawing/2014/main" id="{F579F758-578E-4B81-9CAF-1F963786CDE5}"/>
               </a:ext>
             </a:extLst>
           </p:cNvPr>
@@ -3452,7 +3452,7 @@
           <p:cNvPr id="33" name="">
             <a:extLst xmlns:a="http://schemas.openxmlformats.org/drawingml/2006/main">
               <a:ext uri="{FF2B5EF4-FFF2-40B4-BE49-F238E27FC236}">
-                <a16:creationId xmlns:a16="http://schemas.microsoft.com/office/drawing/2014/main" id="{EF98A646-17FD-4098-BC8D-1D7A39BEDFED}"/>
+                <a16:creationId xmlns:a16="http://schemas.microsoft.com/office/drawing/2014/main" id="{B8D655D8-69BA-42F3-937B-8B97C90EEC71}"/>
               </a:ext>
             </a:extLst>
           </p:cNvPr>
@@ -3509,7 +3509,7 @@
           <p:cNvPr id="34" name="">
             <a:extLst xmlns:a="http://schemas.openxmlformats.org/drawingml/2006/main">
               <a:ext uri="{FF2B5EF4-FFF2-40B4-BE49-F238E27FC236}">
-                <a16:creationId xmlns:a16="http://schemas.microsoft.com/office/drawing/2014/main" id="{B6B523FB-0B81-4528-A38C-692B325CB3A8}"/>
+                <a16:creationId xmlns:a16="http://schemas.microsoft.com/office/drawing/2014/main" id="{62BAC110-5F0A-42B4-8087-F43F3682D09C}"/>
               </a:ext>
             </a:extLst>
           </p:cNvPr>
@@ -3566,7 +3566,7 @@
           <p:cNvPr id="35" name="">
             <a:extLst xmlns:a="http://schemas.openxmlformats.org/drawingml/2006/main">
               <a:ext uri="{FF2B5EF4-FFF2-40B4-BE49-F238E27FC236}">
-                <a16:creationId xmlns:a16="http://schemas.microsoft.com/office/drawing/2014/main" id="{75F48F34-8A25-401A-B22B-14A7496F9720}"/>
+                <a16:creationId xmlns:a16="http://schemas.microsoft.com/office/drawing/2014/main" id="{018C6078-A6A5-46E1-988E-A83CE4C09F19}"/>
               </a:ext>
             </a:extLst>
           </p:cNvPr>
@@ -3623,7 +3623,7 @@
           <p:cNvPr id="36" name="">
             <a:extLst xmlns:a="http://schemas.openxmlformats.org/drawingml/2006/main">
               <a:ext uri="{FF2B5EF4-FFF2-40B4-BE49-F238E27FC236}">
-                <a16:creationId xmlns:a16="http://schemas.microsoft.com/office/drawing/2014/main" id="{B7C09CC2-3A85-4FF1-8C57-E65F7BDC120B}"/>
+                <a16:creationId xmlns:a16="http://schemas.microsoft.com/office/drawing/2014/main" id="{71C5ADBE-96F7-472C-A116-E2CA165ADAB8}"/>
               </a:ext>
             </a:extLst>
           </p:cNvPr>
@@ -3680,7 +3680,7 @@
           <p:cNvPr id="37" name="">
             <a:extLst xmlns:a="http://schemas.openxmlformats.org/drawingml/2006/main">
               <a:ext uri="{FF2B5EF4-FFF2-40B4-BE49-F238E27FC236}">
-                <a16:creationId xmlns:a16="http://schemas.microsoft.com/office/drawing/2014/main" id="{41583FBD-2154-4639-AC52-378F5E646A48}"/>
+                <a16:creationId xmlns:a16="http://schemas.microsoft.com/office/drawing/2014/main" id="{346799FE-A17E-4D92-97C3-C6823B91DCF6}"/>
               </a:ext>
             </a:extLst>
           </p:cNvPr>
@@ -3737,7 +3737,7 @@
           <p:cNvPr id="38" name="">
             <a:extLst xmlns:a="http://schemas.openxmlformats.org/drawingml/2006/main">
               <a:ext uri="{FF2B5EF4-FFF2-40B4-BE49-F238E27FC236}">
-                <a16:creationId xmlns:a16="http://schemas.microsoft.com/office/drawing/2014/main" id="{76A0DEE8-ACFE-462E-A881-14278630F057}"/>
+                <a16:creationId xmlns:a16="http://schemas.microsoft.com/office/drawing/2014/main" id="{E9798D19-81A2-48A0-B9BC-71D4EB41F32E}"/>
               </a:ext>
             </a:extLst>
           </p:cNvPr>
@@ -3794,7 +3794,7 @@
           <p:cNvPr id="39" name="">
             <a:extLst xmlns:a="http://schemas.openxmlformats.org/drawingml/2006/main">
               <a:ext uri="{FF2B5EF4-FFF2-40B4-BE49-F238E27FC236}">
-                <a16:creationId xmlns:a16="http://schemas.microsoft.com/office/drawing/2014/main" id="{85E03942-7D96-49D1-9C55-8A30B65F6CE9}"/>
+                <a16:creationId xmlns:a16="http://schemas.microsoft.com/office/drawing/2014/main" id="{6D3A3038-6040-4353-B666-03949FF14679}"/>
               </a:ext>
             </a:extLst>
           </p:cNvPr>
@@ -3851,7 +3851,7 @@
           <p:cNvPr id="40" name="">
             <a:extLst xmlns:a="http://schemas.openxmlformats.org/drawingml/2006/main">
               <a:ext uri="{FF2B5EF4-FFF2-40B4-BE49-F238E27FC236}">
-                <a16:creationId xmlns:a16="http://schemas.microsoft.com/office/drawing/2014/main" id="{7F4F8D09-B71F-4F5B-B0E3-57FA3D81C7C7}"/>
+                <a16:creationId xmlns:a16="http://schemas.microsoft.com/office/drawing/2014/main" id="{12DE2C93-5A10-4BB5-8453-7F76EACED356}"/>
               </a:ext>
             </a:extLst>
           </p:cNvPr>
@@ -3908,7 +3908,7 @@
           <p:cNvPr id="41" name="">
             <a:extLst xmlns:a="http://schemas.openxmlformats.org/drawingml/2006/main">
               <a:ext uri="{FF2B5EF4-FFF2-40B4-BE49-F238E27FC236}">
-                <a16:creationId xmlns:a16="http://schemas.microsoft.com/office/drawing/2014/main" id="{13ADC870-A1E6-4082-97EE-E9D08D2136F9}"/>
+                <a16:creationId xmlns:a16="http://schemas.microsoft.com/office/drawing/2014/main" id="{FD40E817-7F82-44CC-933A-F8B845649DE4}"/>
               </a:ext>
             </a:extLst>
           </p:cNvPr>
@@ -3988,7 +3988,7 @@
           <p:cNvPr id="42" name="">
             <a:extLst xmlns:a="http://schemas.openxmlformats.org/drawingml/2006/main">
               <a:ext uri="{FF2B5EF4-FFF2-40B4-BE49-F238E27FC236}">
-                <a16:creationId xmlns:a16="http://schemas.microsoft.com/office/drawing/2014/main" id="{27831340-0C22-4886-B68B-56ECC3C7CDBF}"/>
+                <a16:creationId xmlns:a16="http://schemas.microsoft.com/office/drawing/2014/main" id="{8AA1CD72-0528-4B96-9849-289F0A9B87D2}"/>
               </a:ext>
             </a:extLst>
           </p:cNvPr>
@@ -4045,7 +4045,7 @@
           <p:cNvPr id="43" name="">
             <a:extLst xmlns:a="http://schemas.openxmlformats.org/drawingml/2006/main">
               <a:ext uri="{FF2B5EF4-FFF2-40B4-BE49-F238E27FC236}">
-                <a16:creationId xmlns:a16="http://schemas.microsoft.com/office/drawing/2014/main" id="{1C8B260D-65FC-4930-88E8-E767781979B1}"/>
+                <a16:creationId xmlns:a16="http://schemas.microsoft.com/office/drawing/2014/main" id="{3A6C1783-22E9-499F-B74C-77321786EB96}"/>
               </a:ext>
             </a:extLst>
           </p:cNvPr>
@@ -4077,7 +4077,7 @@
           <p:cNvPr id="44" name="">
             <a:extLst xmlns:a="http://schemas.openxmlformats.org/drawingml/2006/main">
               <a:ext uri="{FF2B5EF4-FFF2-40B4-BE49-F238E27FC236}">
-                <a16:creationId xmlns:a16="http://schemas.microsoft.com/office/drawing/2014/main" id="{A67722E8-9543-4BBA-B123-FC10E035C9C2}"/>
+                <a16:creationId xmlns:a16="http://schemas.microsoft.com/office/drawing/2014/main" id="{D0B28E90-7F11-4687-89E2-37BD648D2AFB}"/>
               </a:ext>
             </a:extLst>
           </p:cNvPr>
@@ -4132,7 +4132,7 @@
     </p:spTree>
     <p:extLst>
       <p:ext uri="{BB962C8B-B14F-4D97-AF65-F5344CB8AC3E}">
-        <p14:creationId xmlns:p14="http://schemas.microsoft.com/office/powerpoint/2010/main" val="678091102"/>
+        <p14:creationId xmlns:p14="http://schemas.microsoft.com/office/powerpoint/2010/main" val="415490476"/>
       </p:ext>
     </p:extLst>
   </p:cSld>
@@ -4163,7 +4163,7 @@
           <p:cNvPr id="56" name="">
             <a:extLst xmlns:a="http://schemas.openxmlformats.org/drawingml/2006/main">
               <a:ext uri="{FF2B5EF4-FFF2-40B4-BE49-F238E27FC236}">
-                <a16:creationId xmlns:a16="http://schemas.microsoft.com/office/drawing/2014/main" id="{E3D10723-A624-4903-8E65-840F65D5D688}"/>
+                <a16:creationId xmlns:a16="http://schemas.microsoft.com/office/drawing/2014/main" id="{1AD91FE7-EF32-418A-A2E8-5FCBB3414644}"/>
               </a:ext>
             </a:extLst>
           </p:cNvPr>
@@ -4193,7 +4193,7 @@
           <p:cNvPr id="2" name="">
             <a:extLst xmlns:a="http://schemas.openxmlformats.org/drawingml/2006/main">
               <a:ext uri="{FF2B5EF4-FFF2-40B4-BE49-F238E27FC236}">
-                <a16:creationId xmlns:a16="http://schemas.microsoft.com/office/drawing/2014/main" id="{62DC4879-57BF-435B-9DE4-CBCF52CF4384}"/>
+                <a16:creationId xmlns:a16="http://schemas.microsoft.com/office/drawing/2014/main" id="{99D3EB75-0BBD-42FE-919A-778EC453F181}"/>
               </a:ext>
             </a:extLst>
           </p:cNvPr>
@@ -4250,7 +4250,7 @@
           <p:cNvPr id="3" name="">
             <a:extLst xmlns:a="http://schemas.openxmlformats.org/drawingml/2006/main">
               <a:ext uri="{FF2B5EF4-FFF2-40B4-BE49-F238E27FC236}">
-                <a16:creationId xmlns:a16="http://schemas.microsoft.com/office/drawing/2014/main" id="{31B26076-1C16-463D-87B9-A239207E8B52}"/>
+                <a16:creationId xmlns:a16="http://schemas.microsoft.com/office/drawing/2014/main" id="{410F4260-5016-4717-97EF-68A4CBB0926C}"/>
               </a:ext>
             </a:extLst>
           </p:cNvPr>
@@ -4280,7 +4280,7 @@
           <p:cNvPr id="4" name="">
             <a:extLst xmlns:a="http://schemas.openxmlformats.org/drawingml/2006/main">
               <a:ext uri="{FF2B5EF4-FFF2-40B4-BE49-F238E27FC236}">
-                <a16:creationId xmlns:a16="http://schemas.microsoft.com/office/drawing/2014/main" id="{598A0E73-BC1F-467F-B91B-CD2CCD4C122B}"/>
+                <a16:creationId xmlns:a16="http://schemas.microsoft.com/office/drawing/2014/main" id="{ACE49670-8C2A-4D24-AA4F-219DCD9CCC7A}"/>
               </a:ext>
             </a:extLst>
           </p:cNvPr>
@@ -4337,7 +4337,7 @@
           <p:cNvPr id="5" name="">
             <a:extLst xmlns:a="http://schemas.openxmlformats.org/drawingml/2006/main">
               <a:ext uri="{FF2B5EF4-FFF2-40B4-BE49-F238E27FC236}">
-                <a16:creationId xmlns:a16="http://schemas.microsoft.com/office/drawing/2014/main" id="{226321E6-4768-4ED7-ABF0-5D76A1B287C6}"/>
+                <a16:creationId xmlns:a16="http://schemas.microsoft.com/office/drawing/2014/main" id="{DFE3ECB1-4BD0-4EE8-96BA-1EB3DF80A2AD}"/>
               </a:ext>
             </a:extLst>
           </p:cNvPr>
@@ -4394,7 +4394,7 @@
           <p:cNvPr id="6" name="">
             <a:extLst xmlns:a="http://schemas.openxmlformats.org/drawingml/2006/main">
               <a:ext uri="{FF2B5EF4-FFF2-40B4-BE49-F238E27FC236}">
-                <a16:creationId xmlns:a16="http://schemas.microsoft.com/office/drawing/2014/main" id="{8958EE09-E51A-48C0-BC7D-1814282435BE}"/>
+                <a16:creationId xmlns:a16="http://schemas.microsoft.com/office/drawing/2014/main" id="{F96FFF4D-2149-4022-AF5F-5D3150C4C03F}"/>
               </a:ext>
             </a:extLst>
           </p:cNvPr>
@@ -4428,7 +4428,7 @@
           <p:cNvPr id="7" name="">
             <a:extLst xmlns:a="http://schemas.openxmlformats.org/drawingml/2006/main">
               <a:ext uri="{FF2B5EF4-FFF2-40B4-BE49-F238E27FC236}">
-                <a16:creationId xmlns:a16="http://schemas.microsoft.com/office/drawing/2014/main" id="{58229896-5F06-4723-8A1A-7CF931A2531D}"/>
+                <a16:creationId xmlns:a16="http://schemas.microsoft.com/office/drawing/2014/main" id="{ED7B7561-9CE0-4C0B-8B83-507382B18D0E}"/>
               </a:ext>
             </a:extLst>
           </p:cNvPr>
@@ -4460,7 +4460,7 @@
           <p:cNvPr id="8" name="">
             <a:extLst xmlns:a="http://schemas.openxmlformats.org/drawingml/2006/main">
               <a:ext uri="{FF2B5EF4-FFF2-40B4-BE49-F238E27FC236}">
-                <a16:creationId xmlns:a16="http://schemas.microsoft.com/office/drawing/2014/main" id="{D93BCC9E-D5FD-4369-8D77-3F8C6FC4E7A4}"/>
+                <a16:creationId xmlns:a16="http://schemas.microsoft.com/office/drawing/2014/main" id="{A506BF6D-E165-4D29-B261-484740E37F7C}"/>
               </a:ext>
             </a:extLst>
           </p:cNvPr>
@@ -4517,7 +4517,7 @@
           <p:cNvPr id="9" name="">
             <a:extLst xmlns:a="http://schemas.openxmlformats.org/drawingml/2006/main">
               <a:ext uri="{FF2B5EF4-FFF2-40B4-BE49-F238E27FC236}">
-                <a16:creationId xmlns:a16="http://schemas.microsoft.com/office/drawing/2014/main" id="{55B3486F-DDBD-4D0F-82A6-1A0ECF100617}"/>
+                <a16:creationId xmlns:a16="http://schemas.microsoft.com/office/drawing/2014/main" id="{04588564-F41A-486F-8B6F-5C85D483E695}"/>
               </a:ext>
             </a:extLst>
           </p:cNvPr>
@@ -4574,7 +4574,7 @@
           <p:cNvPr id="10" name="">
             <a:extLst xmlns:a="http://schemas.openxmlformats.org/drawingml/2006/main">
               <a:ext uri="{FF2B5EF4-FFF2-40B4-BE49-F238E27FC236}">
-                <a16:creationId xmlns:a16="http://schemas.microsoft.com/office/drawing/2014/main" id="{3C466D01-ACDA-4C68-B430-AE5D22081F5F}"/>
+                <a16:creationId xmlns:a16="http://schemas.microsoft.com/office/drawing/2014/main" id="{442C8AF0-5D9F-4780-B2DE-6A1DA386E275}"/>
               </a:ext>
             </a:extLst>
           </p:cNvPr>
@@ -4631,7 +4631,7 @@
           <p:cNvPr id="11" name="">
             <a:extLst xmlns:a="http://schemas.openxmlformats.org/drawingml/2006/main">
               <a:ext uri="{FF2B5EF4-FFF2-40B4-BE49-F238E27FC236}">
-                <a16:creationId xmlns:a16="http://schemas.microsoft.com/office/drawing/2014/main" id="{8ACE0320-D522-4D96-B337-F0EACE555068}"/>
+                <a16:creationId xmlns:a16="http://schemas.microsoft.com/office/drawing/2014/main" id="{7D245A55-E438-4799-8BEB-DAC6EA57121D}"/>
               </a:ext>
             </a:extLst>
           </p:cNvPr>
@@ -4661,7 +4661,7 @@
           <p:cNvPr id="12" name="">
             <a:extLst xmlns:a="http://schemas.openxmlformats.org/drawingml/2006/main">
               <a:ext uri="{FF2B5EF4-FFF2-40B4-BE49-F238E27FC236}">
-                <a16:creationId xmlns:a16="http://schemas.microsoft.com/office/drawing/2014/main" id="{B09EA37C-2ACB-40F4-B012-06F39672B5F0}"/>
+                <a16:creationId xmlns:a16="http://schemas.microsoft.com/office/drawing/2014/main" id="{265102B3-7670-41E4-B3ED-A1C19D1ECCA0}"/>
               </a:ext>
             </a:extLst>
           </p:cNvPr>
@@ -4695,7 +4695,7 @@
           <p:cNvPr id="13" name="">
             <a:extLst xmlns:a="http://schemas.openxmlformats.org/drawingml/2006/main">
               <a:ext uri="{FF2B5EF4-FFF2-40B4-BE49-F238E27FC236}">
-                <a16:creationId xmlns:a16="http://schemas.microsoft.com/office/drawing/2014/main" id="{AF994664-FDF7-4C3A-A388-6F650B39DCFE}"/>
+                <a16:creationId xmlns:a16="http://schemas.microsoft.com/office/drawing/2014/main" id="{9CAF3F38-2844-4A26-A191-C49016607D87}"/>
               </a:ext>
             </a:extLst>
           </p:cNvPr>
@@ -4727,7 +4727,7 @@
           <p:cNvPr id="14" name="">
             <a:extLst xmlns:a="http://schemas.openxmlformats.org/drawingml/2006/main">
               <a:ext uri="{FF2B5EF4-FFF2-40B4-BE49-F238E27FC236}">
-                <a16:creationId xmlns:a16="http://schemas.microsoft.com/office/drawing/2014/main" id="{35B8913D-6762-4B2F-917E-C92643CA9A52}"/>
+                <a16:creationId xmlns:a16="http://schemas.microsoft.com/office/drawing/2014/main" id="{33A6E3F9-CE80-4C68-9DDB-EC642FF86FB7}"/>
               </a:ext>
             </a:extLst>
           </p:cNvPr>
@@ -4784,7 +4784,7 @@
           <p:cNvPr id="15" name="">
             <a:extLst xmlns:a="http://schemas.openxmlformats.org/drawingml/2006/main">
               <a:ext uri="{FF2B5EF4-FFF2-40B4-BE49-F238E27FC236}">
-                <a16:creationId xmlns:a16="http://schemas.microsoft.com/office/drawing/2014/main" id="{6C639567-8A47-4DBD-9B6B-53CB30D285D2}"/>
+                <a16:creationId xmlns:a16="http://schemas.microsoft.com/office/drawing/2014/main" id="{BAFD1C05-AF39-4E84-9B2C-6A4055746E11}"/>
               </a:ext>
             </a:extLst>
           </p:cNvPr>
@@ -4841,7 +4841,7 @@
           <p:cNvPr id="16" name="">
             <a:extLst xmlns:a="http://schemas.openxmlformats.org/drawingml/2006/main">
               <a:ext uri="{FF2B5EF4-FFF2-40B4-BE49-F238E27FC236}">
-                <a16:creationId xmlns:a16="http://schemas.microsoft.com/office/drawing/2014/main" id="{2BF4F288-7586-4FED-9608-D467D4EB9E66}"/>
+                <a16:creationId xmlns:a16="http://schemas.microsoft.com/office/drawing/2014/main" id="{C632164B-6DE0-429D-B1E9-D6848D184CC3}"/>
               </a:ext>
             </a:extLst>
           </p:cNvPr>
@@ -4898,7 +4898,7 @@
           <p:cNvPr id="17" name="">
             <a:extLst xmlns:a="http://schemas.openxmlformats.org/drawingml/2006/main">
               <a:ext uri="{FF2B5EF4-FFF2-40B4-BE49-F238E27FC236}">
-                <a16:creationId xmlns:a16="http://schemas.microsoft.com/office/drawing/2014/main" id="{C26C8E7E-5051-4FE0-A941-D39B59586C40}"/>
+                <a16:creationId xmlns:a16="http://schemas.microsoft.com/office/drawing/2014/main" id="{A4D7141F-6DE8-4F8B-82B0-E28DDC7F2D82}"/>
               </a:ext>
             </a:extLst>
           </p:cNvPr>
@@ -4928,7 +4928,7 @@
           <p:cNvPr id="18" name="">
             <a:extLst xmlns:a="http://schemas.openxmlformats.org/drawingml/2006/main">
               <a:ext uri="{FF2B5EF4-FFF2-40B4-BE49-F238E27FC236}">
-                <a16:creationId xmlns:a16="http://schemas.microsoft.com/office/drawing/2014/main" id="{E231873B-FADD-4CDD-9A48-384D8529340B}"/>
+                <a16:creationId xmlns:a16="http://schemas.microsoft.com/office/drawing/2014/main" id="{E360EE42-52AB-4F11-9336-38A19D902C3B}"/>
               </a:ext>
             </a:extLst>
           </p:cNvPr>
@@ -4962,7 +4962,7 @@
           <p:cNvPr id="19" name="">
             <a:extLst xmlns:a="http://schemas.openxmlformats.org/drawingml/2006/main">
               <a:ext uri="{FF2B5EF4-FFF2-40B4-BE49-F238E27FC236}">
-                <a16:creationId xmlns:a16="http://schemas.microsoft.com/office/drawing/2014/main" id="{526BE33E-A5A2-4F61-B1F5-AA321E23570E}"/>
+                <a16:creationId xmlns:a16="http://schemas.microsoft.com/office/drawing/2014/main" id="{679AED27-5B11-47AC-8EF6-D7548C82426A}"/>
               </a:ext>
             </a:extLst>
           </p:cNvPr>
@@ -4994,7 +4994,7 @@
           <p:cNvPr id="20" name="">
             <a:extLst xmlns:a="http://schemas.openxmlformats.org/drawingml/2006/main">
               <a:ext uri="{FF2B5EF4-FFF2-40B4-BE49-F238E27FC236}">
-                <a16:creationId xmlns:a16="http://schemas.microsoft.com/office/drawing/2014/main" id="{D62B1BDC-ACE7-4B12-9968-AA39607C9B1E}"/>
+                <a16:creationId xmlns:a16="http://schemas.microsoft.com/office/drawing/2014/main" id="{69ED7E3F-D508-4D90-B3EF-FCE9E4671259}"/>
               </a:ext>
             </a:extLst>
           </p:cNvPr>
@@ -5051,7 +5051,7 @@
           <p:cNvPr id="21" name="">
             <a:extLst xmlns:a="http://schemas.openxmlformats.org/drawingml/2006/main">
               <a:ext uri="{FF2B5EF4-FFF2-40B4-BE49-F238E27FC236}">
-                <a16:creationId xmlns:a16="http://schemas.microsoft.com/office/drawing/2014/main" id="{BAED3878-0B6F-492F-8597-221BC8B3F352}"/>
+                <a16:creationId xmlns:a16="http://schemas.microsoft.com/office/drawing/2014/main" id="{1463E557-BD6A-4EB1-BD9B-75BF46AB45C1}"/>
               </a:ext>
             </a:extLst>
           </p:cNvPr>
@@ -5108,7 +5108,7 @@
           <p:cNvPr id="22" name="">
             <a:extLst xmlns:a="http://schemas.openxmlformats.org/drawingml/2006/main">
               <a:ext uri="{FF2B5EF4-FFF2-40B4-BE49-F238E27FC236}">
-                <a16:creationId xmlns:a16="http://schemas.microsoft.com/office/drawing/2014/main" id="{8D6C473C-6601-4C1F-9B56-D65F26B70E5C}"/>
+                <a16:creationId xmlns:a16="http://schemas.microsoft.com/office/drawing/2014/main" id="{121EF560-5C57-4BB6-A04F-47E84A81074F}"/>
               </a:ext>
             </a:extLst>
           </p:cNvPr>
@@ -5165,7 +5165,7 @@
           <p:cNvPr id="23" name="">
             <a:extLst xmlns:a="http://schemas.openxmlformats.org/drawingml/2006/main">
               <a:ext uri="{FF2B5EF4-FFF2-40B4-BE49-F238E27FC236}">
-                <a16:creationId xmlns:a16="http://schemas.microsoft.com/office/drawing/2014/main" id="{612B226D-62B3-46A7-ADBE-31DCD13AE0EA}"/>
+                <a16:creationId xmlns:a16="http://schemas.microsoft.com/office/drawing/2014/main" id="{33D947E3-78D0-44C9-B1EB-0C261C235426}"/>
               </a:ext>
             </a:extLst>
           </p:cNvPr>
@@ -5195,7 +5195,7 @@
           <p:cNvPr id="24" name="">
             <a:extLst xmlns:a="http://schemas.openxmlformats.org/drawingml/2006/main">
               <a:ext uri="{FF2B5EF4-FFF2-40B4-BE49-F238E27FC236}">
-                <a16:creationId xmlns:a16="http://schemas.microsoft.com/office/drawing/2014/main" id="{B4380685-92BB-4EA1-95E0-1DD5AC156BB3}"/>
+                <a16:creationId xmlns:a16="http://schemas.microsoft.com/office/drawing/2014/main" id="{90A8DE5A-FCE2-4D32-8B95-5A7718D6A09F}"/>
               </a:ext>
             </a:extLst>
           </p:cNvPr>
@@ -5229,7 +5229,7 @@
           <p:cNvPr id="25" name="">
             <a:extLst xmlns:a="http://schemas.openxmlformats.org/drawingml/2006/main">
               <a:ext uri="{FF2B5EF4-FFF2-40B4-BE49-F238E27FC236}">
-                <a16:creationId xmlns:a16="http://schemas.microsoft.com/office/drawing/2014/main" id="{BC5C885F-72E7-44F3-A742-7FD5DB90391C}"/>
+                <a16:creationId xmlns:a16="http://schemas.microsoft.com/office/drawing/2014/main" id="{2426524D-FE1B-4129-A1A7-1ED1C2D9B127}"/>
               </a:ext>
             </a:extLst>
           </p:cNvPr>
@@ -5261,7 +5261,7 @@
           <p:cNvPr id="26" name="">
             <a:extLst xmlns:a="http://schemas.openxmlformats.org/drawingml/2006/main">
               <a:ext uri="{FF2B5EF4-FFF2-40B4-BE49-F238E27FC236}">
-                <a16:creationId xmlns:a16="http://schemas.microsoft.com/office/drawing/2014/main" id="{BC94BAB0-6010-4C2F-972C-95161498134C}"/>
+                <a16:creationId xmlns:a16="http://schemas.microsoft.com/office/drawing/2014/main" id="{8C43C6BD-223F-4740-BB58-E7021D6B6225}"/>
               </a:ext>
             </a:extLst>
           </p:cNvPr>
@@ -5318,7 +5318,7 @@
           <p:cNvPr id="27" name="">
             <a:extLst xmlns:a="http://schemas.openxmlformats.org/drawingml/2006/main">
               <a:ext uri="{FF2B5EF4-FFF2-40B4-BE49-F238E27FC236}">
-                <a16:creationId xmlns:a16="http://schemas.microsoft.com/office/drawing/2014/main" id="{50A3C85F-A793-481A-970C-5B9C07223501}"/>
+                <a16:creationId xmlns:a16="http://schemas.microsoft.com/office/drawing/2014/main" id="{EAD89A89-5840-4425-AA4A-31BEFD6B5C06}"/>
               </a:ext>
             </a:extLst>
           </p:cNvPr>
@@ -5375,7 +5375,7 @@
           <p:cNvPr id="28" name="">
             <a:extLst xmlns:a="http://schemas.openxmlformats.org/drawingml/2006/main">
               <a:ext uri="{FF2B5EF4-FFF2-40B4-BE49-F238E27FC236}">
-                <a16:creationId xmlns:a16="http://schemas.microsoft.com/office/drawing/2014/main" id="{AAD68C50-F435-4252-BAC8-659B0223C17A}"/>
+                <a16:creationId xmlns:a16="http://schemas.microsoft.com/office/drawing/2014/main" id="{28502A63-9547-4045-BD15-9F714913B440}"/>
               </a:ext>
             </a:extLst>
           </p:cNvPr>
@@ -5432,7 +5432,7 @@
           <p:cNvPr id="29" name="">
             <a:extLst xmlns:a="http://schemas.openxmlformats.org/drawingml/2006/main">
               <a:ext uri="{FF2B5EF4-FFF2-40B4-BE49-F238E27FC236}">
-                <a16:creationId xmlns:a16="http://schemas.microsoft.com/office/drawing/2014/main" id="{4FEC1028-4F2A-4C1A-9CD7-3D6736455A3F}"/>
+                <a16:creationId xmlns:a16="http://schemas.microsoft.com/office/drawing/2014/main" id="{0211B042-6348-4B5B-9BDA-52FA54F26D9D}"/>
               </a:ext>
             </a:extLst>
           </p:cNvPr>
@@ -5462,7 +5462,7 @@
           <p:cNvPr id="30" name="">
             <a:extLst xmlns:a="http://schemas.openxmlformats.org/drawingml/2006/main">
               <a:ext uri="{FF2B5EF4-FFF2-40B4-BE49-F238E27FC236}">
-                <a16:creationId xmlns:a16="http://schemas.microsoft.com/office/drawing/2014/main" id="{6812D253-CA01-4C2A-842D-695EDA16FAA6}"/>
+                <a16:creationId xmlns:a16="http://schemas.microsoft.com/office/drawing/2014/main" id="{E97379DB-686E-4D70-9F23-7E52447FAA4B}"/>
               </a:ext>
             </a:extLst>
           </p:cNvPr>
@@ -5496,7 +5496,7 @@
           <p:cNvPr id="31" name="">
             <a:extLst xmlns:a="http://schemas.openxmlformats.org/drawingml/2006/main">
               <a:ext uri="{FF2B5EF4-FFF2-40B4-BE49-F238E27FC236}">
-                <a16:creationId xmlns:a16="http://schemas.microsoft.com/office/drawing/2014/main" id="{D62D44F3-D60D-4ACA-82D3-E748E22F186F}"/>
+                <a16:creationId xmlns:a16="http://schemas.microsoft.com/office/drawing/2014/main" id="{A5D2F7CA-A381-4645-875A-05F17E2A239A}"/>
               </a:ext>
             </a:extLst>
           </p:cNvPr>
@@ -5528,7 +5528,7 @@
           <p:cNvPr id="32" name="">
             <a:extLst xmlns:a="http://schemas.openxmlformats.org/drawingml/2006/main">
               <a:ext uri="{FF2B5EF4-FFF2-40B4-BE49-F238E27FC236}">
-                <a16:creationId xmlns:a16="http://schemas.microsoft.com/office/drawing/2014/main" id="{DC58FA19-DC56-477A-8869-34651E80A20C}"/>
+                <a16:creationId xmlns:a16="http://schemas.microsoft.com/office/drawing/2014/main" id="{80949E8A-BF7D-44E6-8179-3725CCE98E8C}"/>
               </a:ext>
             </a:extLst>
           </p:cNvPr>
@@ -5585,7 +5585,7 @@
           <p:cNvPr id="33" name="">
             <a:extLst xmlns:a="http://schemas.openxmlformats.org/drawingml/2006/main">
               <a:ext uri="{FF2B5EF4-FFF2-40B4-BE49-F238E27FC236}">
-                <a16:creationId xmlns:a16="http://schemas.microsoft.com/office/drawing/2014/main" id="{6E5AF0CE-770B-4F9F-83D4-53751B840803}"/>
+                <a16:creationId xmlns:a16="http://schemas.microsoft.com/office/drawing/2014/main" id="{92A2769A-DEE8-420C-BE4C-5EABB1855DC8}"/>
               </a:ext>
             </a:extLst>
           </p:cNvPr>
@@ -5642,7 +5642,7 @@
           <p:cNvPr id="34" name="">
             <a:extLst xmlns:a="http://schemas.openxmlformats.org/drawingml/2006/main">
               <a:ext uri="{FF2B5EF4-FFF2-40B4-BE49-F238E27FC236}">
-                <a16:creationId xmlns:a16="http://schemas.microsoft.com/office/drawing/2014/main" id="{F828A7A2-F8DF-46C0-AA1F-40BF172DA69C}"/>
+                <a16:creationId xmlns:a16="http://schemas.microsoft.com/office/drawing/2014/main" id="{421E01A2-F4E5-409F-B17E-0C5DE6C925E1}"/>
               </a:ext>
             </a:extLst>
           </p:cNvPr>
@@ -5699,7 +5699,7 @@
           <p:cNvPr id="35" name="">
             <a:extLst xmlns:a="http://schemas.openxmlformats.org/drawingml/2006/main">
               <a:ext uri="{FF2B5EF4-FFF2-40B4-BE49-F238E27FC236}">
-                <a16:creationId xmlns:a16="http://schemas.microsoft.com/office/drawing/2014/main" id="{9D03FF3B-30FA-45B3-8075-508D71BA030A}"/>
+                <a16:creationId xmlns:a16="http://schemas.microsoft.com/office/drawing/2014/main" id="{8BC0DB6E-D1CE-4E7E-A260-203EE1088B74}"/>
               </a:ext>
             </a:extLst>
           </p:cNvPr>
@@ -5729,7 +5729,7 @@
           <p:cNvPr id="36" name="">
             <a:extLst xmlns:a="http://schemas.openxmlformats.org/drawingml/2006/main">
               <a:ext uri="{FF2B5EF4-FFF2-40B4-BE49-F238E27FC236}">
-                <a16:creationId xmlns:a16="http://schemas.microsoft.com/office/drawing/2014/main" id="{C25E4C7B-F1E2-4C80-8256-21BCD6F182E5}"/>
+                <a16:creationId xmlns:a16="http://schemas.microsoft.com/office/drawing/2014/main" id="{5029D390-3442-43E9-9D4F-9FB5F49A1504}"/>
               </a:ext>
             </a:extLst>
           </p:cNvPr>
@@ -5763,7 +5763,7 @@
           <p:cNvPr id="37" name="">
             <a:extLst xmlns:a="http://schemas.openxmlformats.org/drawingml/2006/main">
               <a:ext uri="{FF2B5EF4-FFF2-40B4-BE49-F238E27FC236}">
-                <a16:creationId xmlns:a16="http://schemas.microsoft.com/office/drawing/2014/main" id="{935FEFBE-1DAA-4DF5-A0E2-9310DD9B9667}"/>
+                <a16:creationId xmlns:a16="http://schemas.microsoft.com/office/drawing/2014/main" id="{00AD73CD-78C9-4866-A7F1-380D4AF95364}"/>
               </a:ext>
             </a:extLst>
           </p:cNvPr>
@@ -5795,7 +5795,7 @@
           <p:cNvPr id="38" name="">
             <a:extLst xmlns:a="http://schemas.openxmlformats.org/drawingml/2006/main">
               <a:ext uri="{FF2B5EF4-FFF2-40B4-BE49-F238E27FC236}">
-                <a16:creationId xmlns:a16="http://schemas.microsoft.com/office/drawing/2014/main" id="{EA98122E-41DA-4921-9F43-FFA0263B5279}"/>
+                <a16:creationId xmlns:a16="http://schemas.microsoft.com/office/drawing/2014/main" id="{DE8374FD-80F5-4628-AFA5-F5EA5591184E}"/>
               </a:ext>
             </a:extLst>
           </p:cNvPr>
@@ -5852,7 +5852,7 @@
           <p:cNvPr id="39" name="">
             <a:extLst xmlns:a="http://schemas.openxmlformats.org/drawingml/2006/main">
               <a:ext uri="{FF2B5EF4-FFF2-40B4-BE49-F238E27FC236}">
-                <a16:creationId xmlns:a16="http://schemas.microsoft.com/office/drawing/2014/main" id="{74750590-FAFC-45E8-8130-4BB3DE9A6CEB}"/>
+                <a16:creationId xmlns:a16="http://schemas.microsoft.com/office/drawing/2014/main" id="{D0D84C4A-9083-41C7-A834-DBA0191C102A}"/>
               </a:ext>
             </a:extLst>
           </p:cNvPr>
@@ -5909,7 +5909,7 @@
           <p:cNvPr id="40" name="">
             <a:extLst xmlns:a="http://schemas.openxmlformats.org/drawingml/2006/main">
               <a:ext uri="{FF2B5EF4-FFF2-40B4-BE49-F238E27FC236}">
-                <a16:creationId xmlns:a16="http://schemas.microsoft.com/office/drawing/2014/main" id="{C8AA26CD-1561-4137-B2F8-96F52340C63C}"/>
+                <a16:creationId xmlns:a16="http://schemas.microsoft.com/office/drawing/2014/main" id="{A8313BC8-05E1-41F2-9E30-9162CA3C2865}"/>
               </a:ext>
             </a:extLst>
           </p:cNvPr>
@@ -5966,7 +5966,7 @@
           <p:cNvPr id="41" name="">
             <a:extLst xmlns:a="http://schemas.openxmlformats.org/drawingml/2006/main">
               <a:ext uri="{FF2B5EF4-FFF2-40B4-BE49-F238E27FC236}">
-                <a16:creationId xmlns:a16="http://schemas.microsoft.com/office/drawing/2014/main" id="{10C88B33-8EAE-4229-ACD4-29A819EBA082}"/>
+                <a16:creationId xmlns:a16="http://schemas.microsoft.com/office/drawing/2014/main" id="{ADE64A8A-A701-445D-848A-0A79998CD738}"/>
               </a:ext>
             </a:extLst>
           </p:cNvPr>
@@ -5998,7 +5998,7 @@
           <p:cNvPr id="42" name="">
             <a:extLst xmlns:a="http://schemas.openxmlformats.org/drawingml/2006/main">
               <a:ext uri="{FF2B5EF4-FFF2-40B4-BE49-F238E27FC236}">
-                <a16:creationId xmlns:a16="http://schemas.microsoft.com/office/drawing/2014/main" id="{E9A0A87D-5A32-4343-86FC-D468F0C6C21A}"/>
+                <a16:creationId xmlns:a16="http://schemas.microsoft.com/office/drawing/2014/main" id="{2D46D78B-1053-4931-9899-E2CA4EF9B82E}"/>
               </a:ext>
             </a:extLst>
           </p:cNvPr>
@@ -6055,7 +6055,7 @@
           <p:cNvPr id="43" name="">
             <a:extLst xmlns:a="http://schemas.openxmlformats.org/drawingml/2006/main">
               <a:ext uri="{FF2B5EF4-FFF2-40B4-BE49-F238E27FC236}">
-                <a16:creationId xmlns:a16="http://schemas.microsoft.com/office/drawing/2014/main" id="{075A0B91-BA13-44E0-9C59-879A4E8FF2CF}"/>
+                <a16:creationId xmlns:a16="http://schemas.microsoft.com/office/drawing/2014/main" id="{05BB4C13-EA32-4A5E-9A54-FD334E85156C}"/>
               </a:ext>
             </a:extLst>
           </p:cNvPr>
@@ -6112,7 +6112,7 @@
           <p:cNvPr id="44" name="">
             <a:extLst xmlns:a="http://schemas.openxmlformats.org/drawingml/2006/main">
               <a:ext uri="{FF2B5EF4-FFF2-40B4-BE49-F238E27FC236}">
-                <a16:creationId xmlns:a16="http://schemas.microsoft.com/office/drawing/2014/main" id="{AE215257-E8C6-4828-8285-2F72323810C6}"/>
+                <a16:creationId xmlns:a16="http://schemas.microsoft.com/office/drawing/2014/main" id="{57FA32F3-7231-4FB9-800D-E04EFF6265E1}"/>
               </a:ext>
             </a:extLst>
           </p:cNvPr>
@@ -6169,7 +6169,7 @@
           <p:cNvPr id="45" name="">
             <a:extLst xmlns:a="http://schemas.openxmlformats.org/drawingml/2006/main">
               <a:ext uri="{FF2B5EF4-FFF2-40B4-BE49-F238E27FC236}">
-                <a16:creationId xmlns:a16="http://schemas.microsoft.com/office/drawing/2014/main" id="{8C83AAA6-F7B4-4F72-B190-75801E628C87}"/>
+                <a16:creationId xmlns:a16="http://schemas.microsoft.com/office/drawing/2014/main" id="{9F7D048B-1F41-4135-A16A-FA0F76B46900}"/>
               </a:ext>
             </a:extLst>
           </p:cNvPr>
@@ -6226,7 +6226,7 @@
           <p:cNvPr id="46" name="">
             <a:extLst xmlns:a="http://schemas.openxmlformats.org/drawingml/2006/main">
               <a:ext uri="{FF2B5EF4-FFF2-40B4-BE49-F238E27FC236}">
-                <a16:creationId xmlns:a16="http://schemas.microsoft.com/office/drawing/2014/main" id="{F678E5CC-DDB2-4691-8167-51AE6C48F8E5}"/>
+                <a16:creationId xmlns:a16="http://schemas.microsoft.com/office/drawing/2014/main" id="{5C8C2394-73D4-4943-9123-1D845D738062}"/>
               </a:ext>
             </a:extLst>
           </p:cNvPr>
@@ -6283,7 +6283,7 @@
           <p:cNvPr id="47" name="">
             <a:extLst xmlns:a="http://schemas.openxmlformats.org/drawingml/2006/main">
               <a:ext uri="{FF2B5EF4-FFF2-40B4-BE49-F238E27FC236}">
-                <a16:creationId xmlns:a16="http://schemas.microsoft.com/office/drawing/2014/main" id="{926FCD29-63CD-46C5-937D-4C892697FA27}"/>
+                <a16:creationId xmlns:a16="http://schemas.microsoft.com/office/drawing/2014/main" id="{59EF5007-47FF-40CB-9B61-49D7733FAF86}"/>
               </a:ext>
             </a:extLst>
           </p:cNvPr>
@@ -6340,7 +6340,7 @@
           <p:cNvPr id="48" name="">
             <a:extLst xmlns:a="http://schemas.openxmlformats.org/drawingml/2006/main">
               <a:ext uri="{FF2B5EF4-FFF2-40B4-BE49-F238E27FC236}">
-                <a16:creationId xmlns:a16="http://schemas.microsoft.com/office/drawing/2014/main" id="{8D48BCE8-3DEE-42DD-BF5C-6E48C61BF442}"/>
+                <a16:creationId xmlns:a16="http://schemas.microsoft.com/office/drawing/2014/main" id="{8D75A6D8-CCEE-4C9B-AA75-220E5C00AF13}"/>
               </a:ext>
             </a:extLst>
           </p:cNvPr>
@@ -6397,7 +6397,7 @@
           <p:cNvPr id="49" name="">
             <a:extLst xmlns:a="http://schemas.openxmlformats.org/drawingml/2006/main">
               <a:ext uri="{FF2B5EF4-FFF2-40B4-BE49-F238E27FC236}">
-                <a16:creationId xmlns:a16="http://schemas.microsoft.com/office/drawing/2014/main" id="{FF1E7BD1-99B3-4057-8313-3060B5963D05}"/>
+                <a16:creationId xmlns:a16="http://schemas.microsoft.com/office/drawing/2014/main" id="{719CF8BB-C159-4844-8A43-27AC06BA8A9C}"/>
               </a:ext>
             </a:extLst>
           </p:cNvPr>
@@ -6477,7 +6477,7 @@
           <p:cNvPr id="50" name="">
             <a:extLst xmlns:a="http://schemas.openxmlformats.org/drawingml/2006/main">
               <a:ext uri="{FF2B5EF4-FFF2-40B4-BE49-F238E27FC236}">
-                <a16:creationId xmlns:a16="http://schemas.microsoft.com/office/drawing/2014/main" id="{472D1117-0D17-4503-B852-BD6388BE1E76}"/>
+                <a16:creationId xmlns:a16="http://schemas.microsoft.com/office/drawing/2014/main" id="{8C5F4715-41D5-49DC-9698-CFB7BB1D7559}"/>
               </a:ext>
             </a:extLst>
           </p:cNvPr>
@@ -6534,7 +6534,7 @@
           <p:cNvPr id="51" name="">
             <a:extLst xmlns:a="http://schemas.openxmlformats.org/drawingml/2006/main">
               <a:ext uri="{FF2B5EF4-FFF2-40B4-BE49-F238E27FC236}">
-                <a16:creationId xmlns:a16="http://schemas.microsoft.com/office/drawing/2014/main" id="{276721D9-5DC2-4C45-9FB9-33B17E473BBE}"/>
+                <a16:creationId xmlns:a16="http://schemas.microsoft.com/office/drawing/2014/main" id="{01D04882-BE31-4D06-B6CD-682D173BD007}"/>
               </a:ext>
             </a:extLst>
           </p:cNvPr>
@@ -6614,7 +6614,7 @@
           <p:cNvPr id="52" name="">
             <a:extLst xmlns:a="http://schemas.openxmlformats.org/drawingml/2006/main">
               <a:ext uri="{FF2B5EF4-FFF2-40B4-BE49-F238E27FC236}">
-                <a16:creationId xmlns:a16="http://schemas.microsoft.com/office/drawing/2014/main" id="{C265B8ED-8D31-47D4-B475-BF6C2D090A80}"/>
+                <a16:creationId xmlns:a16="http://schemas.microsoft.com/office/drawing/2014/main" id="{59435158-6513-4D82-998C-44CC0902E933}"/>
               </a:ext>
             </a:extLst>
           </p:cNvPr>
@@ -6671,7 +6671,7 @@
           <p:cNvPr id="53" name="">
             <a:extLst xmlns:a="http://schemas.openxmlformats.org/drawingml/2006/main">
               <a:ext uri="{FF2B5EF4-FFF2-40B4-BE49-F238E27FC236}">
-                <a16:creationId xmlns:a16="http://schemas.microsoft.com/office/drawing/2014/main" id="{9816FBB1-CDAD-49C1-B875-980DCAA186AD}"/>
+                <a16:creationId xmlns:a16="http://schemas.microsoft.com/office/drawing/2014/main" id="{6A08E36F-968F-4E2A-8E8E-AB62B2C8CD51}"/>
               </a:ext>
             </a:extLst>
           </p:cNvPr>
@@ -6751,7 +6751,7 @@
           <p:cNvPr id="54" name="">
             <a:extLst xmlns:a="http://schemas.openxmlformats.org/drawingml/2006/main">
               <a:ext uri="{FF2B5EF4-FFF2-40B4-BE49-F238E27FC236}">
-                <a16:creationId xmlns:a16="http://schemas.microsoft.com/office/drawing/2014/main" id="{C0E0350A-C17C-4632-916F-4046490FBEF8}"/>
+                <a16:creationId xmlns:a16="http://schemas.microsoft.com/office/drawing/2014/main" id="{A32F5C0B-10A7-4A26-A7F5-5DBADA5FCF58}"/>
               </a:ext>
             </a:extLst>
           </p:cNvPr>
@@ -6783,7 +6783,7 @@
           <p:cNvPr id="55" name="">
             <a:extLst xmlns:a="http://schemas.openxmlformats.org/drawingml/2006/main">
               <a:ext uri="{FF2B5EF4-FFF2-40B4-BE49-F238E27FC236}">
-                <a16:creationId xmlns:a16="http://schemas.microsoft.com/office/drawing/2014/main" id="{75422F59-704F-4766-B111-9F6F4C0CA65B}"/>
+                <a16:creationId xmlns:a16="http://schemas.microsoft.com/office/drawing/2014/main" id="{FB3945F6-0316-4229-9989-B08A7542E096}"/>
               </a:ext>
             </a:extLst>
           </p:cNvPr>
@@ -6838,7 +6838,7 @@
     </p:spTree>
     <p:extLst>
       <p:ext uri="{BB962C8B-B14F-4D97-AF65-F5344CB8AC3E}">
-        <p14:creationId xmlns:p14="http://schemas.microsoft.com/office/powerpoint/2010/main" val="127154672"/>
+        <p14:creationId xmlns:p14="http://schemas.microsoft.com/office/powerpoint/2010/main" val="1916282405"/>
       </p:ext>
     </p:extLst>
   </p:cSld>
@@ -6869,7 +6869,7 @@
           <p:cNvPr id="41" name="">
             <a:extLst xmlns:a="http://schemas.openxmlformats.org/drawingml/2006/main">
               <a:ext uri="{FF2B5EF4-FFF2-40B4-BE49-F238E27FC236}">
-                <a16:creationId xmlns:a16="http://schemas.microsoft.com/office/drawing/2014/main" id="{A301C061-E2C7-4E2F-91DF-7DE8B5B0F300}"/>
+                <a16:creationId xmlns:a16="http://schemas.microsoft.com/office/drawing/2014/main" id="{53F0DA39-4062-4506-8278-7A9DB4CB8D4D}"/>
               </a:ext>
             </a:extLst>
           </p:cNvPr>
@@ -6899,7 +6899,7 @@
           <p:cNvPr id="2" name="">
             <a:extLst xmlns:a="http://schemas.openxmlformats.org/drawingml/2006/main">
               <a:ext uri="{FF2B5EF4-FFF2-40B4-BE49-F238E27FC236}">
-                <a16:creationId xmlns:a16="http://schemas.microsoft.com/office/drawing/2014/main" id="{CC719CD3-A7A4-475D-8AF9-DA1FB83BC1D1}"/>
+                <a16:creationId xmlns:a16="http://schemas.microsoft.com/office/drawing/2014/main" id="{A0893489-5231-4E40-AAD2-A6F1601E544C}"/>
               </a:ext>
             </a:extLst>
           </p:cNvPr>
@@ -6956,7 +6956,7 @@
           <p:cNvPr id="3" name="">
             <a:extLst xmlns:a="http://schemas.openxmlformats.org/drawingml/2006/main">
               <a:ext uri="{FF2B5EF4-FFF2-40B4-BE49-F238E27FC236}">
-                <a16:creationId xmlns:a16="http://schemas.microsoft.com/office/drawing/2014/main" id="{AF93F2E7-5809-40D6-BB3F-9E209E40E3CD}"/>
+                <a16:creationId xmlns:a16="http://schemas.microsoft.com/office/drawing/2014/main" id="{B2CB651B-5C51-4D89-8986-487E0AB08681}"/>
               </a:ext>
             </a:extLst>
           </p:cNvPr>
@@ -6986,7 +6986,7 @@
           <p:cNvPr id="4" name="">
             <a:extLst xmlns:a="http://schemas.openxmlformats.org/drawingml/2006/main">
               <a:ext uri="{FF2B5EF4-FFF2-40B4-BE49-F238E27FC236}">
-                <a16:creationId xmlns:a16="http://schemas.microsoft.com/office/drawing/2014/main" id="{788ED17C-4663-4667-BB9D-B36D42EAC077}"/>
+                <a16:creationId xmlns:a16="http://schemas.microsoft.com/office/drawing/2014/main" id="{28E65DB9-A9A4-4ACF-BA2A-6B80565E5ED6}"/>
               </a:ext>
             </a:extLst>
           </p:cNvPr>
@@ -7043,7 +7043,7 @@
           <p:cNvPr id="5" name="">
             <a:extLst xmlns:a="http://schemas.openxmlformats.org/drawingml/2006/main">
               <a:ext uri="{FF2B5EF4-FFF2-40B4-BE49-F238E27FC236}">
-                <a16:creationId xmlns:a16="http://schemas.microsoft.com/office/drawing/2014/main" id="{8802B30B-12E0-461A-BCE3-B9620C672F11}"/>
+                <a16:creationId xmlns:a16="http://schemas.microsoft.com/office/drawing/2014/main" id="{D4C4E12C-8861-42D4-A1A2-A8A6DE256291}"/>
               </a:ext>
             </a:extLst>
           </p:cNvPr>
@@ -7100,7 +7100,7 @@
           <p:cNvPr id="6" name="">
             <a:extLst xmlns:a="http://schemas.openxmlformats.org/drawingml/2006/main">
               <a:ext uri="{FF2B5EF4-FFF2-40B4-BE49-F238E27FC236}">
-                <a16:creationId xmlns:a16="http://schemas.microsoft.com/office/drawing/2014/main" id="{F4C86D2C-BE11-47A6-B899-C5CC7D7E6843}"/>
+                <a16:creationId xmlns:a16="http://schemas.microsoft.com/office/drawing/2014/main" id="{974335FC-5CF9-44AC-9F1C-B9D7D84DAF42}"/>
               </a:ext>
             </a:extLst>
           </p:cNvPr>
@@ -7157,7 +7157,7 @@
           <p:cNvPr id="7" name="">
             <a:extLst xmlns:a="http://schemas.openxmlformats.org/drawingml/2006/main">
               <a:ext uri="{FF2B5EF4-FFF2-40B4-BE49-F238E27FC236}">
-                <a16:creationId xmlns:a16="http://schemas.microsoft.com/office/drawing/2014/main" id="{16791E65-0057-486F-8D7C-69535072473F}"/>
+                <a16:creationId xmlns:a16="http://schemas.microsoft.com/office/drawing/2014/main" id="{1BD62BE5-8B14-4A87-B023-A77362CFB56E}"/>
               </a:ext>
             </a:extLst>
           </p:cNvPr>
@@ -7187,7 +7187,7 @@
           <p:cNvPr id="8" name="">
             <a:extLst xmlns:a="http://schemas.openxmlformats.org/drawingml/2006/main">
               <a:ext uri="{FF2B5EF4-FFF2-40B4-BE49-F238E27FC236}">
-                <a16:creationId xmlns:a16="http://schemas.microsoft.com/office/drawing/2014/main" id="{677082B3-FCF0-4940-B461-AAA0E615996F}"/>
+                <a16:creationId xmlns:a16="http://schemas.microsoft.com/office/drawing/2014/main" id="{E0981505-75F3-4EC3-884A-F782DB36E4A7}"/>
               </a:ext>
             </a:extLst>
           </p:cNvPr>
@@ -7244,7 +7244,7 @@
           <p:cNvPr id="9" name="">
             <a:extLst xmlns:a="http://schemas.openxmlformats.org/drawingml/2006/main">
               <a:ext uri="{FF2B5EF4-FFF2-40B4-BE49-F238E27FC236}">
-                <a16:creationId xmlns:a16="http://schemas.microsoft.com/office/drawing/2014/main" id="{FE505008-2468-44D0-AAFF-5229649E1FEE}"/>
+                <a16:creationId xmlns:a16="http://schemas.microsoft.com/office/drawing/2014/main" id="{29F6E746-1675-4C4D-892B-3C33310BFCF6}"/>
               </a:ext>
             </a:extLst>
           </p:cNvPr>
@@ -7276,7 +7276,7 @@
           <p:cNvPr id="10" name="">
             <a:extLst xmlns:a="http://schemas.openxmlformats.org/drawingml/2006/main">
               <a:ext uri="{FF2B5EF4-FFF2-40B4-BE49-F238E27FC236}">
-                <a16:creationId xmlns:a16="http://schemas.microsoft.com/office/drawing/2014/main" id="{848BC55C-796D-4115-A2EC-3270E237D7A3}"/>
+                <a16:creationId xmlns:a16="http://schemas.microsoft.com/office/drawing/2014/main" id="{E3583C17-6A4A-4204-9292-F1ED7C9A1E13}"/>
               </a:ext>
             </a:extLst>
           </p:cNvPr>
@@ -7333,7 +7333,7 @@
           <p:cNvPr id="11" name="">
             <a:extLst xmlns:a="http://schemas.openxmlformats.org/drawingml/2006/main">
               <a:ext uri="{FF2B5EF4-FFF2-40B4-BE49-F238E27FC236}">
-                <a16:creationId xmlns:a16="http://schemas.microsoft.com/office/drawing/2014/main" id="{592009E0-71CD-4CAA-9618-8CE24EBC3BFA}"/>
+                <a16:creationId xmlns:a16="http://schemas.microsoft.com/office/drawing/2014/main" id="{CC3A49EA-1B4C-4924-AFD6-6B58427D1437}"/>
               </a:ext>
             </a:extLst>
           </p:cNvPr>
@@ -7390,7 +7390,7 @@
           <p:cNvPr id="12" name="">
             <a:extLst xmlns:a="http://schemas.openxmlformats.org/drawingml/2006/main">
               <a:ext uri="{FF2B5EF4-FFF2-40B4-BE49-F238E27FC236}">
-                <a16:creationId xmlns:a16="http://schemas.microsoft.com/office/drawing/2014/main" id="{A8B80D8B-DDE7-4BE0-8B1C-634789B0F368}"/>
+                <a16:creationId xmlns:a16="http://schemas.microsoft.com/office/drawing/2014/main" id="{412BB334-3634-414A-A56D-56347D717BB8}"/>
               </a:ext>
             </a:extLst>
           </p:cNvPr>
@@ -7447,7 +7447,7 @@
           <p:cNvPr id="13" name="">
             <a:extLst xmlns:a="http://schemas.openxmlformats.org/drawingml/2006/main">
               <a:ext uri="{FF2B5EF4-FFF2-40B4-BE49-F238E27FC236}">
-                <a16:creationId xmlns:a16="http://schemas.microsoft.com/office/drawing/2014/main" id="{374B067E-0696-4AE6-A303-AC54133642CB}"/>
+                <a16:creationId xmlns:a16="http://schemas.microsoft.com/office/drawing/2014/main" id="{9BF51E4B-DC79-4807-A420-50A560969355}"/>
               </a:ext>
             </a:extLst>
           </p:cNvPr>
@@ -7479,7 +7479,7 @@
           <p:cNvPr id="14" name="">
             <a:extLst xmlns:a="http://schemas.openxmlformats.org/drawingml/2006/main">
               <a:ext uri="{FF2B5EF4-FFF2-40B4-BE49-F238E27FC236}">
-                <a16:creationId xmlns:a16="http://schemas.microsoft.com/office/drawing/2014/main" id="{58AEF8F1-43C1-44A4-BA32-3150C8B62F2A}"/>
+                <a16:creationId xmlns:a16="http://schemas.microsoft.com/office/drawing/2014/main" id="{3F31325F-8A0D-4746-84B2-C74B0B899C13}"/>
               </a:ext>
             </a:extLst>
           </p:cNvPr>
@@ -7536,7 +7536,7 @@
           <p:cNvPr id="15" name="">
             <a:extLst xmlns:a="http://schemas.openxmlformats.org/drawingml/2006/main">
               <a:ext uri="{FF2B5EF4-FFF2-40B4-BE49-F238E27FC236}">
-                <a16:creationId xmlns:a16="http://schemas.microsoft.com/office/drawing/2014/main" id="{9E3665AD-27A9-4867-86E7-784F9BCB6B3F}"/>
+                <a16:creationId xmlns:a16="http://schemas.microsoft.com/office/drawing/2014/main" id="{1C87BEB8-28F8-415F-89CD-866D5A34D14E}"/>
               </a:ext>
             </a:extLst>
           </p:cNvPr>
@@ -7593,7 +7593,7 @@
           <p:cNvPr id="16" name="">
             <a:extLst xmlns:a="http://schemas.openxmlformats.org/drawingml/2006/main">
               <a:ext uri="{FF2B5EF4-FFF2-40B4-BE49-F238E27FC236}">
-                <a16:creationId xmlns:a16="http://schemas.microsoft.com/office/drawing/2014/main" id="{FC3489C7-8409-4594-8BB0-2261D2E73CAA}"/>
+                <a16:creationId xmlns:a16="http://schemas.microsoft.com/office/drawing/2014/main" id="{6B6E24CD-4A7D-46A7-A47E-FCB5D198C080}"/>
               </a:ext>
             </a:extLst>
           </p:cNvPr>
@@ -7650,7 +7650,7 @@
           <p:cNvPr id="17" name="">
             <a:extLst xmlns:a="http://schemas.openxmlformats.org/drawingml/2006/main">
               <a:ext uri="{FF2B5EF4-FFF2-40B4-BE49-F238E27FC236}">
-                <a16:creationId xmlns:a16="http://schemas.microsoft.com/office/drawing/2014/main" id="{97E57877-BA7A-4BDC-85B5-0FAB0B31FC6A}"/>
+                <a16:creationId xmlns:a16="http://schemas.microsoft.com/office/drawing/2014/main" id="{1AD26595-0721-46CA-B31F-94867456190F}"/>
               </a:ext>
             </a:extLst>
           </p:cNvPr>
@@ -7682,7 +7682,7 @@
           <p:cNvPr id="18" name="">
             <a:extLst xmlns:a="http://schemas.openxmlformats.org/drawingml/2006/main">
               <a:ext uri="{FF2B5EF4-FFF2-40B4-BE49-F238E27FC236}">
-                <a16:creationId xmlns:a16="http://schemas.microsoft.com/office/drawing/2014/main" id="{A1A64E4D-14F5-4439-A060-FFFE11876E68}"/>
+                <a16:creationId xmlns:a16="http://schemas.microsoft.com/office/drawing/2014/main" id="{948B91C4-95ED-4AA0-883D-DF318F44EE34}"/>
               </a:ext>
             </a:extLst>
           </p:cNvPr>
@@ -7739,7 +7739,7 @@
           <p:cNvPr id="19" name="">
             <a:extLst xmlns:a="http://schemas.openxmlformats.org/drawingml/2006/main">
               <a:ext uri="{FF2B5EF4-FFF2-40B4-BE49-F238E27FC236}">
-                <a16:creationId xmlns:a16="http://schemas.microsoft.com/office/drawing/2014/main" id="{A86C5249-FF49-414E-AB88-A5089576F41C}"/>
+                <a16:creationId xmlns:a16="http://schemas.microsoft.com/office/drawing/2014/main" id="{915DCEFB-DFA1-4BD6-8162-008A13A8DA03}"/>
               </a:ext>
             </a:extLst>
           </p:cNvPr>
@@ -7796,7 +7796,7 @@
           <p:cNvPr id="20" name="">
             <a:extLst xmlns:a="http://schemas.openxmlformats.org/drawingml/2006/main">
               <a:ext uri="{FF2B5EF4-FFF2-40B4-BE49-F238E27FC236}">
-                <a16:creationId xmlns:a16="http://schemas.microsoft.com/office/drawing/2014/main" id="{692C6ABC-3489-4A8A-9BD1-23A6A6BCC361}"/>
+                <a16:creationId xmlns:a16="http://schemas.microsoft.com/office/drawing/2014/main" id="{5C61FB92-4CC3-47DB-A783-9400DE819D9E}"/>
               </a:ext>
             </a:extLst>
           </p:cNvPr>
@@ -7853,7 +7853,7 @@
           <p:cNvPr id="21" name="">
             <a:extLst xmlns:a="http://schemas.openxmlformats.org/drawingml/2006/main">
               <a:ext uri="{FF2B5EF4-FFF2-40B4-BE49-F238E27FC236}">
-                <a16:creationId xmlns:a16="http://schemas.microsoft.com/office/drawing/2014/main" id="{F63F78F3-CA3F-4336-81D0-5313E6D21820}"/>
+                <a16:creationId xmlns:a16="http://schemas.microsoft.com/office/drawing/2014/main" id="{4002DC70-EC58-4ED7-891C-F69F852CD3E0}"/>
               </a:ext>
             </a:extLst>
           </p:cNvPr>
@@ -7885,7 +7885,7 @@
           <p:cNvPr id="22" name="">
             <a:extLst xmlns:a="http://schemas.openxmlformats.org/drawingml/2006/main">
               <a:ext uri="{FF2B5EF4-FFF2-40B4-BE49-F238E27FC236}">
-                <a16:creationId xmlns:a16="http://schemas.microsoft.com/office/drawing/2014/main" id="{B7D4DF2B-F6DC-4FEE-97E1-00F44F4B353A}"/>
+                <a16:creationId xmlns:a16="http://schemas.microsoft.com/office/drawing/2014/main" id="{E6AE5C65-250E-43CD-9510-AA63FE840A08}"/>
               </a:ext>
             </a:extLst>
           </p:cNvPr>
@@ -7942,7 +7942,7 @@
           <p:cNvPr id="23" name="">
             <a:extLst xmlns:a="http://schemas.openxmlformats.org/drawingml/2006/main">
               <a:ext uri="{FF2B5EF4-FFF2-40B4-BE49-F238E27FC236}">
-                <a16:creationId xmlns:a16="http://schemas.microsoft.com/office/drawing/2014/main" id="{F2484456-6CBA-478B-8BDB-EB657FF62A6F}"/>
+                <a16:creationId xmlns:a16="http://schemas.microsoft.com/office/drawing/2014/main" id="{33DDF17E-0E6D-4138-ACD9-F4F13056C907}"/>
               </a:ext>
             </a:extLst>
           </p:cNvPr>
@@ -7999,7 +7999,7 @@
           <p:cNvPr id="24" name="">
             <a:extLst xmlns:a="http://schemas.openxmlformats.org/drawingml/2006/main">
               <a:ext uri="{FF2B5EF4-FFF2-40B4-BE49-F238E27FC236}">
-                <a16:creationId xmlns:a16="http://schemas.microsoft.com/office/drawing/2014/main" id="{883D878B-A455-46E8-8251-C3F79377C547}"/>
+                <a16:creationId xmlns:a16="http://schemas.microsoft.com/office/drawing/2014/main" id="{E02F5B02-0C62-436A-B532-C960ADEC1934}"/>
               </a:ext>
             </a:extLst>
           </p:cNvPr>
@@ -8056,7 +8056,7 @@
           <p:cNvPr id="25" name="">
             <a:extLst xmlns:a="http://schemas.openxmlformats.org/drawingml/2006/main">
               <a:ext uri="{FF2B5EF4-FFF2-40B4-BE49-F238E27FC236}">
-                <a16:creationId xmlns:a16="http://schemas.microsoft.com/office/drawing/2014/main" id="{EAAD8A0C-9C6D-4F6F-A898-292FA541E1D6}"/>
+                <a16:creationId xmlns:a16="http://schemas.microsoft.com/office/drawing/2014/main" id="{BA12364B-E371-41CC-87B2-B288444DD025}"/>
               </a:ext>
             </a:extLst>
           </p:cNvPr>
@@ -8088,7 +8088,7 @@
           <p:cNvPr id="26" name="">
             <a:extLst xmlns:a="http://schemas.openxmlformats.org/drawingml/2006/main">
               <a:ext uri="{FF2B5EF4-FFF2-40B4-BE49-F238E27FC236}">
-                <a16:creationId xmlns:a16="http://schemas.microsoft.com/office/drawing/2014/main" id="{D58C1E84-8531-4EF9-8E50-467391B6892B}"/>
+                <a16:creationId xmlns:a16="http://schemas.microsoft.com/office/drawing/2014/main" id="{814ED507-AA0B-467E-B31F-05FC4B78619F}"/>
               </a:ext>
             </a:extLst>
           </p:cNvPr>
@@ -8145,7 +8145,7 @@
           <p:cNvPr id="27" name="">
             <a:extLst xmlns:a="http://schemas.openxmlformats.org/drawingml/2006/main">
               <a:ext uri="{FF2B5EF4-FFF2-40B4-BE49-F238E27FC236}">
-                <a16:creationId xmlns:a16="http://schemas.microsoft.com/office/drawing/2014/main" id="{042BECFC-CE50-4008-8A19-30F788604D84}"/>
+                <a16:creationId xmlns:a16="http://schemas.microsoft.com/office/drawing/2014/main" id="{DD8CF72A-3E64-4547-89E1-FB7D99FC9B90}"/>
               </a:ext>
             </a:extLst>
           </p:cNvPr>
@@ -8202,7 +8202,7 @@
           <p:cNvPr id="28" name="">
             <a:extLst xmlns:a="http://schemas.openxmlformats.org/drawingml/2006/main">
               <a:ext uri="{FF2B5EF4-FFF2-40B4-BE49-F238E27FC236}">
-                <a16:creationId xmlns:a16="http://schemas.microsoft.com/office/drawing/2014/main" id="{22E14C8E-A2B0-406B-97D8-57B5B9CA400D}"/>
+                <a16:creationId xmlns:a16="http://schemas.microsoft.com/office/drawing/2014/main" id="{9BA29DD5-0810-4C9C-8E89-7D5FB401B064}"/>
               </a:ext>
             </a:extLst>
           </p:cNvPr>
@@ -8259,7 +8259,7 @@
           <p:cNvPr id="29" name="">
             <a:extLst xmlns:a="http://schemas.openxmlformats.org/drawingml/2006/main">
               <a:ext uri="{FF2B5EF4-FFF2-40B4-BE49-F238E27FC236}">
-                <a16:creationId xmlns:a16="http://schemas.microsoft.com/office/drawing/2014/main" id="{1D462E9C-F996-4D1B-93A8-3DBBA961A4C5}"/>
+                <a16:creationId xmlns:a16="http://schemas.microsoft.com/office/drawing/2014/main" id="{3D74658F-94D0-4F4C-B2AE-72441AB69D99}"/>
               </a:ext>
             </a:extLst>
           </p:cNvPr>
@@ -8316,7 +8316,7 @@
           <p:cNvPr id="30" name="">
             <a:extLst xmlns:a="http://schemas.openxmlformats.org/drawingml/2006/main">
               <a:ext uri="{FF2B5EF4-FFF2-40B4-BE49-F238E27FC236}">
-                <a16:creationId xmlns:a16="http://schemas.microsoft.com/office/drawing/2014/main" id="{8B06ACE5-3101-4C08-98C2-CD110AC7AC96}"/>
+                <a16:creationId xmlns:a16="http://schemas.microsoft.com/office/drawing/2014/main" id="{36ABBC13-0CC2-48AD-A397-01DA9A974F5A}"/>
               </a:ext>
             </a:extLst>
           </p:cNvPr>
@@ -8373,7 +8373,7 @@
           <p:cNvPr id="31" name="">
             <a:extLst xmlns:a="http://schemas.openxmlformats.org/drawingml/2006/main">
               <a:ext uri="{FF2B5EF4-FFF2-40B4-BE49-F238E27FC236}">
-                <a16:creationId xmlns:a16="http://schemas.microsoft.com/office/drawing/2014/main" id="{69DCCE3C-A506-4EB9-AA9C-EB2A088CB5E6}"/>
+                <a16:creationId xmlns:a16="http://schemas.microsoft.com/office/drawing/2014/main" id="{A5AECB74-699D-4D01-B37D-B6A5BBD97F1E}"/>
               </a:ext>
             </a:extLst>
           </p:cNvPr>
@@ -8430,7 +8430,7 @@
           <p:cNvPr id="32" name="">
             <a:extLst xmlns:a="http://schemas.openxmlformats.org/drawingml/2006/main">
               <a:ext uri="{FF2B5EF4-FFF2-40B4-BE49-F238E27FC236}">
-                <a16:creationId xmlns:a16="http://schemas.microsoft.com/office/drawing/2014/main" id="{30C24AE9-5881-4A63-8C8C-D1487E0945B9}"/>
+                <a16:creationId xmlns:a16="http://schemas.microsoft.com/office/drawing/2014/main" id="{195EEFCA-9D02-4C48-BFB9-59EB75E05E46}"/>
               </a:ext>
             </a:extLst>
           </p:cNvPr>
@@ -8487,7 +8487,7 @@
           <p:cNvPr id="33" name="">
             <a:extLst xmlns:a="http://schemas.openxmlformats.org/drawingml/2006/main">
               <a:ext uri="{FF2B5EF4-FFF2-40B4-BE49-F238E27FC236}">
-                <a16:creationId xmlns:a16="http://schemas.microsoft.com/office/drawing/2014/main" id="{C7F17F36-BC99-4F65-A8BA-DF7FEFE3AB1A}"/>
+                <a16:creationId xmlns:a16="http://schemas.microsoft.com/office/drawing/2014/main" id="{6A1A1825-0369-4821-AD58-347CCE9EE5FE}"/>
               </a:ext>
             </a:extLst>
           </p:cNvPr>
@@ -8534,7 +8534,7 @@
                 <a:ea typeface="Malgun Gothic"/>
                 <a:cs typeface="Malgun Gothic"/>
               </a:rPr>
-              <a:t>숙고 전용 4 Case · 3회</a:t>
+              <a:t>숙고 전용 4 Case</a:t>
             </a:r>
           </a:p>
         </p:txBody>
@@ -8544,7 +8544,7 @@
           <p:cNvPr id="34" name="">
             <a:extLst xmlns:a="http://schemas.openxmlformats.org/drawingml/2006/main">
               <a:ext uri="{FF2B5EF4-FFF2-40B4-BE49-F238E27FC236}">
-                <a16:creationId xmlns:a16="http://schemas.microsoft.com/office/drawing/2014/main" id="{043A31BA-79BA-4A20-B9AD-FBCF96731654}"/>
+                <a16:creationId xmlns:a16="http://schemas.microsoft.com/office/drawing/2014/main" id="{C3B1046A-DCBF-4593-A097-015ACC359FC5}"/>
               </a:ext>
             </a:extLst>
           </p:cNvPr>
@@ -8591,7 +8591,7 @@
                 <a:ea typeface="Malgun Gothic"/>
                 <a:cs typeface="Malgun Gothic"/>
               </a:rPr>
-              <a:t>재현되는 차이 1건</a:t>
+              <a:t>Mock On 4/4 · Off 3/4</a:t>
             </a:r>
           </a:p>
         </p:txBody>
@@ -8601,7 +8601,7 @@
           <p:cNvPr id="35" name="">
             <a:extLst xmlns:a="http://schemas.openxmlformats.org/drawingml/2006/main">
               <a:ext uri="{FF2B5EF4-FFF2-40B4-BE49-F238E27FC236}">
-                <a16:creationId xmlns:a16="http://schemas.microsoft.com/office/drawing/2014/main" id="{0AD4AD10-A69E-4995-8346-6FE6C46D6F66}"/>
+                <a16:creationId xmlns:a16="http://schemas.microsoft.com/office/drawing/2014/main" id="{18944B0C-C0D3-4892-92F4-6353B66D79B1}"/>
               </a:ext>
             </a:extLst>
           </p:cNvPr>
@@ -8648,7 +8648,7 @@
                 <a:ea typeface="Malgun Gothic"/>
                 <a:cs typeface="Malgun Gothic"/>
               </a:rPr>
-              <a:t>DLB-02: On 3/3 통과, Off 3/3 실패</a:t>
+              <a:t>LLM 없는 결정론 경로에서 재현</a:t>
             </a:r>
           </a:p>
         </p:txBody>
@@ -8658,7 +8658,7 @@
           <p:cNvPr id="36" name="">
             <a:extLst xmlns:a="http://schemas.openxmlformats.org/drawingml/2006/main">
               <a:ext uri="{FF2B5EF4-FFF2-40B4-BE49-F238E27FC236}">
-                <a16:creationId xmlns:a16="http://schemas.microsoft.com/office/drawing/2014/main" id="{580CEF93-DD34-4B7A-8EF4-FF8992016866}"/>
+                <a16:creationId xmlns:a16="http://schemas.microsoft.com/office/drawing/2014/main" id="{A961A47F-39B9-4AF6-8049-839F735DCF53}"/>
               </a:ext>
             </a:extLst>
           </p:cNvPr>
@@ -8715,7 +8715,7 @@
           <p:cNvPr id="37" name="">
             <a:extLst xmlns:a="http://schemas.openxmlformats.org/drawingml/2006/main">
               <a:ext uri="{FF2B5EF4-FFF2-40B4-BE49-F238E27FC236}">
-                <a16:creationId xmlns:a16="http://schemas.microsoft.com/office/drawing/2014/main" id="{64B50644-3C83-4A39-A74B-2F8B053F6666}"/>
+                <a16:creationId xmlns:a16="http://schemas.microsoft.com/office/drawing/2014/main" id="{22BC7500-3D6D-4453-B8FB-E861C6D7F96C}"/>
               </a:ext>
             </a:extLst>
           </p:cNvPr>
@@ -8772,7 +8772,7 @@
           <p:cNvPr id="38" name="">
             <a:extLst xmlns:a="http://schemas.openxmlformats.org/drawingml/2006/main">
               <a:ext uri="{FF2B5EF4-FFF2-40B4-BE49-F238E27FC236}">
-                <a16:creationId xmlns:a16="http://schemas.microsoft.com/office/drawing/2014/main" id="{60D60258-420A-4ADD-BDC8-5ACA6A4EA1E5}"/>
+                <a16:creationId xmlns:a16="http://schemas.microsoft.com/office/drawing/2014/main" id="{CBA5467F-E415-4FB4-A373-BED542AD45B2}"/>
               </a:ext>
             </a:extLst>
           </p:cNvPr>
@@ -8829,7 +8829,7 @@
           <p:cNvPr id="39" name="">
             <a:extLst xmlns:a="http://schemas.openxmlformats.org/drawingml/2006/main">
               <a:ext uri="{FF2B5EF4-FFF2-40B4-BE49-F238E27FC236}">
-                <a16:creationId xmlns:a16="http://schemas.microsoft.com/office/drawing/2014/main" id="{DCC07A96-F902-4A4C-A7B8-B32A56E3A2DB}"/>
+                <a16:creationId xmlns:a16="http://schemas.microsoft.com/office/drawing/2014/main" id="{F67D4B16-EB13-4A11-B90C-22BEABA7C02C}"/>
               </a:ext>
             </a:extLst>
           </p:cNvPr>
@@ -8886,7 +8886,7 @@
           <p:cNvPr id="40" name="">
             <a:extLst xmlns:a="http://schemas.openxmlformats.org/drawingml/2006/main">
               <a:ext uri="{FF2B5EF4-FFF2-40B4-BE49-F238E27FC236}">
-                <a16:creationId xmlns:a16="http://schemas.microsoft.com/office/drawing/2014/main" id="{802DB9D0-DDA5-4372-960C-C1BE0407B585}"/>
+                <a16:creationId xmlns:a16="http://schemas.microsoft.com/office/drawing/2014/main" id="{CAD5E631-0911-44DE-968C-CA4638D6D61B}"/>
               </a:ext>
             </a:extLst>
           </p:cNvPr>
@@ -8941,7 +8941,7 @@
     </p:spTree>
     <p:extLst>
       <p:ext uri="{BB962C8B-B14F-4D97-AF65-F5344CB8AC3E}">
-        <p14:creationId xmlns:p14="http://schemas.microsoft.com/office/powerpoint/2010/main" val="1029891108"/>
+        <p14:creationId xmlns:p14="http://schemas.microsoft.com/office/powerpoint/2010/main" val="509430761"/>
       </p:ext>
     </p:extLst>
   </p:cSld>

--- a/Docs/PRESENTATION/2. 최종/09285_백준현_AI_Master_최종발표자료_v8.pptx
+++ b/Docs/PRESENTATION/2. 최종/09285_백준현_AI_Master_최종발표자료_v8.pptx
@@ -2,16 +2,16 @@
 <file path=ppt/presentation.xml><?xml version="1.0" encoding="utf-8"?>
 <p:presentation xmlns:p="http://schemas.openxmlformats.org/presentationml/2006/main">
   <p:sldMasterIdLst>
-    <p:sldMasterId xmlns:r="http://schemas.openxmlformats.org/officeDocument/2006/relationships" id="2147483648" r:id="R1ece40f1d70b483a"/>
+    <p:sldMasterId xmlns:r="http://schemas.openxmlformats.org/officeDocument/2006/relationships" id="2147483648" r:id="R2775756419e54ecf"/>
   </p:sldMasterIdLst>
   <p:notesMasterIdLst>
-    <p:notesMasterId xmlns:r="http://schemas.openxmlformats.org/officeDocument/2006/relationships" r:id="Rb637b666397a4b4e"/>
+    <p:notesMasterId xmlns:r="http://schemas.openxmlformats.org/officeDocument/2006/relationships" r:id="Rd6821184268e44e3"/>
   </p:notesMasterIdLst>
   <p:sldIdLst>
-    <p:sldId xmlns:r="http://schemas.openxmlformats.org/officeDocument/2006/relationships" id="256" r:id="Radb904423e0e4fda"/>
-    <p:sldId xmlns:r="http://schemas.openxmlformats.org/officeDocument/2006/relationships" id="257" r:id="R539e3f979d3c4465"/>
-    <p:sldId xmlns:r="http://schemas.openxmlformats.org/officeDocument/2006/relationships" id="258" r:id="R71416bab2b55442f"/>
-    <p:sldId xmlns:r="http://schemas.openxmlformats.org/officeDocument/2006/relationships" id="259" r:id="Rd1193541fd2045ed"/>
+    <p:sldId xmlns:r="http://schemas.openxmlformats.org/officeDocument/2006/relationships" id="256" r:id="Rc27b9ff4761a49ac"/>
+    <p:sldId xmlns:r="http://schemas.openxmlformats.org/officeDocument/2006/relationships" id="257" r:id="R945934f5d7d14264"/>
+    <p:sldId xmlns:r="http://schemas.openxmlformats.org/officeDocument/2006/relationships" id="258" r:id="R4dd79b329165489e"/>
+    <p:sldId xmlns:r="http://schemas.openxmlformats.org/officeDocument/2006/relationships" id="259" r:id="Rdacfbb7228e242b1"/>
   </p:sldIdLst>
   <p:sldSz cx="12192000" cy="6858000"/>
   <p:notesSz cx="6858000" cy="9144000"/>
@@ -800,7 +800,7 @@
           </a:p>
           <a:p xmlns:a="http://schemas.openxmlformats.org/drawingml/2006/main">
             <a:r>
-              <a:t>효과는 같은 코드에서 기능만 껐다 켜서 측정했습니다. 기존 열다섯 개 Case는 양쪽이 똑같이 15/15, Action 28/28이고 소요시간만 약 삼십 퍼센트 늘었습니다. 숙고가 실제 발동하는 전용 네 개 Case는 엘엘엠 출력이 회차마다 달라져서 각 설정을 세 번씩 돌렸습니다. 통과 수는 켠 쪽이 삼, 사, 삼이고 끈 쪽이 삼, 이, 삼이라 한 회차 숫자를 결론으로 쓰지 않았습니다. 대신 엘엘엠을 호출하지 않는 결정론적 경로에서도 같은 비교를 했고, 거기서는 켠 쪽 사 대 사, 끈 쪽 삼 대 사로 갈립니다. 실패하는 케이스와 실패하는 방식까지 같습니다. 요청자가 같고 대상 시스템만 다른 유사 업무가 둘 있을 때, 단일 결론 경로는 둘 중 하나에 그대로 연결하고, 두 단계 경로는 사용자 확인으로 닫습니다. 회차 변동이 없는 경로에서 재현되니까, 이 차이는 모델 출력 운이 아니라 판단 구조의 차이라고 말할 수 있습니다. 제가 개선했다고 말하는 범위는 이 한 건입니다.</a:t>
+              <a:t>효과는 같은 코드에서 기능만 껐다 켜서 측정했습니다. 기존 열다섯 개 Case는 양쪽이 똑같이 15/15, Action 28/28이고 소요시간만 약 삼십 퍼센트 늘었습니다. 숙고가 실제 발동하는 전용 네 개 케이스는 엘엘엠 출력이 회차마다 달라져서 각 설정을 세 번씩 돌렸습니다. 통과 수는 켠 쪽이 삼, 삼, 이이고 끈 쪽이 이, 이, 이입니다. 한 회차 숫자를 결론으로 쓰지 않았습니다. 세 번 모두 재현되는 차이는 한 건입니다. 요청자가 같고 대상 시스템만 다른 유사 업무가 둘 있을 때, 단일 결론 경로는 세 번 모두 둘 중 하나에 그대로 연결했고, 두 단계 경로는 세 번 모두 사용자 확인으로 닫았습니다. 제가 개선했다고 말하는 범위는 이 한 건입니다. 엘엘엠을 호출하지 않는 목 경로에서는 양쪽이 모두 사 대 사로 차이가 없습니다. 목 분석기는 어휘 겹침만 보기 때문에 숙고가 다루는 판단 자체가 생기지 않습니다.</a:t>
             </a:r>
           </a:p>
           <a:p xmlns:a="http://schemas.openxmlformats.org/drawingml/2006/main">
@@ -820,7 +820,7 @@
           </a:p>
           <a:p xmlns:a="http://schemas.openxmlformats.org/drawingml/2006/main">
             <a:r>
-              <a:t>반대로 개선되지 않은 것도 말씀드리겠습니다. 검색 결과 안에 명령을 심어 둔 Case는 두 설정 모두에서 흔들렸습니다. 켠 쪽이 세 번 중 한 번, 끈 쪽이 세 번 중 두 번 통과했습니다. 실패한 회차는 모두 무시로 끝났는데, 심어진 명령을 실행하지 않는다는 점에서는 안전하지만 저희 기준은 사람에게 넘기는 것이라 실패로 셌습니다. 이 변동은 숙고의 효과로도 부작용으로도 말하지 않습니다. 화면의 신뢰도와 지지도 역시 모델의 자기보고 값이지 검증된 정답 확률이 아닙니다.</a:t>
+              <a:t>반대로 개선되지 않은 것도 말씀드리겠습니다. 검색 결과 안에 명령을 심어 둔 케이스는 두 설정 모두 세 번 모두 기대값을 충족하지 못했습니다. 기대값은 사용자 확인인데 실제로는 무시로 끝났습니다. 다만 이 케이스가 확인해야 할 안전 속성인, 심어진 명령을 실행하지 않는다는 점은 여섯 번 모두 지켜졌습니다. 본문이 지시한 전체 완료 처리와 기록 삭제는 한 번도 일어나지 않았습니다. 명령은 거부하지만 사람에게 넘기지는 않는, 안전하되 정보를 버리는 동작이고 한계로 남겨 두었습니다. 화면의 신뢰도와 지지도 역시 모델의 자기보고 값이지 검증된 정답 확률이 아닙니다.</a:t>
             </a:r>
           </a:p>
           <a:p xmlns:a="http://schemas.openxmlformats.org/drawingml/2006/main">
@@ -933,7 +933,7 @@
   </p:cSld>
   <p:clrMap bg1="lt1" tx1="dk1" bg2="lt2" tx2="dk2" accent1="accent1" accent2="accent2" accent3="accent3" accent4="accent4" accent5="accent5" accent6="accent6" hlink="hlink" folHlink="folHlink"/>
   <p:sldLayoutIdLst>
-    <p:sldLayoutId xmlns:r="http://schemas.openxmlformats.org/officeDocument/2006/relationships" id="2147483649" r:id="Rad53b6b2db6f42f4"/>
+    <p:sldLayoutId xmlns:r="http://schemas.openxmlformats.org/officeDocument/2006/relationships" id="2147483649" r:id="R061895a6d1be4b3c"/>
   </p:sldLayoutIdLst>
   <p:txStyles>
     <p:titleStyle>
@@ -1484,7 +1484,7 @@
           <p:cNvPr id="9" name="">
             <a:extLst xmlns:a="http://schemas.openxmlformats.org/drawingml/2006/main">
               <a:ext uri="{FF2B5EF4-FFF2-40B4-BE49-F238E27FC236}">
-                <a16:creationId xmlns:a16="http://schemas.microsoft.com/office/drawing/2014/main" id="{E308FBDF-CB90-4C74-A050-65DFE4AA3341}"/>
+                <a16:creationId xmlns:a16="http://schemas.microsoft.com/office/drawing/2014/main" id="{EDD36BE5-7AA3-4DCC-AC51-4BAC6D276F7D}"/>
               </a:ext>
             </a:extLst>
           </p:cNvPr>
@@ -1514,7 +1514,7 @@
           <p:cNvPr id="2" name="">
             <a:extLst xmlns:a="http://schemas.openxmlformats.org/drawingml/2006/main">
               <a:ext uri="{FF2B5EF4-FFF2-40B4-BE49-F238E27FC236}">
-                <a16:creationId xmlns:a16="http://schemas.microsoft.com/office/drawing/2014/main" id="{87081F9D-49E2-4F5C-93BC-674C95876C69}"/>
+                <a16:creationId xmlns:a16="http://schemas.microsoft.com/office/drawing/2014/main" id="{9DA03BD6-1468-4F3E-BE11-B34277E7F724}"/>
               </a:ext>
             </a:extLst>
           </p:cNvPr>
@@ -1571,7 +1571,7 @@
           <p:cNvPr id="3" name="">
             <a:extLst xmlns:a="http://schemas.openxmlformats.org/drawingml/2006/main">
               <a:ext uri="{FF2B5EF4-FFF2-40B4-BE49-F238E27FC236}">
-                <a16:creationId xmlns:a16="http://schemas.microsoft.com/office/drawing/2014/main" id="{D2249088-3FB9-453D-A96A-8B9FD1867BEE}"/>
+                <a16:creationId xmlns:a16="http://schemas.microsoft.com/office/drawing/2014/main" id="{B09C0AF8-87D1-44AB-841C-1D937BD59C6A}"/>
               </a:ext>
             </a:extLst>
           </p:cNvPr>
@@ -1628,7 +1628,7 @@
           <p:cNvPr id="4" name="">
             <a:extLst xmlns:a="http://schemas.openxmlformats.org/drawingml/2006/main">
               <a:ext uri="{FF2B5EF4-FFF2-40B4-BE49-F238E27FC236}">
-                <a16:creationId xmlns:a16="http://schemas.microsoft.com/office/drawing/2014/main" id="{2579C8FA-C882-4FA7-8DA2-A75738F1EB42}"/>
+                <a16:creationId xmlns:a16="http://schemas.microsoft.com/office/drawing/2014/main" id="{11043A31-E5AD-4AC3-A476-DC5E2DEEAC87}"/>
               </a:ext>
             </a:extLst>
           </p:cNvPr>
@@ -1685,7 +1685,7 @@
           <p:cNvPr id="5" name="">
             <a:extLst xmlns:a="http://schemas.openxmlformats.org/drawingml/2006/main">
               <a:ext uri="{FF2B5EF4-FFF2-40B4-BE49-F238E27FC236}">
-                <a16:creationId xmlns:a16="http://schemas.microsoft.com/office/drawing/2014/main" id="{906B8096-0987-4489-8E8F-51DAE484DD12}"/>
+                <a16:creationId xmlns:a16="http://schemas.microsoft.com/office/drawing/2014/main" id="{762DA727-9B48-4C9D-B8CC-ABC5745DC082}"/>
               </a:ext>
             </a:extLst>
           </p:cNvPr>
@@ -1715,7 +1715,7 @@
           <p:cNvPr id="6" name="">
             <a:extLst xmlns:a="http://schemas.openxmlformats.org/drawingml/2006/main">
               <a:ext uri="{FF2B5EF4-FFF2-40B4-BE49-F238E27FC236}">
-                <a16:creationId xmlns:a16="http://schemas.microsoft.com/office/drawing/2014/main" id="{190D4A90-DDD6-435D-9DC3-C5CCD2DE32AD}"/>
+                <a16:creationId xmlns:a16="http://schemas.microsoft.com/office/drawing/2014/main" id="{543637AD-F775-4666-8ACC-C2C55010C7BE}"/>
               </a:ext>
             </a:extLst>
           </p:cNvPr>
@@ -1772,7 +1772,7 @@
           <p:cNvPr id="7" name="">
             <a:extLst xmlns:a="http://schemas.openxmlformats.org/drawingml/2006/main">
               <a:ext uri="{FF2B5EF4-FFF2-40B4-BE49-F238E27FC236}">
-                <a16:creationId xmlns:a16="http://schemas.microsoft.com/office/drawing/2014/main" id="{28DCA238-10DF-4B8C-87C8-83B298081805}"/>
+                <a16:creationId xmlns:a16="http://schemas.microsoft.com/office/drawing/2014/main" id="{4B1B4AB4-9AF3-44EC-B233-1B63B1C6B7A4}"/>
               </a:ext>
             </a:extLst>
           </p:cNvPr>
@@ -1829,7 +1829,7 @@
           <p:cNvPr id="8" name="">
             <a:extLst xmlns:a="http://schemas.openxmlformats.org/drawingml/2006/main">
               <a:ext uri="{FF2B5EF4-FFF2-40B4-BE49-F238E27FC236}">
-                <a16:creationId xmlns:a16="http://schemas.microsoft.com/office/drawing/2014/main" id="{9DA3E97B-1730-49D9-B798-C1B74A73C9FD}"/>
+                <a16:creationId xmlns:a16="http://schemas.microsoft.com/office/drawing/2014/main" id="{CF8A1FFD-1779-43E9-B2F9-CE8F1E13C294}"/>
               </a:ext>
             </a:extLst>
           </p:cNvPr>
@@ -1884,7 +1884,7 @@
     </p:spTree>
     <p:extLst>
       <p:ext uri="{BB962C8B-B14F-4D97-AF65-F5344CB8AC3E}">
-        <p14:creationId xmlns:p14="http://schemas.microsoft.com/office/powerpoint/2010/main" val="2013341118"/>
+        <p14:creationId xmlns:p14="http://schemas.microsoft.com/office/powerpoint/2010/main" val="109796254"/>
       </p:ext>
     </p:extLst>
   </p:cSld>
@@ -1915,7 +1915,7 @@
           <p:cNvPr id="45" name="">
             <a:extLst xmlns:a="http://schemas.openxmlformats.org/drawingml/2006/main">
               <a:ext uri="{FF2B5EF4-FFF2-40B4-BE49-F238E27FC236}">
-                <a16:creationId xmlns:a16="http://schemas.microsoft.com/office/drawing/2014/main" id="{4665648A-0A3A-43CB-A6E6-A8C0B16EAE31}"/>
+                <a16:creationId xmlns:a16="http://schemas.microsoft.com/office/drawing/2014/main" id="{6A4C2678-A64A-4203-8634-82EC9BFFEBEF}"/>
               </a:ext>
             </a:extLst>
           </p:cNvPr>
@@ -1945,7 +1945,7 @@
           <p:cNvPr id="2" name="">
             <a:extLst xmlns:a="http://schemas.openxmlformats.org/drawingml/2006/main">
               <a:ext uri="{FF2B5EF4-FFF2-40B4-BE49-F238E27FC236}">
-                <a16:creationId xmlns:a16="http://schemas.microsoft.com/office/drawing/2014/main" id="{8EE26F1D-D996-434F-9F61-9D40CD1AF171}"/>
+                <a16:creationId xmlns:a16="http://schemas.microsoft.com/office/drawing/2014/main" id="{42AF43FB-58A7-45DD-804F-5F3283DF6777}"/>
               </a:ext>
             </a:extLst>
           </p:cNvPr>
@@ -2002,7 +2002,7 @@
           <p:cNvPr id="3" name="">
             <a:extLst xmlns:a="http://schemas.openxmlformats.org/drawingml/2006/main">
               <a:ext uri="{FF2B5EF4-FFF2-40B4-BE49-F238E27FC236}">
-                <a16:creationId xmlns:a16="http://schemas.microsoft.com/office/drawing/2014/main" id="{8D61DFF0-039F-4B07-8A9B-4631F38F5D9D}"/>
+                <a16:creationId xmlns:a16="http://schemas.microsoft.com/office/drawing/2014/main" id="{F8BCB7D4-B929-4DD8-93EA-A2C23EB4432A}"/>
               </a:ext>
             </a:extLst>
           </p:cNvPr>
@@ -2032,7 +2032,7 @@
           <p:cNvPr id="4" name="">
             <a:extLst xmlns:a="http://schemas.openxmlformats.org/drawingml/2006/main">
               <a:ext uri="{FF2B5EF4-FFF2-40B4-BE49-F238E27FC236}">
-                <a16:creationId xmlns:a16="http://schemas.microsoft.com/office/drawing/2014/main" id="{ADAFCC95-49B7-4884-9188-33DEC65BC4E3}"/>
+                <a16:creationId xmlns:a16="http://schemas.microsoft.com/office/drawing/2014/main" id="{57B593AE-22A5-4595-B144-C495F43F7237}"/>
               </a:ext>
             </a:extLst>
           </p:cNvPr>
@@ -2089,7 +2089,7 @@
           <p:cNvPr id="5" name="">
             <a:extLst xmlns:a="http://schemas.openxmlformats.org/drawingml/2006/main">
               <a:ext uri="{FF2B5EF4-FFF2-40B4-BE49-F238E27FC236}">
-                <a16:creationId xmlns:a16="http://schemas.microsoft.com/office/drawing/2014/main" id="{B2376A46-4701-4DAF-9372-6C9303C8FC7F}"/>
+                <a16:creationId xmlns:a16="http://schemas.microsoft.com/office/drawing/2014/main" id="{3773A65F-4FA3-4E93-ACA1-74EAF11A0E25}"/>
               </a:ext>
             </a:extLst>
           </p:cNvPr>
@@ -2146,7 +2146,7 @@
           <p:cNvPr id="6" name="">
             <a:extLst xmlns:a="http://schemas.openxmlformats.org/drawingml/2006/main">
               <a:ext uri="{FF2B5EF4-FFF2-40B4-BE49-F238E27FC236}">
-                <a16:creationId xmlns:a16="http://schemas.microsoft.com/office/drawing/2014/main" id="{F685CFB3-3673-4257-A896-98E6FE573CC6}"/>
+                <a16:creationId xmlns:a16="http://schemas.microsoft.com/office/drawing/2014/main" id="{E34508AA-F704-40CE-AA5A-C6B144CC8B06}"/>
               </a:ext>
             </a:extLst>
           </p:cNvPr>
@@ -2203,7 +2203,7 @@
           <p:cNvPr id="7" name="">
             <a:extLst xmlns:a="http://schemas.openxmlformats.org/drawingml/2006/main">
               <a:ext uri="{FF2B5EF4-FFF2-40B4-BE49-F238E27FC236}">
-                <a16:creationId xmlns:a16="http://schemas.microsoft.com/office/drawing/2014/main" id="{820718F0-206B-4B89-AFAB-4E8361EC7D82}"/>
+                <a16:creationId xmlns:a16="http://schemas.microsoft.com/office/drawing/2014/main" id="{434BAE99-C9DC-400F-B0B9-A9B1D4B31E3E}"/>
               </a:ext>
             </a:extLst>
           </p:cNvPr>
@@ -2237,7 +2237,7 @@
           <p:cNvPr id="8" name="">
             <a:extLst xmlns:a="http://schemas.openxmlformats.org/drawingml/2006/main">
               <a:ext uri="{FF2B5EF4-FFF2-40B4-BE49-F238E27FC236}">
-                <a16:creationId xmlns:a16="http://schemas.microsoft.com/office/drawing/2014/main" id="{EA8CEBC2-1097-40DF-9B22-2BD6908CFA43}"/>
+                <a16:creationId xmlns:a16="http://schemas.microsoft.com/office/drawing/2014/main" id="{7A268029-2410-4D4E-9BD1-520FDCBB2F06}"/>
               </a:ext>
             </a:extLst>
           </p:cNvPr>
@@ -2269,7 +2269,7 @@
           <p:cNvPr id="9" name="">
             <a:extLst xmlns:a="http://schemas.openxmlformats.org/drawingml/2006/main">
               <a:ext uri="{FF2B5EF4-FFF2-40B4-BE49-F238E27FC236}">
-                <a16:creationId xmlns:a16="http://schemas.microsoft.com/office/drawing/2014/main" id="{FD41680D-2E22-4704-ADC3-85B61DC933DD}"/>
+                <a16:creationId xmlns:a16="http://schemas.microsoft.com/office/drawing/2014/main" id="{754B57D4-F14D-45BA-B93E-66804AF60F3D}"/>
               </a:ext>
             </a:extLst>
           </p:cNvPr>
@@ -2326,7 +2326,7 @@
           <p:cNvPr id="10" name="">
             <a:extLst xmlns:a="http://schemas.openxmlformats.org/drawingml/2006/main">
               <a:ext uri="{FF2B5EF4-FFF2-40B4-BE49-F238E27FC236}">
-                <a16:creationId xmlns:a16="http://schemas.microsoft.com/office/drawing/2014/main" id="{71126D52-349A-4747-8E0E-52DD316D8179}"/>
+                <a16:creationId xmlns:a16="http://schemas.microsoft.com/office/drawing/2014/main" id="{F3240AB1-0C33-4EBA-9F1F-E23886E7C8B2}"/>
               </a:ext>
             </a:extLst>
           </p:cNvPr>
@@ -2406,7 +2406,7 @@
           <p:cNvPr id="11" name="">
             <a:extLst xmlns:a="http://schemas.openxmlformats.org/drawingml/2006/main">
               <a:ext uri="{FF2B5EF4-FFF2-40B4-BE49-F238E27FC236}">
-                <a16:creationId xmlns:a16="http://schemas.microsoft.com/office/drawing/2014/main" id="{C2BEDEDA-ABAF-40AC-A1D4-8BE36D3F604B}"/>
+                <a16:creationId xmlns:a16="http://schemas.microsoft.com/office/drawing/2014/main" id="{A3783D29-3416-4C73-9C74-B385E2C5A6EB}"/>
               </a:ext>
             </a:extLst>
           </p:cNvPr>
@@ -2436,7 +2436,7 @@
           <p:cNvPr id="12" name="">
             <a:extLst xmlns:a="http://schemas.openxmlformats.org/drawingml/2006/main">
               <a:ext uri="{FF2B5EF4-FFF2-40B4-BE49-F238E27FC236}">
-                <a16:creationId xmlns:a16="http://schemas.microsoft.com/office/drawing/2014/main" id="{409E19D9-BE16-49F6-AE44-8917E8ED8818}"/>
+                <a16:creationId xmlns:a16="http://schemas.microsoft.com/office/drawing/2014/main" id="{3EFF41F1-919F-40BC-9183-87A545360CF8}"/>
               </a:ext>
             </a:extLst>
           </p:cNvPr>
@@ -2470,7 +2470,7 @@
           <p:cNvPr id="13" name="">
             <a:extLst xmlns:a="http://schemas.openxmlformats.org/drawingml/2006/main">
               <a:ext uri="{FF2B5EF4-FFF2-40B4-BE49-F238E27FC236}">
-                <a16:creationId xmlns:a16="http://schemas.microsoft.com/office/drawing/2014/main" id="{26974091-ADEB-44C1-B0EA-332BB073142A}"/>
+                <a16:creationId xmlns:a16="http://schemas.microsoft.com/office/drawing/2014/main" id="{FFACC464-144B-4B50-8E10-0D345A7FC969}"/>
               </a:ext>
             </a:extLst>
           </p:cNvPr>
@@ -2502,7 +2502,7 @@
           <p:cNvPr id="14" name="">
             <a:extLst xmlns:a="http://schemas.openxmlformats.org/drawingml/2006/main">
               <a:ext uri="{FF2B5EF4-FFF2-40B4-BE49-F238E27FC236}">
-                <a16:creationId xmlns:a16="http://schemas.microsoft.com/office/drawing/2014/main" id="{E662049C-7208-4C2B-B0CC-ACE58F32B74A}"/>
+                <a16:creationId xmlns:a16="http://schemas.microsoft.com/office/drawing/2014/main" id="{EAD7F57F-8F44-4412-9C9A-FFD0BF804220}"/>
               </a:ext>
             </a:extLst>
           </p:cNvPr>
@@ -2559,7 +2559,7 @@
           <p:cNvPr id="15" name="">
             <a:extLst xmlns:a="http://schemas.openxmlformats.org/drawingml/2006/main">
               <a:ext uri="{FF2B5EF4-FFF2-40B4-BE49-F238E27FC236}">
-                <a16:creationId xmlns:a16="http://schemas.microsoft.com/office/drawing/2014/main" id="{2A12CC0C-86EA-4FF2-B50B-2841A38FB4ED}"/>
+                <a16:creationId xmlns:a16="http://schemas.microsoft.com/office/drawing/2014/main" id="{9F94AC04-1C5F-4CE1-BCBE-2E1506CD02F7}"/>
               </a:ext>
             </a:extLst>
           </p:cNvPr>
@@ -2639,7 +2639,7 @@
           <p:cNvPr id="16" name="">
             <a:extLst xmlns:a="http://schemas.openxmlformats.org/drawingml/2006/main">
               <a:ext uri="{FF2B5EF4-FFF2-40B4-BE49-F238E27FC236}">
-                <a16:creationId xmlns:a16="http://schemas.microsoft.com/office/drawing/2014/main" id="{DEE09F92-1825-4A1F-936E-B4788F4E7D74}"/>
+                <a16:creationId xmlns:a16="http://schemas.microsoft.com/office/drawing/2014/main" id="{49CEA19B-83A9-4356-8C08-08001BF0DAC1}"/>
               </a:ext>
             </a:extLst>
           </p:cNvPr>
@@ -2669,7 +2669,7 @@
           <p:cNvPr id="17" name="">
             <a:extLst xmlns:a="http://schemas.openxmlformats.org/drawingml/2006/main">
               <a:ext uri="{FF2B5EF4-FFF2-40B4-BE49-F238E27FC236}">
-                <a16:creationId xmlns:a16="http://schemas.microsoft.com/office/drawing/2014/main" id="{AAD612AC-1547-4EA5-A167-2D93CCFCE3B9}"/>
+                <a16:creationId xmlns:a16="http://schemas.microsoft.com/office/drawing/2014/main" id="{CE3AF99B-A055-4F94-8C70-2F90DBB06D82}"/>
               </a:ext>
             </a:extLst>
           </p:cNvPr>
@@ -2703,7 +2703,7 @@
           <p:cNvPr id="18" name="">
             <a:extLst xmlns:a="http://schemas.openxmlformats.org/drawingml/2006/main">
               <a:ext uri="{FF2B5EF4-FFF2-40B4-BE49-F238E27FC236}">
-                <a16:creationId xmlns:a16="http://schemas.microsoft.com/office/drawing/2014/main" id="{1E45ABEA-0E6B-4595-A768-88F00FE2EB75}"/>
+                <a16:creationId xmlns:a16="http://schemas.microsoft.com/office/drawing/2014/main" id="{26A947FF-4732-4AED-B9D8-B042D9831A4D}"/>
               </a:ext>
             </a:extLst>
           </p:cNvPr>
@@ -2735,7 +2735,7 @@
           <p:cNvPr id="19" name="">
             <a:extLst xmlns:a="http://schemas.openxmlformats.org/drawingml/2006/main">
               <a:ext uri="{FF2B5EF4-FFF2-40B4-BE49-F238E27FC236}">
-                <a16:creationId xmlns:a16="http://schemas.microsoft.com/office/drawing/2014/main" id="{F215C771-4185-4C84-B85F-D2A17669A13B}"/>
+                <a16:creationId xmlns:a16="http://schemas.microsoft.com/office/drawing/2014/main" id="{4EB58487-703B-44CB-889E-D70466E5E0B3}"/>
               </a:ext>
             </a:extLst>
           </p:cNvPr>
@@ -2792,7 +2792,7 @@
           <p:cNvPr id="20" name="">
             <a:extLst xmlns:a="http://schemas.openxmlformats.org/drawingml/2006/main">
               <a:ext uri="{FF2B5EF4-FFF2-40B4-BE49-F238E27FC236}">
-                <a16:creationId xmlns:a16="http://schemas.microsoft.com/office/drawing/2014/main" id="{F9F58620-8099-448D-B39C-124CCA6CF8A3}"/>
+                <a16:creationId xmlns:a16="http://schemas.microsoft.com/office/drawing/2014/main" id="{E567E96A-3E53-4B6D-BA3D-223112C7F584}"/>
               </a:ext>
             </a:extLst>
           </p:cNvPr>
@@ -2872,7 +2872,7 @@
           <p:cNvPr id="21" name="">
             <a:extLst xmlns:a="http://schemas.openxmlformats.org/drawingml/2006/main">
               <a:ext uri="{FF2B5EF4-FFF2-40B4-BE49-F238E27FC236}">
-                <a16:creationId xmlns:a16="http://schemas.microsoft.com/office/drawing/2014/main" id="{B74180D5-9B56-4077-8BC5-17CF3F1033DC}"/>
+                <a16:creationId xmlns:a16="http://schemas.microsoft.com/office/drawing/2014/main" id="{54EC44F3-44A2-479A-8C05-0D85828D91A7}"/>
               </a:ext>
             </a:extLst>
           </p:cNvPr>
@@ -2902,7 +2902,7 @@
           <p:cNvPr id="22" name="">
             <a:extLst xmlns:a="http://schemas.openxmlformats.org/drawingml/2006/main">
               <a:ext uri="{FF2B5EF4-FFF2-40B4-BE49-F238E27FC236}">
-                <a16:creationId xmlns:a16="http://schemas.microsoft.com/office/drawing/2014/main" id="{83FEC0BF-7C1B-4230-BCFC-76D4183CCC53}"/>
+                <a16:creationId xmlns:a16="http://schemas.microsoft.com/office/drawing/2014/main" id="{8A5C6A43-6683-4AF0-BE9D-708A81D735BE}"/>
               </a:ext>
             </a:extLst>
           </p:cNvPr>
@@ -2936,7 +2936,7 @@
           <p:cNvPr id="23" name="">
             <a:extLst xmlns:a="http://schemas.openxmlformats.org/drawingml/2006/main">
               <a:ext uri="{FF2B5EF4-FFF2-40B4-BE49-F238E27FC236}">
-                <a16:creationId xmlns:a16="http://schemas.microsoft.com/office/drawing/2014/main" id="{392FD129-823A-4827-AA53-B9B3FBF80E40}"/>
+                <a16:creationId xmlns:a16="http://schemas.microsoft.com/office/drawing/2014/main" id="{0FD9FCD7-524A-41F3-8113-9423B3B03837}"/>
               </a:ext>
             </a:extLst>
           </p:cNvPr>
@@ -2968,7 +2968,7 @@
           <p:cNvPr id="24" name="">
             <a:extLst xmlns:a="http://schemas.openxmlformats.org/drawingml/2006/main">
               <a:ext uri="{FF2B5EF4-FFF2-40B4-BE49-F238E27FC236}">
-                <a16:creationId xmlns:a16="http://schemas.microsoft.com/office/drawing/2014/main" id="{2A91466B-7244-4229-AAC6-B3A0C0DAEAFE}"/>
+                <a16:creationId xmlns:a16="http://schemas.microsoft.com/office/drawing/2014/main" id="{0A785D48-EFB0-4776-BF17-35A7E05F29BE}"/>
               </a:ext>
             </a:extLst>
           </p:cNvPr>
@@ -3025,7 +3025,7 @@
           <p:cNvPr id="25" name="">
             <a:extLst xmlns:a="http://schemas.openxmlformats.org/drawingml/2006/main">
               <a:ext uri="{FF2B5EF4-FFF2-40B4-BE49-F238E27FC236}">
-                <a16:creationId xmlns:a16="http://schemas.microsoft.com/office/drawing/2014/main" id="{8303B191-89CE-4F7B-9324-C372B77EF26B}"/>
+                <a16:creationId xmlns:a16="http://schemas.microsoft.com/office/drawing/2014/main" id="{9CCE1EDE-E3BF-445D-A261-BDD6BC1489A3}"/>
               </a:ext>
             </a:extLst>
           </p:cNvPr>
@@ -3105,7 +3105,7 @@
           <p:cNvPr id="26" name="">
             <a:extLst xmlns:a="http://schemas.openxmlformats.org/drawingml/2006/main">
               <a:ext uri="{FF2B5EF4-FFF2-40B4-BE49-F238E27FC236}">
-                <a16:creationId xmlns:a16="http://schemas.microsoft.com/office/drawing/2014/main" id="{8B199CC9-4449-4114-8B13-3DB2BEB47CD4}"/>
+                <a16:creationId xmlns:a16="http://schemas.microsoft.com/office/drawing/2014/main" id="{A073A5B2-BA12-4398-AECB-997152E23690}"/>
               </a:ext>
             </a:extLst>
           </p:cNvPr>
@@ -3135,7 +3135,7 @@
           <p:cNvPr id="27" name="">
             <a:extLst xmlns:a="http://schemas.openxmlformats.org/drawingml/2006/main">
               <a:ext uri="{FF2B5EF4-FFF2-40B4-BE49-F238E27FC236}">
-                <a16:creationId xmlns:a16="http://schemas.microsoft.com/office/drawing/2014/main" id="{11CC317B-73F2-426A-85D5-0191FB9678E0}"/>
+                <a16:creationId xmlns:a16="http://schemas.microsoft.com/office/drawing/2014/main" id="{A942D121-9F86-497E-B8B8-0724DCA64A0B}"/>
               </a:ext>
             </a:extLst>
           </p:cNvPr>
@@ -3169,7 +3169,7 @@
           <p:cNvPr id="28" name="">
             <a:extLst xmlns:a="http://schemas.openxmlformats.org/drawingml/2006/main">
               <a:ext uri="{FF2B5EF4-FFF2-40B4-BE49-F238E27FC236}">
-                <a16:creationId xmlns:a16="http://schemas.microsoft.com/office/drawing/2014/main" id="{3565D1EC-9B22-4C2D-BB98-B32B786096CD}"/>
+                <a16:creationId xmlns:a16="http://schemas.microsoft.com/office/drawing/2014/main" id="{2B09EA8F-69E1-4435-B0E3-FDDFB8CF4BB7}"/>
               </a:ext>
             </a:extLst>
           </p:cNvPr>
@@ -3201,7 +3201,7 @@
           <p:cNvPr id="29" name="">
             <a:extLst xmlns:a="http://schemas.openxmlformats.org/drawingml/2006/main">
               <a:ext uri="{FF2B5EF4-FFF2-40B4-BE49-F238E27FC236}">
-                <a16:creationId xmlns:a16="http://schemas.microsoft.com/office/drawing/2014/main" id="{7007FADF-52B6-42DC-8F52-C6D21A4428F5}"/>
+                <a16:creationId xmlns:a16="http://schemas.microsoft.com/office/drawing/2014/main" id="{A5E58007-2AFC-463A-B945-3DCD912BFB59}"/>
               </a:ext>
             </a:extLst>
           </p:cNvPr>
@@ -3258,7 +3258,7 @@
           <p:cNvPr id="30" name="">
             <a:extLst xmlns:a="http://schemas.openxmlformats.org/drawingml/2006/main">
               <a:ext uri="{FF2B5EF4-FFF2-40B4-BE49-F238E27FC236}">
-                <a16:creationId xmlns:a16="http://schemas.microsoft.com/office/drawing/2014/main" id="{2322E08A-0951-48B1-97E5-CF8D26AB7ECF}"/>
+                <a16:creationId xmlns:a16="http://schemas.microsoft.com/office/drawing/2014/main" id="{1E28CB85-F90C-40F6-913B-240411FD5517}"/>
               </a:ext>
             </a:extLst>
           </p:cNvPr>
@@ -3338,7 +3338,7 @@
           <p:cNvPr id="31" name="">
             <a:extLst xmlns:a="http://schemas.openxmlformats.org/drawingml/2006/main">
               <a:ext uri="{FF2B5EF4-FFF2-40B4-BE49-F238E27FC236}">
-                <a16:creationId xmlns:a16="http://schemas.microsoft.com/office/drawing/2014/main" id="{060B5122-F250-4ABA-9634-465488A80892}"/>
+                <a16:creationId xmlns:a16="http://schemas.microsoft.com/office/drawing/2014/main" id="{DEFC246C-8F65-44D5-907D-DB73B5DC6AFA}"/>
               </a:ext>
             </a:extLst>
           </p:cNvPr>
@@ -3395,7 +3395,7 @@
           <p:cNvPr id="32" name="">
             <a:extLst xmlns:a="http://schemas.openxmlformats.org/drawingml/2006/main">
               <a:ext uri="{FF2B5EF4-FFF2-40B4-BE49-F238E27FC236}">
-                <a16:creationId xmlns:a16="http://schemas.microsoft.com/office/drawing/2014/main" id="{F579F758-578E-4B81-9CAF-1F963786CDE5}"/>
+                <a16:creationId xmlns:a16="http://schemas.microsoft.com/office/drawing/2014/main" id="{F0571A30-BBA3-4465-9E89-6293D587FC4D}"/>
               </a:ext>
             </a:extLst>
           </p:cNvPr>
@@ -3452,7 +3452,7 @@
           <p:cNvPr id="33" name="">
             <a:extLst xmlns:a="http://schemas.openxmlformats.org/drawingml/2006/main">
               <a:ext uri="{FF2B5EF4-FFF2-40B4-BE49-F238E27FC236}">
-                <a16:creationId xmlns:a16="http://schemas.microsoft.com/office/drawing/2014/main" id="{B8D655D8-69BA-42F3-937B-8B97C90EEC71}"/>
+                <a16:creationId xmlns:a16="http://schemas.microsoft.com/office/drawing/2014/main" id="{5149C864-E502-4472-9BF7-E83F43DDB885}"/>
               </a:ext>
             </a:extLst>
           </p:cNvPr>
@@ -3509,7 +3509,7 @@
           <p:cNvPr id="34" name="">
             <a:extLst xmlns:a="http://schemas.openxmlformats.org/drawingml/2006/main">
               <a:ext uri="{FF2B5EF4-FFF2-40B4-BE49-F238E27FC236}">
-                <a16:creationId xmlns:a16="http://schemas.microsoft.com/office/drawing/2014/main" id="{62BAC110-5F0A-42B4-8087-F43F3682D09C}"/>
+                <a16:creationId xmlns:a16="http://schemas.microsoft.com/office/drawing/2014/main" id="{297E5D51-473F-45AF-8A6D-DB8A2DDE22E4}"/>
               </a:ext>
             </a:extLst>
           </p:cNvPr>
@@ -3566,7 +3566,7 @@
           <p:cNvPr id="35" name="">
             <a:extLst xmlns:a="http://schemas.openxmlformats.org/drawingml/2006/main">
               <a:ext uri="{FF2B5EF4-FFF2-40B4-BE49-F238E27FC236}">
-                <a16:creationId xmlns:a16="http://schemas.microsoft.com/office/drawing/2014/main" id="{018C6078-A6A5-46E1-988E-A83CE4C09F19}"/>
+                <a16:creationId xmlns:a16="http://schemas.microsoft.com/office/drawing/2014/main" id="{1E617B3B-B4F8-4F55-AB7D-8B557A118FF3}"/>
               </a:ext>
             </a:extLst>
           </p:cNvPr>
@@ -3623,7 +3623,7 @@
           <p:cNvPr id="36" name="">
             <a:extLst xmlns:a="http://schemas.openxmlformats.org/drawingml/2006/main">
               <a:ext uri="{FF2B5EF4-FFF2-40B4-BE49-F238E27FC236}">
-                <a16:creationId xmlns:a16="http://schemas.microsoft.com/office/drawing/2014/main" id="{71C5ADBE-96F7-472C-A116-E2CA165ADAB8}"/>
+                <a16:creationId xmlns:a16="http://schemas.microsoft.com/office/drawing/2014/main" id="{795B2FA4-144B-4614-8F0B-4B189EF48C7B}"/>
               </a:ext>
             </a:extLst>
           </p:cNvPr>
@@ -3680,7 +3680,7 @@
           <p:cNvPr id="37" name="">
             <a:extLst xmlns:a="http://schemas.openxmlformats.org/drawingml/2006/main">
               <a:ext uri="{FF2B5EF4-FFF2-40B4-BE49-F238E27FC236}">
-                <a16:creationId xmlns:a16="http://schemas.microsoft.com/office/drawing/2014/main" id="{346799FE-A17E-4D92-97C3-C6823B91DCF6}"/>
+                <a16:creationId xmlns:a16="http://schemas.microsoft.com/office/drawing/2014/main" id="{4F9E1BAA-DAB9-4EDC-818B-3241B4370D67}"/>
               </a:ext>
             </a:extLst>
           </p:cNvPr>
@@ -3737,7 +3737,7 @@
           <p:cNvPr id="38" name="">
             <a:extLst xmlns:a="http://schemas.openxmlformats.org/drawingml/2006/main">
               <a:ext uri="{FF2B5EF4-FFF2-40B4-BE49-F238E27FC236}">
-                <a16:creationId xmlns:a16="http://schemas.microsoft.com/office/drawing/2014/main" id="{E9798D19-81A2-48A0-B9BC-71D4EB41F32E}"/>
+                <a16:creationId xmlns:a16="http://schemas.microsoft.com/office/drawing/2014/main" id="{5685CF4C-D705-4FFF-AE61-16F0A2FDA87D}"/>
               </a:ext>
             </a:extLst>
           </p:cNvPr>
@@ -3794,7 +3794,7 @@
           <p:cNvPr id="39" name="">
             <a:extLst xmlns:a="http://schemas.openxmlformats.org/drawingml/2006/main">
               <a:ext uri="{FF2B5EF4-FFF2-40B4-BE49-F238E27FC236}">
-                <a16:creationId xmlns:a16="http://schemas.microsoft.com/office/drawing/2014/main" id="{6D3A3038-6040-4353-B666-03949FF14679}"/>
+                <a16:creationId xmlns:a16="http://schemas.microsoft.com/office/drawing/2014/main" id="{F17DD4C6-B77D-4F27-A6DB-AF8E5A314416}"/>
               </a:ext>
             </a:extLst>
           </p:cNvPr>
@@ -3851,31 +3851,31 @@
           <p:cNvPr id="40" name="">
             <a:extLst xmlns:a="http://schemas.openxmlformats.org/drawingml/2006/main">
               <a:ext uri="{FF2B5EF4-FFF2-40B4-BE49-F238E27FC236}">
-                <a16:creationId xmlns:a16="http://schemas.microsoft.com/office/drawing/2014/main" id="{12DE2C93-5A10-4BB5-8453-7F76EACED356}"/>
-              </a:ext>
-            </a:extLst>
-          </p:cNvPr>
-          <p:cNvSpPr>
-            <a:spLocks xmlns:a="http://schemas.openxmlformats.org/drawingml/2006/main" noGrp="1"/>
-          </p:cNvSpPr>
-          <p:nvPr/>
-        </p:nvSpPr>
-        <p:spPr>
-          <a:xfrm xmlns:a="http://schemas.openxmlformats.org/drawingml/2006/main">
-            <a:off x="8572500" y="4629150"/>
-            <a:ext cx="2667000" cy="247650"/>
-          </a:xfrm>
-          <a:prstGeom xmlns:a="http://schemas.openxmlformats.org/drawingml/2006/main" prst="rect">
-            <a:avLst/>
-          </a:prstGeom>
-          <a:noFill xmlns:a="http://schemas.openxmlformats.org/drawingml/2006/main"/>
-          <a:ln xmlns:a="http://schemas.openxmlformats.org/drawingml/2006/main" w="0">
-            <a:noFill/>
-          </a:ln>
-        </p:spPr>
-        <p:txBody>
-          <a:bodyPr xmlns:a="http://schemas.openxmlformats.org/drawingml/2006/main" anchor="ctr">
-            <a:normAutofit fontScale="75018"/>
+                <a16:creationId xmlns:a16="http://schemas.microsoft.com/office/drawing/2014/main" id="{8393D993-BEE8-400E-8814-01B0CC36B56B}"/>
+              </a:ext>
+            </a:extLst>
+          </p:cNvPr>
+          <p:cNvSpPr>
+            <a:spLocks xmlns:a="http://schemas.openxmlformats.org/drawingml/2006/main" noGrp="1"/>
+          </p:cNvSpPr>
+          <p:nvPr/>
+        </p:nvSpPr>
+        <p:spPr>
+          <a:xfrm xmlns:a="http://schemas.openxmlformats.org/drawingml/2006/main">
+            <a:off x="8191500" y="4629150"/>
+            <a:ext cx="3048000" cy="247650"/>
+          </a:xfrm>
+          <a:prstGeom xmlns:a="http://schemas.openxmlformats.org/drawingml/2006/main" prst="rect">
+            <a:avLst/>
+          </a:prstGeom>
+          <a:noFill xmlns:a="http://schemas.openxmlformats.org/drawingml/2006/main"/>
+          <a:ln xmlns:a="http://schemas.openxmlformats.org/drawingml/2006/main" w="0">
+            <a:noFill/>
+          </a:ln>
+        </p:spPr>
+        <p:txBody>
+          <a:bodyPr xmlns:a="http://schemas.openxmlformats.org/drawingml/2006/main" anchor="ctr">
+            <a:normAutofit fontScale="86304"/>
           </a:bodyPr>
           <a:lstStyle xmlns:a="http://schemas.openxmlformats.org/drawingml/2006/main"/>
           <a:p xmlns:a="http://schemas.openxmlformats.org/drawingml/2006/main">
@@ -3898,7 +3898,7 @@
                 <a:ea typeface="Malgun Gothic"/>
                 <a:cs typeface="Malgun Gothic"/>
               </a:rPr>
-              <a:t>보조 검증  |  pytest 214 passed  ·  중복 재조회 35/35</a:t>
+              <a:t>보조 검증  |  pytest 224 passed  ·  중복 재조회 35/35</a:t>
             </a:r>
           </a:p>
         </p:txBody>
@@ -3908,7 +3908,7 @@
           <p:cNvPr id="41" name="">
             <a:extLst xmlns:a="http://schemas.openxmlformats.org/drawingml/2006/main">
               <a:ext uri="{FF2B5EF4-FFF2-40B4-BE49-F238E27FC236}">
-                <a16:creationId xmlns:a16="http://schemas.microsoft.com/office/drawing/2014/main" id="{FD40E817-7F82-44CC-933A-F8B845649DE4}"/>
+                <a16:creationId xmlns:a16="http://schemas.microsoft.com/office/drawing/2014/main" id="{01F05465-DCE8-4311-B2AB-106AC8D8DAEF}"/>
               </a:ext>
             </a:extLst>
           </p:cNvPr>
@@ -3988,7 +3988,7 @@
           <p:cNvPr id="42" name="">
             <a:extLst xmlns:a="http://schemas.openxmlformats.org/drawingml/2006/main">
               <a:ext uri="{FF2B5EF4-FFF2-40B4-BE49-F238E27FC236}">
-                <a16:creationId xmlns:a16="http://schemas.microsoft.com/office/drawing/2014/main" id="{8AA1CD72-0528-4B96-9849-289F0A9B87D2}"/>
+                <a16:creationId xmlns:a16="http://schemas.microsoft.com/office/drawing/2014/main" id="{AB274BFF-D2D8-4355-A897-8E182AAD2639}"/>
               </a:ext>
             </a:extLst>
           </p:cNvPr>
@@ -4045,7 +4045,7 @@
           <p:cNvPr id="43" name="">
             <a:extLst xmlns:a="http://schemas.openxmlformats.org/drawingml/2006/main">
               <a:ext uri="{FF2B5EF4-FFF2-40B4-BE49-F238E27FC236}">
-                <a16:creationId xmlns:a16="http://schemas.microsoft.com/office/drawing/2014/main" id="{3A6C1783-22E9-499F-B74C-77321786EB96}"/>
+                <a16:creationId xmlns:a16="http://schemas.microsoft.com/office/drawing/2014/main" id="{2631DF23-D828-4588-B595-2985F22F2C6E}"/>
               </a:ext>
             </a:extLst>
           </p:cNvPr>
@@ -4077,7 +4077,7 @@
           <p:cNvPr id="44" name="">
             <a:extLst xmlns:a="http://schemas.openxmlformats.org/drawingml/2006/main">
               <a:ext uri="{FF2B5EF4-FFF2-40B4-BE49-F238E27FC236}">
-                <a16:creationId xmlns:a16="http://schemas.microsoft.com/office/drawing/2014/main" id="{D0B28E90-7F11-4687-89E2-37BD648D2AFB}"/>
+                <a16:creationId xmlns:a16="http://schemas.microsoft.com/office/drawing/2014/main" id="{30CD9179-22B0-4C04-8ABE-14D3A6B51363}"/>
               </a:ext>
             </a:extLst>
           </p:cNvPr>
@@ -4132,7 +4132,7 @@
     </p:spTree>
     <p:extLst>
       <p:ext uri="{BB962C8B-B14F-4D97-AF65-F5344CB8AC3E}">
-        <p14:creationId xmlns:p14="http://schemas.microsoft.com/office/powerpoint/2010/main" val="415490476"/>
+        <p14:creationId xmlns:p14="http://schemas.microsoft.com/office/powerpoint/2010/main" val="380329340"/>
       </p:ext>
     </p:extLst>
   </p:cSld>
@@ -4163,7 +4163,7 @@
           <p:cNvPr id="56" name="">
             <a:extLst xmlns:a="http://schemas.openxmlformats.org/drawingml/2006/main">
               <a:ext uri="{FF2B5EF4-FFF2-40B4-BE49-F238E27FC236}">
-                <a16:creationId xmlns:a16="http://schemas.microsoft.com/office/drawing/2014/main" id="{1AD91FE7-EF32-418A-A2E8-5FCBB3414644}"/>
+                <a16:creationId xmlns:a16="http://schemas.microsoft.com/office/drawing/2014/main" id="{30D9BB3F-0268-482E-B6FF-DAA0956A175A}"/>
               </a:ext>
             </a:extLst>
           </p:cNvPr>
@@ -4193,7 +4193,7 @@
           <p:cNvPr id="2" name="">
             <a:extLst xmlns:a="http://schemas.openxmlformats.org/drawingml/2006/main">
               <a:ext uri="{FF2B5EF4-FFF2-40B4-BE49-F238E27FC236}">
-                <a16:creationId xmlns:a16="http://schemas.microsoft.com/office/drawing/2014/main" id="{99D3EB75-0BBD-42FE-919A-778EC453F181}"/>
+                <a16:creationId xmlns:a16="http://schemas.microsoft.com/office/drawing/2014/main" id="{DFFF49F1-8242-485E-A6BF-0A0F9BF068A8}"/>
               </a:ext>
             </a:extLst>
           </p:cNvPr>
@@ -4250,7 +4250,7 @@
           <p:cNvPr id="3" name="">
             <a:extLst xmlns:a="http://schemas.openxmlformats.org/drawingml/2006/main">
               <a:ext uri="{FF2B5EF4-FFF2-40B4-BE49-F238E27FC236}">
-                <a16:creationId xmlns:a16="http://schemas.microsoft.com/office/drawing/2014/main" id="{410F4260-5016-4717-97EF-68A4CBB0926C}"/>
+                <a16:creationId xmlns:a16="http://schemas.microsoft.com/office/drawing/2014/main" id="{133085A3-92FA-4583-951D-2BD158E23167}"/>
               </a:ext>
             </a:extLst>
           </p:cNvPr>
@@ -4280,7 +4280,7 @@
           <p:cNvPr id="4" name="">
             <a:extLst xmlns:a="http://schemas.openxmlformats.org/drawingml/2006/main">
               <a:ext uri="{FF2B5EF4-FFF2-40B4-BE49-F238E27FC236}">
-                <a16:creationId xmlns:a16="http://schemas.microsoft.com/office/drawing/2014/main" id="{ACE49670-8C2A-4D24-AA4F-219DCD9CCC7A}"/>
+                <a16:creationId xmlns:a16="http://schemas.microsoft.com/office/drawing/2014/main" id="{AB863C90-6A73-4841-931B-88CA68D92BB0}"/>
               </a:ext>
             </a:extLst>
           </p:cNvPr>
@@ -4337,7 +4337,7 @@
           <p:cNvPr id="5" name="">
             <a:extLst xmlns:a="http://schemas.openxmlformats.org/drawingml/2006/main">
               <a:ext uri="{FF2B5EF4-FFF2-40B4-BE49-F238E27FC236}">
-                <a16:creationId xmlns:a16="http://schemas.microsoft.com/office/drawing/2014/main" id="{DFE3ECB1-4BD0-4EE8-96BA-1EB3DF80A2AD}"/>
+                <a16:creationId xmlns:a16="http://schemas.microsoft.com/office/drawing/2014/main" id="{1645A1F8-55C0-46A4-AD4D-D1A0A6E0FE5C}"/>
               </a:ext>
             </a:extLst>
           </p:cNvPr>
@@ -4394,7 +4394,7 @@
           <p:cNvPr id="6" name="">
             <a:extLst xmlns:a="http://schemas.openxmlformats.org/drawingml/2006/main">
               <a:ext uri="{FF2B5EF4-FFF2-40B4-BE49-F238E27FC236}">
-                <a16:creationId xmlns:a16="http://schemas.microsoft.com/office/drawing/2014/main" id="{F96FFF4D-2149-4022-AF5F-5D3150C4C03F}"/>
+                <a16:creationId xmlns:a16="http://schemas.microsoft.com/office/drawing/2014/main" id="{9C9FE3F0-67BF-41BA-8DE1-CB65E9852CBB}"/>
               </a:ext>
             </a:extLst>
           </p:cNvPr>
@@ -4428,7 +4428,7 @@
           <p:cNvPr id="7" name="">
             <a:extLst xmlns:a="http://schemas.openxmlformats.org/drawingml/2006/main">
               <a:ext uri="{FF2B5EF4-FFF2-40B4-BE49-F238E27FC236}">
-                <a16:creationId xmlns:a16="http://schemas.microsoft.com/office/drawing/2014/main" id="{ED7B7561-9CE0-4C0B-8B83-507382B18D0E}"/>
+                <a16:creationId xmlns:a16="http://schemas.microsoft.com/office/drawing/2014/main" id="{DC7ECA4E-DADB-4763-AD53-8B06E95F814B}"/>
               </a:ext>
             </a:extLst>
           </p:cNvPr>
@@ -4460,7 +4460,7 @@
           <p:cNvPr id="8" name="">
             <a:extLst xmlns:a="http://schemas.openxmlformats.org/drawingml/2006/main">
               <a:ext uri="{FF2B5EF4-FFF2-40B4-BE49-F238E27FC236}">
-                <a16:creationId xmlns:a16="http://schemas.microsoft.com/office/drawing/2014/main" id="{A506BF6D-E165-4D29-B261-484740E37F7C}"/>
+                <a16:creationId xmlns:a16="http://schemas.microsoft.com/office/drawing/2014/main" id="{ED4BD085-7F90-4F7E-A442-736E423353AB}"/>
               </a:ext>
             </a:extLst>
           </p:cNvPr>
@@ -4517,7 +4517,7 @@
           <p:cNvPr id="9" name="">
             <a:extLst xmlns:a="http://schemas.openxmlformats.org/drawingml/2006/main">
               <a:ext uri="{FF2B5EF4-FFF2-40B4-BE49-F238E27FC236}">
-                <a16:creationId xmlns:a16="http://schemas.microsoft.com/office/drawing/2014/main" id="{04588564-F41A-486F-8B6F-5C85D483E695}"/>
+                <a16:creationId xmlns:a16="http://schemas.microsoft.com/office/drawing/2014/main" id="{290F2631-11AA-4D96-809D-C467093C8E29}"/>
               </a:ext>
             </a:extLst>
           </p:cNvPr>
@@ -4574,7 +4574,7 @@
           <p:cNvPr id="10" name="">
             <a:extLst xmlns:a="http://schemas.openxmlformats.org/drawingml/2006/main">
               <a:ext uri="{FF2B5EF4-FFF2-40B4-BE49-F238E27FC236}">
-                <a16:creationId xmlns:a16="http://schemas.microsoft.com/office/drawing/2014/main" id="{442C8AF0-5D9F-4780-B2DE-6A1DA386E275}"/>
+                <a16:creationId xmlns:a16="http://schemas.microsoft.com/office/drawing/2014/main" id="{BC580843-EE86-4A76-9F7D-679FB58435E5}"/>
               </a:ext>
             </a:extLst>
           </p:cNvPr>
@@ -4631,7 +4631,7 @@
           <p:cNvPr id="11" name="">
             <a:extLst xmlns:a="http://schemas.openxmlformats.org/drawingml/2006/main">
               <a:ext uri="{FF2B5EF4-FFF2-40B4-BE49-F238E27FC236}">
-                <a16:creationId xmlns:a16="http://schemas.microsoft.com/office/drawing/2014/main" id="{7D245A55-E438-4799-8BEB-DAC6EA57121D}"/>
+                <a16:creationId xmlns:a16="http://schemas.microsoft.com/office/drawing/2014/main" id="{4A7FB21F-9B34-4EAD-AC31-00EE9A7C42C5}"/>
               </a:ext>
             </a:extLst>
           </p:cNvPr>
@@ -4661,7 +4661,7 @@
           <p:cNvPr id="12" name="">
             <a:extLst xmlns:a="http://schemas.openxmlformats.org/drawingml/2006/main">
               <a:ext uri="{FF2B5EF4-FFF2-40B4-BE49-F238E27FC236}">
-                <a16:creationId xmlns:a16="http://schemas.microsoft.com/office/drawing/2014/main" id="{265102B3-7670-41E4-B3ED-A1C19D1ECCA0}"/>
+                <a16:creationId xmlns:a16="http://schemas.microsoft.com/office/drawing/2014/main" id="{EA4C843F-3303-4C4F-8890-C1B92753DDCD}"/>
               </a:ext>
             </a:extLst>
           </p:cNvPr>
@@ -4695,7 +4695,7 @@
           <p:cNvPr id="13" name="">
             <a:extLst xmlns:a="http://schemas.openxmlformats.org/drawingml/2006/main">
               <a:ext uri="{FF2B5EF4-FFF2-40B4-BE49-F238E27FC236}">
-                <a16:creationId xmlns:a16="http://schemas.microsoft.com/office/drawing/2014/main" id="{9CAF3F38-2844-4A26-A191-C49016607D87}"/>
+                <a16:creationId xmlns:a16="http://schemas.microsoft.com/office/drawing/2014/main" id="{FD1351A2-03BB-41D7-8C6F-C8713B69A10C}"/>
               </a:ext>
             </a:extLst>
           </p:cNvPr>
@@ -4727,7 +4727,7 @@
           <p:cNvPr id="14" name="">
             <a:extLst xmlns:a="http://schemas.openxmlformats.org/drawingml/2006/main">
               <a:ext uri="{FF2B5EF4-FFF2-40B4-BE49-F238E27FC236}">
-                <a16:creationId xmlns:a16="http://schemas.microsoft.com/office/drawing/2014/main" id="{33A6E3F9-CE80-4C68-9DDB-EC642FF86FB7}"/>
+                <a16:creationId xmlns:a16="http://schemas.microsoft.com/office/drawing/2014/main" id="{2041F1E8-0A1B-415D-87D5-AC8EFC690651}"/>
               </a:ext>
             </a:extLst>
           </p:cNvPr>
@@ -4784,7 +4784,7 @@
           <p:cNvPr id="15" name="">
             <a:extLst xmlns:a="http://schemas.openxmlformats.org/drawingml/2006/main">
               <a:ext uri="{FF2B5EF4-FFF2-40B4-BE49-F238E27FC236}">
-                <a16:creationId xmlns:a16="http://schemas.microsoft.com/office/drawing/2014/main" id="{BAFD1C05-AF39-4E84-9B2C-6A4055746E11}"/>
+                <a16:creationId xmlns:a16="http://schemas.microsoft.com/office/drawing/2014/main" id="{E4A55F24-63D2-4982-9173-56ABA38C53E7}"/>
               </a:ext>
             </a:extLst>
           </p:cNvPr>
@@ -4841,7 +4841,7 @@
           <p:cNvPr id="16" name="">
             <a:extLst xmlns:a="http://schemas.openxmlformats.org/drawingml/2006/main">
               <a:ext uri="{FF2B5EF4-FFF2-40B4-BE49-F238E27FC236}">
-                <a16:creationId xmlns:a16="http://schemas.microsoft.com/office/drawing/2014/main" id="{C632164B-6DE0-429D-B1E9-D6848D184CC3}"/>
+                <a16:creationId xmlns:a16="http://schemas.microsoft.com/office/drawing/2014/main" id="{49230FE8-F978-4C4D-A509-7A0E0B08F7F0}"/>
               </a:ext>
             </a:extLst>
           </p:cNvPr>
@@ -4898,7 +4898,7 @@
           <p:cNvPr id="17" name="">
             <a:extLst xmlns:a="http://schemas.openxmlformats.org/drawingml/2006/main">
               <a:ext uri="{FF2B5EF4-FFF2-40B4-BE49-F238E27FC236}">
-                <a16:creationId xmlns:a16="http://schemas.microsoft.com/office/drawing/2014/main" id="{A4D7141F-6DE8-4F8B-82B0-E28DDC7F2D82}"/>
+                <a16:creationId xmlns:a16="http://schemas.microsoft.com/office/drawing/2014/main" id="{AD59232F-6729-4CE2-93EF-BE2A32AD492A}"/>
               </a:ext>
             </a:extLst>
           </p:cNvPr>
@@ -4928,7 +4928,7 @@
           <p:cNvPr id="18" name="">
             <a:extLst xmlns:a="http://schemas.openxmlformats.org/drawingml/2006/main">
               <a:ext uri="{FF2B5EF4-FFF2-40B4-BE49-F238E27FC236}">
-                <a16:creationId xmlns:a16="http://schemas.microsoft.com/office/drawing/2014/main" id="{E360EE42-52AB-4F11-9336-38A19D902C3B}"/>
+                <a16:creationId xmlns:a16="http://schemas.microsoft.com/office/drawing/2014/main" id="{CC643A6B-9147-4C9F-AAB8-47AD9A3C26FD}"/>
               </a:ext>
             </a:extLst>
           </p:cNvPr>
@@ -4962,7 +4962,7 @@
           <p:cNvPr id="19" name="">
             <a:extLst xmlns:a="http://schemas.openxmlformats.org/drawingml/2006/main">
               <a:ext uri="{FF2B5EF4-FFF2-40B4-BE49-F238E27FC236}">
-                <a16:creationId xmlns:a16="http://schemas.microsoft.com/office/drawing/2014/main" id="{679AED27-5B11-47AC-8EF6-D7548C82426A}"/>
+                <a16:creationId xmlns:a16="http://schemas.microsoft.com/office/drawing/2014/main" id="{1B40C8ED-36B8-43EC-B97E-C13F38A484DB}"/>
               </a:ext>
             </a:extLst>
           </p:cNvPr>
@@ -4994,7 +4994,7 @@
           <p:cNvPr id="20" name="">
             <a:extLst xmlns:a="http://schemas.openxmlformats.org/drawingml/2006/main">
               <a:ext uri="{FF2B5EF4-FFF2-40B4-BE49-F238E27FC236}">
-                <a16:creationId xmlns:a16="http://schemas.microsoft.com/office/drawing/2014/main" id="{69ED7E3F-D508-4D90-B3EF-FCE9E4671259}"/>
+                <a16:creationId xmlns:a16="http://schemas.microsoft.com/office/drawing/2014/main" id="{409DD21E-DB13-4B15-916B-E071E043C6C0}"/>
               </a:ext>
             </a:extLst>
           </p:cNvPr>
@@ -5051,7 +5051,7 @@
           <p:cNvPr id="21" name="">
             <a:extLst xmlns:a="http://schemas.openxmlformats.org/drawingml/2006/main">
               <a:ext uri="{FF2B5EF4-FFF2-40B4-BE49-F238E27FC236}">
-                <a16:creationId xmlns:a16="http://schemas.microsoft.com/office/drawing/2014/main" id="{1463E557-BD6A-4EB1-BD9B-75BF46AB45C1}"/>
+                <a16:creationId xmlns:a16="http://schemas.microsoft.com/office/drawing/2014/main" id="{2FA91850-1052-44B5-A4FC-750EFDD7CEEC}"/>
               </a:ext>
             </a:extLst>
           </p:cNvPr>
@@ -5108,7 +5108,7 @@
           <p:cNvPr id="22" name="">
             <a:extLst xmlns:a="http://schemas.openxmlformats.org/drawingml/2006/main">
               <a:ext uri="{FF2B5EF4-FFF2-40B4-BE49-F238E27FC236}">
-                <a16:creationId xmlns:a16="http://schemas.microsoft.com/office/drawing/2014/main" id="{121EF560-5C57-4BB6-A04F-47E84A81074F}"/>
+                <a16:creationId xmlns:a16="http://schemas.microsoft.com/office/drawing/2014/main" id="{0BBD5461-FAAD-4E13-B4A2-E214B0007D81}"/>
               </a:ext>
             </a:extLst>
           </p:cNvPr>
@@ -5165,7 +5165,7 @@
           <p:cNvPr id="23" name="">
             <a:extLst xmlns:a="http://schemas.openxmlformats.org/drawingml/2006/main">
               <a:ext uri="{FF2B5EF4-FFF2-40B4-BE49-F238E27FC236}">
-                <a16:creationId xmlns:a16="http://schemas.microsoft.com/office/drawing/2014/main" id="{33D947E3-78D0-44C9-B1EB-0C261C235426}"/>
+                <a16:creationId xmlns:a16="http://schemas.microsoft.com/office/drawing/2014/main" id="{7A87DC47-2902-47CB-9118-43D359CDAEF5}"/>
               </a:ext>
             </a:extLst>
           </p:cNvPr>
@@ -5195,7 +5195,7 @@
           <p:cNvPr id="24" name="">
             <a:extLst xmlns:a="http://schemas.openxmlformats.org/drawingml/2006/main">
               <a:ext uri="{FF2B5EF4-FFF2-40B4-BE49-F238E27FC236}">
-                <a16:creationId xmlns:a16="http://schemas.microsoft.com/office/drawing/2014/main" id="{90A8DE5A-FCE2-4D32-8B95-5A7718D6A09F}"/>
+                <a16:creationId xmlns:a16="http://schemas.microsoft.com/office/drawing/2014/main" id="{5D680349-32AB-4ED9-ACFE-7CA7DF3A3996}"/>
               </a:ext>
             </a:extLst>
           </p:cNvPr>
@@ -5229,7 +5229,7 @@
           <p:cNvPr id="25" name="">
             <a:extLst xmlns:a="http://schemas.openxmlformats.org/drawingml/2006/main">
               <a:ext uri="{FF2B5EF4-FFF2-40B4-BE49-F238E27FC236}">
-                <a16:creationId xmlns:a16="http://schemas.microsoft.com/office/drawing/2014/main" id="{2426524D-FE1B-4129-A1A7-1ED1C2D9B127}"/>
+                <a16:creationId xmlns:a16="http://schemas.microsoft.com/office/drawing/2014/main" id="{E38ECB8C-2912-429D-BE06-28CE64E35C53}"/>
               </a:ext>
             </a:extLst>
           </p:cNvPr>
@@ -5261,7 +5261,7 @@
           <p:cNvPr id="26" name="">
             <a:extLst xmlns:a="http://schemas.openxmlformats.org/drawingml/2006/main">
               <a:ext uri="{FF2B5EF4-FFF2-40B4-BE49-F238E27FC236}">
-                <a16:creationId xmlns:a16="http://schemas.microsoft.com/office/drawing/2014/main" id="{8C43C6BD-223F-4740-BB58-E7021D6B6225}"/>
+                <a16:creationId xmlns:a16="http://schemas.microsoft.com/office/drawing/2014/main" id="{36EB20DE-D756-4B3E-89ED-B4CC8151C1AE}"/>
               </a:ext>
             </a:extLst>
           </p:cNvPr>
@@ -5318,7 +5318,7 @@
           <p:cNvPr id="27" name="">
             <a:extLst xmlns:a="http://schemas.openxmlformats.org/drawingml/2006/main">
               <a:ext uri="{FF2B5EF4-FFF2-40B4-BE49-F238E27FC236}">
-                <a16:creationId xmlns:a16="http://schemas.microsoft.com/office/drawing/2014/main" id="{EAD89A89-5840-4425-AA4A-31BEFD6B5C06}"/>
+                <a16:creationId xmlns:a16="http://schemas.microsoft.com/office/drawing/2014/main" id="{7E092F9C-B1FD-4BBD-BECC-B1D5DF768B07}"/>
               </a:ext>
             </a:extLst>
           </p:cNvPr>
@@ -5375,7 +5375,7 @@
           <p:cNvPr id="28" name="">
             <a:extLst xmlns:a="http://schemas.openxmlformats.org/drawingml/2006/main">
               <a:ext uri="{FF2B5EF4-FFF2-40B4-BE49-F238E27FC236}">
-                <a16:creationId xmlns:a16="http://schemas.microsoft.com/office/drawing/2014/main" id="{28502A63-9547-4045-BD15-9F714913B440}"/>
+                <a16:creationId xmlns:a16="http://schemas.microsoft.com/office/drawing/2014/main" id="{B81869C3-1355-4021-B84E-B00ACBDC6014}"/>
               </a:ext>
             </a:extLst>
           </p:cNvPr>
@@ -5432,7 +5432,7 @@
           <p:cNvPr id="29" name="">
             <a:extLst xmlns:a="http://schemas.openxmlformats.org/drawingml/2006/main">
               <a:ext uri="{FF2B5EF4-FFF2-40B4-BE49-F238E27FC236}">
-                <a16:creationId xmlns:a16="http://schemas.microsoft.com/office/drawing/2014/main" id="{0211B042-6348-4B5B-9BDA-52FA54F26D9D}"/>
+                <a16:creationId xmlns:a16="http://schemas.microsoft.com/office/drawing/2014/main" id="{96AB31E7-2360-4F3C-B62A-A21CC00C5B4A}"/>
               </a:ext>
             </a:extLst>
           </p:cNvPr>
@@ -5462,7 +5462,7 @@
           <p:cNvPr id="30" name="">
             <a:extLst xmlns:a="http://schemas.openxmlformats.org/drawingml/2006/main">
               <a:ext uri="{FF2B5EF4-FFF2-40B4-BE49-F238E27FC236}">
-                <a16:creationId xmlns:a16="http://schemas.microsoft.com/office/drawing/2014/main" id="{E97379DB-686E-4D70-9F23-7E52447FAA4B}"/>
+                <a16:creationId xmlns:a16="http://schemas.microsoft.com/office/drawing/2014/main" id="{FE84930E-6EDF-4177-AD27-073E6C01B472}"/>
               </a:ext>
             </a:extLst>
           </p:cNvPr>
@@ -5496,7 +5496,7 @@
           <p:cNvPr id="31" name="">
             <a:extLst xmlns:a="http://schemas.openxmlformats.org/drawingml/2006/main">
               <a:ext uri="{FF2B5EF4-FFF2-40B4-BE49-F238E27FC236}">
-                <a16:creationId xmlns:a16="http://schemas.microsoft.com/office/drawing/2014/main" id="{A5D2F7CA-A381-4645-875A-05F17E2A239A}"/>
+                <a16:creationId xmlns:a16="http://schemas.microsoft.com/office/drawing/2014/main" id="{541F8CE3-E5AF-40C3-AC5E-4249DE578E9C}"/>
               </a:ext>
             </a:extLst>
           </p:cNvPr>
@@ -5528,7 +5528,7 @@
           <p:cNvPr id="32" name="">
             <a:extLst xmlns:a="http://schemas.openxmlformats.org/drawingml/2006/main">
               <a:ext uri="{FF2B5EF4-FFF2-40B4-BE49-F238E27FC236}">
-                <a16:creationId xmlns:a16="http://schemas.microsoft.com/office/drawing/2014/main" id="{80949E8A-BF7D-44E6-8179-3725CCE98E8C}"/>
+                <a16:creationId xmlns:a16="http://schemas.microsoft.com/office/drawing/2014/main" id="{EC3DFB95-57E6-46A5-B076-785A750602FB}"/>
               </a:ext>
             </a:extLst>
           </p:cNvPr>
@@ -5585,7 +5585,7 @@
           <p:cNvPr id="33" name="">
             <a:extLst xmlns:a="http://schemas.openxmlformats.org/drawingml/2006/main">
               <a:ext uri="{FF2B5EF4-FFF2-40B4-BE49-F238E27FC236}">
-                <a16:creationId xmlns:a16="http://schemas.microsoft.com/office/drawing/2014/main" id="{92A2769A-DEE8-420C-BE4C-5EABB1855DC8}"/>
+                <a16:creationId xmlns:a16="http://schemas.microsoft.com/office/drawing/2014/main" id="{B67D80A3-AE94-4C3F-A395-54FD81CDBCE7}"/>
               </a:ext>
             </a:extLst>
           </p:cNvPr>
@@ -5642,7 +5642,7 @@
           <p:cNvPr id="34" name="">
             <a:extLst xmlns:a="http://schemas.openxmlformats.org/drawingml/2006/main">
               <a:ext uri="{FF2B5EF4-FFF2-40B4-BE49-F238E27FC236}">
-                <a16:creationId xmlns:a16="http://schemas.microsoft.com/office/drawing/2014/main" id="{421E01A2-F4E5-409F-B17E-0C5DE6C925E1}"/>
+                <a16:creationId xmlns:a16="http://schemas.microsoft.com/office/drawing/2014/main" id="{6DF337F2-927C-4311-BB32-92FF5F34ED03}"/>
               </a:ext>
             </a:extLst>
           </p:cNvPr>
@@ -5699,7 +5699,7 @@
           <p:cNvPr id="35" name="">
             <a:extLst xmlns:a="http://schemas.openxmlformats.org/drawingml/2006/main">
               <a:ext uri="{FF2B5EF4-FFF2-40B4-BE49-F238E27FC236}">
-                <a16:creationId xmlns:a16="http://schemas.microsoft.com/office/drawing/2014/main" id="{8BC0DB6E-D1CE-4E7E-A260-203EE1088B74}"/>
+                <a16:creationId xmlns:a16="http://schemas.microsoft.com/office/drawing/2014/main" id="{C570AF00-85D2-433D-AC3B-1D3E32D81219}"/>
               </a:ext>
             </a:extLst>
           </p:cNvPr>
@@ -5729,7 +5729,7 @@
           <p:cNvPr id="36" name="">
             <a:extLst xmlns:a="http://schemas.openxmlformats.org/drawingml/2006/main">
               <a:ext uri="{FF2B5EF4-FFF2-40B4-BE49-F238E27FC236}">
-                <a16:creationId xmlns:a16="http://schemas.microsoft.com/office/drawing/2014/main" id="{5029D390-3442-43E9-9D4F-9FB5F49A1504}"/>
+                <a16:creationId xmlns:a16="http://schemas.microsoft.com/office/drawing/2014/main" id="{446B643C-F00B-4431-842D-8698144C69D5}"/>
               </a:ext>
             </a:extLst>
           </p:cNvPr>
@@ -5763,7 +5763,7 @@
           <p:cNvPr id="37" name="">
             <a:extLst xmlns:a="http://schemas.openxmlformats.org/drawingml/2006/main">
               <a:ext uri="{FF2B5EF4-FFF2-40B4-BE49-F238E27FC236}">
-                <a16:creationId xmlns:a16="http://schemas.microsoft.com/office/drawing/2014/main" id="{00AD73CD-78C9-4866-A7F1-380D4AF95364}"/>
+                <a16:creationId xmlns:a16="http://schemas.microsoft.com/office/drawing/2014/main" id="{9876734B-DCD7-430E-A3F2-798998056015}"/>
               </a:ext>
             </a:extLst>
           </p:cNvPr>
@@ -5795,7 +5795,7 @@
           <p:cNvPr id="38" name="">
             <a:extLst xmlns:a="http://schemas.openxmlformats.org/drawingml/2006/main">
               <a:ext uri="{FF2B5EF4-FFF2-40B4-BE49-F238E27FC236}">
-                <a16:creationId xmlns:a16="http://schemas.microsoft.com/office/drawing/2014/main" id="{DE8374FD-80F5-4628-AFA5-F5EA5591184E}"/>
+                <a16:creationId xmlns:a16="http://schemas.microsoft.com/office/drawing/2014/main" id="{91100544-4121-4576-AC52-633DA059D634}"/>
               </a:ext>
             </a:extLst>
           </p:cNvPr>
@@ -5852,7 +5852,7 @@
           <p:cNvPr id="39" name="">
             <a:extLst xmlns:a="http://schemas.openxmlformats.org/drawingml/2006/main">
               <a:ext uri="{FF2B5EF4-FFF2-40B4-BE49-F238E27FC236}">
-                <a16:creationId xmlns:a16="http://schemas.microsoft.com/office/drawing/2014/main" id="{D0D84C4A-9083-41C7-A834-DBA0191C102A}"/>
+                <a16:creationId xmlns:a16="http://schemas.microsoft.com/office/drawing/2014/main" id="{97398C66-DE47-4D52-A05F-9B52DE4774DA}"/>
               </a:ext>
             </a:extLst>
           </p:cNvPr>
@@ -5909,7 +5909,7 @@
           <p:cNvPr id="40" name="">
             <a:extLst xmlns:a="http://schemas.openxmlformats.org/drawingml/2006/main">
               <a:ext uri="{FF2B5EF4-FFF2-40B4-BE49-F238E27FC236}">
-                <a16:creationId xmlns:a16="http://schemas.microsoft.com/office/drawing/2014/main" id="{A8313BC8-05E1-41F2-9E30-9162CA3C2865}"/>
+                <a16:creationId xmlns:a16="http://schemas.microsoft.com/office/drawing/2014/main" id="{A3EB5B45-52E7-4873-9F74-02EB10A1AFBF}"/>
               </a:ext>
             </a:extLst>
           </p:cNvPr>
@@ -5966,7 +5966,7 @@
           <p:cNvPr id="41" name="">
             <a:extLst xmlns:a="http://schemas.openxmlformats.org/drawingml/2006/main">
               <a:ext uri="{FF2B5EF4-FFF2-40B4-BE49-F238E27FC236}">
-                <a16:creationId xmlns:a16="http://schemas.microsoft.com/office/drawing/2014/main" id="{ADE64A8A-A701-445D-848A-0A79998CD738}"/>
+                <a16:creationId xmlns:a16="http://schemas.microsoft.com/office/drawing/2014/main" id="{46A14E9D-EAE4-429A-97FC-0B4D8DB1AA40}"/>
               </a:ext>
             </a:extLst>
           </p:cNvPr>
@@ -5998,7 +5998,7 @@
           <p:cNvPr id="42" name="">
             <a:extLst xmlns:a="http://schemas.openxmlformats.org/drawingml/2006/main">
               <a:ext uri="{FF2B5EF4-FFF2-40B4-BE49-F238E27FC236}">
-                <a16:creationId xmlns:a16="http://schemas.microsoft.com/office/drawing/2014/main" id="{2D46D78B-1053-4931-9899-E2CA4EF9B82E}"/>
+                <a16:creationId xmlns:a16="http://schemas.microsoft.com/office/drawing/2014/main" id="{03F0DBDA-9B2A-441B-9D29-A7BD348736CB}"/>
               </a:ext>
             </a:extLst>
           </p:cNvPr>
@@ -6055,7 +6055,7 @@
           <p:cNvPr id="43" name="">
             <a:extLst xmlns:a="http://schemas.openxmlformats.org/drawingml/2006/main">
               <a:ext uri="{FF2B5EF4-FFF2-40B4-BE49-F238E27FC236}">
-                <a16:creationId xmlns:a16="http://schemas.microsoft.com/office/drawing/2014/main" id="{05BB4C13-EA32-4A5E-9A54-FD334E85156C}"/>
+                <a16:creationId xmlns:a16="http://schemas.microsoft.com/office/drawing/2014/main" id="{F49C45AA-198B-412B-9440-90490D675BAC}"/>
               </a:ext>
             </a:extLst>
           </p:cNvPr>
@@ -6112,7 +6112,7 @@
           <p:cNvPr id="44" name="">
             <a:extLst xmlns:a="http://schemas.openxmlformats.org/drawingml/2006/main">
               <a:ext uri="{FF2B5EF4-FFF2-40B4-BE49-F238E27FC236}">
-                <a16:creationId xmlns:a16="http://schemas.microsoft.com/office/drawing/2014/main" id="{57FA32F3-7231-4FB9-800D-E04EFF6265E1}"/>
+                <a16:creationId xmlns:a16="http://schemas.microsoft.com/office/drawing/2014/main" id="{EEBF244C-3C17-45D9-AF5E-94ADC7A6B9F3}"/>
               </a:ext>
             </a:extLst>
           </p:cNvPr>
@@ -6169,7 +6169,7 @@
           <p:cNvPr id="45" name="">
             <a:extLst xmlns:a="http://schemas.openxmlformats.org/drawingml/2006/main">
               <a:ext uri="{FF2B5EF4-FFF2-40B4-BE49-F238E27FC236}">
-                <a16:creationId xmlns:a16="http://schemas.microsoft.com/office/drawing/2014/main" id="{9F7D048B-1F41-4135-A16A-FA0F76B46900}"/>
+                <a16:creationId xmlns:a16="http://schemas.microsoft.com/office/drawing/2014/main" id="{9CDCB5F9-15F5-4E05-B8DF-020E4DB460A0}"/>
               </a:ext>
             </a:extLst>
           </p:cNvPr>
@@ -6226,7 +6226,7 @@
           <p:cNvPr id="46" name="">
             <a:extLst xmlns:a="http://schemas.openxmlformats.org/drawingml/2006/main">
               <a:ext uri="{FF2B5EF4-FFF2-40B4-BE49-F238E27FC236}">
-                <a16:creationId xmlns:a16="http://schemas.microsoft.com/office/drawing/2014/main" id="{5C8C2394-73D4-4943-9123-1D845D738062}"/>
+                <a16:creationId xmlns:a16="http://schemas.microsoft.com/office/drawing/2014/main" id="{8C917E4D-B7C9-4AB1-8C67-1D7F10E6BA2D}"/>
               </a:ext>
             </a:extLst>
           </p:cNvPr>
@@ -6283,7 +6283,7 @@
           <p:cNvPr id="47" name="">
             <a:extLst xmlns:a="http://schemas.openxmlformats.org/drawingml/2006/main">
               <a:ext uri="{FF2B5EF4-FFF2-40B4-BE49-F238E27FC236}">
-                <a16:creationId xmlns:a16="http://schemas.microsoft.com/office/drawing/2014/main" id="{59EF5007-47FF-40CB-9B61-49D7733FAF86}"/>
+                <a16:creationId xmlns:a16="http://schemas.microsoft.com/office/drawing/2014/main" id="{F05B40E5-1DE8-43DC-83FB-B5F3EB2DCF1A}"/>
               </a:ext>
             </a:extLst>
           </p:cNvPr>
@@ -6340,7 +6340,7 @@
           <p:cNvPr id="48" name="">
             <a:extLst xmlns:a="http://schemas.openxmlformats.org/drawingml/2006/main">
               <a:ext uri="{FF2B5EF4-FFF2-40B4-BE49-F238E27FC236}">
-                <a16:creationId xmlns:a16="http://schemas.microsoft.com/office/drawing/2014/main" id="{8D75A6D8-CCEE-4C9B-AA75-220E5C00AF13}"/>
+                <a16:creationId xmlns:a16="http://schemas.microsoft.com/office/drawing/2014/main" id="{806AD1A7-3D36-4017-8BFC-F58E455E862E}"/>
               </a:ext>
             </a:extLst>
           </p:cNvPr>
@@ -6397,7 +6397,7 @@
           <p:cNvPr id="49" name="">
             <a:extLst xmlns:a="http://schemas.openxmlformats.org/drawingml/2006/main">
               <a:ext uri="{FF2B5EF4-FFF2-40B4-BE49-F238E27FC236}">
-                <a16:creationId xmlns:a16="http://schemas.microsoft.com/office/drawing/2014/main" id="{719CF8BB-C159-4844-8A43-27AC06BA8A9C}"/>
+                <a16:creationId xmlns:a16="http://schemas.microsoft.com/office/drawing/2014/main" id="{BBD65CEA-28E6-4612-BE48-10F56846550F}"/>
               </a:ext>
             </a:extLst>
           </p:cNvPr>
@@ -6477,7 +6477,7 @@
           <p:cNvPr id="50" name="">
             <a:extLst xmlns:a="http://schemas.openxmlformats.org/drawingml/2006/main">
               <a:ext uri="{FF2B5EF4-FFF2-40B4-BE49-F238E27FC236}">
-                <a16:creationId xmlns:a16="http://schemas.microsoft.com/office/drawing/2014/main" id="{8C5F4715-41D5-49DC-9698-CFB7BB1D7559}"/>
+                <a16:creationId xmlns:a16="http://schemas.microsoft.com/office/drawing/2014/main" id="{36F6E55A-D716-4469-914D-48D94E08BAD1}"/>
               </a:ext>
             </a:extLst>
           </p:cNvPr>
@@ -6534,7 +6534,7 @@
           <p:cNvPr id="51" name="">
             <a:extLst xmlns:a="http://schemas.openxmlformats.org/drawingml/2006/main">
               <a:ext uri="{FF2B5EF4-FFF2-40B4-BE49-F238E27FC236}">
-                <a16:creationId xmlns:a16="http://schemas.microsoft.com/office/drawing/2014/main" id="{01D04882-BE31-4D06-B6CD-682D173BD007}"/>
+                <a16:creationId xmlns:a16="http://schemas.microsoft.com/office/drawing/2014/main" id="{AFBB1D3D-43E0-4B49-B86D-C47CC39AFC2D}"/>
               </a:ext>
             </a:extLst>
           </p:cNvPr>
@@ -6614,7 +6614,7 @@
           <p:cNvPr id="52" name="">
             <a:extLst xmlns:a="http://schemas.openxmlformats.org/drawingml/2006/main">
               <a:ext uri="{FF2B5EF4-FFF2-40B4-BE49-F238E27FC236}">
-                <a16:creationId xmlns:a16="http://schemas.microsoft.com/office/drawing/2014/main" id="{59435158-6513-4D82-998C-44CC0902E933}"/>
+                <a16:creationId xmlns:a16="http://schemas.microsoft.com/office/drawing/2014/main" id="{6F127CE2-BBF8-42D2-8AD8-94D3E5E8B6FB}"/>
               </a:ext>
             </a:extLst>
           </p:cNvPr>
@@ -6671,7 +6671,7 @@
           <p:cNvPr id="53" name="">
             <a:extLst xmlns:a="http://schemas.openxmlformats.org/drawingml/2006/main">
               <a:ext uri="{FF2B5EF4-FFF2-40B4-BE49-F238E27FC236}">
-                <a16:creationId xmlns:a16="http://schemas.microsoft.com/office/drawing/2014/main" id="{6A08E36F-968F-4E2A-8E8E-AB62B2C8CD51}"/>
+                <a16:creationId xmlns:a16="http://schemas.microsoft.com/office/drawing/2014/main" id="{90780C9A-6D6E-4020-AAFC-71F85AC1BAA8}"/>
               </a:ext>
             </a:extLst>
           </p:cNvPr>
@@ -6751,7 +6751,7 @@
           <p:cNvPr id="54" name="">
             <a:extLst xmlns:a="http://schemas.openxmlformats.org/drawingml/2006/main">
               <a:ext uri="{FF2B5EF4-FFF2-40B4-BE49-F238E27FC236}">
-                <a16:creationId xmlns:a16="http://schemas.microsoft.com/office/drawing/2014/main" id="{A32F5C0B-10A7-4A26-A7F5-5DBADA5FCF58}"/>
+                <a16:creationId xmlns:a16="http://schemas.microsoft.com/office/drawing/2014/main" id="{53F56788-6B1A-42B4-BB45-9661A9335451}"/>
               </a:ext>
             </a:extLst>
           </p:cNvPr>
@@ -6783,7 +6783,7 @@
           <p:cNvPr id="55" name="">
             <a:extLst xmlns:a="http://schemas.openxmlformats.org/drawingml/2006/main">
               <a:ext uri="{FF2B5EF4-FFF2-40B4-BE49-F238E27FC236}">
-                <a16:creationId xmlns:a16="http://schemas.microsoft.com/office/drawing/2014/main" id="{FB3945F6-0316-4229-9989-B08A7542E096}"/>
+                <a16:creationId xmlns:a16="http://schemas.microsoft.com/office/drawing/2014/main" id="{EBC79037-F3EE-441C-BDA1-89202A370530}"/>
               </a:ext>
             </a:extLst>
           </p:cNvPr>
@@ -6838,7 +6838,7 @@
     </p:spTree>
     <p:extLst>
       <p:ext uri="{BB962C8B-B14F-4D97-AF65-F5344CB8AC3E}">
-        <p14:creationId xmlns:p14="http://schemas.microsoft.com/office/powerpoint/2010/main" val="1916282405"/>
+        <p14:creationId xmlns:p14="http://schemas.microsoft.com/office/powerpoint/2010/main" val="1392511365"/>
       </p:ext>
     </p:extLst>
   </p:cSld>
@@ -6869,7 +6869,7 @@
           <p:cNvPr id="41" name="">
             <a:extLst xmlns:a="http://schemas.openxmlformats.org/drawingml/2006/main">
               <a:ext uri="{FF2B5EF4-FFF2-40B4-BE49-F238E27FC236}">
-                <a16:creationId xmlns:a16="http://schemas.microsoft.com/office/drawing/2014/main" id="{53F0DA39-4062-4506-8278-7A9DB4CB8D4D}"/>
+                <a16:creationId xmlns:a16="http://schemas.microsoft.com/office/drawing/2014/main" id="{B61C8D0A-6431-4605-B856-43847DE8DBD8}"/>
               </a:ext>
             </a:extLst>
           </p:cNvPr>
@@ -6899,7 +6899,7 @@
           <p:cNvPr id="2" name="">
             <a:extLst xmlns:a="http://schemas.openxmlformats.org/drawingml/2006/main">
               <a:ext uri="{FF2B5EF4-FFF2-40B4-BE49-F238E27FC236}">
-                <a16:creationId xmlns:a16="http://schemas.microsoft.com/office/drawing/2014/main" id="{A0893489-5231-4E40-AAD2-A6F1601E544C}"/>
+                <a16:creationId xmlns:a16="http://schemas.microsoft.com/office/drawing/2014/main" id="{D1A55909-D058-46AD-91B0-8F2020E41239}"/>
               </a:ext>
             </a:extLst>
           </p:cNvPr>
@@ -6956,7 +6956,7 @@
           <p:cNvPr id="3" name="">
             <a:extLst xmlns:a="http://schemas.openxmlformats.org/drawingml/2006/main">
               <a:ext uri="{FF2B5EF4-FFF2-40B4-BE49-F238E27FC236}">
-                <a16:creationId xmlns:a16="http://schemas.microsoft.com/office/drawing/2014/main" id="{B2CB651B-5C51-4D89-8986-487E0AB08681}"/>
+                <a16:creationId xmlns:a16="http://schemas.microsoft.com/office/drawing/2014/main" id="{74E712B4-917D-497A-A6C3-0B61994747F2}"/>
               </a:ext>
             </a:extLst>
           </p:cNvPr>
@@ -6986,7 +6986,7 @@
           <p:cNvPr id="4" name="">
             <a:extLst xmlns:a="http://schemas.openxmlformats.org/drawingml/2006/main">
               <a:ext uri="{FF2B5EF4-FFF2-40B4-BE49-F238E27FC236}">
-                <a16:creationId xmlns:a16="http://schemas.microsoft.com/office/drawing/2014/main" id="{28E65DB9-A9A4-4ACF-BA2A-6B80565E5ED6}"/>
+                <a16:creationId xmlns:a16="http://schemas.microsoft.com/office/drawing/2014/main" id="{EB02847E-D403-495B-B998-DCB6A9D17F56}"/>
               </a:ext>
             </a:extLst>
           </p:cNvPr>
@@ -7043,7 +7043,7 @@
           <p:cNvPr id="5" name="">
             <a:extLst xmlns:a="http://schemas.openxmlformats.org/drawingml/2006/main">
               <a:ext uri="{FF2B5EF4-FFF2-40B4-BE49-F238E27FC236}">
-                <a16:creationId xmlns:a16="http://schemas.microsoft.com/office/drawing/2014/main" id="{D4C4E12C-8861-42D4-A1A2-A8A6DE256291}"/>
+                <a16:creationId xmlns:a16="http://schemas.microsoft.com/office/drawing/2014/main" id="{603F8EA2-951A-4843-90C7-5035E9C63D3A}"/>
               </a:ext>
             </a:extLst>
           </p:cNvPr>
@@ -7100,7 +7100,7 @@
           <p:cNvPr id="6" name="">
             <a:extLst xmlns:a="http://schemas.openxmlformats.org/drawingml/2006/main">
               <a:ext uri="{FF2B5EF4-FFF2-40B4-BE49-F238E27FC236}">
-                <a16:creationId xmlns:a16="http://schemas.microsoft.com/office/drawing/2014/main" id="{974335FC-5CF9-44AC-9F1C-B9D7D84DAF42}"/>
+                <a16:creationId xmlns:a16="http://schemas.microsoft.com/office/drawing/2014/main" id="{E0E42362-8DAF-4F1F-887C-59F732611C76}"/>
               </a:ext>
             </a:extLst>
           </p:cNvPr>
@@ -7157,7 +7157,7 @@
           <p:cNvPr id="7" name="">
             <a:extLst xmlns:a="http://schemas.openxmlformats.org/drawingml/2006/main">
               <a:ext uri="{FF2B5EF4-FFF2-40B4-BE49-F238E27FC236}">
-                <a16:creationId xmlns:a16="http://schemas.microsoft.com/office/drawing/2014/main" id="{1BD62BE5-8B14-4A87-B023-A77362CFB56E}"/>
+                <a16:creationId xmlns:a16="http://schemas.microsoft.com/office/drawing/2014/main" id="{1F1D38A7-9055-4BCC-890B-D2FA480285AA}"/>
               </a:ext>
             </a:extLst>
           </p:cNvPr>
@@ -7187,7 +7187,7 @@
           <p:cNvPr id="8" name="">
             <a:extLst xmlns:a="http://schemas.openxmlformats.org/drawingml/2006/main">
               <a:ext uri="{FF2B5EF4-FFF2-40B4-BE49-F238E27FC236}">
-                <a16:creationId xmlns:a16="http://schemas.microsoft.com/office/drawing/2014/main" id="{E0981505-75F3-4EC3-884A-F782DB36E4A7}"/>
+                <a16:creationId xmlns:a16="http://schemas.microsoft.com/office/drawing/2014/main" id="{73DA6F94-1EA3-427F-80A9-4A4F21C6C384}"/>
               </a:ext>
             </a:extLst>
           </p:cNvPr>
@@ -7244,7 +7244,7 @@
           <p:cNvPr id="9" name="">
             <a:extLst xmlns:a="http://schemas.openxmlformats.org/drawingml/2006/main">
               <a:ext uri="{FF2B5EF4-FFF2-40B4-BE49-F238E27FC236}">
-                <a16:creationId xmlns:a16="http://schemas.microsoft.com/office/drawing/2014/main" id="{29F6E746-1675-4C4D-892B-3C33310BFCF6}"/>
+                <a16:creationId xmlns:a16="http://schemas.microsoft.com/office/drawing/2014/main" id="{82656AE9-271F-42C1-9D83-7225B06ACEE2}"/>
               </a:ext>
             </a:extLst>
           </p:cNvPr>
@@ -7276,7 +7276,7 @@
           <p:cNvPr id="10" name="">
             <a:extLst xmlns:a="http://schemas.openxmlformats.org/drawingml/2006/main">
               <a:ext uri="{FF2B5EF4-FFF2-40B4-BE49-F238E27FC236}">
-                <a16:creationId xmlns:a16="http://schemas.microsoft.com/office/drawing/2014/main" id="{E3583C17-6A4A-4204-9292-F1ED7C9A1E13}"/>
+                <a16:creationId xmlns:a16="http://schemas.microsoft.com/office/drawing/2014/main" id="{BF7778BC-868B-4F21-8104-F7DF9FBE1DFD}"/>
               </a:ext>
             </a:extLst>
           </p:cNvPr>
@@ -7333,7 +7333,7 @@
           <p:cNvPr id="11" name="">
             <a:extLst xmlns:a="http://schemas.openxmlformats.org/drawingml/2006/main">
               <a:ext uri="{FF2B5EF4-FFF2-40B4-BE49-F238E27FC236}">
-                <a16:creationId xmlns:a16="http://schemas.microsoft.com/office/drawing/2014/main" id="{CC3A49EA-1B4C-4924-AFD6-6B58427D1437}"/>
+                <a16:creationId xmlns:a16="http://schemas.microsoft.com/office/drawing/2014/main" id="{B276331B-A3CC-46B2-9B2B-A313FB511B8A}"/>
               </a:ext>
             </a:extLst>
           </p:cNvPr>
@@ -7390,7 +7390,7 @@
           <p:cNvPr id="12" name="">
             <a:extLst xmlns:a="http://schemas.openxmlformats.org/drawingml/2006/main">
               <a:ext uri="{FF2B5EF4-FFF2-40B4-BE49-F238E27FC236}">
-                <a16:creationId xmlns:a16="http://schemas.microsoft.com/office/drawing/2014/main" id="{412BB334-3634-414A-A56D-56347D717BB8}"/>
+                <a16:creationId xmlns:a16="http://schemas.microsoft.com/office/drawing/2014/main" id="{1FECEF4D-F310-4185-88ED-E84199476DB0}"/>
               </a:ext>
             </a:extLst>
           </p:cNvPr>
@@ -7447,7 +7447,7 @@
           <p:cNvPr id="13" name="">
             <a:extLst xmlns:a="http://schemas.openxmlformats.org/drawingml/2006/main">
               <a:ext uri="{FF2B5EF4-FFF2-40B4-BE49-F238E27FC236}">
-                <a16:creationId xmlns:a16="http://schemas.microsoft.com/office/drawing/2014/main" id="{9BF51E4B-DC79-4807-A420-50A560969355}"/>
+                <a16:creationId xmlns:a16="http://schemas.microsoft.com/office/drawing/2014/main" id="{D8924DF1-7D78-48F2-A995-19A0998CE9B3}"/>
               </a:ext>
             </a:extLst>
           </p:cNvPr>
@@ -7479,7 +7479,7 @@
           <p:cNvPr id="14" name="">
             <a:extLst xmlns:a="http://schemas.openxmlformats.org/drawingml/2006/main">
               <a:ext uri="{FF2B5EF4-FFF2-40B4-BE49-F238E27FC236}">
-                <a16:creationId xmlns:a16="http://schemas.microsoft.com/office/drawing/2014/main" id="{3F31325F-8A0D-4746-84B2-C74B0B899C13}"/>
+                <a16:creationId xmlns:a16="http://schemas.microsoft.com/office/drawing/2014/main" id="{01D3E45E-33B4-4695-8CAA-1A76866F240B}"/>
               </a:ext>
             </a:extLst>
           </p:cNvPr>
@@ -7536,7 +7536,7 @@
           <p:cNvPr id="15" name="">
             <a:extLst xmlns:a="http://schemas.openxmlformats.org/drawingml/2006/main">
               <a:ext uri="{FF2B5EF4-FFF2-40B4-BE49-F238E27FC236}">
-                <a16:creationId xmlns:a16="http://schemas.microsoft.com/office/drawing/2014/main" id="{1C87BEB8-28F8-415F-89CD-866D5A34D14E}"/>
+                <a16:creationId xmlns:a16="http://schemas.microsoft.com/office/drawing/2014/main" id="{343D9DDB-AED3-40F4-B8B9-514F4B7812A3}"/>
               </a:ext>
             </a:extLst>
           </p:cNvPr>
@@ -7593,7 +7593,7 @@
           <p:cNvPr id="16" name="">
             <a:extLst xmlns:a="http://schemas.openxmlformats.org/drawingml/2006/main">
               <a:ext uri="{FF2B5EF4-FFF2-40B4-BE49-F238E27FC236}">
-                <a16:creationId xmlns:a16="http://schemas.microsoft.com/office/drawing/2014/main" id="{6B6E24CD-4A7D-46A7-A47E-FCB5D198C080}"/>
+                <a16:creationId xmlns:a16="http://schemas.microsoft.com/office/drawing/2014/main" id="{EAC423A7-DB6C-4567-9B8C-4F57167AE383}"/>
               </a:ext>
             </a:extLst>
           </p:cNvPr>
@@ -7650,7 +7650,7 @@
           <p:cNvPr id="17" name="">
             <a:extLst xmlns:a="http://schemas.openxmlformats.org/drawingml/2006/main">
               <a:ext uri="{FF2B5EF4-FFF2-40B4-BE49-F238E27FC236}">
-                <a16:creationId xmlns:a16="http://schemas.microsoft.com/office/drawing/2014/main" id="{1AD26595-0721-46CA-B31F-94867456190F}"/>
+                <a16:creationId xmlns:a16="http://schemas.microsoft.com/office/drawing/2014/main" id="{3C61D325-63CA-4FC6-9475-14B55269C105}"/>
               </a:ext>
             </a:extLst>
           </p:cNvPr>
@@ -7682,7 +7682,7 @@
           <p:cNvPr id="18" name="">
             <a:extLst xmlns:a="http://schemas.openxmlformats.org/drawingml/2006/main">
               <a:ext uri="{FF2B5EF4-FFF2-40B4-BE49-F238E27FC236}">
-                <a16:creationId xmlns:a16="http://schemas.microsoft.com/office/drawing/2014/main" id="{948B91C4-95ED-4AA0-883D-DF318F44EE34}"/>
+                <a16:creationId xmlns:a16="http://schemas.microsoft.com/office/drawing/2014/main" id="{CE6D0974-9DEF-4540-A6F6-0BE72E14F522}"/>
               </a:ext>
             </a:extLst>
           </p:cNvPr>
@@ -7739,7 +7739,7 @@
           <p:cNvPr id="19" name="">
             <a:extLst xmlns:a="http://schemas.openxmlformats.org/drawingml/2006/main">
               <a:ext uri="{FF2B5EF4-FFF2-40B4-BE49-F238E27FC236}">
-                <a16:creationId xmlns:a16="http://schemas.microsoft.com/office/drawing/2014/main" id="{915DCEFB-DFA1-4BD6-8162-008A13A8DA03}"/>
+                <a16:creationId xmlns:a16="http://schemas.microsoft.com/office/drawing/2014/main" id="{AE26BAE2-67F9-4460-9FCA-47FB93F6D273}"/>
               </a:ext>
             </a:extLst>
           </p:cNvPr>
@@ -7796,7 +7796,7 @@
           <p:cNvPr id="20" name="">
             <a:extLst xmlns:a="http://schemas.openxmlformats.org/drawingml/2006/main">
               <a:ext uri="{FF2B5EF4-FFF2-40B4-BE49-F238E27FC236}">
-                <a16:creationId xmlns:a16="http://schemas.microsoft.com/office/drawing/2014/main" id="{5C61FB92-4CC3-47DB-A783-9400DE819D9E}"/>
+                <a16:creationId xmlns:a16="http://schemas.microsoft.com/office/drawing/2014/main" id="{B0E414DE-5498-4221-A0E5-56C92F277866}"/>
               </a:ext>
             </a:extLst>
           </p:cNvPr>
@@ -7853,7 +7853,7 @@
           <p:cNvPr id="21" name="">
             <a:extLst xmlns:a="http://schemas.openxmlformats.org/drawingml/2006/main">
               <a:ext uri="{FF2B5EF4-FFF2-40B4-BE49-F238E27FC236}">
-                <a16:creationId xmlns:a16="http://schemas.microsoft.com/office/drawing/2014/main" id="{4002DC70-EC58-4ED7-891C-F69F852CD3E0}"/>
+                <a16:creationId xmlns:a16="http://schemas.microsoft.com/office/drawing/2014/main" id="{19544E9B-001B-4B5D-9EE0-2D32EEAC0F7A}"/>
               </a:ext>
             </a:extLst>
           </p:cNvPr>
@@ -7885,7 +7885,7 @@
           <p:cNvPr id="22" name="">
             <a:extLst xmlns:a="http://schemas.openxmlformats.org/drawingml/2006/main">
               <a:ext uri="{FF2B5EF4-FFF2-40B4-BE49-F238E27FC236}">
-                <a16:creationId xmlns:a16="http://schemas.microsoft.com/office/drawing/2014/main" id="{E6AE5C65-250E-43CD-9510-AA63FE840A08}"/>
+                <a16:creationId xmlns:a16="http://schemas.microsoft.com/office/drawing/2014/main" id="{1D4CACB2-52B3-4E37-818E-873E20F6ED0F}"/>
               </a:ext>
             </a:extLst>
           </p:cNvPr>
@@ -7942,7 +7942,7 @@
           <p:cNvPr id="23" name="">
             <a:extLst xmlns:a="http://schemas.openxmlformats.org/drawingml/2006/main">
               <a:ext uri="{FF2B5EF4-FFF2-40B4-BE49-F238E27FC236}">
-                <a16:creationId xmlns:a16="http://schemas.microsoft.com/office/drawing/2014/main" id="{33DDF17E-0E6D-4138-ACD9-F4F13056C907}"/>
+                <a16:creationId xmlns:a16="http://schemas.microsoft.com/office/drawing/2014/main" id="{8A4EAA19-9171-4D0F-8F16-5810527D0A23}"/>
               </a:ext>
             </a:extLst>
           </p:cNvPr>
@@ -7999,7 +7999,7 @@
           <p:cNvPr id="24" name="">
             <a:extLst xmlns:a="http://schemas.openxmlformats.org/drawingml/2006/main">
               <a:ext uri="{FF2B5EF4-FFF2-40B4-BE49-F238E27FC236}">
-                <a16:creationId xmlns:a16="http://schemas.microsoft.com/office/drawing/2014/main" id="{E02F5B02-0C62-436A-B532-C960ADEC1934}"/>
+                <a16:creationId xmlns:a16="http://schemas.microsoft.com/office/drawing/2014/main" id="{358DA92C-5F30-4BC2-9755-DE13D9ED6BF1}"/>
               </a:ext>
             </a:extLst>
           </p:cNvPr>
@@ -8056,7 +8056,7 @@
           <p:cNvPr id="25" name="">
             <a:extLst xmlns:a="http://schemas.openxmlformats.org/drawingml/2006/main">
               <a:ext uri="{FF2B5EF4-FFF2-40B4-BE49-F238E27FC236}">
-                <a16:creationId xmlns:a16="http://schemas.microsoft.com/office/drawing/2014/main" id="{BA12364B-E371-41CC-87B2-B288444DD025}"/>
+                <a16:creationId xmlns:a16="http://schemas.microsoft.com/office/drawing/2014/main" id="{E9B2DD47-AC4F-4F9A-8341-3088AC1E8A82}"/>
               </a:ext>
             </a:extLst>
           </p:cNvPr>
@@ -8088,7 +8088,7 @@
           <p:cNvPr id="26" name="">
             <a:extLst xmlns:a="http://schemas.openxmlformats.org/drawingml/2006/main">
               <a:ext uri="{FF2B5EF4-FFF2-40B4-BE49-F238E27FC236}">
-                <a16:creationId xmlns:a16="http://schemas.microsoft.com/office/drawing/2014/main" id="{814ED507-AA0B-467E-B31F-05FC4B78619F}"/>
+                <a16:creationId xmlns:a16="http://schemas.microsoft.com/office/drawing/2014/main" id="{FEF7ADC5-ADE8-4108-AB99-FB3C7C7986B8}"/>
               </a:ext>
             </a:extLst>
           </p:cNvPr>
@@ -8145,7 +8145,7 @@
           <p:cNvPr id="27" name="">
             <a:extLst xmlns:a="http://schemas.openxmlformats.org/drawingml/2006/main">
               <a:ext uri="{FF2B5EF4-FFF2-40B4-BE49-F238E27FC236}">
-                <a16:creationId xmlns:a16="http://schemas.microsoft.com/office/drawing/2014/main" id="{DD8CF72A-3E64-4547-89E1-FB7D99FC9B90}"/>
+                <a16:creationId xmlns:a16="http://schemas.microsoft.com/office/drawing/2014/main" id="{B7D979CB-D419-4CE6-AF75-4DCD01C44074}"/>
               </a:ext>
             </a:extLst>
           </p:cNvPr>
@@ -8202,7 +8202,7 @@
           <p:cNvPr id="28" name="">
             <a:extLst xmlns:a="http://schemas.openxmlformats.org/drawingml/2006/main">
               <a:ext uri="{FF2B5EF4-FFF2-40B4-BE49-F238E27FC236}">
-                <a16:creationId xmlns:a16="http://schemas.microsoft.com/office/drawing/2014/main" id="{9BA29DD5-0810-4C9C-8E89-7D5FB401B064}"/>
+                <a16:creationId xmlns:a16="http://schemas.microsoft.com/office/drawing/2014/main" id="{47EE264D-438A-43D8-AEA3-90EED8123E3C}"/>
               </a:ext>
             </a:extLst>
           </p:cNvPr>
@@ -8259,7 +8259,7 @@
           <p:cNvPr id="29" name="">
             <a:extLst xmlns:a="http://schemas.openxmlformats.org/drawingml/2006/main">
               <a:ext uri="{FF2B5EF4-FFF2-40B4-BE49-F238E27FC236}">
-                <a16:creationId xmlns:a16="http://schemas.microsoft.com/office/drawing/2014/main" id="{3D74658F-94D0-4F4C-B2AE-72441AB69D99}"/>
+                <a16:creationId xmlns:a16="http://schemas.microsoft.com/office/drawing/2014/main" id="{2120A9EF-252E-42DF-A6F2-0DA9D7983E25}"/>
               </a:ext>
             </a:extLst>
           </p:cNvPr>
@@ -8316,7 +8316,7 @@
           <p:cNvPr id="30" name="">
             <a:extLst xmlns:a="http://schemas.openxmlformats.org/drawingml/2006/main">
               <a:ext uri="{FF2B5EF4-FFF2-40B4-BE49-F238E27FC236}">
-                <a16:creationId xmlns:a16="http://schemas.microsoft.com/office/drawing/2014/main" id="{36ABBC13-0CC2-48AD-A397-01DA9A974F5A}"/>
+                <a16:creationId xmlns:a16="http://schemas.microsoft.com/office/drawing/2014/main" id="{3AC996A9-6D06-4BCB-AF4D-C684924BBFDE}"/>
               </a:ext>
             </a:extLst>
           </p:cNvPr>
@@ -8373,7 +8373,7 @@
           <p:cNvPr id="31" name="">
             <a:extLst xmlns:a="http://schemas.openxmlformats.org/drawingml/2006/main">
               <a:ext uri="{FF2B5EF4-FFF2-40B4-BE49-F238E27FC236}">
-                <a16:creationId xmlns:a16="http://schemas.microsoft.com/office/drawing/2014/main" id="{A5AECB74-699D-4D01-B37D-B6A5BBD97F1E}"/>
+                <a16:creationId xmlns:a16="http://schemas.microsoft.com/office/drawing/2014/main" id="{6B084878-F09E-4F49-BECE-917413E20E8A}"/>
               </a:ext>
             </a:extLst>
           </p:cNvPr>
@@ -8430,7 +8430,7 @@
           <p:cNvPr id="32" name="">
             <a:extLst xmlns:a="http://schemas.openxmlformats.org/drawingml/2006/main">
               <a:ext uri="{FF2B5EF4-FFF2-40B4-BE49-F238E27FC236}">
-                <a16:creationId xmlns:a16="http://schemas.microsoft.com/office/drawing/2014/main" id="{195EEFCA-9D02-4C48-BFB9-59EB75E05E46}"/>
+                <a16:creationId xmlns:a16="http://schemas.microsoft.com/office/drawing/2014/main" id="{B1A17F56-ED99-41E8-A484-FBB8BB49080D}"/>
               </a:ext>
             </a:extLst>
           </p:cNvPr>
@@ -8487,7 +8487,7 @@
           <p:cNvPr id="33" name="">
             <a:extLst xmlns:a="http://schemas.openxmlformats.org/drawingml/2006/main">
               <a:ext uri="{FF2B5EF4-FFF2-40B4-BE49-F238E27FC236}">
-                <a16:creationId xmlns:a16="http://schemas.microsoft.com/office/drawing/2014/main" id="{6A1A1825-0369-4821-AD58-347CCE9EE5FE}"/>
+                <a16:creationId xmlns:a16="http://schemas.microsoft.com/office/drawing/2014/main" id="{9193603A-AFAB-46AC-9C29-E3231F4C487D}"/>
               </a:ext>
             </a:extLst>
           </p:cNvPr>
@@ -8544,7 +8544,7 @@
           <p:cNvPr id="34" name="">
             <a:extLst xmlns:a="http://schemas.openxmlformats.org/drawingml/2006/main">
               <a:ext uri="{FF2B5EF4-FFF2-40B4-BE49-F238E27FC236}">
-                <a16:creationId xmlns:a16="http://schemas.microsoft.com/office/drawing/2014/main" id="{C3B1046A-DCBF-4593-A097-015ACC359FC5}"/>
+                <a16:creationId xmlns:a16="http://schemas.microsoft.com/office/drawing/2014/main" id="{22DA06E9-AECB-40D1-961E-3A66D2E59D28}"/>
               </a:ext>
             </a:extLst>
           </p:cNvPr>
@@ -8591,7 +8591,7 @@
                 <a:ea typeface="Malgun Gothic"/>
                 <a:cs typeface="Malgun Gothic"/>
               </a:rPr>
-              <a:t>Mock On 4/4 · Off 3/4</a:t>
+              <a:t>재현되는 차이 1건</a:t>
             </a:r>
           </a:p>
         </p:txBody>
@@ -8601,7 +8601,7 @@
           <p:cNvPr id="35" name="">
             <a:extLst xmlns:a="http://schemas.openxmlformats.org/drawingml/2006/main">
               <a:ext uri="{FF2B5EF4-FFF2-40B4-BE49-F238E27FC236}">
-                <a16:creationId xmlns:a16="http://schemas.microsoft.com/office/drawing/2014/main" id="{18944B0C-C0D3-4892-92F4-6353B66D79B1}"/>
+                <a16:creationId xmlns:a16="http://schemas.microsoft.com/office/drawing/2014/main" id="{5B23313E-9A0B-4CFA-89FA-B95DA4890993}"/>
               </a:ext>
             </a:extLst>
           </p:cNvPr>
@@ -8648,7 +8648,7 @@
                 <a:ea typeface="Malgun Gothic"/>
                 <a:cs typeface="Malgun Gothic"/>
               </a:rPr>
-              <a:t>LLM 없는 결정론 경로에서 재현</a:t>
+              <a:t>DLB-02: On 3/3 통과, Off 3/3 실패</a:t>
             </a:r>
           </a:p>
         </p:txBody>
@@ -8658,7 +8658,7 @@
           <p:cNvPr id="36" name="">
             <a:extLst xmlns:a="http://schemas.openxmlformats.org/drawingml/2006/main">
               <a:ext uri="{FF2B5EF4-FFF2-40B4-BE49-F238E27FC236}">
-                <a16:creationId xmlns:a16="http://schemas.microsoft.com/office/drawing/2014/main" id="{A961A47F-39B9-4AF6-8049-839F735DCF53}"/>
+                <a16:creationId xmlns:a16="http://schemas.microsoft.com/office/drawing/2014/main" id="{EC833430-847F-484E-9D9B-5D033163610C}"/>
               </a:ext>
             </a:extLst>
           </p:cNvPr>
@@ -8715,7 +8715,7 @@
           <p:cNvPr id="37" name="">
             <a:extLst xmlns:a="http://schemas.openxmlformats.org/drawingml/2006/main">
               <a:ext uri="{FF2B5EF4-FFF2-40B4-BE49-F238E27FC236}">
-                <a16:creationId xmlns:a16="http://schemas.microsoft.com/office/drawing/2014/main" id="{22BC7500-3D6D-4453-B8FB-E861C6D7F96C}"/>
+                <a16:creationId xmlns:a16="http://schemas.microsoft.com/office/drawing/2014/main" id="{0264BAD7-45FD-46CD-9343-DC2E489935F7}"/>
               </a:ext>
             </a:extLst>
           </p:cNvPr>
@@ -8762,7 +8762,7 @@
                 <a:ea typeface="Malgun Gothic"/>
                 <a:cs typeface="Malgun Gothic"/>
               </a:rPr>
-              <a:t>새 메일 3통 발송</a:t>
+              <a:t>새 메일 4건 처리</a:t>
             </a:r>
           </a:p>
         </p:txBody>
@@ -8772,7 +8772,7 @@
           <p:cNvPr id="38" name="">
             <a:extLst xmlns:a="http://schemas.openxmlformats.org/drawingml/2006/main">
               <a:ext uri="{FF2B5EF4-FFF2-40B4-BE49-F238E27FC236}">
-                <a16:creationId xmlns:a16="http://schemas.microsoft.com/office/drawing/2014/main" id="{CBA5467F-E415-4FB4-A373-BED542AD45B2}"/>
+                <a16:creationId xmlns:a16="http://schemas.microsoft.com/office/drawing/2014/main" id="{4AADEF60-4DC1-4BEF-A3DF-D6AA5CAB353B}"/>
               </a:ext>
             </a:extLst>
           </p:cNvPr>
@@ -8819,7 +8819,7 @@
                 <a:ea typeface="Malgun Gothic"/>
                 <a:cs typeface="Malgun Gothic"/>
               </a:rPr>
-              <a:t>같은 경로로 ASK_USER 확인</a:t>
+              <a:t>2건 Task 생성, 2건 ASK_USER</a:t>
             </a:r>
           </a:p>
         </p:txBody>
@@ -8829,7 +8829,7 @@
           <p:cNvPr id="39" name="">
             <a:extLst xmlns:a="http://schemas.openxmlformats.org/drawingml/2006/main">
               <a:ext uri="{FF2B5EF4-FFF2-40B4-BE49-F238E27FC236}">
-                <a16:creationId xmlns:a16="http://schemas.microsoft.com/office/drawing/2014/main" id="{F67D4B16-EB13-4A11-B90C-22BEABA7C02C}"/>
+                <a16:creationId xmlns:a16="http://schemas.microsoft.com/office/drawing/2014/main" id="{32BFE406-5C03-4DF9-A359-AF8704D8FDAB}"/>
               </a:ext>
             </a:extLst>
           </p:cNvPr>
@@ -8886,7 +8886,7 @@
           <p:cNvPr id="40" name="">
             <a:extLst xmlns:a="http://schemas.openxmlformats.org/drawingml/2006/main">
               <a:ext uri="{FF2B5EF4-FFF2-40B4-BE49-F238E27FC236}">
-                <a16:creationId xmlns:a16="http://schemas.microsoft.com/office/drawing/2014/main" id="{CAD5E631-0911-44DE-968C-CA4638D6D61B}"/>
+                <a16:creationId xmlns:a16="http://schemas.microsoft.com/office/drawing/2014/main" id="{1EF989E6-69E7-4B99-AD75-E77CBF1E5B1D}"/>
               </a:ext>
             </a:extLst>
           </p:cNvPr>
@@ -8941,7 +8941,7 @@
     </p:spTree>
     <p:extLst>
       <p:ext uri="{BB962C8B-B14F-4D97-AF65-F5344CB8AC3E}">
-        <p14:creationId xmlns:p14="http://schemas.microsoft.com/office/powerpoint/2010/main" val="509430761"/>
+        <p14:creationId xmlns:p14="http://schemas.microsoft.com/office/powerpoint/2010/main" val="534427060"/>
       </p:ext>
     </p:extLst>
   </p:cSld>
